--- a/IT388_ParallelNaiveBayes_Final.pptx
+++ b/IT388_ParallelNaiveBayes_Final.pptx
@@ -132,6 +132,582 @@
     </p:ext>
   </p:extLst>
 </p:presentation>
+</file>
+
+<file path=ppt/revisionInfo.xml><?xml version="1.0" encoding="utf-8"?>
+<p1510:revInfo xmlns:a="http://schemas.openxmlformats.org/drawingml/2006/main" xmlns:r="http://schemas.openxmlformats.org/officeDocument/2006/relationships" xmlns:p1510="http://schemas.microsoft.com/office/powerpoint/2015/10/main">
+  <p1510:revLst>
+    <p1510:client id="{DA307683-F528-4545-98BE-6884735B25C7}" v="12" dt="2026-04-25T16:12:58.084"/>
+  </p1510:revLst>
+</p1510:revInfo>
+</file>
+
+<file path=ppt/changesInfos/changesInfo1.xml><?xml version="1.0" encoding="utf-8"?>
+<pc:chgInfo xmlns:a="http://schemas.openxmlformats.org/drawingml/2006/main" xmlns:r="http://schemas.openxmlformats.org/officeDocument/2006/relationships" xmlns:ac="http://schemas.microsoft.com/office/drawing/2013/main/command" xmlns:pc="http://schemas.microsoft.com/office/powerpoint/2013/main/command">
+  <pc:docChgLst>
+    <pc:chgData name="Justin Hoffman" userId="40d7c2b8f9dba042" providerId="LiveId" clId="{98AE922D-438C-4FBD-AB6F-EAC5EAC34870}"/>
+    <pc:docChg chg="undo custSel modSld">
+      <pc:chgData name="Justin Hoffman" userId="40d7c2b8f9dba042" providerId="LiveId" clId="{98AE922D-438C-4FBD-AB6F-EAC5EAC34870}" dt="2026-04-25T16:13:00.018" v="1132" actId="20577"/>
+      <pc:docMkLst>
+        <pc:docMk/>
+      </pc:docMkLst>
+      <pc:sldChg chg="modSp mod">
+        <pc:chgData name="Justin Hoffman" userId="40d7c2b8f9dba042" providerId="LiveId" clId="{98AE922D-438C-4FBD-AB6F-EAC5EAC34870}" dt="2026-04-25T06:05:05.540" v="564" actId="255"/>
+        <pc:sldMkLst>
+          <pc:docMk/>
+          <pc:sldMk cId="0" sldId="256"/>
+        </pc:sldMkLst>
+        <pc:spChg chg="mod">
+          <ac:chgData name="Justin Hoffman" userId="40d7c2b8f9dba042" providerId="LiveId" clId="{98AE922D-438C-4FBD-AB6F-EAC5EAC34870}" dt="2026-04-25T06:04:17.782" v="561" actId="255"/>
+          <ac:spMkLst>
+            <pc:docMk/>
+            <pc:sldMk cId="0" sldId="256"/>
+            <ac:spMk id="4" creationId="{00000000-0000-0000-0000-000000000000}"/>
+          </ac:spMkLst>
+        </pc:spChg>
+        <pc:spChg chg="mod">
+          <ac:chgData name="Justin Hoffman" userId="40d7c2b8f9dba042" providerId="LiveId" clId="{98AE922D-438C-4FBD-AB6F-EAC5EAC34870}" dt="2026-04-25T06:04:27.980" v="562" actId="255"/>
+          <ac:spMkLst>
+            <pc:docMk/>
+            <pc:sldMk cId="0" sldId="256"/>
+            <ac:spMk id="7" creationId="{00000000-0000-0000-0000-000000000000}"/>
+          </ac:spMkLst>
+        </pc:spChg>
+        <pc:spChg chg="mod">
+          <ac:chgData name="Justin Hoffman" userId="40d7c2b8f9dba042" providerId="LiveId" clId="{98AE922D-438C-4FBD-AB6F-EAC5EAC34870}" dt="2026-04-25T06:04:53.459" v="563" actId="255"/>
+          <ac:spMkLst>
+            <pc:docMk/>
+            <pc:sldMk cId="0" sldId="256"/>
+            <ac:spMk id="10" creationId="{00000000-0000-0000-0000-000000000000}"/>
+          </ac:spMkLst>
+        </pc:spChg>
+        <pc:spChg chg="mod">
+          <ac:chgData name="Justin Hoffman" userId="40d7c2b8f9dba042" providerId="LiveId" clId="{98AE922D-438C-4FBD-AB6F-EAC5EAC34870}" dt="2026-04-25T06:05:05.540" v="564" actId="255"/>
+          <ac:spMkLst>
+            <pc:docMk/>
+            <pc:sldMk cId="0" sldId="256"/>
+            <ac:spMk id="13" creationId="{00000000-0000-0000-0000-000000000000}"/>
+          </ac:spMkLst>
+        </pc:spChg>
+      </pc:sldChg>
+      <pc:sldChg chg="modSp mod">
+        <pc:chgData name="Justin Hoffman" userId="40d7c2b8f9dba042" providerId="LiveId" clId="{98AE922D-438C-4FBD-AB6F-EAC5EAC34870}" dt="2026-04-25T03:16:45.152" v="3" actId="20577"/>
+        <pc:sldMkLst>
+          <pc:docMk/>
+          <pc:sldMk cId="0" sldId="257"/>
+        </pc:sldMkLst>
+        <pc:spChg chg="mod">
+          <ac:chgData name="Justin Hoffman" userId="40d7c2b8f9dba042" providerId="LiveId" clId="{98AE922D-438C-4FBD-AB6F-EAC5EAC34870}" dt="2026-04-25T03:16:45.152" v="3" actId="20577"/>
+          <ac:spMkLst>
+            <pc:docMk/>
+            <pc:sldMk cId="0" sldId="257"/>
+            <ac:spMk id="4" creationId="{00000000-0000-0000-0000-000000000000}"/>
+          </ac:spMkLst>
+        </pc:spChg>
+        <pc:spChg chg="mod">
+          <ac:chgData name="Justin Hoffman" userId="40d7c2b8f9dba042" providerId="LiveId" clId="{98AE922D-438C-4FBD-AB6F-EAC5EAC34870}" dt="2026-04-25T03:15:35.548" v="1" actId="2710"/>
+          <ac:spMkLst>
+            <pc:docMk/>
+            <pc:sldMk cId="0" sldId="257"/>
+            <ac:spMk id="8" creationId="{00000000-0000-0000-0000-000000000000}"/>
+          </ac:spMkLst>
+        </pc:spChg>
+      </pc:sldChg>
+      <pc:sldChg chg="modSp mod">
+        <pc:chgData name="Justin Hoffman" userId="40d7c2b8f9dba042" providerId="LiveId" clId="{98AE922D-438C-4FBD-AB6F-EAC5EAC34870}" dt="2026-04-25T03:20:35.814" v="90" actId="20577"/>
+        <pc:sldMkLst>
+          <pc:docMk/>
+          <pc:sldMk cId="0" sldId="261"/>
+        </pc:sldMkLst>
+        <pc:spChg chg="mod">
+          <ac:chgData name="Justin Hoffman" userId="40d7c2b8f9dba042" providerId="LiveId" clId="{98AE922D-438C-4FBD-AB6F-EAC5EAC34870}" dt="2026-04-25T03:20:35.814" v="90" actId="20577"/>
+          <ac:spMkLst>
+            <pc:docMk/>
+            <pc:sldMk cId="0" sldId="261"/>
+            <ac:spMk id="5" creationId="{00000000-0000-0000-0000-000000000000}"/>
+          </ac:spMkLst>
+        </pc:spChg>
+        <pc:spChg chg="mod">
+          <ac:chgData name="Justin Hoffman" userId="40d7c2b8f9dba042" providerId="LiveId" clId="{98AE922D-438C-4FBD-AB6F-EAC5EAC34870}" dt="2026-04-25T03:19:31.356" v="66" actId="20577"/>
+          <ac:spMkLst>
+            <pc:docMk/>
+            <pc:sldMk cId="0" sldId="261"/>
+            <ac:spMk id="7" creationId="{00000000-0000-0000-0000-000000000000}"/>
+          </ac:spMkLst>
+        </pc:spChg>
+        <pc:spChg chg="mod">
+          <ac:chgData name="Justin Hoffman" userId="40d7c2b8f9dba042" providerId="LiveId" clId="{98AE922D-438C-4FBD-AB6F-EAC5EAC34870}" dt="2026-04-25T03:18:17.816" v="24" actId="20577"/>
+          <ac:spMkLst>
+            <pc:docMk/>
+            <pc:sldMk cId="0" sldId="261"/>
+            <ac:spMk id="9" creationId="{00000000-0000-0000-0000-000000000000}"/>
+          </ac:spMkLst>
+        </pc:spChg>
+        <pc:spChg chg="mod">
+          <ac:chgData name="Justin Hoffman" userId="40d7c2b8f9dba042" providerId="LiveId" clId="{98AE922D-438C-4FBD-AB6F-EAC5EAC34870}" dt="2026-04-25T03:17:34.938" v="22" actId="20577"/>
+          <ac:spMkLst>
+            <pc:docMk/>
+            <pc:sldMk cId="0" sldId="261"/>
+            <ac:spMk id="11" creationId="{00000000-0000-0000-0000-000000000000}"/>
+          </ac:spMkLst>
+        </pc:spChg>
+        <pc:spChg chg="mod">
+          <ac:chgData name="Justin Hoffman" userId="40d7c2b8f9dba042" providerId="LiveId" clId="{98AE922D-438C-4FBD-AB6F-EAC5EAC34870}" dt="2026-04-25T03:18:44.558" v="51" actId="20577"/>
+          <ac:spMkLst>
+            <pc:docMk/>
+            <pc:sldMk cId="0" sldId="261"/>
+            <ac:spMk id="12" creationId="{00000000-0000-0000-0000-000000000000}"/>
+          </ac:spMkLst>
+        </pc:spChg>
+        <pc:spChg chg="mod">
+          <ac:chgData name="Justin Hoffman" userId="40d7c2b8f9dba042" providerId="LiveId" clId="{98AE922D-438C-4FBD-AB6F-EAC5EAC34870}" dt="2026-04-25T03:19:18.615" v="63" actId="255"/>
+          <ac:spMkLst>
+            <pc:docMk/>
+            <pc:sldMk cId="0" sldId="261"/>
+            <ac:spMk id="15" creationId="{00000000-0000-0000-0000-000000000000}"/>
+          </ac:spMkLst>
+        </pc:spChg>
+      </pc:sldChg>
+      <pc:sldChg chg="addSp delSp modSp mod">
+        <pc:chgData name="Justin Hoffman" userId="40d7c2b8f9dba042" providerId="LiveId" clId="{98AE922D-438C-4FBD-AB6F-EAC5EAC34870}" dt="2026-04-25T03:22:11.851" v="178" actId="1035"/>
+        <pc:sldMkLst>
+          <pc:docMk/>
+          <pc:sldMk cId="0" sldId="262"/>
+        </pc:sldMkLst>
+        <pc:spChg chg="add del mod">
+          <ac:chgData name="Justin Hoffman" userId="40d7c2b8f9dba042" providerId="LiveId" clId="{98AE922D-438C-4FBD-AB6F-EAC5EAC34870}" dt="2026-04-25T03:21:06.043" v="129" actId="20577"/>
+          <ac:spMkLst>
+            <pc:docMk/>
+            <pc:sldMk cId="0" sldId="262"/>
+            <ac:spMk id="7" creationId="{00000000-0000-0000-0000-000000000000}"/>
+          </ac:spMkLst>
+        </pc:spChg>
+        <pc:spChg chg="mod">
+          <ac:chgData name="Justin Hoffman" userId="40d7c2b8f9dba042" providerId="LiveId" clId="{98AE922D-438C-4FBD-AB6F-EAC5EAC34870}" dt="2026-04-25T03:21:54.748" v="165" actId="14100"/>
+          <ac:spMkLst>
+            <pc:docMk/>
+            <pc:sldMk cId="0" sldId="262"/>
+            <ac:spMk id="8" creationId="{00000000-0000-0000-0000-000000000000}"/>
+          </ac:spMkLst>
+        </pc:spChg>
+        <pc:spChg chg="mod">
+          <ac:chgData name="Justin Hoffman" userId="40d7c2b8f9dba042" providerId="LiveId" clId="{98AE922D-438C-4FBD-AB6F-EAC5EAC34870}" dt="2026-04-25T03:22:11.851" v="178" actId="1035"/>
+          <ac:spMkLst>
+            <pc:docMk/>
+            <pc:sldMk cId="0" sldId="262"/>
+            <ac:spMk id="10" creationId="{00000000-0000-0000-0000-000000000000}"/>
+          </ac:spMkLst>
+        </pc:spChg>
+        <pc:spChg chg="mod">
+          <ac:chgData name="Justin Hoffman" userId="40d7c2b8f9dba042" providerId="LiveId" clId="{98AE922D-438C-4FBD-AB6F-EAC5EAC34870}" dt="2026-04-25T03:22:02.854" v="170" actId="1036"/>
+          <ac:spMkLst>
+            <pc:docMk/>
+            <pc:sldMk cId="0" sldId="262"/>
+            <ac:spMk id="11" creationId="{00000000-0000-0000-0000-000000000000}"/>
+          </ac:spMkLst>
+        </pc:spChg>
+        <pc:spChg chg="mod">
+          <ac:chgData name="Justin Hoffman" userId="40d7c2b8f9dba042" providerId="LiveId" clId="{98AE922D-438C-4FBD-AB6F-EAC5EAC34870}" dt="2026-04-25T03:22:02.854" v="170" actId="1036"/>
+          <ac:spMkLst>
+            <pc:docMk/>
+            <pc:sldMk cId="0" sldId="262"/>
+            <ac:spMk id="12" creationId="{00000000-0000-0000-0000-000000000000}"/>
+          </ac:spMkLst>
+        </pc:spChg>
+      </pc:sldChg>
+      <pc:sldChg chg="modSp mod">
+        <pc:chgData name="Justin Hoffman" userId="40d7c2b8f9dba042" providerId="LiveId" clId="{98AE922D-438C-4FBD-AB6F-EAC5EAC34870}" dt="2026-04-25T03:23:10.802" v="184" actId="1035"/>
+        <pc:sldMkLst>
+          <pc:docMk/>
+          <pc:sldMk cId="0" sldId="263"/>
+        </pc:sldMkLst>
+        <pc:spChg chg="mod">
+          <ac:chgData name="Justin Hoffman" userId="40d7c2b8f9dba042" providerId="LiveId" clId="{98AE922D-438C-4FBD-AB6F-EAC5EAC34870}" dt="2026-04-25T03:23:10.802" v="184" actId="1035"/>
+          <ac:spMkLst>
+            <pc:docMk/>
+            <pc:sldMk cId="0" sldId="263"/>
+            <ac:spMk id="8" creationId="{00000000-0000-0000-0000-000000000000}"/>
+          </ac:spMkLst>
+        </pc:spChg>
+        <pc:spChg chg="mod">
+          <ac:chgData name="Justin Hoffman" userId="40d7c2b8f9dba042" providerId="LiveId" clId="{98AE922D-438C-4FBD-AB6F-EAC5EAC34870}" dt="2026-04-25T03:23:10.802" v="184" actId="1035"/>
+          <ac:spMkLst>
+            <pc:docMk/>
+            <pc:sldMk cId="0" sldId="263"/>
+            <ac:spMk id="9" creationId="{00000000-0000-0000-0000-000000000000}"/>
+          </ac:spMkLst>
+        </pc:spChg>
+      </pc:sldChg>
+      <pc:sldChg chg="modSp mod">
+        <pc:chgData name="Justin Hoffman" userId="40d7c2b8f9dba042" providerId="LiveId" clId="{98AE922D-438C-4FBD-AB6F-EAC5EAC34870}" dt="2026-04-25T03:23:52.743" v="194" actId="1036"/>
+        <pc:sldMkLst>
+          <pc:docMk/>
+          <pc:sldMk cId="0" sldId="264"/>
+        </pc:sldMkLst>
+        <pc:spChg chg="mod">
+          <ac:chgData name="Justin Hoffman" userId="40d7c2b8f9dba042" providerId="LiveId" clId="{98AE922D-438C-4FBD-AB6F-EAC5EAC34870}" dt="2026-04-25T03:23:30.697" v="185" actId="255"/>
+          <ac:spMkLst>
+            <pc:docMk/>
+            <pc:sldMk cId="0" sldId="264"/>
+            <ac:spMk id="4" creationId="{00000000-0000-0000-0000-000000000000}"/>
+          </ac:spMkLst>
+        </pc:spChg>
+        <pc:spChg chg="mod">
+          <ac:chgData name="Justin Hoffman" userId="40d7c2b8f9dba042" providerId="LiveId" clId="{98AE922D-438C-4FBD-AB6F-EAC5EAC34870}" dt="2026-04-25T03:23:52.743" v="194" actId="1036"/>
+          <ac:spMkLst>
+            <pc:docMk/>
+            <pc:sldMk cId="0" sldId="264"/>
+            <ac:spMk id="6" creationId="{00000000-0000-0000-0000-000000000000}"/>
+          </ac:spMkLst>
+        </pc:spChg>
+        <pc:spChg chg="mod">
+          <ac:chgData name="Justin Hoffman" userId="40d7c2b8f9dba042" providerId="LiveId" clId="{98AE922D-438C-4FBD-AB6F-EAC5EAC34870}" dt="2026-04-25T03:23:52.743" v="194" actId="1036"/>
+          <ac:spMkLst>
+            <pc:docMk/>
+            <pc:sldMk cId="0" sldId="264"/>
+            <ac:spMk id="8" creationId="{00000000-0000-0000-0000-000000000000}"/>
+          </ac:spMkLst>
+        </pc:spChg>
+        <pc:graphicFrameChg chg="mod">
+          <ac:chgData name="Justin Hoffman" userId="40d7c2b8f9dba042" providerId="LiveId" clId="{98AE922D-438C-4FBD-AB6F-EAC5EAC34870}" dt="2026-04-25T03:23:52.743" v="194" actId="1036"/>
+          <ac:graphicFrameMkLst>
+            <pc:docMk/>
+            <pc:sldMk cId="0" sldId="264"/>
+            <ac:graphicFrameMk id="7" creationId="{00000000-0000-0000-0000-000000000000}"/>
+          </ac:graphicFrameMkLst>
+        </pc:graphicFrameChg>
+        <pc:graphicFrameChg chg="mod">
+          <ac:chgData name="Justin Hoffman" userId="40d7c2b8f9dba042" providerId="LiveId" clId="{98AE922D-438C-4FBD-AB6F-EAC5EAC34870}" dt="2026-04-25T03:23:52.743" v="194" actId="1036"/>
+          <ac:graphicFrameMkLst>
+            <pc:docMk/>
+            <pc:sldMk cId="0" sldId="264"/>
+            <ac:graphicFrameMk id="9" creationId="{00000000-0000-0000-0000-000000000000}"/>
+          </ac:graphicFrameMkLst>
+        </pc:graphicFrameChg>
+      </pc:sldChg>
+      <pc:sldChg chg="addSp delSp modSp mod">
+        <pc:chgData name="Justin Hoffman" userId="40d7c2b8f9dba042" providerId="LiveId" clId="{98AE922D-438C-4FBD-AB6F-EAC5EAC34870}" dt="2026-04-25T15:38:59.052" v="586" actId="20577"/>
+        <pc:sldMkLst>
+          <pc:docMk/>
+          <pc:sldMk cId="0" sldId="265"/>
+        </pc:sldMkLst>
+        <pc:spChg chg="mod">
+          <ac:chgData name="Justin Hoffman" userId="40d7c2b8f9dba042" providerId="LiveId" clId="{98AE922D-438C-4FBD-AB6F-EAC5EAC34870}" dt="2026-04-25T15:38:59.052" v="586" actId="20577"/>
+          <ac:spMkLst>
+            <pc:docMk/>
+            <pc:sldMk cId="0" sldId="265"/>
+            <ac:spMk id="5" creationId="{00000000-0000-0000-0000-000000000000}"/>
+          </ac:spMkLst>
+        </pc:spChg>
+        <pc:picChg chg="add del mod">
+          <ac:chgData name="Justin Hoffman" userId="40d7c2b8f9dba042" providerId="LiveId" clId="{98AE922D-438C-4FBD-AB6F-EAC5EAC34870}" dt="2026-04-25T15:37:45.291" v="565" actId="478"/>
+          <ac:picMkLst>
+            <pc:docMk/>
+            <pc:sldMk cId="0" sldId="265"/>
+            <ac:picMk id="7" creationId="{9A33AA82-E404-BD11-D965-434A29583627}"/>
+          </ac:picMkLst>
+        </pc:picChg>
+        <pc:picChg chg="add mod">
+          <ac:chgData name="Justin Hoffman" userId="40d7c2b8f9dba042" providerId="LiveId" clId="{98AE922D-438C-4FBD-AB6F-EAC5EAC34870}" dt="2026-04-25T15:38:48.811" v="582" actId="1036"/>
+          <ac:picMkLst>
+            <pc:docMk/>
+            <pc:sldMk cId="0" sldId="265"/>
+            <ac:picMk id="8" creationId="{9743B7A9-4CED-8A57-1729-02A735DD604C}"/>
+          </ac:picMkLst>
+        </pc:picChg>
+        <pc:picChg chg="del">
+          <ac:chgData name="Justin Hoffman" userId="40d7c2b8f9dba042" providerId="LiveId" clId="{98AE922D-438C-4FBD-AB6F-EAC5EAC34870}" dt="2026-04-25T05:44:48.433" v="229" actId="478"/>
+          <ac:picMkLst>
+            <pc:docMk/>
+            <pc:sldMk cId="0" sldId="265"/>
+            <ac:picMk id="8" creationId="{C17DBEBD-5221-C0D1-E014-31084F4E31E8}"/>
+          </ac:picMkLst>
+        </pc:picChg>
+      </pc:sldChg>
+      <pc:sldChg chg="addSp delSp modSp mod">
+        <pc:chgData name="Justin Hoffman" userId="40d7c2b8f9dba042" providerId="LiveId" clId="{98AE922D-438C-4FBD-AB6F-EAC5EAC34870}" dt="2026-04-25T03:25:51.287" v="212" actId="1036"/>
+        <pc:sldMkLst>
+          <pc:docMk/>
+          <pc:sldMk cId="0" sldId="267"/>
+        </pc:sldMkLst>
+        <pc:picChg chg="add mod">
+          <ac:chgData name="Justin Hoffman" userId="40d7c2b8f9dba042" providerId="LiveId" clId="{98AE922D-438C-4FBD-AB6F-EAC5EAC34870}" dt="2026-04-25T03:25:51.287" v="212" actId="1036"/>
+          <ac:picMkLst>
+            <pc:docMk/>
+            <pc:sldMk cId="0" sldId="267"/>
+            <ac:picMk id="7" creationId="{724C75C2-3116-4E8F-379A-10ED380FD106}"/>
+          </ac:picMkLst>
+        </pc:picChg>
+        <pc:picChg chg="del">
+          <ac:chgData name="Justin Hoffman" userId="40d7c2b8f9dba042" providerId="LiveId" clId="{98AE922D-438C-4FBD-AB6F-EAC5EAC34870}" dt="2026-04-25T03:24:58.339" v="195" actId="478"/>
+          <ac:picMkLst>
+            <pc:docMk/>
+            <pc:sldMk cId="0" sldId="267"/>
+            <ac:picMk id="8" creationId="{203D6C79-AC04-3E12-630F-105467DA58CE}"/>
+          </ac:picMkLst>
+        </pc:picChg>
+      </pc:sldChg>
+      <pc:sldChg chg="addSp delSp modSp mod">
+        <pc:chgData name="Justin Hoffman" userId="40d7c2b8f9dba042" providerId="LiveId" clId="{98AE922D-438C-4FBD-AB6F-EAC5EAC34870}" dt="2026-04-25T15:40:23.159" v="611" actId="20577"/>
+        <pc:sldMkLst>
+          <pc:docMk/>
+          <pc:sldMk cId="0" sldId="272"/>
+        </pc:sldMkLst>
+        <pc:spChg chg="mod">
+          <ac:chgData name="Justin Hoffman" userId="40d7c2b8f9dba042" providerId="LiveId" clId="{98AE922D-438C-4FBD-AB6F-EAC5EAC34870}" dt="2026-04-25T15:40:23.159" v="611" actId="20577"/>
+          <ac:spMkLst>
+            <pc:docMk/>
+            <pc:sldMk cId="0" sldId="272"/>
+            <ac:spMk id="5" creationId="{00000000-0000-0000-0000-000000000000}"/>
+          </ac:spMkLst>
+        </pc:spChg>
+        <pc:picChg chg="add del mod">
+          <ac:chgData name="Justin Hoffman" userId="40d7c2b8f9dba042" providerId="LiveId" clId="{98AE922D-438C-4FBD-AB6F-EAC5EAC34870}" dt="2026-04-25T15:39:32.142" v="587" actId="478"/>
+          <ac:picMkLst>
+            <pc:docMk/>
+            <pc:sldMk cId="0" sldId="272"/>
+            <ac:picMk id="7" creationId="{083752D7-754F-A049-0247-EBA9365B10BC}"/>
+          </ac:picMkLst>
+        </pc:picChg>
+        <pc:picChg chg="del">
+          <ac:chgData name="Justin Hoffman" userId="40d7c2b8f9dba042" providerId="LiveId" clId="{98AE922D-438C-4FBD-AB6F-EAC5EAC34870}" dt="2026-04-25T05:49:40.020" v="346" actId="478"/>
+          <ac:picMkLst>
+            <pc:docMk/>
+            <pc:sldMk cId="0" sldId="272"/>
+            <ac:picMk id="8" creationId="{99ECF0B6-053B-E4DF-ED2F-D6A5BD36A68F}"/>
+          </ac:picMkLst>
+        </pc:picChg>
+        <pc:picChg chg="add mod">
+          <ac:chgData name="Justin Hoffman" userId="40d7c2b8f9dba042" providerId="LiveId" clId="{98AE922D-438C-4FBD-AB6F-EAC5EAC34870}" dt="2026-04-25T15:40:03.356" v="603" actId="1036"/>
+          <ac:picMkLst>
+            <pc:docMk/>
+            <pc:sldMk cId="0" sldId="272"/>
+            <ac:picMk id="8" creationId="{DE644991-4434-58E9-21C4-A6CB90D28B55}"/>
+          </ac:picMkLst>
+        </pc:picChg>
+      </pc:sldChg>
+      <pc:sldChg chg="addSp delSp modSp mod">
+        <pc:chgData name="Justin Hoffman" userId="40d7c2b8f9dba042" providerId="LiveId" clId="{98AE922D-438C-4FBD-AB6F-EAC5EAC34870}" dt="2026-04-25T15:41:48.700" v="637" actId="20577"/>
+        <pc:sldMkLst>
+          <pc:docMk/>
+          <pc:sldMk cId="0" sldId="273"/>
+        </pc:sldMkLst>
+        <pc:spChg chg="mod">
+          <ac:chgData name="Justin Hoffman" userId="40d7c2b8f9dba042" providerId="LiveId" clId="{98AE922D-438C-4FBD-AB6F-EAC5EAC34870}" dt="2026-04-25T15:41:48.700" v="637" actId="20577"/>
+          <ac:spMkLst>
+            <pc:docMk/>
+            <pc:sldMk cId="0" sldId="273"/>
+            <ac:spMk id="5" creationId="{00000000-0000-0000-0000-000000000000}"/>
+          </ac:spMkLst>
+        </pc:spChg>
+        <pc:picChg chg="add del mod">
+          <ac:chgData name="Justin Hoffman" userId="40d7c2b8f9dba042" providerId="LiveId" clId="{98AE922D-438C-4FBD-AB6F-EAC5EAC34870}" dt="2026-04-25T15:40:28.825" v="612" actId="478"/>
+          <ac:picMkLst>
+            <pc:docMk/>
+            <pc:sldMk cId="0" sldId="273"/>
+            <ac:picMk id="7" creationId="{65775446-E8F4-0502-500D-C4A798DC643A}"/>
+          </ac:picMkLst>
+        </pc:picChg>
+        <pc:picChg chg="add mod">
+          <ac:chgData name="Justin Hoffman" userId="40d7c2b8f9dba042" providerId="LiveId" clId="{98AE922D-438C-4FBD-AB6F-EAC5EAC34870}" dt="2026-04-25T15:41:07.119" v="627" actId="1036"/>
+          <ac:picMkLst>
+            <pc:docMk/>
+            <pc:sldMk cId="0" sldId="273"/>
+            <ac:picMk id="8" creationId="{3CF88791-8208-521D-4CB7-33B57ECE7FC1}"/>
+          </ac:picMkLst>
+        </pc:picChg>
+        <pc:picChg chg="del">
+          <ac:chgData name="Justin Hoffman" userId="40d7c2b8f9dba042" providerId="LiveId" clId="{98AE922D-438C-4FBD-AB6F-EAC5EAC34870}" dt="2026-04-25T05:50:35.808" v="369" actId="478"/>
+          <ac:picMkLst>
+            <pc:docMk/>
+            <pc:sldMk cId="0" sldId="273"/>
+            <ac:picMk id="8" creationId="{7FBC32C6-F401-1DDE-997E-2D9C2EEB874D}"/>
+          </ac:picMkLst>
+        </pc:picChg>
+      </pc:sldChg>
+      <pc:sldChg chg="addSp delSp modSp mod">
+        <pc:chgData name="Justin Hoffman" userId="40d7c2b8f9dba042" providerId="LiveId" clId="{98AE922D-438C-4FBD-AB6F-EAC5EAC34870}" dt="2026-04-25T15:42:34.483" v="654" actId="1036"/>
+        <pc:sldMkLst>
+          <pc:docMk/>
+          <pc:sldMk cId="0" sldId="274"/>
+        </pc:sldMkLst>
+        <pc:spChg chg="mod">
+          <ac:chgData name="Justin Hoffman" userId="40d7c2b8f9dba042" providerId="LiveId" clId="{98AE922D-438C-4FBD-AB6F-EAC5EAC34870}" dt="2026-04-25T05:53:46.844" v="406" actId="20577"/>
+          <ac:spMkLst>
+            <pc:docMk/>
+            <pc:sldMk cId="0" sldId="274"/>
+            <ac:spMk id="5" creationId="{00000000-0000-0000-0000-000000000000}"/>
+          </ac:spMkLst>
+        </pc:spChg>
+        <pc:picChg chg="add del mod">
+          <ac:chgData name="Justin Hoffman" userId="40d7c2b8f9dba042" providerId="LiveId" clId="{98AE922D-438C-4FBD-AB6F-EAC5EAC34870}" dt="2026-04-25T15:42:06.196" v="638" actId="478"/>
+          <ac:picMkLst>
+            <pc:docMk/>
+            <pc:sldMk cId="0" sldId="274"/>
+            <ac:picMk id="7" creationId="{E069DFBF-5372-9C63-1447-698621E56998}"/>
+          </ac:picMkLst>
+        </pc:picChg>
+        <pc:picChg chg="del">
+          <ac:chgData name="Justin Hoffman" userId="40d7c2b8f9dba042" providerId="LiveId" clId="{98AE922D-438C-4FBD-AB6F-EAC5EAC34870}" dt="2026-04-25T05:53:49.332" v="407" actId="478"/>
+          <ac:picMkLst>
+            <pc:docMk/>
+            <pc:sldMk cId="0" sldId="274"/>
+            <ac:picMk id="8" creationId="{26A6BC54-E04E-FD32-3BEC-14DADFF9E005}"/>
+          </ac:picMkLst>
+        </pc:picChg>
+        <pc:picChg chg="add mod">
+          <ac:chgData name="Justin Hoffman" userId="40d7c2b8f9dba042" providerId="LiveId" clId="{98AE922D-438C-4FBD-AB6F-EAC5EAC34870}" dt="2026-04-25T15:42:34.483" v="654" actId="1036"/>
+          <ac:picMkLst>
+            <pc:docMk/>
+            <pc:sldMk cId="0" sldId="274"/>
+            <ac:picMk id="8" creationId="{29564311-76F5-EB79-1A98-6F93BE84AD6E}"/>
+          </ac:picMkLst>
+        </pc:picChg>
+      </pc:sldChg>
+      <pc:sldChg chg="addSp delSp modSp mod">
+        <pc:chgData name="Justin Hoffman" userId="40d7c2b8f9dba042" providerId="LiveId" clId="{98AE922D-438C-4FBD-AB6F-EAC5EAC34870}" dt="2026-04-25T15:46:06.824" v="855" actId="20577"/>
+        <pc:sldMkLst>
+          <pc:docMk/>
+          <pc:sldMk cId="0" sldId="275"/>
+        </pc:sldMkLst>
+        <pc:spChg chg="mod">
+          <ac:chgData name="Justin Hoffman" userId="40d7c2b8f9dba042" providerId="LiveId" clId="{98AE922D-438C-4FBD-AB6F-EAC5EAC34870}" dt="2026-04-25T15:46:06.824" v="855" actId="20577"/>
+          <ac:spMkLst>
+            <pc:docMk/>
+            <pc:sldMk cId="0" sldId="275"/>
+            <ac:spMk id="5" creationId="{00000000-0000-0000-0000-000000000000}"/>
+          </ac:spMkLst>
+        </pc:spChg>
+        <pc:picChg chg="add del mod">
+          <ac:chgData name="Justin Hoffman" userId="40d7c2b8f9dba042" providerId="LiveId" clId="{98AE922D-438C-4FBD-AB6F-EAC5EAC34870}" dt="2026-04-25T15:42:55.257" v="655" actId="478"/>
+          <ac:picMkLst>
+            <pc:docMk/>
+            <pc:sldMk cId="0" sldId="275"/>
+            <ac:picMk id="7" creationId="{F9B89590-A228-D295-EB5D-16DAA53BCE49}"/>
+          </ac:picMkLst>
+        </pc:picChg>
+        <pc:picChg chg="add mod">
+          <ac:chgData name="Justin Hoffman" userId="40d7c2b8f9dba042" providerId="LiveId" clId="{98AE922D-438C-4FBD-AB6F-EAC5EAC34870}" dt="2026-04-25T15:43:27.612" v="679" actId="1036"/>
+          <ac:picMkLst>
+            <pc:docMk/>
+            <pc:sldMk cId="0" sldId="275"/>
+            <ac:picMk id="8" creationId="{88C5AA48-6CB4-FC70-7292-9F25A73D566F}"/>
+          </ac:picMkLst>
+        </pc:picChg>
+        <pc:picChg chg="del">
+          <ac:chgData name="Justin Hoffman" userId="40d7c2b8f9dba042" providerId="LiveId" clId="{98AE922D-438C-4FBD-AB6F-EAC5EAC34870}" dt="2026-04-25T05:54:33.842" v="426" actId="478"/>
+          <ac:picMkLst>
+            <pc:docMk/>
+            <pc:sldMk cId="0" sldId="275"/>
+            <ac:picMk id="8" creationId="{C2417921-B87D-1463-BEA4-B2F6BE87ED1C}"/>
+          </ac:picMkLst>
+        </pc:picChg>
+      </pc:sldChg>
+      <pc:sldChg chg="addSp delSp modSp mod">
+        <pc:chgData name="Justin Hoffman" userId="40d7c2b8f9dba042" providerId="LiveId" clId="{98AE922D-438C-4FBD-AB6F-EAC5EAC34870}" dt="2026-04-25T15:48:54.947" v="916" actId="20577"/>
+        <pc:sldMkLst>
+          <pc:docMk/>
+          <pc:sldMk cId="0" sldId="276"/>
+        </pc:sldMkLst>
+        <pc:spChg chg="mod">
+          <ac:chgData name="Justin Hoffman" userId="40d7c2b8f9dba042" providerId="LiveId" clId="{98AE922D-438C-4FBD-AB6F-EAC5EAC34870}" dt="2026-04-25T15:48:54.947" v="916" actId="20577"/>
+          <ac:spMkLst>
+            <pc:docMk/>
+            <pc:sldMk cId="0" sldId="276"/>
+            <ac:spMk id="5" creationId="{00000000-0000-0000-0000-000000000000}"/>
+          </ac:spMkLst>
+        </pc:spChg>
+        <pc:picChg chg="add del mod">
+          <ac:chgData name="Justin Hoffman" userId="40d7c2b8f9dba042" providerId="LiveId" clId="{98AE922D-438C-4FBD-AB6F-EAC5EAC34870}" dt="2026-04-25T15:46:12.037" v="856" actId="478"/>
+          <ac:picMkLst>
+            <pc:docMk/>
+            <pc:sldMk cId="0" sldId="276"/>
+            <ac:picMk id="7" creationId="{93FC38FF-76EF-28DD-4412-45A940D6F962}"/>
+          </ac:picMkLst>
+        </pc:picChg>
+        <pc:picChg chg="add del mod">
+          <ac:chgData name="Justin Hoffman" userId="40d7c2b8f9dba042" providerId="LiveId" clId="{98AE922D-438C-4FBD-AB6F-EAC5EAC34870}" dt="2026-04-25T15:47:22.203" v="874" actId="478"/>
+          <ac:picMkLst>
+            <pc:docMk/>
+            <pc:sldMk cId="0" sldId="276"/>
+            <ac:picMk id="8" creationId="{435E1758-73DB-E68E-6017-FA00C9AE262B}"/>
+          </ac:picMkLst>
+        </pc:picChg>
+        <pc:picChg chg="del">
+          <ac:chgData name="Justin Hoffman" userId="40d7c2b8f9dba042" providerId="LiveId" clId="{98AE922D-438C-4FBD-AB6F-EAC5EAC34870}" dt="2026-04-25T05:57:09.814" v="464" actId="478"/>
+          <ac:picMkLst>
+            <pc:docMk/>
+            <pc:sldMk cId="0" sldId="276"/>
+            <ac:picMk id="8" creationId="{591D2A93-C132-774C-24E3-8E4C73C2DC2C}"/>
+          </ac:picMkLst>
+        </pc:picChg>
+        <pc:picChg chg="add mod">
+          <ac:chgData name="Justin Hoffman" userId="40d7c2b8f9dba042" providerId="LiveId" clId="{98AE922D-438C-4FBD-AB6F-EAC5EAC34870}" dt="2026-04-25T15:48:01.419" v="890" actId="1036"/>
+          <ac:picMkLst>
+            <pc:docMk/>
+            <pc:sldMk cId="0" sldId="276"/>
+            <ac:picMk id="10" creationId="{8978B677-D81D-C778-2E62-0DAE6A7DFC1F}"/>
+          </ac:picMkLst>
+        </pc:picChg>
+      </pc:sldChg>
+      <pc:sldChg chg="addSp modSp mod">
+        <pc:chgData name="Justin Hoffman" userId="40d7c2b8f9dba042" providerId="LiveId" clId="{98AE922D-438C-4FBD-AB6F-EAC5EAC34870}" dt="2026-04-25T16:13:00.018" v="1132" actId="20577"/>
+        <pc:sldMkLst>
+          <pc:docMk/>
+          <pc:sldMk cId="0" sldId="277"/>
+        </pc:sldMkLst>
+        <pc:spChg chg="mod">
+          <ac:chgData name="Justin Hoffman" userId="40d7c2b8f9dba042" providerId="LiveId" clId="{98AE922D-438C-4FBD-AB6F-EAC5EAC34870}" dt="2026-04-25T15:49:26.784" v="924" actId="20577"/>
+          <ac:spMkLst>
+            <pc:docMk/>
+            <pc:sldMk cId="0" sldId="277"/>
+            <ac:spMk id="9" creationId="{00000000-0000-0000-0000-000000000000}"/>
+          </ac:spMkLst>
+        </pc:spChg>
+        <pc:spChg chg="mod">
+          <ac:chgData name="Justin Hoffman" userId="40d7c2b8f9dba042" providerId="LiveId" clId="{98AE922D-438C-4FBD-AB6F-EAC5EAC34870}" dt="2026-04-25T16:04:57.589" v="1048"/>
+          <ac:spMkLst>
+            <pc:docMk/>
+            <pc:sldMk cId="0" sldId="277"/>
+            <ac:spMk id="10" creationId="{00000000-0000-0000-0000-000000000000}"/>
+          </ac:spMkLst>
+        </pc:spChg>
+        <pc:spChg chg="mod">
+          <ac:chgData name="Justin Hoffman" userId="40d7c2b8f9dba042" providerId="LiveId" clId="{98AE922D-438C-4FBD-AB6F-EAC5EAC34870}" dt="2026-04-25T16:09:52.741" v="1114" actId="20577"/>
+          <ac:spMkLst>
+            <pc:docMk/>
+            <pc:sldMk cId="0" sldId="277"/>
+            <ac:spMk id="12" creationId="{00000000-0000-0000-0000-000000000000}"/>
+          </ac:spMkLst>
+        </pc:spChg>
+        <pc:spChg chg="mod">
+          <ac:chgData name="Justin Hoffman" userId="40d7c2b8f9dba042" providerId="LiveId" clId="{98AE922D-438C-4FBD-AB6F-EAC5EAC34870}" dt="2026-04-25T16:13:00.018" v="1132" actId="20577"/>
+          <ac:spMkLst>
+            <pc:docMk/>
+            <pc:sldMk cId="0" sldId="277"/>
+            <ac:spMk id="15" creationId="{00000000-0000-0000-0000-000000000000}"/>
+          </ac:spMkLst>
+        </pc:spChg>
+        <pc:spChg chg="add">
+          <ac:chgData name="Justin Hoffman" userId="40d7c2b8f9dba042" providerId="LiveId" clId="{98AE922D-438C-4FBD-AB6F-EAC5EAC34870}" dt="2026-04-25T16:03:35.541" v="1033"/>
+          <ac:spMkLst>
+            <pc:docMk/>
+            <pc:sldMk cId="0" sldId="277"/>
+            <ac:spMk id="16" creationId="{37F4185E-2CE2-A867-5B5D-8DE793910520}"/>
+          </ac:spMkLst>
+        </pc:spChg>
+        <pc:spChg chg="add">
+          <ac:chgData name="Justin Hoffman" userId="40d7c2b8f9dba042" providerId="LiveId" clId="{98AE922D-438C-4FBD-AB6F-EAC5EAC34870}" dt="2026-04-25T16:10:19.957" v="1115"/>
+          <ac:spMkLst>
+            <pc:docMk/>
+            <pc:sldMk cId="0" sldId="277"/>
+            <ac:spMk id="17" creationId="{13A048EB-EEB4-4AAC-F0EC-0A57623D43CC}"/>
+          </ac:spMkLst>
+        </pc:spChg>
+      </pc:sldChg>
+    </pc:docChg>
+  </pc:docChgLst>
+</pc:chgInfo>
 </file>
 
 <file path=ppt/notesMasters/notesMaster1.xml><?xml version="1.0" encoding="utf-8"?>
@@ -778,7 +1354,7 @@
               <a:buNone/>
             </a:pPr>
             <a:r>
-              <a:rPr lang="en-US" sz="1300" dirty="0">
+              <a:rPr lang="en-US" sz="1600" dirty="0">
                 <a:solidFill>
                   <a:srgbClr val="A8C4E0"/>
                 </a:solidFill>
@@ -788,14 +1364,14 @@
               </a:rPr>
               <a:t>Peak</a:t>
             </a:r>
-            <a:endParaRPr lang="en-US" sz="1300" dirty="0"/>
+            <a:endParaRPr lang="en-US" sz="1600" dirty="0"/>
           </a:p>
           <a:p>
             <a:pPr marL="0" indent="0" algn="ctr">
               <a:buNone/>
             </a:pPr>
             <a:r>
-              <a:rPr lang="en-US" sz="1300" dirty="0">
+              <a:rPr lang="en-US" sz="1600" dirty="0">
                 <a:solidFill>
                   <a:srgbClr val="A8C4E0"/>
                 </a:solidFill>
@@ -805,7 +1381,7 @@
               </a:rPr>
               <a:t>Speedup</a:t>
             </a:r>
-            <a:endParaRPr lang="en-US" sz="1300" dirty="0"/>
+            <a:endParaRPr lang="en-US" sz="1600" dirty="0"/>
           </a:p>
         </p:txBody>
       </p:sp>
@@ -907,7 +1483,7 @@
               <a:buNone/>
             </a:pPr>
             <a:r>
-              <a:rPr lang="en-US" sz="1300" dirty="0">
+              <a:rPr lang="en-US" sz="1600" dirty="0">
                 <a:solidFill>
                   <a:srgbClr val="A8C4E0"/>
                 </a:solidFill>
@@ -917,14 +1493,14 @@
               </a:rPr>
               <a:t>Records</a:t>
             </a:r>
-            <a:endParaRPr lang="en-US" sz="1300" dirty="0"/>
+            <a:endParaRPr lang="en-US" sz="1600" dirty="0"/>
           </a:p>
           <a:p>
             <a:pPr marL="0" indent="0" algn="ctr">
               <a:buNone/>
             </a:pPr>
             <a:r>
-              <a:rPr lang="en-US" sz="1300" dirty="0">
+              <a:rPr lang="en-US" sz="1600" dirty="0">
                 <a:solidFill>
                   <a:srgbClr val="A8C4E0"/>
                 </a:solidFill>
@@ -934,7 +1510,7 @@
               </a:rPr>
               <a:t>Tested</a:t>
             </a:r>
-            <a:endParaRPr lang="en-US" sz="1300" dirty="0"/>
+            <a:endParaRPr lang="en-US" sz="1600" dirty="0"/>
           </a:p>
         </p:txBody>
       </p:sp>
@@ -1036,7 +1612,7 @@
               <a:buNone/>
             </a:pPr>
             <a:r>
-              <a:rPr lang="en-US" sz="1300" dirty="0">
+              <a:rPr lang="en-US" sz="1600" dirty="0">
                 <a:solidFill>
                   <a:srgbClr val="A8C4E0"/>
                 </a:solidFill>
@@ -1046,7 +1622,7 @@
               </a:rPr>
               <a:t>Implementations</a:t>
             </a:r>
-            <a:endParaRPr lang="en-US" sz="1300" dirty="0"/>
+            <a:endParaRPr lang="en-US" sz="1600" dirty="0"/>
           </a:p>
         </p:txBody>
       </p:sp>
@@ -1148,7 +1724,7 @@
               <a:buNone/>
             </a:pPr>
             <a:r>
-              <a:rPr lang="en-US" sz="1300" dirty="0">
+              <a:rPr lang="en-US" sz="1600" dirty="0">
                 <a:solidFill>
                   <a:srgbClr val="A8C4E0"/>
                 </a:solidFill>
@@ -1158,7 +1734,7 @@
               </a:rPr>
               <a:t>Environments</a:t>
             </a:r>
-            <a:endParaRPr lang="en-US" sz="1300" dirty="0"/>
+            <a:endParaRPr lang="en-US" sz="1600" dirty="0"/>
           </a:p>
         </p:txBody>
       </p:sp>
@@ -1462,9 +2038,6 @@
           <a:bodyPr wrap="square" rtlCol="0" anchor="ctr"/>
           <a:lstStyle/>
           <a:p>
-            <a:pPr marL="0" indent="0">
-              <a:buNone/>
-            </a:pPr>
             <a:r>
               <a:rPr lang="en-US" sz="1600" b="1" dirty="0">
                 <a:solidFill>
@@ -1481,11 +2054,19 @@
                 <a:solidFill>
                   <a:srgbClr val="444444"/>
                 </a:solidFill>
-                <a:latin typeface="Calibri" pitchFamily="34" charset="0"/>
-                <a:ea typeface="Calibri" pitchFamily="34" charset="-122"/>
-                <a:cs typeface="Calibri" pitchFamily="34" charset="-120"/>
-              </a:rPr>
-              <a:t>Scales to 9.11x at 16 threads. Efficiency stays above 0.8 through 8 threads.
+              </a:rPr>
+              <a:t>Scales to 8.41x at 16 threads. Efficiency stays above 0.8 through 4 threads.</a:t>
+            </a:r>
+            <a:r>
+              <a:rPr lang="en-US" sz="1600" dirty="0">
+                <a:solidFill>
+                  <a:srgbClr val="444444"/>
+                </a:solidFill>
+                <a:latin typeface="Calibri" pitchFamily="34" charset="0"/>
+                <a:ea typeface="Calibri" pitchFamily="34" charset="-122"/>
+                <a:cs typeface="Calibri" pitchFamily="34" charset="-120"/>
+              </a:rPr>
+              <a:t>
 </a:t>
             </a:r>
             <a:r>
@@ -1504,13 +2085,9 @@
                 <a:solidFill>
                   <a:srgbClr val="444444"/>
                 </a:solidFill>
-                <a:latin typeface="Calibri" pitchFamily="34" charset="0"/>
-                <a:ea typeface="Calibri" pitchFamily="34" charset="-122"/>
-                <a:cs typeface="Calibri" pitchFamily="34" charset="-120"/>
               </a:rPr>
               <a:t>Tops out at 3.62x at 8 threads due to fewer cores and higher thread overhead.</a:t>
             </a:r>
-            <a:endParaRPr lang="en-US" sz="1600" dirty="0"/>
           </a:p>
         </p:txBody>
       </p:sp>
@@ -1519,7 +2096,7 @@
           <p:cNvPr id="8" name="Picture 7">
             <a:extLst>
               <a:ext uri="{FF2B5EF4-FFF2-40B4-BE49-F238E27FC236}">
-                <a16:creationId xmlns:a16="http://schemas.microsoft.com/office/drawing/2014/main" id="{C17DBEBD-5221-C0D1-E014-31084F4E31E8}"/>
+                <a16:creationId xmlns:a16="http://schemas.microsoft.com/office/drawing/2014/main" id="{9743B7A9-4CED-8A57-1729-02A735DD604C}"/>
               </a:ext>
             </a:extLst>
           </p:cNvPr>
@@ -1536,8 +2113,8 @@
         </p:blipFill>
         <p:spPr>
           <a:xfrm>
-            <a:off x="1083852" y="2098590"/>
-            <a:ext cx="6976295" cy="2939858"/>
+            <a:off x="1100200" y="2100432"/>
+            <a:ext cx="6943600" cy="2926080"/>
           </a:xfrm>
           <a:prstGeom prst="rect">
             <a:avLst/>
@@ -1982,10 +2559,10 @@
       </p:sp>
       <p:pic>
         <p:nvPicPr>
-          <p:cNvPr id="8" name="Picture 7">
+          <p:cNvPr id="7" name="Picture 6">
             <a:extLst>
               <a:ext uri="{FF2B5EF4-FFF2-40B4-BE49-F238E27FC236}">
-                <a16:creationId xmlns:a16="http://schemas.microsoft.com/office/drawing/2014/main" id="{203D6C79-AC04-3E12-630F-105467DA58CE}"/>
+                <a16:creationId xmlns:a16="http://schemas.microsoft.com/office/drawing/2014/main" id="{724C75C2-3116-4E8F-379A-10ED380FD106}"/>
               </a:ext>
             </a:extLst>
           </p:cNvPr>
@@ -2002,8 +2579,8 @@
         </p:blipFill>
         <p:spPr>
           <a:xfrm>
-            <a:off x="938985" y="2098590"/>
-            <a:ext cx="7266029" cy="3017520"/>
+            <a:off x="938986" y="2100942"/>
+            <a:ext cx="7266027" cy="3017520"/>
           </a:xfrm>
           <a:prstGeom prst="rect">
             <a:avLst/>
@@ -4222,7 +4799,7 @@
                 <a:ea typeface="Calibri" pitchFamily="34" charset="-122"/>
                 <a:cs typeface="Calibri" pitchFamily="34" charset="-120"/>
               </a:rPr>
-              <a:t>Scales cleanly to 6.30x at 16 procs. Up from 1.88x in v1.
+              <a:t>Scales cleanly to 6.55x at 16 procs. Up from 1.88x in v1.
 </a:t>
             </a:r>
             <a:r>
@@ -4245,7 +4822,7 @@
                 <a:ea typeface="Calibri" pitchFamily="34" charset="-122"/>
                 <a:cs typeface="Calibri" pitchFamily="34" charset="-120"/>
               </a:rPr>
-              <a:t>Reaches 2.98x at 8 procs. Up from 1.28x in v1.</a:t>
+              <a:t>Reaches 2.67x at 8 procs. Up from 1.28x in v1.</a:t>
             </a:r>
             <a:endParaRPr lang="en-US" sz="1600" dirty="0"/>
           </a:p>
@@ -4256,7 +4833,7 @@
           <p:cNvPr id="8" name="Picture 7">
             <a:extLst>
               <a:ext uri="{FF2B5EF4-FFF2-40B4-BE49-F238E27FC236}">
-                <a16:creationId xmlns:a16="http://schemas.microsoft.com/office/drawing/2014/main" id="{99ECF0B6-053B-E4DF-ED2F-D6A5BD36A68F}"/>
+                <a16:creationId xmlns:a16="http://schemas.microsoft.com/office/drawing/2014/main" id="{DE644991-4434-58E9-21C4-A6CB90D28B55}"/>
               </a:ext>
             </a:extLst>
           </p:cNvPr>
@@ -4273,8 +4850,8 @@
         </p:blipFill>
         <p:spPr>
           <a:xfrm>
-            <a:off x="1083852" y="2098590"/>
-            <a:ext cx="6976295" cy="2939858"/>
+            <a:off x="991706" y="2100432"/>
+            <a:ext cx="7160588" cy="3017520"/>
           </a:xfrm>
           <a:prstGeom prst="rect">
             <a:avLst/>
@@ -4455,7 +5032,7 @@
                 <a:ea typeface="Calibri" pitchFamily="34" charset="-122"/>
                 <a:cs typeface="Calibri" pitchFamily="34" charset="-120"/>
               </a:rPr>
-              <a:t>Peak jumps to 8.06x at 8p x 16t. Up from 6.18x in v1. Heatmap is now much darker.
+              <a:t>Peak jumps to 8.06x at 4p x 16t. Up from 6.18x in v1. Heatmap is now much darker.
 </a:t>
             </a:r>
             <a:r>
@@ -4478,7 +5055,7 @@
                 <a:ea typeface="Calibri" pitchFamily="34" charset="-122"/>
                 <a:cs typeface="Calibri" pitchFamily="34" charset="-120"/>
               </a:rPr>
-              <a:t>Best config hits 3.48x at 2p x 8t. Up from 2.90x in v1.</a:t>
+              <a:t>Best config hits 3.13x at 2p x 8t. Up from 2.90x in v1.</a:t>
             </a:r>
             <a:endParaRPr lang="en-US" sz="1600" dirty="0"/>
           </a:p>
@@ -4489,7 +5066,7 @@
           <p:cNvPr id="8" name="Picture 7">
             <a:extLst>
               <a:ext uri="{FF2B5EF4-FFF2-40B4-BE49-F238E27FC236}">
-                <a16:creationId xmlns:a16="http://schemas.microsoft.com/office/drawing/2014/main" id="{7FBC32C6-F401-1DDE-997E-2D9C2EEB874D}"/>
+                <a16:creationId xmlns:a16="http://schemas.microsoft.com/office/drawing/2014/main" id="{3CF88791-8208-521D-4CB7-33B57ECE7FC1}"/>
               </a:ext>
             </a:extLst>
           </p:cNvPr>
@@ -4506,7 +5083,7 @@
         </p:blipFill>
         <p:spPr>
           <a:xfrm>
-            <a:off x="938986" y="2098590"/>
+            <a:off x="938986" y="2104464"/>
             <a:ext cx="7266027" cy="3017520"/>
           </a:xfrm>
           <a:prstGeom prst="rect">
@@ -4688,7 +5265,7 @@
                 <a:ea typeface="Calibri" pitchFamily="34" charset="-122"/>
                 <a:cs typeface="Calibri" pitchFamily="34" charset="-120"/>
               </a:rPr>
-              <a:t>Efficiency stays above 0.8 through 8 threads on Expanse. Drops at 16.
+              <a:t>Efficiency stays above 0.8 through 4 threads on Expanse. Drops at 16.
 </a:t>
             </a:r>
             <a:r>
@@ -4722,7 +5299,7 @@
           <p:cNvPr id="8" name="Picture 7">
             <a:extLst>
               <a:ext uri="{FF2B5EF4-FFF2-40B4-BE49-F238E27FC236}">
-                <a16:creationId xmlns:a16="http://schemas.microsoft.com/office/drawing/2014/main" id="{26A6BC54-E04E-FD32-3BEC-14DADFF9E005}"/>
+                <a16:creationId xmlns:a16="http://schemas.microsoft.com/office/drawing/2014/main" id="{29564311-76F5-EB79-1A98-6F93BE84AD6E}"/>
               </a:ext>
             </a:extLst>
           </p:cNvPr>
@@ -4739,7 +5316,7 @@
         </p:blipFill>
         <p:spPr>
           <a:xfrm>
-            <a:off x="991706" y="2098590"/>
+            <a:off x="634703" y="2100432"/>
             <a:ext cx="7160588" cy="3017520"/>
           </a:xfrm>
           <a:prstGeom prst="rect">
@@ -4872,7 +5449,7 @@
               <a:buChar char="•"/>
             </a:pPr>
             <a:r>
-              <a:rPr lang="en-US" sz="1600" dirty="0">
+              <a:rPr lang="en-US" dirty="0">
                 <a:solidFill>
                   <a:srgbClr val="1A1A1A"/>
                 </a:solidFill>
@@ -4882,7 +5459,7 @@
               </a:rPr>
               <a:t>All features are integer-coded categories</a:t>
             </a:r>
-            <a:endParaRPr lang="en-US" sz="1600" dirty="0"/>
+            <a:endParaRPr lang="en-US" dirty="0"/>
           </a:p>
           <a:p>
             <a:pPr marL="342900" indent="-342900">
@@ -4893,7 +5470,7 @@
               <a:buChar char="•"/>
             </a:pPr>
             <a:r>
-              <a:rPr lang="en-US" sz="1600" dirty="0">
+              <a:rPr lang="en-US" dirty="0">
                 <a:solidFill>
                   <a:srgbClr val="1A1A1A"/>
                 </a:solidFill>
@@ -4901,9 +5478,9 @@
                 <a:ea typeface="Calibri" pitchFamily="34" charset="-122"/>
                 <a:cs typeface="Calibri" pitchFamily="34" charset="-120"/>
               </a:rPr>
-              <a:t>Training and classification processed row by row: no dependencies between rows, embarrassingly parallel</a:t>
-            </a:r>
-            <a:endParaRPr lang="en-US" sz="1600" dirty="0"/>
+              <a:t>Training and classification processed row by row: no dependencies between rows</a:t>
+            </a:r>
+            <a:endParaRPr lang="en-US" dirty="0"/>
           </a:p>
           <a:p>
             <a:pPr marL="342900" indent="-342900">
@@ -4914,7 +5491,7 @@
               <a:buChar char="•"/>
             </a:pPr>
             <a:r>
-              <a:rPr lang="en-US" sz="1600" dirty="0">
+              <a:rPr lang="en-US" dirty="0">
                 <a:solidFill>
                   <a:srgbClr val="1A1A1A"/>
                 </a:solidFill>
@@ -4924,7 +5501,7 @@
               </a:rPr>
               <a:t>5-fold cross-validation: split data into 5 parts, train on 4, test on 1, rotate and repeat</a:t>
             </a:r>
-            <a:endParaRPr lang="en-US" sz="1600" dirty="0"/>
+            <a:endParaRPr lang="en-US" dirty="0"/>
           </a:p>
           <a:p>
             <a:pPr marL="342900" indent="-342900">
@@ -4935,7 +5512,7 @@
               <a:buChar char="•"/>
             </a:pPr>
             <a:r>
-              <a:rPr lang="en-US" sz="1600" dirty="0">
+              <a:rPr lang="en-US" dirty="0">
                 <a:solidFill>
                   <a:srgbClr val="1A1A1A"/>
                 </a:solidFill>
@@ -4945,7 +5522,7 @@
               </a:rPr>
               <a:t>ML metrics reported: accuracy and confusion matrix per fold</a:t>
             </a:r>
-            <a:endParaRPr lang="en-US" sz="1600" dirty="0"/>
+            <a:endParaRPr lang="en-US" dirty="0"/>
           </a:p>
           <a:p>
             <a:pPr marL="342900" indent="-342900">
@@ -4953,7 +5530,7 @@
               <a:buChar char="•"/>
             </a:pPr>
             <a:r>
-              <a:rPr lang="en-US" sz="1600" dirty="0">
+              <a:rPr lang="en-US" dirty="0">
                 <a:solidFill>
                   <a:srgbClr val="1A1A1A"/>
                 </a:solidFill>
@@ -4963,7 +5540,7 @@
               </a:rPr>
               <a:t>Log probabilities for numerical stability; Laplace smoothing (alpha=1.0) for unseen values</a:t>
             </a:r>
-            <a:endParaRPr lang="en-US" sz="1600" dirty="0"/>
+            <a:endParaRPr lang="en-US" dirty="0"/>
           </a:p>
         </p:txBody>
       </p:sp>
@@ -5112,10 +5689,13 @@
           <a:lstStyle/>
           <a:p>
             <a:pPr marL="0" indent="0">
+              <a:lnSpc>
+                <a:spcPct val="150000"/>
+              </a:lnSpc>
               <a:buNone/>
             </a:pPr>
             <a:r>
-              <a:rPr lang="en-US" sz="1400" b="1" dirty="0">
+              <a:rPr lang="en-US" sz="1600" b="1" dirty="0">
                 <a:solidFill>
                   <a:srgbClr val="0D3B6E"/>
                 </a:solidFill>
@@ -5126,7 +5706,7 @@
               <a:t>P(y)</a:t>
             </a:r>
             <a:r>
-              <a:rPr lang="en-US" sz="1400" dirty="0">
+              <a:rPr lang="en-US" sz="1600" dirty="0">
                 <a:solidFill>
                   <a:srgbClr val="444444"/>
                 </a:solidFill>
@@ -5138,7 +5718,7 @@
 </a:t>
             </a:r>
             <a:r>
-              <a:rPr lang="en-US" sz="1400" b="1" dirty="0">
+              <a:rPr lang="en-US" sz="1600" b="1" dirty="0">
                 <a:solidFill>
                   <a:srgbClr val="0D3B6E"/>
                 </a:solidFill>
@@ -5149,7 +5729,7 @@
               <a:t>P(xᵢ | y)</a:t>
             </a:r>
             <a:r>
-              <a:rPr lang="en-US" sz="1400" dirty="0">
+              <a:rPr lang="en-US" sz="1600" dirty="0">
                 <a:solidFill>
                   <a:srgbClr val="444444"/>
                 </a:solidFill>
@@ -5161,7 +5741,7 @@
 </a:t>
             </a:r>
             <a:r>
-              <a:rPr lang="en-US" sz="1400" b="1" dirty="0">
+              <a:rPr lang="en-US" sz="1600" b="1" dirty="0">
                 <a:solidFill>
                   <a:srgbClr val="0D3B6E"/>
                 </a:solidFill>
@@ -5172,7 +5752,7 @@
               <a:t>Predict</a:t>
             </a:r>
             <a:r>
-              <a:rPr lang="en-US" sz="1400" dirty="0">
+              <a:rPr lang="en-US" sz="1600" dirty="0">
                 <a:solidFill>
                   <a:srgbClr val="444444"/>
                 </a:solidFill>
@@ -5182,7 +5762,7 @@
               </a:rPr>
               <a:t> = argmax [ log P(y) + Σ log P(xᵢ|y) ]</a:t>
             </a:r>
-            <a:endParaRPr lang="en-US" sz="1400" dirty="0"/>
+            <a:endParaRPr lang="en-US" sz="1600" dirty="0"/>
           </a:p>
         </p:txBody>
       </p:sp>
@@ -5444,7 +6024,7 @@
                 <a:ea typeface="Calibri" pitchFamily="34" charset="-122"/>
                 <a:cs typeface="Calibri" pitchFamily="34" charset="-120"/>
               </a:rPr>
-              <a:t>OMP scales with N, reaching 6x at 1m. MPI v2 holds steady around 5x across all sizes.
+              <a:t>OMP, MPI, and Hybrid improve performance as N increases.
 </a:t>
             </a:r>
             <a:r>
@@ -5467,7 +6047,7 @@
                 <a:ea typeface="Calibri" pitchFamily="34" charset="-122"/>
                 <a:cs typeface="Calibri" pitchFamily="34" charset="-120"/>
               </a:rPr>
-              <a:t>OMP and MPI v2 both improve with N. MPI now competitive with OMP.</a:t>
+              <a:t>Performance increases initially then decreases as N increases.</a:t>
             </a:r>
             <a:endParaRPr lang="en-US" sz="1600" dirty="0"/>
           </a:p>
@@ -5478,7 +6058,7 @@
           <p:cNvPr id="8" name="Picture 7">
             <a:extLst>
               <a:ext uri="{FF2B5EF4-FFF2-40B4-BE49-F238E27FC236}">
-                <a16:creationId xmlns:a16="http://schemas.microsoft.com/office/drawing/2014/main" id="{C2417921-B87D-1463-BEA4-B2F6BE87ED1C}"/>
+                <a16:creationId xmlns:a16="http://schemas.microsoft.com/office/drawing/2014/main" id="{88C5AA48-6CB4-FC70-7292-9F25A73D566F}"/>
               </a:ext>
             </a:extLst>
           </p:cNvPr>
@@ -5495,8 +6075,8 @@
         </p:blipFill>
         <p:spPr>
           <a:xfrm>
-            <a:off x="1543359" y="2106006"/>
-            <a:ext cx="6057282" cy="3017520"/>
+            <a:off x="1387737" y="2100432"/>
+            <a:ext cx="6060994" cy="3017520"/>
           </a:xfrm>
           <a:prstGeom prst="rect">
             <a:avLst/>
@@ -5677,7 +6257,7 @@
                 <a:ea typeface="Calibri" pitchFamily="34" charset="-122"/>
                 <a:cs typeface="Calibri" pitchFamily="34" charset="-120"/>
               </a:rPr>
-              <a:t>OMP leads at 9.11x. MPI v2 reaches 6.30x. Hybrid peaks at 8.06x.
+              <a:t>OMP leads at 8.41x. MPI v2 reaches 6.55x. Hybrid peaks at 8.06x.
 </a:t>
             </a:r>
             <a:r>
@@ -5700,7 +6280,7 @@
                 <a:ea typeface="Calibri" pitchFamily="34" charset="-122"/>
                 <a:cs typeface="Calibri" pitchFamily="34" charset="-120"/>
               </a:rPr>
-              <a:t>OMP leads at 3.62x. MPI v2 reaches 2.98x. Hybrid peaks at 3.48x.</a:t>
+              <a:t>OMP leads at 3.29x. MPI v2 reaches 2.67x. Hybrid peaks at 3.13x.</a:t>
             </a:r>
             <a:endParaRPr lang="en-US" sz="1600" dirty="0"/>
           </a:p>
@@ -5708,10 +6288,10 @@
       </p:sp>
       <p:pic>
         <p:nvPicPr>
-          <p:cNvPr id="8" name="Picture 7">
+          <p:cNvPr id="10" name="Picture 9">
             <a:extLst>
               <a:ext uri="{FF2B5EF4-FFF2-40B4-BE49-F238E27FC236}">
-                <a16:creationId xmlns:a16="http://schemas.microsoft.com/office/drawing/2014/main" id="{591D2A93-C132-774C-24E3-8E4C73C2DC2C}"/>
+                <a16:creationId xmlns:a16="http://schemas.microsoft.com/office/drawing/2014/main" id="{8978B677-D81D-C778-2E62-0DAE6A7DFC1F}"/>
               </a:ext>
             </a:extLst>
           </p:cNvPr>
@@ -5728,7 +6308,7 @@
         </p:blipFill>
         <p:spPr>
           <a:xfrm>
-            <a:off x="834390" y="2106006"/>
+            <a:off x="834390" y="2100432"/>
             <a:ext cx="7475219" cy="3017520"/>
           </a:xfrm>
           <a:prstGeom prst="rect">
@@ -6058,9 +6638,50 @@
                 <a:ea typeface="Calibri" pitchFamily="34" charset="-122"/>
                 <a:cs typeface="Calibri" pitchFamily="34" charset="-120"/>
               </a:rPr>
-              <a:t>OMP scaled well on both systems  design paid off
-MPI v1 bottlenecked by copy_rows; v2 fixed it and scaled to 6.30x on Expanse
+              <a:t>OMP scaled well on both systems:  design paid off
+MPI v1 bottlenecked by </a:t>
+            </a:r>
+            <a:r>
+              <a:rPr lang="en-US" sz="1400" dirty="0" err="1">
+                <a:solidFill>
+                  <a:srgbClr val="1A1A1A"/>
+                </a:solidFill>
+                <a:latin typeface="Calibri" pitchFamily="34" charset="0"/>
+                <a:ea typeface="Calibri" pitchFamily="34" charset="-122"/>
+                <a:cs typeface="Calibri" pitchFamily="34" charset="-120"/>
+              </a:rPr>
+              <a:t>copy_rows</a:t>
+            </a:r>
+            <a:r>
+              <a:rPr lang="en-US" sz="1400" dirty="0">
+                <a:solidFill>
+                  <a:srgbClr val="1A1A1A"/>
+                </a:solidFill>
+                <a:latin typeface="Calibri" pitchFamily="34" charset="0"/>
+                <a:ea typeface="Calibri" pitchFamily="34" charset="-122"/>
+                <a:cs typeface="Calibri" pitchFamily="34" charset="-120"/>
+              </a:rPr>
+              <a:t>, v2 fixed it and scaled to 6.55x on Expanse
 Hybrid v2 reached 8.06x combining both levels of parallelism</a:t>
+            </a:r>
+          </a:p>
+          <a:p>
+            <a:pPr marL="0" indent="0">
+              <a:spcAft>
+                <a:spcPts val="400"/>
+              </a:spcAft>
+              <a:buNone/>
+            </a:pPr>
+            <a:r>
+              <a:rPr lang="en-US" sz="1400" dirty="0">
+                <a:solidFill>
+                  <a:srgbClr val="1A1A1A"/>
+                </a:solidFill>
+                <a:latin typeface="Calibri" pitchFamily="34" charset="0"/>
+                <a:ea typeface="Calibri" pitchFamily="34" charset="-122"/>
+                <a:cs typeface="Calibri" pitchFamily="34" charset="-120"/>
+              </a:rPr>
+              <a:t>Both MPI and Hybrid under performed vs OMP</a:t>
             </a:r>
             <a:endParaRPr lang="en-US" sz="1400" dirty="0"/>
           </a:p>
@@ -6096,7 +6717,7 @@
           <a:bodyPr/>
           <a:lstStyle/>
           <a:p>
-            <a:endParaRPr lang="en-US"/>
+            <a:endParaRPr lang="en-US" dirty="0"/>
           </a:p>
         </p:txBody>
       </p:sp>
@@ -6160,12 +6781,22 @@
           <a:bodyPr wrap="square" rtlCol="0" anchor="t"/>
           <a:lstStyle/>
           <a:p>
-            <a:pPr marL="0" indent="0">
-              <a:spcAft>
-                <a:spcPts val="400"/>
-              </a:spcAft>
-              <a:buNone/>
-            </a:pPr>
+            <a:r>
+              <a:rPr lang="en-US" sz="1400" dirty="0"/>
+              <a:t>Allocated 4 nodes × 16 tasks × 8 CPUs to fully utilize 128 cores per node</a:t>
+            </a:r>
+          </a:p>
+          <a:p>
+            <a:r>
+              <a:rPr lang="en-US" sz="1400" dirty="0"/>
+              <a:t>--bind-to none untethered threads from specific cores but all 16 threads still run within their rank 16 threads per rank exceeded the 8-CPU ceiling; more nodes cannot fix intra-rank oversubscription</a:t>
+            </a:r>
+          </a:p>
+          <a:p>
+            <a:r>
+              <a:rPr lang="en-US" sz="1400" dirty="0"/>
+              <a:t>Collapse to 0.628x below serial is the expected result of 2:1 thread oversubscription </a:t>
+            </a:r>
             <a:r>
               <a:rPr lang="en-US" sz="1400" dirty="0">
                 <a:solidFill>
@@ -6175,31 +6806,8 @@
                 <a:ea typeface="Calibri" pitchFamily="34" charset="-122"/>
                 <a:cs typeface="Calibri" pitchFamily="34" charset="-120"/>
               </a:rPr>
-              <a:t>--ntasks-per-node=128 in the script (and </a:t>
-            </a:r>
-            <a:r>
-              <a:rPr lang="en-US" sz="1400" dirty="0" err="1">
-                <a:solidFill>
-                  <a:srgbClr val="1A1A1A"/>
-                </a:solidFill>
-                <a:latin typeface="Calibri" pitchFamily="34" charset="0"/>
-                <a:ea typeface="Calibri" pitchFamily="34" charset="-122"/>
-                <a:cs typeface="Calibri" pitchFamily="34" charset="-120"/>
-              </a:rPr>
-              <a:t>expance</a:t>
-            </a:r>
-            <a:r>
-              <a:rPr lang="en-US" sz="1400" dirty="0">
-                <a:solidFill>
-                  <a:srgbClr val="1A1A1A"/>
-                </a:solidFill>
-                <a:latin typeface="Calibri" pitchFamily="34" charset="0"/>
-                <a:ea typeface="Calibri" pitchFamily="34" charset="-122"/>
-                <a:cs typeface="Calibri" pitchFamily="34" charset="-120"/>
-              </a:rPr>
-              <a:t> limit per node) set the core limit; at 16p x 16t we hit exactly 256 workers on 128 cores
-MPI coordination overhead on top pushed performance below serial
-Multi-node MPI runs would be the natural next step to scale further</a:t>
+              <a:t>
+</a:t>
             </a:r>
             <a:endParaRPr lang="en-US" sz="1400" dirty="0"/>
           </a:p>
@@ -6299,6 +6907,35 @@
           <a:bodyPr wrap="square" rtlCol="0" anchor="t"/>
           <a:lstStyle/>
           <a:p>
+            <a:pPr>
+              <a:spcAft>
+                <a:spcPts val="400"/>
+              </a:spcAft>
+            </a:pPr>
+            <a:r>
+              <a:rPr lang="en-US" sz="1400" dirty="0"/>
+              <a:t>MPI scaling on the Linux cluster was modest, reaching only 2.67x at 8 procs</a:t>
+            </a:r>
+          </a:p>
+          <a:p>
+            <a:pPr>
+              <a:spcAft>
+                <a:spcPts val="400"/>
+              </a:spcAft>
+            </a:pPr>
+            <a:r>
+              <a:rPr lang="en-US" sz="1400" dirty="0">
+                <a:solidFill>
+                  <a:srgbClr val="1A1A1A"/>
+                </a:solidFill>
+                <a:latin typeface="Calibri" pitchFamily="34" charset="0"/>
+                <a:ea typeface="Calibri" pitchFamily="34" charset="-122"/>
+                <a:cs typeface="Calibri" pitchFamily="34" charset="-120"/>
+              </a:rPr>
+              <a:t>Hybrid peaked at 3.13x (2p×8t): oversubscription degraded performance beyond 4 procs</a:t>
+            </a:r>
+          </a:p>
+          <a:p>
             <a:pPr marL="0" indent="0">
               <a:spcAft>
                 <a:spcPts val="400"/>
@@ -6314,9 +6951,7 @@
                 <a:ea typeface="Calibri" pitchFamily="34" charset="-122"/>
                 <a:cs typeface="Calibri" pitchFamily="34" charset="-120"/>
               </a:rPr>
-              <a:t>Capped at 8 procs/threads in the bash script
---oversubscribe flag used for hybrid runs; performance degraded early, suggesting fewer than 32 physical cores
-Adding processes beyond 4 consistently hurt performance</a:t>
+              <a:t>Neither parallelization strategy gains much from larger data, suggesting memory bandwidth limits</a:t>
             </a:r>
             <a:endParaRPr lang="en-US" sz="1400" dirty="0"/>
           </a:p>
@@ -10415,7 +11050,7 @@
                 <a:ea typeface="Calibri" pitchFamily="34" charset="-122"/>
                 <a:cs typeface="Calibri" pitchFamily="34" charset="-120"/>
               </a:rPr>
-              <a:t>schedule(static)</a:t>
+              <a:t>schedule(static default)</a:t>
             </a:r>
             <a:r>
               <a:rPr lang="en-US" sz="1400" dirty="0">
@@ -10499,7 +11134,7 @@
                 <a:ea typeface="Calibri" pitchFamily="34" charset="-122"/>
                 <a:cs typeface="Calibri" pitchFamily="34" charset="-120"/>
               </a:rPr>
-              <a:t>Serial design enabled this — row ranges, flat arrays, and read-only log_probs required minimal changes.</a:t>
+              <a:t>Serial design enabled this, row ranges, flat arrays, and read-only log_probs required minimal changes.</a:t>
             </a:r>
             <a:endParaRPr lang="en-US" sz="1300" dirty="0"/>
           </a:p>
@@ -10569,7 +11204,7 @@
               <a:buNone/>
             </a:pPr>
             <a:r>
-              <a:rPr lang="en-US" sz="1200" i="1" dirty="0">
+              <a:rPr lang="en-US" sz="1400" i="1" dirty="0">
                 <a:solidFill>
                   <a:srgbClr val="888888"/>
                 </a:solidFill>
@@ -10577,9 +11212,9 @@
                 <a:ea typeface="Calibri" pitchFamily="34" charset="-122"/>
                 <a:cs typeface="Calibri" pitchFamily="34" charset="-120"/>
               </a:rPr>
-              <a:t>Count accumulation — array reduction</a:t>
-            </a:r>
-            <a:endParaRPr lang="en-US" sz="1200" dirty="0"/>
+              <a:t>Count accumulation  array reduction</a:t>
+            </a:r>
+            <a:endParaRPr lang="en-US" sz="1400" dirty="0"/>
           </a:p>
         </p:txBody>
       </p:sp>
@@ -10650,74 +11285,63 @@
                 <a:ea typeface="Courier New" pitchFamily="34" charset="-122"/>
                 <a:cs typeface="Courier New" pitchFamily="34" charset="-120"/>
               </a:rPr>
-              <a:t>#pragma omp parallel for </a:t>
+              <a:t>#pragma omp parallel for</a:t>
             </a:r>
             <a:r>
               <a:rPr lang="en-US" sz="1100" dirty="0">
                 <a:solidFill>
-                  <a:srgbClr val="FDE68A"/>
+                  <a:srgbClr val="FFFFFF"/>
                 </a:solidFill>
                 <a:latin typeface="Courier New" pitchFamily="34" charset="0"/>
                 <a:ea typeface="Courier New" pitchFamily="34" charset="-122"/>
                 <a:cs typeface="Courier New" pitchFamily="34" charset="-120"/>
               </a:rPr>
-              <a:t>schedule</a:t>
+              <a:t>
+</a:t>
             </a:r>
             <a:r>
               <a:rPr lang="en-US" sz="1100" dirty="0">
                 <a:solidFill>
-                  <a:srgbClr val="FFFFFF"/>
+                  <a:srgbClr val="FDE68A"/>
                 </a:solidFill>
                 <a:latin typeface="Courier New" pitchFamily="34" charset="0"/>
                 <a:ea typeface="Courier New" pitchFamily="34" charset="-122"/>
                 <a:cs typeface="Courier New" pitchFamily="34" charset="-120"/>
               </a:rPr>
-              <a:t>(static) \
-</a:t>
+              <a:t>  reduction</a:t>
             </a:r>
             <a:r>
               <a:rPr lang="en-US" sz="1100" dirty="0">
                 <a:solidFill>
-                  <a:srgbClr val="FDE68A"/>
+                  <a:srgbClr val="FFFFFF"/>
                 </a:solidFill>
                 <a:latin typeface="Courier New" pitchFamily="34" charset="0"/>
                 <a:ea typeface="Courier New" pitchFamily="34" charset="-122"/>
                 <a:cs typeface="Courier New" pitchFamily="34" charset="-120"/>
               </a:rPr>
-              <a:t>  reduction</a:t>
+              <a:t>(+:class_counts[:C]) \
+</a:t>
             </a:r>
             <a:r>
               <a:rPr lang="en-US" sz="1100" dirty="0">
                 <a:solidFill>
-                  <a:srgbClr val="FFFFFF"/>
+                  <a:srgbClr val="FDE68A"/>
                 </a:solidFill>
                 <a:latin typeface="Courier New" pitchFamily="34" charset="0"/>
                 <a:ea typeface="Courier New" pitchFamily="34" charset="-122"/>
                 <a:cs typeface="Courier New" pitchFamily="34" charset="-120"/>
               </a:rPr>
-              <a:t>(+:class_counts[:C]) \
-</a:t>
+              <a:t>  reduction</a:t>
             </a:r>
             <a:r>
               <a:rPr lang="en-US" sz="1100" dirty="0">
                 <a:solidFill>
-                  <a:srgbClr val="FDE68A"/>
+                  <a:srgbClr val="FFFFFF"/>
                 </a:solidFill>
                 <a:latin typeface="Courier New" pitchFamily="34" charset="0"/>
                 <a:ea typeface="Courier New" pitchFamily="34" charset="-122"/>
                 <a:cs typeface="Courier New" pitchFamily="34" charset="-120"/>
               </a:rPr>
-              <a:t>  reduction</a:t>
-            </a:r>
-            <a:r>
-              <a:rPr lang="en-US" sz="1100" dirty="0">
-                <a:solidFill>
-                  <a:srgbClr val="FFFFFF"/>
-                </a:solidFill>
-                <a:latin typeface="Courier New" pitchFamily="34" charset="0"/>
-                <a:ea typeface="Courier New" pitchFamily="34" charset="-122"/>
-                <a:cs typeface="Courier New" pitchFamily="34" charset="-120"/>
-              </a:rPr>
               <a:t>(+:feature_counts[:P])</a:t>
             </a:r>
             <a:endParaRPr lang="en-US" sz="1100" dirty="0"/>
@@ -10749,7 +11373,7 @@
               <a:buNone/>
             </a:pPr>
             <a:r>
-              <a:rPr lang="en-US" sz="1200" i="1" dirty="0">
+              <a:rPr lang="en-US" sz="1400" i="1" dirty="0">
                 <a:solidFill>
                   <a:srgbClr val="888888"/>
                 </a:solidFill>
@@ -10757,9 +11381,9 @@
                 <a:ea typeface="Calibri" pitchFamily="34" charset="-122"/>
                 <a:cs typeface="Calibri" pitchFamily="34" charset="-120"/>
               </a:rPr>
-              <a:t>Classification — embarrassingly parallel</a:t>
-            </a:r>
-            <a:endParaRPr lang="en-US" sz="1200" dirty="0"/>
+              <a:t>Classification</a:t>
+            </a:r>
+            <a:endParaRPr lang="en-US" sz="1400" dirty="0"/>
           </a:p>
         </p:txBody>
       </p:sp>
@@ -10907,7 +11531,7 @@
               <a:buNone/>
             </a:pPr>
             <a:r>
-              <a:rPr lang="en-US" sz="1200" i="1" dirty="0">
+              <a:rPr lang="en-US" sz="1400" i="1" dirty="0">
                 <a:solidFill>
                   <a:srgbClr val="888888"/>
                 </a:solidFill>
@@ -10915,9 +11539,9 @@
                 <a:ea typeface="Calibri" pitchFamily="34" charset="-122"/>
                 <a:cs typeface="Calibri" pitchFamily="34" charset="-120"/>
               </a:rPr>
-              <a:t>Accuracy — scalar reduction</a:t>
-            </a:r>
-            <a:endParaRPr lang="en-US" sz="1200" dirty="0"/>
+              <a:t>Accuracy reduction</a:t>
+            </a:r>
+            <a:endParaRPr lang="en-US" sz="1400" dirty="0"/>
           </a:p>
         </p:txBody>
       </p:sp>
@@ -11465,7 +12089,7 @@
               <a:buNone/>
             </a:pPr>
             <a:r>
-              <a:rPr lang="en-US" sz="1200" i="1" dirty="0" err="1">
+              <a:rPr lang="en-US" sz="1400" i="1" dirty="0" err="1">
                 <a:solidFill>
                   <a:srgbClr val="888888"/>
                 </a:solidFill>
@@ -11475,18 +12099,7 @@
               </a:rPr>
               <a:t>copy_rows</a:t>
             </a:r>
-            <a:r>
-              <a:rPr lang="en-US" sz="1200" i="1" dirty="0">
-                <a:solidFill>
-                  <a:srgbClr val="888888"/>
-                </a:solidFill>
-                <a:latin typeface="Calibri" pitchFamily="34" charset="0"/>
-                <a:ea typeface="Calibri" pitchFamily="34" charset="-122"/>
-                <a:cs typeface="Calibri" pitchFamily="34" charset="-120"/>
-              </a:rPr>
-              <a:t>  called twice per fold across 5 folds</a:t>
-            </a:r>
-            <a:endParaRPr lang="en-US" sz="1200" dirty="0"/>
+            <a:endParaRPr lang="en-US" sz="1400" dirty="0"/>
           </a:p>
         </p:txBody>
       </p:sp>
@@ -11499,7 +12112,7 @@
         <p:spPr>
           <a:xfrm>
             <a:off x="4846320" y="1389888"/>
-            <a:ext cx="4023360" cy="1097280"/>
+            <a:ext cx="4023360" cy="1188720"/>
           </a:xfrm>
           <a:prstGeom prst="roundRect">
             <a:avLst>
@@ -11674,7 +12287,7 @@
         </p:nvSpPr>
         <p:spPr>
           <a:xfrm>
-            <a:off x="4846320" y="2578608"/>
+            <a:off x="4846320" y="2635758"/>
             <a:ext cx="4023360" cy="201168"/>
           </a:xfrm>
           <a:prstGeom prst="rect">
@@ -11691,7 +12304,7 @@
               <a:buNone/>
             </a:pPr>
             <a:r>
-              <a:rPr lang="en-US" sz="1200" i="1" dirty="0" err="1">
+              <a:rPr lang="en-US" sz="1400" i="1" dirty="0" err="1">
                 <a:solidFill>
                   <a:srgbClr val="888888"/>
                 </a:solidFill>
@@ -11701,18 +12314,7 @@
               </a:rPr>
               <a:t>confusion_matrix_binary</a:t>
             </a:r>
-            <a:r>
-              <a:rPr lang="en-US" sz="1200" i="1" dirty="0">
-                <a:solidFill>
-                  <a:srgbClr val="888888"/>
-                </a:solidFill>
-                <a:latin typeface="Calibri" pitchFamily="34" charset="0"/>
-                <a:ea typeface="Calibri" pitchFamily="34" charset="-122"/>
-                <a:cs typeface="Calibri" pitchFamily="34" charset="-120"/>
-              </a:rPr>
-              <a:t>  count locally, reduce to rank 0</a:t>
-            </a:r>
-            <a:endParaRPr lang="en-US" sz="1200" dirty="0"/>
+            <a:endParaRPr lang="en-US" sz="1400" dirty="0"/>
           </a:p>
         </p:txBody>
       </p:sp>
@@ -11724,8 +12326,8 @@
         </p:nvSpPr>
         <p:spPr>
           <a:xfrm>
-            <a:off x="4846320" y="2807208"/>
-            <a:ext cx="4023360" cy="2011680"/>
+            <a:off x="4846320" y="2864358"/>
+            <a:ext cx="4023360" cy="2103120"/>
           </a:xfrm>
           <a:prstGeom prst="roundRect">
             <a:avLst>
@@ -11758,7 +12360,7 @@
         </p:nvSpPr>
         <p:spPr>
           <a:xfrm>
-            <a:off x="4983480" y="2807208"/>
+            <a:off x="4983480" y="2864358"/>
             <a:ext cx="3749040" cy="2011680"/>
           </a:xfrm>
           <a:prstGeom prst="rect">
@@ -12378,8 +12980,8 @@
         </p:nvSpPr>
         <p:spPr>
           <a:xfrm>
-            <a:off x="4812545" y="1173234"/>
-            <a:ext cx="4114800" cy="3520440"/>
+            <a:off x="4812545" y="1144658"/>
+            <a:ext cx="4114800" cy="3846441"/>
           </a:xfrm>
           <a:prstGeom prst="roundRect">
             <a:avLst>
@@ -12412,7 +13014,7 @@
         </p:nvSpPr>
         <p:spPr>
           <a:xfrm>
-            <a:off x="4892040" y="1173234"/>
+            <a:off x="4892040" y="1307658"/>
             <a:ext cx="3840480" cy="3520440"/>
           </a:xfrm>
           <a:prstGeom prst="rect">
@@ -12429,7 +13031,7 @@
               <a:buNone/>
             </a:pPr>
             <a:r>
-              <a:rPr lang="en-US" sz="1050" dirty="0">
+              <a:rPr lang="en-US" sz="1100" dirty="0">
                 <a:solidFill>
                   <a:srgbClr val="888888"/>
                 </a:solidFill>
@@ -12441,7 +13043,7 @@
 </a:t>
             </a:r>
             <a:r>
-              <a:rPr lang="en-US" sz="1050" dirty="0">
+              <a:rPr lang="en-US" sz="1100" dirty="0">
                 <a:solidFill>
                   <a:srgbClr val="7DD3FC"/>
                 </a:solidFill>
@@ -12452,7 +13054,7 @@
               <a:t>MPI_Comm_rank</a:t>
             </a:r>
             <a:r>
-              <a:rPr lang="en-US" sz="1050" dirty="0">
+              <a:rPr lang="en-US" sz="1100" dirty="0">
                 <a:solidFill>
                   <a:srgbClr val="FFFFFF"/>
                 </a:solidFill>
@@ -12464,7 +13066,7 @@
 </a:t>
             </a:r>
             <a:r>
-              <a:rPr lang="en-US" sz="1050" dirty="0">
+              <a:rPr lang="en-US" sz="1100" dirty="0">
                 <a:solidFill>
                   <a:srgbClr val="FDE68A"/>
                 </a:solidFill>
@@ -12475,7 +13077,7 @@
               <a:t>int </a:t>
             </a:r>
             <a:r>
-              <a:rPr lang="en-US" sz="1050" dirty="0">
+              <a:rPr lang="en-US" sz="1100" dirty="0">
                 <a:solidFill>
                   <a:srgbClr val="FFFFFF"/>
                 </a:solidFill>
@@ -12487,7 +13089,7 @@
 </a:t>
             </a:r>
             <a:r>
-              <a:rPr lang="en-US" sz="1050" dirty="0">
+              <a:rPr lang="en-US" sz="1100" dirty="0">
                 <a:solidFill>
                   <a:srgbClr val="FDE68A"/>
                 </a:solidFill>
@@ -12498,7 +13100,7 @@
               <a:t>int </a:t>
             </a:r>
             <a:r>
-              <a:rPr lang="en-US" sz="1050" dirty="0">
+              <a:rPr lang="en-US" sz="1100" dirty="0">
                 <a:solidFill>
                   <a:srgbClr val="FFFFFF"/>
                 </a:solidFill>
@@ -12510,7 +13112,7 @@
 </a:t>
             </a:r>
             <a:r>
-              <a:rPr lang="en-US" sz="1050" dirty="0">
+              <a:rPr lang="en-US" sz="1100" dirty="0">
                 <a:solidFill>
                   <a:srgbClr val="888888"/>
                 </a:solidFill>
@@ -12522,7 +13124,7 @@
 </a:t>
             </a:r>
             <a:r>
-              <a:rPr lang="en-US" sz="1050" dirty="0">
+              <a:rPr lang="en-US" sz="1100" dirty="0">
                 <a:solidFill>
                   <a:srgbClr val="C4B5FD"/>
                 </a:solidFill>
@@ -12533,7 +13135,7 @@
               <a:t>#pragma omp parallel for </a:t>
             </a:r>
             <a:r>
-              <a:rPr lang="en-US" sz="1050" dirty="0">
+              <a:rPr lang="en-US" sz="1100" dirty="0">
                 <a:solidFill>
                   <a:srgbClr val="FDE68A"/>
                 </a:solidFill>
@@ -12544,7 +13146,7 @@
               <a:t>schedule</a:t>
             </a:r>
             <a:r>
-              <a:rPr lang="en-US" sz="1050" dirty="0">
+              <a:rPr lang="en-US" sz="1100" dirty="0">
                 <a:solidFill>
                   <a:srgbClr val="FFFFFF"/>
                 </a:solidFill>
@@ -12556,7 +13158,7 @@
 </a:t>
             </a:r>
             <a:r>
-              <a:rPr lang="en-US" sz="1050" dirty="0">
+              <a:rPr lang="en-US" sz="1100" dirty="0">
                 <a:solidFill>
                   <a:srgbClr val="FDE68A"/>
                 </a:solidFill>
@@ -12567,7 +13169,7 @@
               <a:t>  reduction</a:t>
             </a:r>
             <a:r>
-              <a:rPr lang="en-US" sz="1050" dirty="0">
+              <a:rPr lang="en-US" sz="1100" dirty="0">
                 <a:solidFill>
                   <a:srgbClr val="FFFFFF"/>
                 </a:solidFill>
@@ -12579,7 +13181,7 @@
 </a:t>
             </a:r>
             <a:r>
-              <a:rPr lang="en-US" sz="1050" dirty="0">
+              <a:rPr lang="en-US" sz="1100" dirty="0">
                 <a:solidFill>
                   <a:srgbClr val="FDE68A"/>
                 </a:solidFill>
@@ -12590,7 +13192,7 @@
               <a:t>  reduction</a:t>
             </a:r>
             <a:r>
-              <a:rPr lang="en-US" sz="1050" dirty="0">
+              <a:rPr lang="en-US" sz="1100" dirty="0">
                 <a:solidFill>
                   <a:srgbClr val="FFFFFF"/>
                 </a:solidFill>
@@ -12602,7 +13204,7 @@
 </a:t>
             </a:r>
             <a:r>
-              <a:rPr lang="en-US" sz="1050" dirty="0">
+              <a:rPr lang="en-US" sz="1100" dirty="0">
                 <a:solidFill>
                   <a:srgbClr val="FDE68A"/>
                 </a:solidFill>
@@ -12613,7 +13215,7 @@
               <a:t>for </a:t>
             </a:r>
             <a:r>
-              <a:rPr lang="en-US" sz="1050" dirty="0">
+              <a:rPr lang="en-US" sz="1100" dirty="0">
                 <a:solidFill>
                   <a:srgbClr val="FFFFFF"/>
                 </a:solidFill>
@@ -12625,7 +13227,7 @@
 </a:t>
             </a:r>
             <a:r>
-              <a:rPr lang="en-US" sz="1050" dirty="0">
+              <a:rPr lang="en-US" sz="1100" dirty="0">
                 <a:solidFill>
                   <a:srgbClr val="888888"/>
                 </a:solidFill>
@@ -12639,7 +13241,7 @@
 </a:t>
             </a:r>
             <a:r>
-              <a:rPr lang="en-US" sz="1050" dirty="0">
+              <a:rPr lang="en-US" sz="1100" dirty="0">
                 <a:solidFill>
                   <a:srgbClr val="FCA5A5"/>
                 </a:solidFill>
@@ -12650,7 +13252,7 @@
               <a:t>MPI_Allreduce</a:t>
             </a:r>
             <a:r>
-              <a:rPr lang="en-US" sz="1050" dirty="0">
+              <a:rPr lang="en-US" sz="1100" dirty="0">
                 <a:solidFill>
                   <a:srgbClr val="FFFFFF"/>
                 </a:solidFill>
@@ -12663,7 +13265,7 @@
 </a:t>
             </a:r>
             <a:r>
-              <a:rPr lang="en-US" sz="1050" dirty="0">
+              <a:rPr lang="en-US" sz="1100" dirty="0">
                 <a:solidFill>
                   <a:srgbClr val="FCA5A5"/>
                 </a:solidFill>
@@ -12674,7 +13276,7 @@
               <a:t>MPI_Allreduce</a:t>
             </a:r>
             <a:r>
-              <a:rPr lang="en-US" sz="1050" dirty="0">
+              <a:rPr lang="en-US" sz="1100" dirty="0">
                 <a:solidFill>
                   <a:srgbClr val="FFFFFF"/>
                 </a:solidFill>
@@ -12684,14 +13286,14 @@
               </a:rPr>
               <a:t>(local_feat, feature_counts,</a:t>
             </a:r>
-            <a:endParaRPr lang="en-US" sz="1050" dirty="0"/>
+            <a:endParaRPr lang="en-US" sz="1100" dirty="0"/>
           </a:p>
           <a:p>
             <a:pPr marL="0" indent="0">
               <a:buNone/>
             </a:pPr>
             <a:r>
-              <a:rPr lang="en-US" sz="1050" dirty="0">
+              <a:rPr lang="en-US" sz="1100" dirty="0">
                 <a:solidFill>
                   <a:srgbClr val="FFFFFF"/>
                 </a:solidFill>
@@ -12701,7 +13303,7 @@
               </a:rPr>
               <a:t>  P, MPI_LONG_LONG, MPI_SUM, WORLD);</a:t>
             </a:r>
-            <a:endParaRPr lang="en-US" sz="1050" dirty="0"/>
+            <a:endParaRPr lang="en-US" sz="1100" dirty="0"/>
           </a:p>
         </p:txBody>
       </p:sp>
@@ -12827,7 +13429,7 @@
               <a:buChar char="•"/>
             </a:pPr>
             <a:r>
-              <a:rPr lang="en-US" sz="1600" dirty="0">
+              <a:rPr lang="en-US" dirty="0">
                 <a:solidFill>
                   <a:srgbClr val="1A1A1A"/>
                 </a:solidFill>
@@ -12845,7 +13447,7 @@
               <a:buChar char="•"/>
             </a:pPr>
             <a:r>
-              <a:rPr lang="en-US" sz="1600" dirty="0">
+              <a:rPr lang="en-US" dirty="0">
                 <a:solidFill>
                   <a:srgbClr val="1A1A1A"/>
                 </a:solidFill>
@@ -12855,7 +13457,7 @@
               </a:rPr>
               <a:t>Performance phase: each configuration run 5 times and averaged</a:t>
             </a:r>
-            <a:endParaRPr lang="en-US" sz="1600" dirty="0"/>
+            <a:endParaRPr lang="en-US" dirty="0"/>
           </a:p>
           <a:p>
             <a:pPr marL="342900" indent="-342900">
@@ -12874,7 +13476,7 @@
         </p:nvSpPr>
         <p:spPr>
           <a:xfrm>
-            <a:off x="228600" y="2060047"/>
+            <a:off x="228600" y="1945747"/>
             <a:ext cx="4114800" cy="228600"/>
           </a:xfrm>
           <a:prstGeom prst="rect">
@@ -12914,13 +13516,13 @@
           <p:nvPr>
             <p:extLst>
               <p:ext uri="{D42A27DB-BD31-4B8C-83A1-F6EECF244321}">
-                <p14:modId xmlns:p14="http://schemas.microsoft.com/office/powerpoint/2010/main" val="3743117273"/>
+                <p14:modId xmlns:p14="http://schemas.microsoft.com/office/powerpoint/2010/main" val="2804466758"/>
               </p:ext>
             </p:extLst>
           </p:nvPr>
         </p:nvGraphicFramePr>
         <p:xfrm>
-          <a:off x="228600" y="2316079"/>
+          <a:off x="228600" y="2201779"/>
           <a:ext cx="4114800" cy="2468880"/>
         </p:xfrm>
         <a:graphic>
@@ -13611,7 +14213,7 @@
         </p:nvSpPr>
         <p:spPr>
           <a:xfrm>
-            <a:off x="4800600" y="2060047"/>
+            <a:off x="4800600" y="1945747"/>
             <a:ext cx="4114800" cy="228600"/>
           </a:xfrm>
           <a:prstGeom prst="rect">
@@ -13651,13 +14253,13 @@
           <p:nvPr>
             <p:extLst>
               <p:ext uri="{D42A27DB-BD31-4B8C-83A1-F6EECF244321}">
-                <p14:modId xmlns:p14="http://schemas.microsoft.com/office/powerpoint/2010/main" val="1191545498"/>
+                <p14:modId xmlns:p14="http://schemas.microsoft.com/office/powerpoint/2010/main" val="3429568789"/>
               </p:ext>
             </p:extLst>
           </p:nvPr>
         </p:nvGraphicFramePr>
         <p:xfrm>
-          <a:off x="4800600" y="2316079"/>
+          <a:off x="4800600" y="2201779"/>
           <a:ext cx="4114800" cy="2468880"/>
         </p:xfrm>
         <a:graphic>

--- a/IT388_ParallelNaiveBayes_Final.pptx
+++ b/IT388_ParallelNaiveBayes_Final.pptx
@@ -137,7 +137,7 @@
 <file path=ppt/revisionInfo.xml><?xml version="1.0" encoding="utf-8"?>
 <p1510:revInfo xmlns:a="http://schemas.openxmlformats.org/drawingml/2006/main" xmlns:r="http://schemas.openxmlformats.org/officeDocument/2006/relationships" xmlns:p1510="http://schemas.microsoft.com/office/powerpoint/2015/10/main">
   <p1510:revLst>
-    <p1510:client id="{DA307683-F528-4545-98BE-6884735B25C7}" v="12" dt="2026-04-25T16:12:58.084"/>
+    <p1510:client id="{DA307683-F528-4545-98BE-6884735B25C7}" v="19" dt="2026-04-25T18:50:30.670"/>
   </p1510:revLst>
 </p1510:revInfo>
 </file>
@@ -147,16 +147,24 @@
   <pc:docChgLst>
     <pc:chgData name="Justin Hoffman" userId="40d7c2b8f9dba042" providerId="LiveId" clId="{98AE922D-438C-4FBD-AB6F-EAC5EAC34870}"/>
     <pc:docChg chg="undo custSel modSld">
-      <pc:chgData name="Justin Hoffman" userId="40d7c2b8f9dba042" providerId="LiveId" clId="{98AE922D-438C-4FBD-AB6F-EAC5EAC34870}" dt="2026-04-25T16:13:00.018" v="1132" actId="20577"/>
+      <pc:chgData name="Justin Hoffman" userId="40d7c2b8f9dba042" providerId="LiveId" clId="{98AE922D-438C-4FBD-AB6F-EAC5EAC34870}" dt="2026-04-25T18:56:08.623" v="2165" actId="113"/>
       <pc:docMkLst>
         <pc:docMk/>
       </pc:docMkLst>
       <pc:sldChg chg="modSp mod">
-        <pc:chgData name="Justin Hoffman" userId="40d7c2b8f9dba042" providerId="LiveId" clId="{98AE922D-438C-4FBD-AB6F-EAC5EAC34870}" dt="2026-04-25T06:05:05.540" v="564" actId="255"/>
+        <pc:chgData name="Justin Hoffman" userId="40d7c2b8f9dba042" providerId="LiveId" clId="{98AE922D-438C-4FBD-AB6F-EAC5EAC34870}" dt="2026-04-25T16:20:51.779" v="1140" actId="20577"/>
         <pc:sldMkLst>
           <pc:docMk/>
           <pc:sldMk cId="0" sldId="256"/>
         </pc:sldMkLst>
+        <pc:spChg chg="mod">
+          <ac:chgData name="Justin Hoffman" userId="40d7c2b8f9dba042" providerId="LiveId" clId="{98AE922D-438C-4FBD-AB6F-EAC5EAC34870}" dt="2026-04-25T16:20:51.779" v="1140" actId="20577"/>
+          <ac:spMkLst>
+            <pc:docMk/>
+            <pc:sldMk cId="0" sldId="256"/>
+            <ac:spMk id="3" creationId="{00000000-0000-0000-0000-000000000000}"/>
+          </ac:spMkLst>
+        </pc:spChg>
         <pc:spChg chg="mod">
           <ac:chgData name="Justin Hoffman" userId="40d7c2b8f9dba042" providerId="LiveId" clId="{98AE922D-438C-4FBD-AB6F-EAC5EAC34870}" dt="2026-04-25T06:04:17.782" v="561" actId="255"/>
           <ac:spMkLst>
@@ -210,6 +218,29 @@
             <pc:docMk/>
             <pc:sldMk cId="0" sldId="257"/>
             <ac:spMk id="8" creationId="{00000000-0000-0000-0000-000000000000}"/>
+          </ac:spMkLst>
+        </pc:spChg>
+      </pc:sldChg>
+      <pc:sldChg chg="addSp modSp mod">
+        <pc:chgData name="Justin Hoffman" userId="40d7c2b8f9dba042" providerId="LiveId" clId="{98AE922D-438C-4FBD-AB6F-EAC5EAC34870}" dt="2026-04-25T18:51:06.388" v="2108" actId="1076"/>
+        <pc:sldMkLst>
+          <pc:docMk/>
+          <pc:sldMk cId="0" sldId="259"/>
+        </pc:sldMkLst>
+        <pc:spChg chg="add">
+          <ac:chgData name="Justin Hoffman" userId="40d7c2b8f9dba042" providerId="LiveId" clId="{98AE922D-438C-4FBD-AB6F-EAC5EAC34870}" dt="2026-04-25T18:50:26.962" v="2102"/>
+          <ac:spMkLst>
+            <pc:docMk/>
+            <pc:sldMk cId="0" sldId="259"/>
+            <ac:spMk id="4" creationId="{A18D0721-0E12-1E8B-EFE0-7BB9F9B23878}"/>
+          </ac:spMkLst>
+        </pc:spChg>
+        <pc:spChg chg="mod">
+          <ac:chgData name="Justin Hoffman" userId="40d7c2b8f9dba042" providerId="LiveId" clId="{98AE922D-438C-4FBD-AB6F-EAC5EAC34870}" dt="2026-04-25T18:51:06.388" v="2108" actId="1076"/>
+          <ac:spMkLst>
+            <pc:docMk/>
+            <pc:sldMk cId="0" sldId="259"/>
+            <ac:spMk id="34" creationId="{00000000-0000-0000-0000-000000000000}"/>
           </ac:spMkLst>
         </pc:spChg>
       </pc:sldChg>
@@ -269,13 +300,21 @@
         </pc:spChg>
       </pc:sldChg>
       <pc:sldChg chg="addSp delSp modSp mod">
-        <pc:chgData name="Justin Hoffman" userId="40d7c2b8f9dba042" providerId="LiveId" clId="{98AE922D-438C-4FBD-AB6F-EAC5EAC34870}" dt="2026-04-25T03:22:11.851" v="178" actId="1035"/>
+        <pc:chgData name="Justin Hoffman" userId="40d7c2b8f9dba042" providerId="LiveId" clId="{98AE922D-438C-4FBD-AB6F-EAC5EAC34870}" dt="2026-04-25T18:56:08.623" v="2165" actId="113"/>
         <pc:sldMkLst>
           <pc:docMk/>
           <pc:sldMk cId="0" sldId="262"/>
         </pc:sldMkLst>
+        <pc:spChg chg="mod">
+          <ac:chgData name="Justin Hoffman" userId="40d7c2b8f9dba042" providerId="LiveId" clId="{98AE922D-438C-4FBD-AB6F-EAC5EAC34870}" dt="2026-04-25T18:56:08.623" v="2165" actId="113"/>
+          <ac:spMkLst>
+            <pc:docMk/>
+            <pc:sldMk cId="0" sldId="262"/>
+            <ac:spMk id="5" creationId="{00000000-0000-0000-0000-000000000000}"/>
+          </ac:spMkLst>
+        </pc:spChg>
         <pc:spChg chg="add del mod">
-          <ac:chgData name="Justin Hoffman" userId="40d7c2b8f9dba042" providerId="LiveId" clId="{98AE922D-438C-4FBD-AB6F-EAC5EAC34870}" dt="2026-04-25T03:21:06.043" v="129" actId="20577"/>
+          <ac:chgData name="Justin Hoffman" userId="40d7c2b8f9dba042" providerId="LiveId" clId="{98AE922D-438C-4FBD-AB6F-EAC5EAC34870}" dt="2026-04-25T17:59:35.885" v="1954" actId="20577"/>
           <ac:spMkLst>
             <pc:docMk/>
             <pc:sldMk cId="0" sldId="262"/>
@@ -291,7 +330,7 @@
           </ac:spMkLst>
         </pc:spChg>
         <pc:spChg chg="mod">
-          <ac:chgData name="Justin Hoffman" userId="40d7c2b8f9dba042" providerId="LiveId" clId="{98AE922D-438C-4FBD-AB6F-EAC5EAC34870}" dt="2026-04-25T03:22:11.851" v="178" actId="1035"/>
+          <ac:chgData name="Justin Hoffman" userId="40d7c2b8f9dba042" providerId="LiveId" clId="{98AE922D-438C-4FBD-AB6F-EAC5EAC34870}" dt="2026-04-25T17:59:41.838" v="1964" actId="20577"/>
           <ac:spMkLst>
             <pc:docMk/>
             <pc:sldMk cId="0" sldId="262"/>
@@ -424,12 +463,43 @@
           </ac:picMkLst>
         </pc:picChg>
       </pc:sldChg>
+      <pc:sldChg chg="modSp mod">
+        <pc:chgData name="Justin Hoffman" userId="40d7c2b8f9dba042" providerId="LiveId" clId="{98AE922D-438C-4FBD-AB6F-EAC5EAC34870}" dt="2026-04-25T18:00:58.921" v="1985" actId="20577"/>
+        <pc:sldMkLst>
+          <pc:docMk/>
+          <pc:sldMk cId="0" sldId="266"/>
+        </pc:sldMkLst>
+        <pc:spChg chg="mod">
+          <ac:chgData name="Justin Hoffman" userId="40d7c2b8f9dba042" providerId="LiveId" clId="{98AE922D-438C-4FBD-AB6F-EAC5EAC34870}" dt="2026-04-25T18:00:58.921" v="1985" actId="20577"/>
+          <ac:spMkLst>
+            <pc:docMk/>
+            <pc:sldMk cId="0" sldId="266"/>
+            <ac:spMk id="3" creationId="{00000000-0000-0000-0000-000000000000}"/>
+          </ac:spMkLst>
+        </pc:spChg>
+      </pc:sldChg>
       <pc:sldChg chg="addSp delSp modSp mod">
-        <pc:chgData name="Justin Hoffman" userId="40d7c2b8f9dba042" providerId="LiveId" clId="{98AE922D-438C-4FBD-AB6F-EAC5EAC34870}" dt="2026-04-25T03:25:51.287" v="212" actId="1036"/>
+        <pc:chgData name="Justin Hoffman" userId="40d7c2b8f9dba042" providerId="LiveId" clId="{98AE922D-438C-4FBD-AB6F-EAC5EAC34870}" dt="2026-04-25T18:01:10.052" v="1986" actId="20577"/>
         <pc:sldMkLst>
           <pc:docMk/>
           <pc:sldMk cId="0" sldId="267"/>
         </pc:sldMkLst>
+        <pc:spChg chg="mod">
+          <ac:chgData name="Justin Hoffman" userId="40d7c2b8f9dba042" providerId="LiveId" clId="{98AE922D-438C-4FBD-AB6F-EAC5EAC34870}" dt="2026-04-25T18:01:10.052" v="1986" actId="20577"/>
+          <ac:spMkLst>
+            <pc:docMk/>
+            <pc:sldMk cId="0" sldId="267"/>
+            <ac:spMk id="3" creationId="{00000000-0000-0000-0000-000000000000}"/>
+          </ac:spMkLst>
+        </pc:spChg>
+        <pc:spChg chg="mod">
+          <ac:chgData name="Justin Hoffman" userId="40d7c2b8f9dba042" providerId="LiveId" clId="{98AE922D-438C-4FBD-AB6F-EAC5EAC34870}" dt="2026-04-25T17:49:39.673" v="1363" actId="20577"/>
+          <ac:spMkLst>
+            <pc:docMk/>
+            <pc:sldMk cId="0" sldId="267"/>
+            <ac:spMk id="5" creationId="{00000000-0000-0000-0000-000000000000}"/>
+          </ac:spMkLst>
+        </pc:spChg>
         <pc:picChg chg="add mod">
           <ac:chgData name="Justin Hoffman" userId="40d7c2b8f9dba042" providerId="LiveId" clId="{98AE922D-438C-4FBD-AB6F-EAC5EAC34870}" dt="2026-04-25T03:25:51.287" v="212" actId="1036"/>
           <ac:picMkLst>
@@ -446,6 +516,68 @@
             <ac:picMk id="8" creationId="{203D6C79-AC04-3E12-630F-105467DA58CE}"/>
           </ac:picMkLst>
         </pc:picChg>
+      </pc:sldChg>
+      <pc:sldChg chg="modSp mod">
+        <pc:chgData name="Justin Hoffman" userId="40d7c2b8f9dba042" providerId="LiveId" clId="{98AE922D-438C-4FBD-AB6F-EAC5EAC34870}" dt="2026-04-25T18:09:19.748" v="1991" actId="20577"/>
+        <pc:sldMkLst>
+          <pc:docMk/>
+          <pc:sldMk cId="0" sldId="270"/>
+        </pc:sldMkLst>
+        <pc:spChg chg="mod">
+          <ac:chgData name="Justin Hoffman" userId="40d7c2b8f9dba042" providerId="LiveId" clId="{98AE922D-438C-4FBD-AB6F-EAC5EAC34870}" dt="2026-04-25T17:59:03.275" v="1940" actId="20577"/>
+          <ac:spMkLst>
+            <pc:docMk/>
+            <pc:sldMk cId="0" sldId="270"/>
+            <ac:spMk id="3" creationId="{00000000-0000-0000-0000-000000000000}"/>
+          </ac:spMkLst>
+        </pc:spChg>
+        <pc:spChg chg="mod">
+          <ac:chgData name="Justin Hoffman" userId="40d7c2b8f9dba042" providerId="LiveId" clId="{98AE922D-438C-4FBD-AB6F-EAC5EAC34870}" dt="2026-04-25T17:54:05.354" v="1661" actId="20577"/>
+          <ac:spMkLst>
+            <pc:docMk/>
+            <pc:sldMk cId="0" sldId="270"/>
+            <ac:spMk id="5" creationId="{00000000-0000-0000-0000-000000000000}"/>
+          </ac:spMkLst>
+        </pc:spChg>
+        <pc:spChg chg="mod">
+          <ac:chgData name="Justin Hoffman" userId="40d7c2b8f9dba042" providerId="LiveId" clId="{98AE922D-438C-4FBD-AB6F-EAC5EAC34870}" dt="2026-04-25T18:09:19.748" v="1991" actId="20577"/>
+          <ac:spMkLst>
+            <pc:docMk/>
+            <pc:sldMk cId="0" sldId="270"/>
+            <ac:spMk id="11" creationId="{00000000-0000-0000-0000-000000000000}"/>
+          </ac:spMkLst>
+        </pc:spChg>
+      </pc:sldChg>
+      <pc:sldChg chg="modSp mod">
+        <pc:chgData name="Justin Hoffman" userId="40d7c2b8f9dba042" providerId="LiveId" clId="{98AE922D-438C-4FBD-AB6F-EAC5EAC34870}" dt="2026-04-25T18:10:36.089" v="2045" actId="313"/>
+        <pc:sldMkLst>
+          <pc:docMk/>
+          <pc:sldMk cId="0" sldId="271"/>
+        </pc:sldMkLst>
+        <pc:spChg chg="mod">
+          <ac:chgData name="Justin Hoffman" userId="40d7c2b8f9dba042" providerId="LiveId" clId="{98AE922D-438C-4FBD-AB6F-EAC5EAC34870}" dt="2026-04-25T17:56:53.093" v="1736" actId="1036"/>
+          <ac:spMkLst>
+            <pc:docMk/>
+            <pc:sldMk cId="0" sldId="271"/>
+            <ac:spMk id="5" creationId="{00000000-0000-0000-0000-000000000000}"/>
+          </ac:spMkLst>
+        </pc:spChg>
+        <pc:spChg chg="mod">
+          <ac:chgData name="Justin Hoffman" userId="40d7c2b8f9dba042" providerId="LiveId" clId="{98AE922D-438C-4FBD-AB6F-EAC5EAC34870}" dt="2026-04-25T17:57:36.251" v="1871" actId="20577"/>
+          <ac:spMkLst>
+            <pc:docMk/>
+            <pc:sldMk cId="0" sldId="271"/>
+            <ac:spMk id="7" creationId="{00000000-0000-0000-0000-000000000000}"/>
+          </ac:spMkLst>
+        </pc:spChg>
+        <pc:spChg chg="mod">
+          <ac:chgData name="Justin Hoffman" userId="40d7c2b8f9dba042" providerId="LiveId" clId="{98AE922D-438C-4FBD-AB6F-EAC5EAC34870}" dt="2026-04-25T18:10:36.089" v="2045" actId="313"/>
+          <ac:spMkLst>
+            <pc:docMk/>
+            <pc:sldMk cId="0" sldId="271"/>
+            <ac:spMk id="11" creationId="{00000000-0000-0000-0000-000000000000}"/>
+          </ac:spMkLst>
+        </pc:spChg>
       </pc:sldChg>
       <pc:sldChg chg="addSp delSp modSp mod">
         <pc:chgData name="Justin Hoffman" userId="40d7c2b8f9dba042" providerId="LiveId" clId="{98AE922D-438C-4FBD-AB6F-EAC5EAC34870}" dt="2026-04-25T15:40:23.159" v="611" actId="20577"/>
@@ -702,6 +834,21 @@
             <pc:docMk/>
             <pc:sldMk cId="0" sldId="277"/>
             <ac:spMk id="17" creationId="{13A048EB-EEB4-4AAC-F0EC-0A57623D43CC}"/>
+          </ac:spMkLst>
+        </pc:spChg>
+      </pc:sldChg>
+      <pc:sldChg chg="modSp mod">
+        <pc:chgData name="Justin Hoffman" userId="40d7c2b8f9dba042" providerId="LiveId" clId="{98AE922D-438C-4FBD-AB6F-EAC5EAC34870}" dt="2026-04-25T18:08:24.777" v="1989" actId="20577"/>
+        <pc:sldMkLst>
+          <pc:docMk/>
+          <pc:sldMk cId="0" sldId="278"/>
+        </pc:sldMkLst>
+        <pc:spChg chg="mod">
+          <ac:chgData name="Justin Hoffman" userId="40d7c2b8f9dba042" providerId="LiveId" clId="{98AE922D-438C-4FBD-AB6F-EAC5EAC34870}" dt="2026-04-25T18:08:24.777" v="1989" actId="20577"/>
+          <ac:spMkLst>
+            <pc:docMk/>
+            <pc:sldMk cId="0" sldId="278"/>
+            <ac:spMk id="14" creationId="{BDBAD0DE-0E86-ADCA-291A-353AF0A62265}"/>
           </ac:spMkLst>
         </pc:spChg>
       </pc:sldChg>
@@ -1323,7 +1470,7 @@
                 <a:ea typeface="Calibri" pitchFamily="34" charset="-122"/>
                 <a:cs typeface="Calibri" pitchFamily="34" charset="-120"/>
               </a:rPr>
-              <a:t>9.11x</a:t>
+              <a:t>8.41x</a:t>
             </a:r>
             <a:endParaRPr lang="en-US" sz="2800" dirty="0"/>
           </a:p>
@@ -2211,7 +2358,7 @@
                 <a:ea typeface="Calibri" pitchFamily="34" charset="-122"/>
                 <a:cs typeface="Calibri" pitchFamily="34" charset="-120"/>
               </a:rPr>
-              <a:t>MPI Results</a:t>
+              <a:t>MPI Results (Signs of bottleneck)</a:t>
             </a:r>
             <a:endParaRPr lang="en-US" sz="3000" dirty="0"/>
           </a:p>
@@ -2407,7 +2554,7 @@
           <a:bodyPr/>
           <a:lstStyle/>
           <a:p>
-            <a:endParaRPr lang="en-US"/>
+            <a:endParaRPr lang="en-US" dirty="0"/>
           </a:p>
         </p:txBody>
       </p:sp>
@@ -2444,7 +2591,7 @@
                 <a:ea typeface="Calibri" pitchFamily="34" charset="-122"/>
                 <a:cs typeface="Calibri" pitchFamily="34" charset="-120"/>
               </a:rPr>
-              <a:t>Hybrid Results</a:t>
+              <a:t>Hybrid Results (Expanse thread bottleneck)</a:t>
             </a:r>
             <a:endParaRPr lang="en-US" sz="3000" dirty="0"/>
           </a:p>
@@ -2528,7 +2675,7 @@
                 <a:ea typeface="Calibri" pitchFamily="34" charset="-122"/>
                 <a:cs typeface="Calibri" pitchFamily="34" charset="-120"/>
               </a:rPr>
-              <a:t>Reaches 6.18x at 8p x 16t. The 16p x 16t corner collapses to 0.59x due to overhead.
+              <a:t>Reaches 6.18x at 8p x 16t. Little scaling as at 16p 1t or 1p 16t
 </a:t>
             </a:r>
             <a:r>
@@ -2551,7 +2698,7 @@
                 <a:ea typeface="Calibri" pitchFamily="34" charset="-122"/>
                 <a:cs typeface="Calibri" pitchFamily="34" charset="-120"/>
               </a:rPr>
-              <a:t>Peaks at 2.9x at 1p x 8t. Adding more processes hurts.</a:t>
+              <a:t>Peaks at 2.9x at 1p x 8t. However, is scaling by thread.</a:t>
             </a:r>
             <a:endParaRPr lang="en-US" sz="1600" dirty="0"/>
           </a:p>
@@ -3143,7 +3290,7 @@
                 <a:ea typeface="Calibri" pitchFamily="34" charset="-122"/>
                 <a:cs typeface="Calibri" pitchFamily="34" charset="-120"/>
               </a:rPr>
-              <a:t>Identifying the Bottleneck</a:t>
+              <a:t>Identifying the Bottlenecks</a:t>
             </a:r>
             <a:endParaRPr lang="en-US" sz="3000" dirty="0"/>
           </a:p>
@@ -3351,7 +3498,7 @@
                 <a:ea typeface="Calibri" pitchFamily="34" charset="-122"/>
                 <a:cs typeface="Calibri" pitchFamily="34" charset="-120"/>
               </a:rPr>
-              <a:t>OMP is unaffected</a:t>
+              <a:t>Hybrid threads bound on Expanse</a:t>
             </a:r>
             <a:r>
               <a:rPr lang="en-US" sz="1400" dirty="0">
@@ -3362,9 +3509,16 @@
                 <a:ea typeface="Calibri" pitchFamily="34" charset="-122"/>
                 <a:cs typeface="Calibri" pitchFamily="34" charset="-120"/>
               </a:rPr>
-              <a:t>  copy_rows uses memcpy within shared memory, no broadcast needed</a:t>
-            </a:r>
-            <a:endParaRPr lang="en-US" sz="1400" dirty="0"/>
+              <a:t> due to </a:t>
+            </a:r>
+            <a:r>
+              <a:rPr lang="en-US" sz="1400" dirty="0">
+                <a:solidFill>
+                  <a:srgbClr val="444444"/>
+                </a:solidFill>
+              </a:rPr>
+              <a:t>--map-by and --bind-to core flags, this prevented scaling</a:t>
+            </a:r>
           </a:p>
         </p:txBody>
       </p:sp>
@@ -3714,7 +3868,29 @@
                 <a:ea typeface="Courier New" pitchFamily="34" charset="-122"/>
                 <a:cs typeface="Courier New" pitchFamily="34" charset="-120"/>
               </a:rPr>
-              <a:t>// inside cross_validate — per fold:
+              <a:t>// inside </a:t>
+            </a:r>
+            <a:r>
+              <a:rPr lang="en-US" sz="1050" dirty="0" err="1">
+                <a:solidFill>
+                  <a:srgbClr val="888888"/>
+                </a:solidFill>
+                <a:latin typeface="Courier New" pitchFamily="34" charset="0"/>
+                <a:ea typeface="Courier New" pitchFamily="34" charset="-122"/>
+                <a:cs typeface="Courier New" pitchFamily="34" charset="-120"/>
+              </a:rPr>
+              <a:t>cross_validate</a:t>
+            </a:r>
+            <a:r>
+              <a:rPr lang="en-US" sz="1050" dirty="0">
+                <a:solidFill>
+                  <a:srgbClr val="888888"/>
+                </a:solidFill>
+                <a:latin typeface="Courier New" pitchFamily="34" charset="0"/>
+                <a:ea typeface="Courier New" pitchFamily="34" charset="-122"/>
+                <a:cs typeface="Courier New" pitchFamily="34" charset="-120"/>
+              </a:rPr>
+              <a:t> per fold:
 </a:t>
             </a:r>
             <a:r>
@@ -4052,51 +4228,6 @@
                 <a:ea typeface="Calibri" pitchFamily="34" charset="-122"/>
                 <a:cs typeface="Calibri" pitchFamily="34" charset="-120"/>
               </a:rPr>
-              <a:t>train_model</a:t>
-            </a:r>
-            <a:r>
-              <a:rPr lang="en-US" sz="1400" dirty="0">
-                <a:solidFill>
-                  <a:srgbClr val="444444"/>
-                </a:solidFill>
-                <a:latin typeface="Calibri" pitchFamily="34" charset="0"/>
-                <a:ea typeface="Calibri" pitchFamily="34" charset="-122"/>
-                <a:cs typeface="Calibri" pitchFamily="34" charset="-120"/>
-              </a:rPr>
-              <a:t>  passes NULL for </a:t>
-            </a:r>
-            <a:r>
-              <a:rPr lang="en-US" sz="1400" dirty="0" err="1">
-                <a:solidFill>
-                  <a:srgbClr val="444444"/>
-                </a:solidFill>
-                <a:latin typeface="Calibri" pitchFamily="34" charset="0"/>
-                <a:ea typeface="Calibri" pitchFamily="34" charset="-122"/>
-                <a:cs typeface="Calibri" pitchFamily="34" charset="-120"/>
-              </a:rPr>
-              <a:t>row_indices</a:t>
-            </a:r>
-            <a:r>
-              <a:rPr lang="en-US" sz="1400" dirty="0">
-                <a:solidFill>
-                  <a:srgbClr val="444444"/>
-                </a:solidFill>
-                <a:latin typeface="Calibri" pitchFamily="34" charset="0"/>
-                <a:ea typeface="Calibri" pitchFamily="34" charset="-122"/>
-                <a:cs typeface="Calibri" pitchFamily="34" charset="-120"/>
-              </a:rPr>
-              <a:t>
-</a:t>
-            </a:r>
-            <a:r>
-              <a:rPr lang="en-US" sz="1400" b="1" dirty="0" err="1">
-                <a:solidFill>
-                  <a:srgbClr val="0D3B6E"/>
-                </a:solidFill>
-                <a:latin typeface="Calibri" pitchFamily="34" charset="0"/>
-                <a:ea typeface="Calibri" pitchFamily="34" charset="-122"/>
-                <a:cs typeface="Calibri" pitchFamily="34" charset="-120"/>
-              </a:rPr>
               <a:t>cross_validate</a:t>
             </a:r>
             <a:r>
@@ -4112,6 +4243,17 @@
 </a:t>
             </a:r>
             <a:r>
+              <a:rPr lang="en-US" sz="1400" b="1" dirty="0" err="1">
+                <a:solidFill>
+                  <a:srgbClr val="0D3B6E"/>
+                </a:solidFill>
+                <a:latin typeface="Calibri" pitchFamily="34" charset="0"/>
+                <a:ea typeface="Calibri" pitchFamily="34" charset="-122"/>
+                <a:cs typeface="Calibri" pitchFamily="34" charset="-120"/>
+              </a:rPr>
+              <a:t>sbash</a:t>
+            </a:r>
+            <a:r>
               <a:rPr lang="en-US" sz="1400" b="1" dirty="0">
                 <a:solidFill>
                   <a:srgbClr val="0D3B6E"/>
@@ -4120,7 +4262,7 @@
                 <a:ea typeface="Calibri" pitchFamily="34" charset="-122"/>
                 <a:cs typeface="Calibri" pitchFamily="34" charset="-120"/>
               </a:rPr>
-              <a:t>main</a:t>
+              <a:t> </a:t>
             </a:r>
             <a:r>
               <a:rPr lang="en-US" sz="1400" dirty="0">
@@ -4131,9 +4273,32 @@
                 <a:ea typeface="Calibri" pitchFamily="34" charset="-122"/>
                 <a:cs typeface="Calibri" pitchFamily="34" charset="-120"/>
               </a:rPr>
-              <a:t> all call sites pass NULL for train/classify passes</a:t>
-            </a:r>
-            <a:endParaRPr lang="en-US" sz="1400" dirty="0"/>
+              <a:t>removed map and bind flags and included </a:t>
+            </a:r>
+            <a:r>
+              <a:rPr lang="en-US" sz="1400" dirty="0">
+                <a:solidFill>
+                  <a:srgbClr val="444444"/>
+                </a:solidFill>
+              </a:rPr>
+              <a:t>--bind-to none on every hybrid </a:t>
+            </a:r>
+            <a:r>
+              <a:rPr lang="en-US" sz="1400" dirty="0" err="1">
+                <a:solidFill>
+                  <a:srgbClr val="444444"/>
+                </a:solidFill>
+              </a:rPr>
+              <a:t>mpiexec</a:t>
+            </a:r>
+            <a:r>
+              <a:rPr lang="en-US" sz="1400" dirty="0">
+                <a:solidFill>
+                  <a:srgbClr val="444444"/>
+                </a:solidFill>
+              </a:rPr>
+              <a:t> call</a:t>
+            </a:r>
           </a:p>
         </p:txBody>
       </p:sp>
@@ -4215,7 +4380,7 @@
                 <a:ea typeface="Calibri" pitchFamily="34" charset="-122"/>
                 <a:cs typeface="Calibri" pitchFamily="34" charset="-120"/>
               </a:rPr>
-              <a:t>10 full-dataset broadcasts per CV run eliminated. Each rank builds fold splits locally.</a:t>
+              <a:t>10 full-dataset broadcasts per CV run eliminated. Hybrid and MPI scale properly.</a:t>
             </a:r>
             <a:endParaRPr lang="en-US" sz="1400" dirty="0"/>
           </a:p>
@@ -4467,7 +4632,7 @@
                 <a:ea typeface="Courier New" pitchFamily="34" charset="-122"/>
                 <a:cs typeface="Courier New" pitchFamily="34" charset="-120"/>
               </a:rPr>
-              <a:t>  // pass directly — no copy, no broadcast
+              <a:t>  // pass indices, no copy, no broadcast
 </a:t>
             </a:r>
             <a:r>
@@ -7182,7 +7347,7 @@
             </a:r>
             <a:r>
               <a:rPr lang="en-US" sz="1400" dirty="0"/>
-              <a:t> — File I/O Reference.</a:t>
+              <a:t>, File I/O Reference.</a:t>
             </a:r>
           </a:p>
           <a:p>
@@ -9543,7 +9708,7 @@
         </p:nvSpPr>
         <p:spPr>
           <a:xfrm>
-            <a:off x="4754880" y="2212848"/>
+            <a:off x="4745736" y="2112264"/>
             <a:ext cx="4114800" cy="2743200"/>
           </a:xfrm>
           <a:prstGeom prst="rect">
@@ -9563,18 +9728,14 @@
               <a:buSzPct val="100000"/>
               <a:buChar char="•"/>
             </a:pPr>
-            <a:r>
-              <a:rPr lang="en-US" sz="1600" dirty="0">
-                <a:solidFill>
-                  <a:srgbClr val="1A1A1A"/>
-                </a:solidFill>
-                <a:latin typeface="Calibri" pitchFamily="34" charset="0"/>
-                <a:ea typeface="Calibri" pitchFamily="34" charset="-122"/>
-                <a:cs typeface="Calibri" pitchFamily="34" charset="-120"/>
-              </a:rPr>
-              <a:t>Explicit row range: any partition scheme without code changes</a:t>
-            </a:r>
-            <a:endParaRPr lang="en-US" sz="1600" dirty="0"/>
+            <a:endParaRPr lang="en-US" sz="1600" dirty="0">
+              <a:solidFill>
+                <a:srgbClr val="1A1A1A"/>
+              </a:solidFill>
+              <a:latin typeface="Calibri" pitchFamily="34" charset="0"/>
+              <a:ea typeface="Calibri" pitchFamily="34" charset="-122"/>
+              <a:cs typeface="Calibri" pitchFamily="34" charset="-120"/>
+            </a:endParaRPr>
           </a:p>
           <a:p>
             <a:pPr marL="342900" indent="-342900">
@@ -9593,9 +9754,8 @@
                 <a:ea typeface="Calibri" pitchFamily="34" charset="-122"/>
                 <a:cs typeface="Calibri" pitchFamily="34" charset="-120"/>
               </a:rPr>
-              <a:t>Flat 1D probability array: cache-friendly and trivially reducible</a:t>
-            </a:r>
-            <a:endParaRPr lang="en-US" sz="1600" dirty="0"/>
+              <a:t>Rows are stored in flat 1D arrays for simple row-based access.</a:t>
+            </a:r>
           </a:p>
           <a:p>
             <a:pPr marL="342900" indent="-342900">
@@ -9614,9 +9774,8 @@
                 <a:ea typeface="Calibri" pitchFamily="34" charset="-122"/>
                 <a:cs typeface="Calibri" pitchFamily="34" charset="-120"/>
               </a:rPr>
-              <a:t>log_probs is read-only during classification: zero contention</a:t>
-            </a:r>
-            <a:endParaRPr lang="en-US" sz="1600" dirty="0"/>
+              <a:t>Each row can be trained or classified independently.</a:t>
+            </a:r>
           </a:p>
           <a:p>
             <a:pPr marL="342900" indent="-342900">
@@ -9635,7 +9794,47 @@
                 <a:ea typeface="Calibri" pitchFamily="34" charset="-122"/>
                 <a:cs typeface="Calibri" pitchFamily="34" charset="-120"/>
               </a:rPr>
-              <a:t>All three phases timed independently with omp_get_wtime()</a:t>
+              <a:t>Feature counts are flattened into one shared count array.</a:t>
+            </a:r>
+          </a:p>
+          <a:p>
+            <a:pPr marL="342900" indent="-342900">
+              <a:spcAft>
+                <a:spcPts val="500"/>
+              </a:spcAft>
+              <a:buSzPct val="100000"/>
+              <a:buChar char="•"/>
+            </a:pPr>
+            <a:r>
+              <a:rPr lang="en-US" sz="1600" dirty="0">
+                <a:solidFill>
+                  <a:srgbClr val="1A1A1A"/>
+                </a:solidFill>
+                <a:latin typeface="Calibri" pitchFamily="34" charset="0"/>
+                <a:ea typeface="Calibri" pitchFamily="34" charset="-122"/>
+                <a:cs typeface="Calibri" pitchFamily="34" charset="-120"/>
+              </a:rPr>
+              <a:t>Offsets map each feature/class/value combination to one index.</a:t>
+            </a:r>
+          </a:p>
+          <a:p>
+            <a:pPr marL="342900" indent="-342900">
+              <a:spcAft>
+                <a:spcPts val="500"/>
+              </a:spcAft>
+              <a:buSzPct val="100000"/>
+              <a:buChar char="•"/>
+            </a:pPr>
+            <a:r>
+              <a:rPr lang="en-US" sz="1600" dirty="0">
+                <a:solidFill>
+                  <a:srgbClr val="1A1A1A"/>
+                </a:solidFill>
+                <a:latin typeface="Calibri" pitchFamily="34" charset="0"/>
+                <a:ea typeface="Calibri" pitchFamily="34" charset="-122"/>
+                <a:cs typeface="Calibri" pitchFamily="34" charset="-120"/>
+              </a:rPr>
+              <a:t>Train, classify, and cross-validation can be timed separately.</a:t>
             </a:r>
             <a:endParaRPr lang="en-US" sz="1600" dirty="0"/>
           </a:p>
@@ -11873,17 +12072,69 @@
               <a:t>Rank 0</a:t>
             </a:r>
             <a:r>
+              <a:rPr lang="en-US" sz="1400" b="1" dirty="0">
+                <a:solidFill>
+                  <a:srgbClr val="444444"/>
+                </a:solidFill>
+                <a:latin typeface="Calibri" pitchFamily="34" charset="0"/>
+                <a:ea typeface="Calibri" pitchFamily="34" charset="-122"/>
+                <a:cs typeface="Calibri" pitchFamily="34" charset="-120"/>
+              </a:rPr>
+              <a:t> </a:t>
+            </a:r>
+            <a:r>
+              <a:rPr lang="en-US" sz="1400" b="1" dirty="0">
+                <a:solidFill>
+                  <a:srgbClr val="0D3B6E"/>
+                </a:solidFill>
+                <a:latin typeface="Calibri" pitchFamily="34" charset="0"/>
+                <a:ea typeface="Calibri" pitchFamily="34" charset="-122"/>
+                <a:cs typeface="Calibri" pitchFamily="34" charset="-120"/>
+              </a:rPr>
+              <a:t>reads all data</a:t>
+            </a:r>
+            <a:r>
               <a:rPr lang="en-US" sz="1400" dirty="0">
                 <a:solidFill>
+                  <a:srgbClr val="0D3B6E"/>
+                </a:solidFill>
+                <a:latin typeface="Calibri" pitchFamily="34" charset="0"/>
+                <a:ea typeface="Calibri" pitchFamily="34" charset="-122"/>
+                <a:cs typeface="Calibri" pitchFamily="34" charset="-120"/>
+              </a:rPr>
+              <a:t> </a:t>
+            </a:r>
+            <a:r>
+              <a:rPr lang="en-US" sz="1400" dirty="0" err="1">
+                <a:solidFill>
                   <a:srgbClr val="444444"/>
                 </a:solidFill>
                 <a:latin typeface="Calibri" pitchFamily="34" charset="0"/>
                 <a:ea typeface="Calibri" pitchFamily="34" charset="-122"/>
                 <a:cs typeface="Calibri" pitchFamily="34" charset="-120"/>
               </a:rPr>
-              <a:t>  reads all data, broadcasts full dataset via MPI_Bcast
-</a:t>
-            </a:r>
+              <a:t>MPI_Bcast</a:t>
+            </a:r>
+            <a:r>
+              <a:rPr lang="en-US" sz="1400" dirty="0">
+                <a:solidFill>
+                  <a:srgbClr val="444444"/>
+                </a:solidFill>
+                <a:latin typeface="Calibri" pitchFamily="34" charset="0"/>
+                <a:ea typeface="Calibri" pitchFamily="34" charset="-122"/>
+                <a:cs typeface="Calibri" pitchFamily="34" charset="-120"/>
+              </a:rPr>
+              <a:t> distributes to all ranks</a:t>
+            </a:r>
+          </a:p>
+          <a:p>
+            <a:pPr marL="285750" indent="-285750">
+              <a:spcAft>
+                <a:spcPts val="400"/>
+              </a:spcAft>
+              <a:buFont typeface="Arial" panose="020B0604020202020204" pitchFamily="34" charset="0"/>
+              <a:buChar char="•"/>
+            </a:pPr>
             <a:r>
               <a:rPr lang="en-US" sz="1400" b="1" dirty="0" err="1">
                 <a:solidFill>
@@ -11896,6 +12147,17 @@
               <a:t>accumulate_counts_range</a:t>
             </a:r>
             <a:r>
+              <a:rPr lang="en-US" sz="1400" b="1" dirty="0">
+                <a:solidFill>
+                  <a:srgbClr val="0D3B6E"/>
+                </a:solidFill>
+                <a:latin typeface="Calibri" pitchFamily="34" charset="0"/>
+                <a:ea typeface="Calibri" pitchFamily="34" charset="-122"/>
+                <a:cs typeface="Calibri" pitchFamily="34" charset="-120"/>
+              </a:rPr>
+              <a:t> </a:t>
+            </a:r>
+            <a:r>
               <a:rPr lang="en-US" sz="1400" dirty="0">
                 <a:solidFill>
                   <a:srgbClr val="444444"/>
@@ -11904,9 +12166,39 @@
                 <a:ea typeface="Calibri" pitchFamily="34" charset="-122"/>
                 <a:cs typeface="Calibri" pitchFamily="34" charset="-120"/>
               </a:rPr>
-              <a:t>  each rank processes its row slice, MPI_Allreduce sums counts
-</a:t>
-            </a:r>
+              <a:t>local rows, </a:t>
+            </a:r>
+            <a:r>
+              <a:rPr lang="en-US" sz="1400" dirty="0" err="1">
+                <a:solidFill>
+                  <a:srgbClr val="444444"/>
+                </a:solidFill>
+                <a:latin typeface="Calibri" pitchFamily="34" charset="0"/>
+                <a:ea typeface="Calibri" pitchFamily="34" charset="-122"/>
+                <a:cs typeface="Calibri" pitchFamily="34" charset="-120"/>
+              </a:rPr>
+              <a:t>MPI_Allreduce</a:t>
+            </a:r>
+            <a:r>
+              <a:rPr lang="en-US" sz="1400" dirty="0">
+                <a:solidFill>
+                  <a:srgbClr val="444444"/>
+                </a:solidFill>
+                <a:latin typeface="Calibri" pitchFamily="34" charset="0"/>
+                <a:ea typeface="Calibri" pitchFamily="34" charset="-122"/>
+                <a:cs typeface="Calibri" pitchFamily="34" charset="-120"/>
+              </a:rPr>
+              <a:t> sums counts</a:t>
+            </a:r>
+          </a:p>
+          <a:p>
+            <a:pPr marL="285750" indent="-285750">
+              <a:spcAft>
+                <a:spcPts val="400"/>
+              </a:spcAft>
+              <a:buFont typeface="Arial" panose="020B0604020202020204" pitchFamily="34" charset="0"/>
+              <a:buChar char="•"/>
+            </a:pPr>
             <a:r>
               <a:rPr lang="en-US" sz="1400" b="1" dirty="0" err="1">
                 <a:solidFill>
@@ -11919,6 +12211,17 @@
               <a:t>classify_dataset</a:t>
             </a:r>
             <a:r>
+              <a:rPr lang="en-US" sz="1400" b="1" dirty="0">
+                <a:solidFill>
+                  <a:srgbClr val="0D3B6E"/>
+                </a:solidFill>
+                <a:latin typeface="Calibri" pitchFamily="34" charset="0"/>
+                <a:ea typeface="Calibri" pitchFamily="34" charset="-122"/>
+                <a:cs typeface="Calibri" pitchFamily="34" charset="-120"/>
+              </a:rPr>
+              <a:t> </a:t>
+            </a:r>
+            <a:r>
               <a:rPr lang="en-US" sz="1400" dirty="0">
                 <a:solidFill>
                   <a:srgbClr val="444444"/>
@@ -11927,9 +12230,39 @@
                 <a:ea typeface="Calibri" pitchFamily="34" charset="-122"/>
                 <a:cs typeface="Calibri" pitchFamily="34" charset="-120"/>
               </a:rPr>
-              <a:t>  each rank classifies its slice, MPI_Allgatherv assembles predictions
-</a:t>
-            </a:r>
+              <a:t>local rows, </a:t>
+            </a:r>
+            <a:r>
+              <a:rPr lang="en-US" sz="1400" dirty="0" err="1">
+                <a:solidFill>
+                  <a:srgbClr val="444444"/>
+                </a:solidFill>
+                <a:latin typeface="Calibri" pitchFamily="34" charset="0"/>
+                <a:ea typeface="Calibri" pitchFamily="34" charset="-122"/>
+                <a:cs typeface="Calibri" pitchFamily="34" charset="-120"/>
+              </a:rPr>
+              <a:t>MPI_Allgatherv</a:t>
+            </a:r>
+            <a:r>
+              <a:rPr lang="en-US" sz="1400" dirty="0">
+                <a:solidFill>
+                  <a:srgbClr val="444444"/>
+                </a:solidFill>
+                <a:latin typeface="Calibri" pitchFamily="34" charset="0"/>
+                <a:ea typeface="Calibri" pitchFamily="34" charset="-122"/>
+                <a:cs typeface="Calibri" pitchFamily="34" charset="-120"/>
+              </a:rPr>
+              <a:t> collects predictions</a:t>
+            </a:r>
+          </a:p>
+          <a:p>
+            <a:pPr marL="285750" indent="-285750">
+              <a:spcAft>
+                <a:spcPts val="400"/>
+              </a:spcAft>
+              <a:buFont typeface="Arial" panose="020B0604020202020204" pitchFamily="34" charset="0"/>
+              <a:buChar char="•"/>
+            </a:pPr>
             <a:r>
               <a:rPr lang="en-US" sz="1400" b="1" dirty="0" err="1">
                 <a:solidFill>
@@ -11942,6 +12275,17 @@
               <a:t>build_truth</a:t>
             </a:r>
             <a:r>
+              <a:rPr lang="en-US" sz="1400" b="1" dirty="0">
+                <a:solidFill>
+                  <a:srgbClr val="0D3B6E"/>
+                </a:solidFill>
+                <a:latin typeface="Calibri" pitchFamily="34" charset="0"/>
+                <a:ea typeface="Calibri" pitchFamily="34" charset="-122"/>
+                <a:cs typeface="Calibri" pitchFamily="34" charset="-120"/>
+              </a:rPr>
+              <a:t> </a:t>
+            </a:r>
+            <a:r>
               <a:rPr lang="en-US" sz="1400" dirty="0">
                 <a:solidFill>
                   <a:srgbClr val="444444"/>
@@ -11950,9 +12294,39 @@
                 <a:ea typeface="Calibri" pitchFamily="34" charset="-122"/>
                 <a:cs typeface="Calibri" pitchFamily="34" charset="-120"/>
               </a:rPr>
-              <a:t>  each rank extracts its label slice, MPI_Allgatherv reassembles
-</a:t>
-            </a:r>
+              <a:t>local labels, </a:t>
+            </a:r>
+            <a:r>
+              <a:rPr lang="en-US" sz="1400" dirty="0" err="1">
+                <a:solidFill>
+                  <a:srgbClr val="444444"/>
+                </a:solidFill>
+                <a:latin typeface="Calibri" pitchFamily="34" charset="0"/>
+                <a:ea typeface="Calibri" pitchFamily="34" charset="-122"/>
+                <a:cs typeface="Calibri" pitchFamily="34" charset="-120"/>
+              </a:rPr>
+              <a:t>MPI_Allgatherv</a:t>
+            </a:r>
+            <a:r>
+              <a:rPr lang="en-US" sz="1400" dirty="0">
+                <a:solidFill>
+                  <a:srgbClr val="444444"/>
+                </a:solidFill>
+                <a:latin typeface="Calibri" pitchFamily="34" charset="0"/>
+                <a:ea typeface="Calibri" pitchFamily="34" charset="-122"/>
+                <a:cs typeface="Calibri" pitchFamily="34" charset="-120"/>
+              </a:rPr>
+              <a:t> collects truth</a:t>
+            </a:r>
+          </a:p>
+          <a:p>
+            <a:pPr marL="285750" indent="-285750">
+              <a:spcAft>
+                <a:spcPts val="400"/>
+              </a:spcAft>
+              <a:buFont typeface="Arial" panose="020B0604020202020204" pitchFamily="34" charset="0"/>
+              <a:buChar char="•"/>
+            </a:pPr>
             <a:r>
               <a:rPr lang="en-US" sz="1400" b="1" dirty="0" err="1">
                 <a:solidFill>
@@ -11965,6 +12339,17 @@
               <a:t>compute_accuracy</a:t>
             </a:r>
             <a:r>
+              <a:rPr lang="en-US" sz="1400" b="1" dirty="0">
+                <a:solidFill>
+                  <a:srgbClr val="0D3B6E"/>
+                </a:solidFill>
+                <a:latin typeface="Calibri" pitchFamily="34" charset="0"/>
+                <a:ea typeface="Calibri" pitchFamily="34" charset="-122"/>
+                <a:cs typeface="Calibri" pitchFamily="34" charset="-120"/>
+              </a:rPr>
+              <a:t> </a:t>
+            </a:r>
+            <a:r>
               <a:rPr lang="en-US" sz="1400" dirty="0">
                 <a:solidFill>
                   <a:srgbClr val="444444"/>
@@ -11973,9 +12358,39 @@
                 <a:ea typeface="Calibri" pitchFamily="34" charset="-122"/>
                 <a:cs typeface="Calibri" pitchFamily="34" charset="-120"/>
               </a:rPr>
-              <a:t>  local correct count summed with MPI_Allreduce
-</a:t>
-            </a:r>
+              <a:t>local counts, </a:t>
+            </a:r>
+            <a:r>
+              <a:rPr lang="en-US" sz="1400" dirty="0" err="1">
+                <a:solidFill>
+                  <a:srgbClr val="444444"/>
+                </a:solidFill>
+                <a:latin typeface="Calibri" pitchFamily="34" charset="0"/>
+                <a:ea typeface="Calibri" pitchFamily="34" charset="-122"/>
+                <a:cs typeface="Calibri" pitchFamily="34" charset="-120"/>
+              </a:rPr>
+              <a:t>MPI_Allreduce</a:t>
+            </a:r>
+            <a:r>
+              <a:rPr lang="en-US" sz="1400" dirty="0">
+                <a:solidFill>
+                  <a:srgbClr val="444444"/>
+                </a:solidFill>
+                <a:latin typeface="Calibri" pitchFamily="34" charset="0"/>
+                <a:ea typeface="Calibri" pitchFamily="34" charset="-122"/>
+                <a:cs typeface="Calibri" pitchFamily="34" charset="-120"/>
+              </a:rPr>
+              <a:t> sums total</a:t>
+            </a:r>
+          </a:p>
+          <a:p>
+            <a:pPr marL="285750" indent="-285750">
+              <a:spcAft>
+                <a:spcPts val="400"/>
+              </a:spcAft>
+              <a:buFont typeface="Arial" panose="020B0604020202020204" pitchFamily="34" charset="0"/>
+              <a:buChar char="•"/>
+            </a:pPr>
             <a:r>
               <a:rPr lang="en-US" sz="1400" b="1" dirty="0" err="1">
                 <a:solidFill>
@@ -11988,6 +12403,17 @@
               <a:t>copy_rows</a:t>
             </a:r>
             <a:r>
+              <a:rPr lang="en-US" sz="1400" b="1" dirty="0">
+                <a:solidFill>
+                  <a:srgbClr val="0D3B6E"/>
+                </a:solidFill>
+                <a:latin typeface="Calibri" pitchFamily="34" charset="0"/>
+                <a:ea typeface="Calibri" pitchFamily="34" charset="-122"/>
+                <a:cs typeface="Calibri" pitchFamily="34" charset="-120"/>
+              </a:rPr>
+              <a:t> </a:t>
+            </a:r>
+            <a:r>
               <a:rPr lang="en-US" sz="1400" dirty="0">
                 <a:solidFill>
                   <a:srgbClr val="444444"/>
@@ -11996,9 +12422,39 @@
                 <a:ea typeface="Calibri" pitchFamily="34" charset="-122"/>
                 <a:cs typeface="Calibri" pitchFamily="34" charset="-120"/>
               </a:rPr>
-              <a:t>  each rank copies its slice, MPI_Allgatherv reassembles full split
-</a:t>
-            </a:r>
+              <a:t>local split, </a:t>
+            </a:r>
+            <a:r>
+              <a:rPr lang="en-US" sz="1400" dirty="0" err="1">
+                <a:solidFill>
+                  <a:srgbClr val="444444"/>
+                </a:solidFill>
+                <a:latin typeface="Calibri" pitchFamily="34" charset="0"/>
+                <a:ea typeface="Calibri" pitchFamily="34" charset="-122"/>
+                <a:cs typeface="Calibri" pitchFamily="34" charset="-120"/>
+              </a:rPr>
+              <a:t>MPI_Allgatherv</a:t>
+            </a:r>
+            <a:r>
+              <a:rPr lang="en-US" sz="1400" dirty="0">
+                <a:solidFill>
+                  <a:srgbClr val="444444"/>
+                </a:solidFill>
+                <a:latin typeface="Calibri" pitchFamily="34" charset="0"/>
+                <a:ea typeface="Calibri" pitchFamily="34" charset="-122"/>
+                <a:cs typeface="Calibri" pitchFamily="34" charset="-120"/>
+              </a:rPr>
+              <a:t> rebuilds full dataset</a:t>
+            </a:r>
+          </a:p>
+          <a:p>
+            <a:pPr marL="285750" indent="-285750">
+              <a:spcAft>
+                <a:spcPts val="400"/>
+              </a:spcAft>
+              <a:buFont typeface="Arial" panose="020B0604020202020204" pitchFamily="34" charset="0"/>
+              <a:buChar char="•"/>
+            </a:pPr>
             <a:r>
               <a:rPr lang="en-US" sz="1400" b="1" dirty="0" err="1">
                 <a:solidFill>
@@ -12011,6 +12467,17 @@
               <a:t>confusion_matrix_binary</a:t>
             </a:r>
             <a:r>
+              <a:rPr lang="en-US" sz="1400" b="1" dirty="0">
+                <a:solidFill>
+                  <a:srgbClr val="0D3B6E"/>
+                </a:solidFill>
+                <a:latin typeface="Calibri" pitchFamily="34" charset="0"/>
+                <a:ea typeface="Calibri" pitchFamily="34" charset="-122"/>
+                <a:cs typeface="Calibri" pitchFamily="34" charset="-120"/>
+              </a:rPr>
+              <a:t> </a:t>
+            </a:r>
+            <a:r>
               <a:rPr lang="en-US" sz="1400" dirty="0">
                 <a:solidFill>
                   <a:srgbClr val="444444"/>
@@ -12019,7 +12486,29 @@
                 <a:ea typeface="Calibri" pitchFamily="34" charset="-122"/>
                 <a:cs typeface="Calibri" pitchFamily="34" charset="-120"/>
               </a:rPr>
-              <a:t>  local TN/FP/FN/TP counts reduced to rank 0 with MPI_Reduce</a:t>
+              <a:t>local TN/FP/FN/TP, </a:t>
+            </a:r>
+            <a:r>
+              <a:rPr lang="en-US" sz="1400" dirty="0" err="1">
+                <a:solidFill>
+                  <a:srgbClr val="444444"/>
+                </a:solidFill>
+                <a:latin typeface="Calibri" pitchFamily="34" charset="0"/>
+                <a:ea typeface="Calibri" pitchFamily="34" charset="-122"/>
+                <a:cs typeface="Calibri" pitchFamily="34" charset="-120"/>
+              </a:rPr>
+              <a:t>MPI_Reduce</a:t>
+            </a:r>
+            <a:r>
+              <a:rPr lang="en-US" sz="1400" dirty="0">
+                <a:solidFill>
+                  <a:srgbClr val="444444"/>
+                </a:solidFill>
+                <a:latin typeface="Calibri" pitchFamily="34" charset="0"/>
+                <a:ea typeface="Calibri" pitchFamily="34" charset="-122"/>
+                <a:cs typeface="Calibri" pitchFamily="34" charset="-120"/>
+              </a:rPr>
+              <a:t> to rank 0</a:t>
             </a:r>
             <a:endParaRPr lang="en-US" sz="1400" dirty="0"/>
           </a:p>
@@ -12088,6 +12577,17 @@
             <a:pPr marL="0" indent="0">
               <a:buNone/>
             </a:pPr>
+            <a:r>
+              <a:rPr lang="en-US" sz="1400" i="1" dirty="0">
+                <a:solidFill>
+                  <a:srgbClr val="888888"/>
+                </a:solidFill>
+                <a:latin typeface="Calibri" pitchFamily="34" charset="0"/>
+                <a:ea typeface="Calibri" pitchFamily="34" charset="-122"/>
+                <a:cs typeface="Calibri" pitchFamily="34" charset="-120"/>
+              </a:rPr>
+              <a:t>Function: </a:t>
+            </a:r>
             <a:r>
               <a:rPr lang="en-US" sz="1400" i="1" dirty="0" err="1">
                 <a:solidFill>
@@ -12303,6 +12803,17 @@
             <a:pPr marL="0" indent="0">
               <a:buNone/>
             </a:pPr>
+            <a:r>
+              <a:rPr lang="en-US" sz="1400" i="1" dirty="0">
+                <a:solidFill>
+                  <a:srgbClr val="888888"/>
+                </a:solidFill>
+                <a:latin typeface="Calibri" pitchFamily="34" charset="0"/>
+                <a:ea typeface="Calibri" pitchFamily="34" charset="-122"/>
+                <a:cs typeface="Calibri" pitchFamily="34" charset="-120"/>
+              </a:rPr>
+              <a:t>Function: </a:t>
+            </a:r>
             <a:r>
               <a:rPr lang="en-US" sz="1400" i="1" dirty="0" err="1">
                 <a:solidFill>

--- a/IT388_ParallelNaiveBayes_Final.pptx
+++ b/IT388_ParallelNaiveBayes_Final.pptx
@@ -126,17 +126,14 @@
       </a:defRPr>
     </a:lvl9pPr>
   </p:defaultTextStyle>
-  <p:extLst>
-    <p:ext uri="{EFAFB233-063F-42B5-8137-9DF3F51BA10A}">
-      <p15:sldGuideLst xmlns:p15="http://schemas.microsoft.com/office/powerpoint/2012/main"/>
-    </p:ext>
-  </p:extLst>
 </p:presentation>
 </file>
 
 <file path=ppt/revisionInfo.xml><?xml version="1.0" encoding="utf-8"?>
 <p1510:revInfo xmlns:a="http://schemas.openxmlformats.org/drawingml/2006/main" xmlns:r="http://schemas.openxmlformats.org/officeDocument/2006/relationships" xmlns:p1510="http://schemas.microsoft.com/office/powerpoint/2015/10/main">
   <p1510:revLst>
+    <p1510:client id="{24FB547D-38DD-62B0-72DA-33322D5400DC}" v="50" dt="2026-04-27T00:10:33.161"/>
+    <p1510:client id="{8198BBC6-6436-96EA-C637-BA50008E9BAB}" v="50" dt="2026-04-26T19:12:44.415"/>
     <p1510:client id="{DA307683-F528-4545-98BE-6884735B25C7}" v="19" dt="2026-04-25T18:50:30.670"/>
   </p1510:revLst>
 </p1510:revInfo>
@@ -227,14 +224,6 @@
           <pc:docMk/>
           <pc:sldMk cId="0" sldId="259"/>
         </pc:sldMkLst>
-        <pc:spChg chg="add">
-          <ac:chgData name="Justin Hoffman" userId="40d7c2b8f9dba042" providerId="LiveId" clId="{98AE922D-438C-4FBD-AB6F-EAC5EAC34870}" dt="2026-04-25T18:50:26.962" v="2102"/>
-          <ac:spMkLst>
-            <pc:docMk/>
-            <pc:sldMk cId="0" sldId="259"/>
-            <ac:spMk id="4" creationId="{A18D0721-0E12-1E8B-EFE0-7BB9F9B23878}"/>
-          </ac:spMkLst>
-        </pc:spChg>
         <pc:spChg chg="mod">
           <ac:chgData name="Justin Hoffman" userId="40d7c2b8f9dba042" providerId="LiveId" clId="{98AE922D-438C-4FBD-AB6F-EAC5EAC34870}" dt="2026-04-25T18:51:06.388" v="2108" actId="1076"/>
           <ac:spMkLst>
@@ -438,28 +427,12 @@
             <ac:spMk id="5" creationId="{00000000-0000-0000-0000-000000000000}"/>
           </ac:spMkLst>
         </pc:spChg>
-        <pc:picChg chg="add del mod">
-          <ac:chgData name="Justin Hoffman" userId="40d7c2b8f9dba042" providerId="LiveId" clId="{98AE922D-438C-4FBD-AB6F-EAC5EAC34870}" dt="2026-04-25T15:37:45.291" v="565" actId="478"/>
-          <ac:picMkLst>
-            <pc:docMk/>
-            <pc:sldMk cId="0" sldId="265"/>
-            <ac:picMk id="7" creationId="{9A33AA82-E404-BD11-D965-434A29583627}"/>
-          </ac:picMkLst>
-        </pc:picChg>
         <pc:picChg chg="add mod">
           <ac:chgData name="Justin Hoffman" userId="40d7c2b8f9dba042" providerId="LiveId" clId="{98AE922D-438C-4FBD-AB6F-EAC5EAC34870}" dt="2026-04-25T15:38:48.811" v="582" actId="1036"/>
           <ac:picMkLst>
             <pc:docMk/>
             <pc:sldMk cId="0" sldId="265"/>
             <ac:picMk id="8" creationId="{9743B7A9-4CED-8A57-1729-02A735DD604C}"/>
-          </ac:picMkLst>
-        </pc:picChg>
-        <pc:picChg chg="del">
-          <ac:chgData name="Justin Hoffman" userId="40d7c2b8f9dba042" providerId="LiveId" clId="{98AE922D-438C-4FBD-AB6F-EAC5EAC34870}" dt="2026-04-25T05:44:48.433" v="229" actId="478"/>
-          <ac:picMkLst>
-            <pc:docMk/>
-            <pc:sldMk cId="0" sldId="265"/>
-            <ac:picMk id="8" creationId="{C17DBEBD-5221-C0D1-E014-31084F4E31E8}"/>
           </ac:picMkLst>
         </pc:picChg>
       </pc:sldChg>
@@ -506,14 +479,6 @@
             <pc:docMk/>
             <pc:sldMk cId="0" sldId="267"/>
             <ac:picMk id="7" creationId="{724C75C2-3116-4E8F-379A-10ED380FD106}"/>
-          </ac:picMkLst>
-        </pc:picChg>
-        <pc:picChg chg="del">
-          <ac:chgData name="Justin Hoffman" userId="40d7c2b8f9dba042" providerId="LiveId" clId="{98AE922D-438C-4FBD-AB6F-EAC5EAC34870}" dt="2026-04-25T03:24:58.339" v="195" actId="478"/>
-          <ac:picMkLst>
-            <pc:docMk/>
-            <pc:sldMk cId="0" sldId="267"/>
-            <ac:picMk id="8" creationId="{203D6C79-AC04-3E12-630F-105467DA58CE}"/>
           </ac:picMkLst>
         </pc:picChg>
       </pc:sldChg>
@@ -593,22 +558,6 @@
             <ac:spMk id="5" creationId="{00000000-0000-0000-0000-000000000000}"/>
           </ac:spMkLst>
         </pc:spChg>
-        <pc:picChg chg="add del mod">
-          <ac:chgData name="Justin Hoffman" userId="40d7c2b8f9dba042" providerId="LiveId" clId="{98AE922D-438C-4FBD-AB6F-EAC5EAC34870}" dt="2026-04-25T15:39:32.142" v="587" actId="478"/>
-          <ac:picMkLst>
-            <pc:docMk/>
-            <pc:sldMk cId="0" sldId="272"/>
-            <ac:picMk id="7" creationId="{083752D7-754F-A049-0247-EBA9365B10BC}"/>
-          </ac:picMkLst>
-        </pc:picChg>
-        <pc:picChg chg="del">
-          <ac:chgData name="Justin Hoffman" userId="40d7c2b8f9dba042" providerId="LiveId" clId="{98AE922D-438C-4FBD-AB6F-EAC5EAC34870}" dt="2026-04-25T05:49:40.020" v="346" actId="478"/>
-          <ac:picMkLst>
-            <pc:docMk/>
-            <pc:sldMk cId="0" sldId="272"/>
-            <ac:picMk id="8" creationId="{99ECF0B6-053B-E4DF-ED2F-D6A5BD36A68F}"/>
-          </ac:picMkLst>
-        </pc:picChg>
         <pc:picChg chg="add mod">
           <ac:chgData name="Justin Hoffman" userId="40d7c2b8f9dba042" providerId="LiveId" clId="{98AE922D-438C-4FBD-AB6F-EAC5EAC34870}" dt="2026-04-25T15:40:03.356" v="603" actId="1036"/>
           <ac:picMkLst>
@@ -632,28 +581,12 @@
             <ac:spMk id="5" creationId="{00000000-0000-0000-0000-000000000000}"/>
           </ac:spMkLst>
         </pc:spChg>
-        <pc:picChg chg="add del mod">
-          <ac:chgData name="Justin Hoffman" userId="40d7c2b8f9dba042" providerId="LiveId" clId="{98AE922D-438C-4FBD-AB6F-EAC5EAC34870}" dt="2026-04-25T15:40:28.825" v="612" actId="478"/>
-          <ac:picMkLst>
-            <pc:docMk/>
-            <pc:sldMk cId="0" sldId="273"/>
-            <ac:picMk id="7" creationId="{65775446-E8F4-0502-500D-C4A798DC643A}"/>
-          </ac:picMkLst>
-        </pc:picChg>
         <pc:picChg chg="add mod">
           <ac:chgData name="Justin Hoffman" userId="40d7c2b8f9dba042" providerId="LiveId" clId="{98AE922D-438C-4FBD-AB6F-EAC5EAC34870}" dt="2026-04-25T15:41:07.119" v="627" actId="1036"/>
           <ac:picMkLst>
             <pc:docMk/>
             <pc:sldMk cId="0" sldId="273"/>
             <ac:picMk id="8" creationId="{3CF88791-8208-521D-4CB7-33B57ECE7FC1}"/>
-          </ac:picMkLst>
-        </pc:picChg>
-        <pc:picChg chg="del">
-          <ac:chgData name="Justin Hoffman" userId="40d7c2b8f9dba042" providerId="LiveId" clId="{98AE922D-438C-4FBD-AB6F-EAC5EAC34870}" dt="2026-04-25T05:50:35.808" v="369" actId="478"/>
-          <ac:picMkLst>
-            <pc:docMk/>
-            <pc:sldMk cId="0" sldId="273"/>
-            <ac:picMk id="8" creationId="{7FBC32C6-F401-1DDE-997E-2D9C2EEB874D}"/>
           </ac:picMkLst>
         </pc:picChg>
       </pc:sldChg>
@@ -671,22 +604,6 @@
             <ac:spMk id="5" creationId="{00000000-0000-0000-0000-000000000000}"/>
           </ac:spMkLst>
         </pc:spChg>
-        <pc:picChg chg="add del mod">
-          <ac:chgData name="Justin Hoffman" userId="40d7c2b8f9dba042" providerId="LiveId" clId="{98AE922D-438C-4FBD-AB6F-EAC5EAC34870}" dt="2026-04-25T15:42:06.196" v="638" actId="478"/>
-          <ac:picMkLst>
-            <pc:docMk/>
-            <pc:sldMk cId="0" sldId="274"/>
-            <ac:picMk id="7" creationId="{E069DFBF-5372-9C63-1447-698621E56998}"/>
-          </ac:picMkLst>
-        </pc:picChg>
-        <pc:picChg chg="del">
-          <ac:chgData name="Justin Hoffman" userId="40d7c2b8f9dba042" providerId="LiveId" clId="{98AE922D-438C-4FBD-AB6F-EAC5EAC34870}" dt="2026-04-25T05:53:49.332" v="407" actId="478"/>
-          <ac:picMkLst>
-            <pc:docMk/>
-            <pc:sldMk cId="0" sldId="274"/>
-            <ac:picMk id="8" creationId="{26A6BC54-E04E-FD32-3BEC-14DADFF9E005}"/>
-          </ac:picMkLst>
-        </pc:picChg>
         <pc:picChg chg="add mod">
           <ac:chgData name="Justin Hoffman" userId="40d7c2b8f9dba042" providerId="LiveId" clId="{98AE922D-438C-4FBD-AB6F-EAC5EAC34870}" dt="2026-04-25T15:42:34.483" v="654" actId="1036"/>
           <ac:picMkLst>
@@ -710,28 +627,12 @@
             <ac:spMk id="5" creationId="{00000000-0000-0000-0000-000000000000}"/>
           </ac:spMkLst>
         </pc:spChg>
-        <pc:picChg chg="add del mod">
-          <ac:chgData name="Justin Hoffman" userId="40d7c2b8f9dba042" providerId="LiveId" clId="{98AE922D-438C-4FBD-AB6F-EAC5EAC34870}" dt="2026-04-25T15:42:55.257" v="655" actId="478"/>
-          <ac:picMkLst>
-            <pc:docMk/>
-            <pc:sldMk cId="0" sldId="275"/>
-            <ac:picMk id="7" creationId="{F9B89590-A228-D295-EB5D-16DAA53BCE49}"/>
-          </ac:picMkLst>
-        </pc:picChg>
         <pc:picChg chg="add mod">
           <ac:chgData name="Justin Hoffman" userId="40d7c2b8f9dba042" providerId="LiveId" clId="{98AE922D-438C-4FBD-AB6F-EAC5EAC34870}" dt="2026-04-25T15:43:27.612" v="679" actId="1036"/>
           <ac:picMkLst>
             <pc:docMk/>
             <pc:sldMk cId="0" sldId="275"/>
             <ac:picMk id="8" creationId="{88C5AA48-6CB4-FC70-7292-9F25A73D566F}"/>
-          </ac:picMkLst>
-        </pc:picChg>
-        <pc:picChg chg="del">
-          <ac:chgData name="Justin Hoffman" userId="40d7c2b8f9dba042" providerId="LiveId" clId="{98AE922D-438C-4FBD-AB6F-EAC5EAC34870}" dt="2026-04-25T05:54:33.842" v="426" actId="478"/>
-          <ac:picMkLst>
-            <pc:docMk/>
-            <pc:sldMk cId="0" sldId="275"/>
-            <ac:picMk id="8" creationId="{C2417921-B87D-1463-BEA4-B2F6BE87ED1C}"/>
           </ac:picMkLst>
         </pc:picChg>
       </pc:sldChg>
@@ -749,30 +650,6 @@
             <ac:spMk id="5" creationId="{00000000-0000-0000-0000-000000000000}"/>
           </ac:spMkLst>
         </pc:spChg>
-        <pc:picChg chg="add del mod">
-          <ac:chgData name="Justin Hoffman" userId="40d7c2b8f9dba042" providerId="LiveId" clId="{98AE922D-438C-4FBD-AB6F-EAC5EAC34870}" dt="2026-04-25T15:46:12.037" v="856" actId="478"/>
-          <ac:picMkLst>
-            <pc:docMk/>
-            <pc:sldMk cId="0" sldId="276"/>
-            <ac:picMk id="7" creationId="{93FC38FF-76EF-28DD-4412-45A940D6F962}"/>
-          </ac:picMkLst>
-        </pc:picChg>
-        <pc:picChg chg="add del mod">
-          <ac:chgData name="Justin Hoffman" userId="40d7c2b8f9dba042" providerId="LiveId" clId="{98AE922D-438C-4FBD-AB6F-EAC5EAC34870}" dt="2026-04-25T15:47:22.203" v="874" actId="478"/>
-          <ac:picMkLst>
-            <pc:docMk/>
-            <pc:sldMk cId="0" sldId="276"/>
-            <ac:picMk id="8" creationId="{435E1758-73DB-E68E-6017-FA00C9AE262B}"/>
-          </ac:picMkLst>
-        </pc:picChg>
-        <pc:picChg chg="del">
-          <ac:chgData name="Justin Hoffman" userId="40d7c2b8f9dba042" providerId="LiveId" clId="{98AE922D-438C-4FBD-AB6F-EAC5EAC34870}" dt="2026-04-25T05:57:09.814" v="464" actId="478"/>
-          <ac:picMkLst>
-            <pc:docMk/>
-            <pc:sldMk cId="0" sldId="276"/>
-            <ac:picMk id="8" creationId="{591D2A93-C132-774C-24E3-8E4C73C2DC2C}"/>
-          </ac:picMkLst>
-        </pc:picChg>
         <pc:picChg chg="add mod">
           <ac:chgData name="Justin Hoffman" userId="40d7c2b8f9dba042" providerId="LiveId" clId="{98AE922D-438C-4FBD-AB6F-EAC5EAC34870}" dt="2026-04-25T15:48:01.419" v="890" actId="1036"/>
           <ac:picMkLst>
@@ -820,22 +697,6 @@
             <ac:spMk id="15" creationId="{00000000-0000-0000-0000-000000000000}"/>
           </ac:spMkLst>
         </pc:spChg>
-        <pc:spChg chg="add">
-          <ac:chgData name="Justin Hoffman" userId="40d7c2b8f9dba042" providerId="LiveId" clId="{98AE922D-438C-4FBD-AB6F-EAC5EAC34870}" dt="2026-04-25T16:03:35.541" v="1033"/>
-          <ac:spMkLst>
-            <pc:docMk/>
-            <pc:sldMk cId="0" sldId="277"/>
-            <ac:spMk id="16" creationId="{37F4185E-2CE2-A867-5B5D-8DE793910520}"/>
-          </ac:spMkLst>
-        </pc:spChg>
-        <pc:spChg chg="add">
-          <ac:chgData name="Justin Hoffman" userId="40d7c2b8f9dba042" providerId="LiveId" clId="{98AE922D-438C-4FBD-AB6F-EAC5EAC34870}" dt="2026-04-25T16:10:19.957" v="1115"/>
-          <ac:spMkLst>
-            <pc:docMk/>
-            <pc:sldMk cId="0" sldId="277"/>
-            <ac:spMk id="17" creationId="{13A048EB-EEB4-4AAC-F0EC-0A57623D43CC}"/>
-          </ac:spMkLst>
-        </pc:spChg>
       </pc:sldChg>
       <pc:sldChg chg="modSp mod">
         <pc:chgData name="Justin Hoffman" userId="40d7c2b8f9dba042" providerId="LiveId" clId="{98AE922D-438C-4FBD-AB6F-EAC5EAC34870}" dt="2026-04-25T18:08:24.777" v="1989" actId="20577"/>
@@ -849,6 +710,153 @@
             <pc:docMk/>
             <pc:sldMk cId="0" sldId="278"/>
             <ac:spMk id="14" creationId="{BDBAD0DE-0E86-ADCA-291A-353AF0A62265}"/>
+          </ac:spMkLst>
+        </pc:spChg>
+      </pc:sldChg>
+    </pc:docChg>
+  </pc:docChgLst>
+  <pc:docChgLst>
+    <pc:chgData name="Hoffman, Justin" userId="S::jrhoff2@ilstu.edu::016db39b-9d3a-45ee-8853-cfee94747a02" providerId="AD" clId="Web-{8198BBC6-6436-96EA-C637-BA50008E9BAB}"/>
+    <pc:docChg chg="modSld">
+      <pc:chgData name="Hoffman, Justin" userId="S::jrhoff2@ilstu.edu::016db39b-9d3a-45ee-8853-cfee94747a02" providerId="AD" clId="Web-{8198BBC6-6436-96EA-C637-BA50008E9BAB}" dt="2026-04-26T19:12:44.415" v="41" actId="20577"/>
+      <pc:docMkLst>
+        <pc:docMk/>
+      </pc:docMkLst>
+      <pc:sldChg chg="modSp">
+        <pc:chgData name="Hoffman, Justin" userId="S::jrhoff2@ilstu.edu::016db39b-9d3a-45ee-8853-cfee94747a02" providerId="AD" clId="Web-{8198BBC6-6436-96EA-C637-BA50008E9BAB}" dt="2026-04-26T18:47:31.826" v="38" actId="20577"/>
+        <pc:sldMkLst>
+          <pc:docMk/>
+          <pc:sldMk cId="0" sldId="256"/>
+        </pc:sldMkLst>
+        <pc:spChg chg="mod">
+          <ac:chgData name="Hoffman, Justin" userId="S::jrhoff2@ilstu.edu::016db39b-9d3a-45ee-8853-cfee94747a02" providerId="AD" clId="Web-{8198BBC6-6436-96EA-C637-BA50008E9BAB}" dt="2026-04-26T18:47:31.826" v="38" actId="20577"/>
+          <ac:spMkLst>
+            <pc:docMk/>
+            <pc:sldMk cId="0" sldId="256"/>
+            <ac:spMk id="17" creationId="{00000000-0000-0000-0000-000000000000}"/>
+          </ac:spMkLst>
+        </pc:spChg>
+      </pc:sldChg>
+      <pc:sldChg chg="modSp">
+        <pc:chgData name="Hoffman, Justin" userId="S::jrhoff2@ilstu.edu::016db39b-9d3a-45ee-8853-cfee94747a02" providerId="AD" clId="Web-{8198BBC6-6436-96EA-C637-BA50008E9BAB}" dt="2026-04-26T18:21:00.299" v="26" actId="20577"/>
+        <pc:sldMkLst>
+          <pc:docMk/>
+          <pc:sldMk cId="0" sldId="267"/>
+        </pc:sldMkLst>
+        <pc:spChg chg="mod">
+          <ac:chgData name="Hoffman, Justin" userId="S::jrhoff2@ilstu.edu::016db39b-9d3a-45ee-8853-cfee94747a02" providerId="AD" clId="Web-{8198BBC6-6436-96EA-C637-BA50008E9BAB}" dt="2026-04-26T18:21:00.299" v="26" actId="20577"/>
+          <ac:spMkLst>
+            <pc:docMk/>
+            <pc:sldMk cId="0" sldId="267"/>
+            <ac:spMk id="5" creationId="{00000000-0000-0000-0000-000000000000}"/>
+          </ac:spMkLst>
+        </pc:spChg>
+      </pc:sldChg>
+      <pc:sldChg chg="modSp">
+        <pc:chgData name="Hoffman, Justin" userId="S::jrhoff2@ilstu.edu::016db39b-9d3a-45ee-8853-cfee94747a02" providerId="AD" clId="Web-{8198BBC6-6436-96EA-C637-BA50008E9BAB}" dt="2026-04-26T19:12:44.415" v="41" actId="20577"/>
+        <pc:sldMkLst>
+          <pc:docMk/>
+          <pc:sldMk cId="0" sldId="270"/>
+        </pc:sldMkLst>
+        <pc:spChg chg="mod">
+          <ac:chgData name="Hoffman, Justin" userId="S::jrhoff2@ilstu.edu::016db39b-9d3a-45ee-8853-cfee94747a02" providerId="AD" clId="Web-{8198BBC6-6436-96EA-C637-BA50008E9BAB}" dt="2026-04-26T19:12:44.415" v="41" actId="20577"/>
+          <ac:spMkLst>
+            <pc:docMk/>
+            <pc:sldMk cId="0" sldId="270"/>
+            <ac:spMk id="5" creationId="{00000000-0000-0000-0000-000000000000}"/>
+          </ac:spMkLst>
+        </pc:spChg>
+      </pc:sldChg>
+      <pc:sldChg chg="modSp">
+        <pc:chgData name="Hoffman, Justin" userId="S::jrhoff2@ilstu.edu::016db39b-9d3a-45ee-8853-cfee94747a02" providerId="AD" clId="Web-{8198BBC6-6436-96EA-C637-BA50008E9BAB}" dt="2026-04-26T18:22:51.930" v="32" actId="20577"/>
+        <pc:sldMkLst>
+          <pc:docMk/>
+          <pc:sldMk cId="0" sldId="278"/>
+        </pc:sldMkLst>
+        <pc:spChg chg="mod">
+          <ac:chgData name="Hoffman, Justin" userId="S::jrhoff2@ilstu.edu::016db39b-9d3a-45ee-8853-cfee94747a02" providerId="AD" clId="Web-{8198BBC6-6436-96EA-C637-BA50008E9BAB}" dt="2026-04-26T18:22:51.930" v="32" actId="20577"/>
+          <ac:spMkLst>
+            <pc:docMk/>
+            <pc:sldMk cId="0" sldId="278"/>
+            <ac:spMk id="14" creationId="{BDBAD0DE-0E86-ADCA-291A-353AF0A62265}"/>
+          </ac:spMkLst>
+        </pc:spChg>
+      </pc:sldChg>
+    </pc:docChg>
+  </pc:docChgLst>
+  <pc:docChgLst>
+    <pc:chgData name="Hoffman, Justin" userId="S::jrhoff2@ilstu.edu::016db39b-9d3a-45ee-8853-cfee94747a02" providerId="AD" clId="Web-{24FB547D-38DD-62B0-72DA-33322D5400DC}"/>
+    <pc:docChg chg="modSld">
+      <pc:chgData name="Hoffman, Justin" userId="S::jrhoff2@ilstu.edu::016db39b-9d3a-45ee-8853-cfee94747a02" providerId="AD" clId="Web-{24FB547D-38DD-62B0-72DA-33322D5400DC}" dt="2026-04-27T00:10:33.161" v="49" actId="20577"/>
+      <pc:docMkLst>
+        <pc:docMk/>
+      </pc:docMkLst>
+      <pc:sldChg chg="modSp">
+        <pc:chgData name="Hoffman, Justin" userId="S::jrhoff2@ilstu.edu::016db39b-9d3a-45ee-8853-cfee94747a02" providerId="AD" clId="Web-{24FB547D-38DD-62B0-72DA-33322D5400DC}" dt="2026-04-27T00:07:55.005" v="15"/>
+        <pc:sldMkLst>
+          <pc:docMk/>
+          <pc:sldMk cId="0" sldId="264"/>
+        </pc:sldMkLst>
+        <pc:graphicFrameChg chg="mod modGraphic">
+          <ac:chgData name="Hoffman, Justin" userId="S::jrhoff2@ilstu.edu::016db39b-9d3a-45ee-8853-cfee94747a02" providerId="AD" clId="Web-{24FB547D-38DD-62B0-72DA-33322D5400DC}" dt="2026-04-27T00:07:55.005" v="15"/>
+          <ac:graphicFrameMkLst>
+            <pc:docMk/>
+            <pc:sldMk cId="0" sldId="264"/>
+            <ac:graphicFrameMk id="7" creationId="{00000000-0000-0000-0000-000000000000}"/>
+          </ac:graphicFrameMkLst>
+        </pc:graphicFrameChg>
+        <pc:graphicFrameChg chg="mod modGraphic">
+          <ac:chgData name="Hoffman, Justin" userId="S::jrhoff2@ilstu.edu::016db39b-9d3a-45ee-8853-cfee94747a02" providerId="AD" clId="Web-{24FB547D-38DD-62B0-72DA-33322D5400DC}" dt="2026-04-27T00:07:50.051" v="7"/>
+          <ac:graphicFrameMkLst>
+            <pc:docMk/>
+            <pc:sldMk cId="0" sldId="264"/>
+            <ac:graphicFrameMk id="9" creationId="{00000000-0000-0000-0000-000000000000}"/>
+          </ac:graphicFrameMkLst>
+        </pc:graphicFrameChg>
+      </pc:sldChg>
+      <pc:sldChg chg="modSp">
+        <pc:chgData name="Hoffman, Justin" userId="S::jrhoff2@ilstu.edu::016db39b-9d3a-45ee-8853-cfee94747a02" providerId="AD" clId="Web-{24FB547D-38DD-62B0-72DA-33322D5400DC}" dt="2026-04-27T00:08:09.536" v="16" actId="20577"/>
+        <pc:sldMkLst>
+          <pc:docMk/>
+          <pc:sldMk cId="0" sldId="267"/>
+        </pc:sldMkLst>
+        <pc:spChg chg="mod">
+          <ac:chgData name="Hoffman, Justin" userId="S::jrhoff2@ilstu.edu::016db39b-9d3a-45ee-8853-cfee94747a02" providerId="AD" clId="Web-{24FB547D-38DD-62B0-72DA-33322D5400DC}" dt="2026-04-27T00:08:09.536" v="16" actId="20577"/>
+          <ac:spMkLst>
+            <pc:docMk/>
+            <pc:sldMk cId="0" sldId="267"/>
+            <ac:spMk id="5" creationId="{00000000-0000-0000-0000-000000000000}"/>
+          </ac:spMkLst>
+        </pc:spChg>
+      </pc:sldChg>
+      <pc:sldChg chg="modSp">
+        <pc:chgData name="Hoffman, Justin" userId="S::jrhoff2@ilstu.edu::016db39b-9d3a-45ee-8853-cfee94747a02" providerId="AD" clId="Web-{24FB547D-38DD-62B0-72DA-33322D5400DC}" dt="2026-04-27T00:10:33.161" v="49" actId="20577"/>
+        <pc:sldMkLst>
+          <pc:docMk/>
+          <pc:sldMk cId="0" sldId="277"/>
+        </pc:sldMkLst>
+        <pc:spChg chg="mod">
+          <ac:chgData name="Hoffman, Justin" userId="S::jrhoff2@ilstu.edu::016db39b-9d3a-45ee-8853-cfee94747a02" providerId="AD" clId="Web-{24FB547D-38DD-62B0-72DA-33322D5400DC}" dt="2026-04-27T00:09:57.645" v="46" actId="20577"/>
+          <ac:spMkLst>
+            <pc:docMk/>
+            <pc:sldMk cId="0" sldId="277"/>
+            <ac:spMk id="6" creationId="{00000000-0000-0000-0000-000000000000}"/>
+          </ac:spMkLst>
+        </pc:spChg>
+        <pc:spChg chg="mod">
+          <ac:chgData name="Hoffman, Justin" userId="S::jrhoff2@ilstu.edu::016db39b-9d3a-45ee-8853-cfee94747a02" providerId="AD" clId="Web-{24FB547D-38DD-62B0-72DA-33322D5400DC}" dt="2026-04-27T00:08:43.005" v="21" actId="20577"/>
+          <ac:spMkLst>
+            <pc:docMk/>
+            <pc:sldMk cId="0" sldId="277"/>
+            <ac:spMk id="9" creationId="{00000000-0000-0000-0000-000000000000}"/>
+          </ac:spMkLst>
+        </pc:spChg>
+        <pc:spChg chg="mod">
+          <ac:chgData name="Hoffman, Justin" userId="S::jrhoff2@ilstu.edu::016db39b-9d3a-45ee-8853-cfee94747a02" providerId="AD" clId="Web-{24FB547D-38DD-62B0-72DA-33322D5400DC}" dt="2026-04-27T00:10:33.161" v="49" actId="20577"/>
+          <ac:spMkLst>
+            <pc:docMk/>
+            <pc:sldMk cId="0" sldId="277"/>
+            <ac:spMk id="12" creationId="{00000000-0000-0000-0000-000000000000}"/>
           </ac:spMkLst>
         </pc:spChg>
       </pc:sldChg>
@@ -1026,7 +1034,7 @@
           <a:bodyPr/>
           <a:lstStyle/>
           <a:p>
-            <a:endParaRPr lang="en-US" dirty="0"/>
+            <a:endParaRPr lang="en-US"/>
           </a:p>
         </p:txBody>
       </p:sp>
@@ -1462,7 +1470,7 @@
               <a:buNone/>
             </a:pPr>
             <a:r>
-              <a:rPr lang="en-US" sz="2800" b="1" dirty="0">
+              <a:rPr lang="en-US" sz="2800" b="1">
                 <a:solidFill>
                   <a:srgbClr val="FFFFFF"/>
                 </a:solidFill>
@@ -1472,7 +1480,7 @@
               </a:rPr>
               <a:t>8.41x</a:t>
             </a:r>
-            <a:endParaRPr lang="en-US" sz="2800" dirty="0"/>
+            <a:endParaRPr lang="en-US" sz="2800"/>
           </a:p>
         </p:txBody>
       </p:sp>
@@ -1501,7 +1509,7 @@
               <a:buNone/>
             </a:pPr>
             <a:r>
-              <a:rPr lang="en-US" sz="1600" dirty="0">
+              <a:rPr lang="en-US" sz="1600">
                 <a:solidFill>
                   <a:srgbClr val="A8C4E0"/>
                 </a:solidFill>
@@ -1511,14 +1519,14 @@
               </a:rPr>
               <a:t>Peak</a:t>
             </a:r>
-            <a:endParaRPr lang="en-US" sz="1600" dirty="0"/>
+            <a:endParaRPr lang="en-US" sz="1600"/>
           </a:p>
           <a:p>
             <a:pPr marL="0" indent="0" algn="ctr">
               <a:buNone/>
             </a:pPr>
             <a:r>
-              <a:rPr lang="en-US" sz="1600" dirty="0">
+              <a:rPr lang="en-US" sz="1600">
                 <a:solidFill>
                   <a:srgbClr val="A8C4E0"/>
                 </a:solidFill>
@@ -1528,7 +1536,7 @@
               </a:rPr>
               <a:t>Speedup</a:t>
             </a:r>
-            <a:endParaRPr lang="en-US" sz="1600" dirty="0"/>
+            <a:endParaRPr lang="en-US" sz="1600"/>
           </a:p>
         </p:txBody>
       </p:sp>
@@ -1591,7 +1599,7 @@
               <a:buNone/>
             </a:pPr>
             <a:r>
-              <a:rPr lang="en-US" sz="2800" b="1" dirty="0">
+              <a:rPr lang="en-US" sz="2800" b="1">
                 <a:solidFill>
                   <a:srgbClr val="FFFFFF"/>
                 </a:solidFill>
@@ -1601,7 +1609,7 @@
               </a:rPr>
               <a:t>1M</a:t>
             </a:r>
-            <a:endParaRPr lang="en-US" sz="2800" dirty="0"/>
+            <a:endParaRPr lang="en-US" sz="2800"/>
           </a:p>
         </p:txBody>
       </p:sp>
@@ -1630,7 +1638,7 @@
               <a:buNone/>
             </a:pPr>
             <a:r>
-              <a:rPr lang="en-US" sz="1600" dirty="0">
+              <a:rPr lang="en-US" sz="1600">
                 <a:solidFill>
                   <a:srgbClr val="A8C4E0"/>
                 </a:solidFill>
@@ -1640,14 +1648,14 @@
               </a:rPr>
               <a:t>Records</a:t>
             </a:r>
-            <a:endParaRPr lang="en-US" sz="1600" dirty="0"/>
+            <a:endParaRPr lang="en-US" sz="1600"/>
           </a:p>
           <a:p>
             <a:pPr marL="0" indent="0" algn="ctr">
               <a:buNone/>
             </a:pPr>
             <a:r>
-              <a:rPr lang="en-US" sz="1600" dirty="0">
+              <a:rPr lang="en-US" sz="1600">
                 <a:solidFill>
                   <a:srgbClr val="A8C4E0"/>
                 </a:solidFill>
@@ -1657,7 +1665,7 @@
               </a:rPr>
               <a:t>Tested</a:t>
             </a:r>
-            <a:endParaRPr lang="en-US" sz="1600" dirty="0"/>
+            <a:endParaRPr lang="en-US" sz="1600"/>
           </a:p>
         </p:txBody>
       </p:sp>
@@ -1720,7 +1728,7 @@
               <a:buNone/>
             </a:pPr>
             <a:r>
-              <a:rPr lang="en-US" sz="2800" b="1" dirty="0">
+              <a:rPr lang="en-US" sz="2800" b="1">
                 <a:solidFill>
                   <a:srgbClr val="FFFFFF"/>
                 </a:solidFill>
@@ -1730,7 +1738,7 @@
               </a:rPr>
               <a:t>4</a:t>
             </a:r>
-            <a:endParaRPr lang="en-US" sz="2800" dirty="0"/>
+            <a:endParaRPr lang="en-US" sz="2800"/>
           </a:p>
         </p:txBody>
       </p:sp>
@@ -1759,7 +1767,7 @@
               <a:buNone/>
             </a:pPr>
             <a:r>
-              <a:rPr lang="en-US" sz="1600" dirty="0">
+              <a:rPr lang="en-US" sz="1600">
                 <a:solidFill>
                   <a:srgbClr val="A8C4E0"/>
                 </a:solidFill>
@@ -1769,7 +1777,7 @@
               </a:rPr>
               <a:t>Implementations</a:t>
             </a:r>
-            <a:endParaRPr lang="en-US" sz="1600" dirty="0"/>
+            <a:endParaRPr lang="en-US" sz="1600"/>
           </a:p>
         </p:txBody>
       </p:sp>
@@ -1832,7 +1840,7 @@
               <a:buNone/>
             </a:pPr>
             <a:r>
-              <a:rPr lang="en-US" sz="2800" b="1" dirty="0">
+              <a:rPr lang="en-US" sz="2800" b="1">
                 <a:solidFill>
                   <a:srgbClr val="FFFFFF"/>
                 </a:solidFill>
@@ -1842,7 +1850,7 @@
               </a:rPr>
               <a:t>2</a:t>
             </a:r>
-            <a:endParaRPr lang="en-US" sz="2800" dirty="0"/>
+            <a:endParaRPr lang="en-US" sz="2800"/>
           </a:p>
         </p:txBody>
       </p:sp>
@@ -1871,7 +1879,7 @@
               <a:buNone/>
             </a:pPr>
             <a:r>
-              <a:rPr lang="en-US" sz="1600" dirty="0">
+              <a:rPr lang="en-US" sz="1600">
                 <a:solidFill>
                   <a:srgbClr val="A8C4E0"/>
                 </a:solidFill>
@@ -1881,7 +1889,7 @@
               </a:rPr>
               <a:t>Environments</a:t>
             </a:r>
-            <a:endParaRPr lang="en-US" sz="1600" dirty="0"/>
+            <a:endParaRPr lang="en-US" sz="1600"/>
           </a:p>
         </p:txBody>
       </p:sp>
@@ -1910,7 +1918,7 @@
               <a:buNone/>
             </a:pPr>
             <a:r>
-              <a:rPr lang="en-US" sz="4200" b="1" dirty="0">
+              <a:rPr lang="en-US" sz="4200" b="1">
                 <a:solidFill>
                   <a:srgbClr val="FFFFFF"/>
                 </a:solidFill>
@@ -1920,7 +1928,7 @@
               </a:rPr>
               <a:t>Parallel Naive Bayes Classifier</a:t>
             </a:r>
-            <a:endParaRPr lang="en-US" sz="4200" dirty="0"/>
+            <a:endParaRPr lang="en-US" sz="4200"/>
           </a:p>
         </p:txBody>
       </p:sp>
@@ -1981,7 +1989,7 @@
               <a:buNone/>
             </a:pPr>
             <a:r>
-              <a:rPr lang="en-US" sz="1700" dirty="0">
+              <a:rPr lang="en-US" sz="1700">
                 <a:solidFill>
                   <a:srgbClr val="A8C4E0"/>
                 </a:solidFill>
@@ -1991,7 +1999,7 @@
               </a:rPr>
               <a:t>IT 388  Parallel Processing  |  Spring 2026</a:t>
             </a:r>
-            <a:endParaRPr lang="en-US" sz="1700" dirty="0"/>
+            <a:endParaRPr lang="en-US" sz="1700"/>
           </a:p>
         </p:txBody>
       </p:sp>
@@ -2013,24 +2021,48 @@
           <a:ln/>
         </p:spPr>
         <p:txBody>
-          <a:bodyPr wrap="square" rtlCol="0" anchor="ctr"/>
-          <a:lstStyle/>
-          <a:p>
-            <a:pPr marL="0" indent="0" algn="ctr">
-              <a:buNone/>
-            </a:pPr>
-            <a:r>
-              <a:rPr lang="en-US" sz="1400" dirty="0">
+          <a:bodyPr wrap="square" lIns="91440" tIns="45720" rIns="91440" bIns="45720" rtlCol="0" anchor="ctr"/>
+          <a:lstStyle/>
+          <a:p>
+            <a:pPr algn="ctr"/>
+            <a:r>
+              <a:rPr lang="en-US" sz="1400">
                 <a:solidFill>
                   <a:srgbClr val="C8D8E8"/>
                 </a:solidFill>
-                <a:latin typeface="Calibri" pitchFamily="34" charset="0"/>
-                <a:ea typeface="Calibri" pitchFamily="34" charset="-122"/>
-                <a:cs typeface="Calibri" pitchFamily="34" charset="-120"/>
-              </a:rPr>
-              <a:t>Justin Hoffman   Brady Davidson   Daniel Sevik   Nathan Wolniak</a:t>
-            </a:r>
-            <a:endParaRPr lang="en-US" sz="1400" dirty="0"/>
+                <a:latin typeface="Calibri"/>
+                <a:ea typeface="Calibri"/>
+                <a:cs typeface="Calibri"/>
+              </a:rPr>
+              <a:t>Justin Hoffman, Brady Davidson, Daniel </a:t>
+            </a:r>
+            <a:r>
+              <a:rPr lang="en-US" sz="1400" err="1">
+                <a:solidFill>
+                  <a:srgbClr val="C8D8E8"/>
+                </a:solidFill>
+                <a:latin typeface="Calibri"/>
+                <a:ea typeface="Calibri"/>
+                <a:cs typeface="Calibri"/>
+              </a:rPr>
+              <a:t>Sevik</a:t>
+            </a:r>
+            <a:r>
+              <a:rPr lang="en-US" sz="1400">
+                <a:solidFill>
+                  <a:srgbClr val="C8D8E8"/>
+                </a:solidFill>
+                <a:latin typeface="Calibri"/>
+                <a:ea typeface="Calibri"/>
+                <a:cs typeface="Calibri"/>
+              </a:rPr>
+              <a:t>,   Nathan Wolniak</a:t>
+            </a:r>
+            <a:endParaRPr lang="en-US" sz="1400">
+              <a:latin typeface="Calibri"/>
+              <a:ea typeface="Calibri"/>
+              <a:cs typeface="Calibri"/>
+            </a:endParaRPr>
           </a:p>
         </p:txBody>
       </p:sp>
@@ -2116,7 +2148,7 @@
               <a:buNone/>
             </a:pPr>
             <a:r>
-              <a:rPr lang="en-US" sz="3000" b="1" dirty="0">
+              <a:rPr lang="en-US" sz="3000" b="1">
                 <a:solidFill>
                   <a:srgbClr val="FFFFFF"/>
                 </a:solidFill>
@@ -2126,7 +2158,7 @@
               </a:rPr>
               <a:t>OpenMP Results</a:t>
             </a:r>
-            <a:endParaRPr lang="en-US" sz="3000" dirty="0"/>
+            <a:endParaRPr lang="en-US" sz="3000"/>
           </a:p>
         </p:txBody>
       </p:sp>
@@ -2186,7 +2218,7 @@
           <a:lstStyle/>
           <a:p>
             <a:r>
-              <a:rPr lang="en-US" sz="1600" b="1" dirty="0">
+              <a:rPr lang="en-US" sz="1600" b="1">
                 <a:solidFill>
                   <a:srgbClr val="185FA5"/>
                 </a:solidFill>
@@ -2197,7 +2229,7 @@
               <a:t>Expanse: </a:t>
             </a:r>
             <a:r>
-              <a:rPr lang="en-US" sz="1600" dirty="0">
+              <a:rPr lang="en-US" sz="1600">
                 <a:solidFill>
                   <a:srgbClr val="444444"/>
                 </a:solidFill>
@@ -2205,7 +2237,7 @@
               <a:t>Scales to 8.41x at 16 threads. Efficiency stays above 0.8 through 4 threads.</a:t>
             </a:r>
             <a:r>
-              <a:rPr lang="en-US" sz="1600" dirty="0">
+              <a:rPr lang="en-US" sz="1600">
                 <a:solidFill>
                   <a:srgbClr val="444444"/>
                 </a:solidFill>
@@ -2217,7 +2249,7 @@
 </a:t>
             </a:r>
             <a:r>
-              <a:rPr lang="en-US" sz="1600" b="1" dirty="0">
+              <a:rPr lang="en-US" sz="1600" b="1">
                 <a:solidFill>
                   <a:srgbClr val="993C1D"/>
                 </a:solidFill>
@@ -2228,7 +2260,7 @@
               <a:t>Linux Cluster: </a:t>
             </a:r>
             <a:r>
-              <a:rPr lang="en-US" sz="1600" dirty="0">
+              <a:rPr lang="en-US" sz="1600">
                 <a:solidFill>
                   <a:srgbClr val="444444"/>
                 </a:solidFill>
@@ -2350,7 +2382,7 @@
               <a:buNone/>
             </a:pPr>
             <a:r>
-              <a:rPr lang="en-US" sz="3000" b="1" dirty="0">
+              <a:rPr lang="en-US" sz="3000" b="1">
                 <a:solidFill>
                   <a:srgbClr val="FFFFFF"/>
                 </a:solidFill>
@@ -2360,7 +2392,7 @@
               </a:rPr>
               <a:t>MPI Results (Signs of bottleneck)</a:t>
             </a:r>
-            <a:endParaRPr lang="en-US" sz="3000" dirty="0"/>
+            <a:endParaRPr lang="en-US" sz="3000"/>
           </a:p>
         </p:txBody>
       </p:sp>
@@ -2423,7 +2455,7 @@
               <a:buNone/>
             </a:pPr>
             <a:r>
-              <a:rPr lang="en-US" sz="1600" b="1" dirty="0">
+              <a:rPr lang="en-US" sz="1600" b="1">
                 <a:solidFill>
                   <a:srgbClr val="993C1D"/>
                 </a:solidFill>
@@ -2434,7 +2466,7 @@
               <a:t>Expanse: </a:t>
             </a:r>
             <a:r>
-              <a:rPr lang="en-US" sz="1600" dirty="0">
+              <a:rPr lang="en-US" sz="1600">
                 <a:solidFill>
                   <a:srgbClr val="444444"/>
                 </a:solidFill>
@@ -2446,7 +2478,7 @@
 </a:t>
             </a:r>
             <a:r>
-              <a:rPr lang="en-US" sz="1600" b="1" dirty="0">
+              <a:rPr lang="en-US" sz="1600" b="1">
                 <a:solidFill>
                   <a:srgbClr val="993C1D"/>
                 </a:solidFill>
@@ -2457,7 +2489,7 @@
               <a:t>Linux Cluster: </a:t>
             </a:r>
             <a:r>
-              <a:rPr lang="en-US" sz="1600" dirty="0">
+              <a:rPr lang="en-US" sz="1600">
                 <a:solidFill>
                   <a:srgbClr val="444444"/>
                 </a:solidFill>
@@ -2467,7 +2499,7 @@
               </a:rPr>
               <a:t>Barely moves off 1x across all counts. Something is limiting MPI performance.</a:t>
             </a:r>
-            <a:endParaRPr lang="en-US" sz="1600" dirty="0"/>
+            <a:endParaRPr lang="en-US" sz="1600"/>
           </a:p>
         </p:txBody>
       </p:sp>
@@ -2554,7 +2586,7 @@
           <a:bodyPr/>
           <a:lstStyle/>
           <a:p>
-            <a:endParaRPr lang="en-US" dirty="0"/>
+            <a:endParaRPr lang="en-US"/>
           </a:p>
         </p:txBody>
       </p:sp>
@@ -2583,7 +2615,7 @@
               <a:buNone/>
             </a:pPr>
             <a:r>
-              <a:rPr lang="en-US" sz="3000" b="1" dirty="0">
+              <a:rPr lang="en-US" sz="3000" b="1">
                 <a:solidFill>
                   <a:srgbClr val="FFFFFF"/>
                 </a:solidFill>
@@ -2593,7 +2625,7 @@
               </a:rPr>
               <a:t>Hybrid Results (Expanse thread bottleneck)</a:t>
             </a:r>
-            <a:endParaRPr lang="en-US" sz="3000" dirty="0"/>
+            <a:endParaRPr lang="en-US" sz="3000"/>
           </a:p>
         </p:txBody>
       </p:sp>
@@ -2649,20 +2681,17 @@
           <a:ln/>
         </p:spPr>
         <p:txBody>
-          <a:bodyPr wrap="square" rtlCol="0" anchor="ctr"/>
-          <a:lstStyle/>
-          <a:p>
-            <a:pPr marL="0" indent="0">
-              <a:buNone/>
-            </a:pPr>
+          <a:bodyPr wrap="square" lIns="91440" tIns="45720" rIns="91440" bIns="45720" rtlCol="0" anchor="ctr"/>
+          <a:lstStyle/>
+          <a:p>
             <a:r>
               <a:rPr lang="en-US" sz="1600" b="1" dirty="0">
                 <a:solidFill>
                   <a:srgbClr val="0F6E56"/>
                 </a:solidFill>
-                <a:latin typeface="Calibri" pitchFamily="34" charset="0"/>
-                <a:ea typeface="Calibri" pitchFamily="34" charset="-122"/>
-                <a:cs typeface="Calibri" pitchFamily="34" charset="-120"/>
+                <a:latin typeface="Calibri"/>
+                <a:ea typeface="Calibri"/>
+                <a:cs typeface="Calibri"/>
               </a:rPr>
               <a:t>Expanse: </a:t>
             </a:r>
@@ -2671,11 +2700,11 @@
                 <a:solidFill>
                   <a:srgbClr val="444444"/>
                 </a:solidFill>
-                <a:latin typeface="Calibri" pitchFamily="34" charset="0"/>
-                <a:ea typeface="Calibri" pitchFamily="34" charset="-122"/>
-                <a:cs typeface="Calibri" pitchFamily="34" charset="-120"/>
-              </a:rPr>
-              <a:t>Reaches 6.18x at 8p x 16t. Little scaling as at 16p 1t or 1p 16t
+                <a:latin typeface="Calibri"/>
+                <a:ea typeface="Calibri"/>
+                <a:cs typeface="Calibri"/>
+              </a:rPr>
+              <a:t>Reaches 6.18x at 8p x 16t. Hybrid not scaling by process or threads alone.
 </a:t>
             </a:r>
             <a:r>
@@ -2683,24 +2712,39 @@
                 <a:solidFill>
                   <a:srgbClr val="993C1D"/>
                 </a:solidFill>
-                <a:latin typeface="Calibri" pitchFamily="34" charset="0"/>
-                <a:ea typeface="Calibri" pitchFamily="34" charset="-122"/>
-                <a:cs typeface="Calibri" pitchFamily="34" charset="-120"/>
+                <a:latin typeface="Calibri"/>
+                <a:ea typeface="Calibri"/>
+                <a:cs typeface="Calibri"/>
               </a:rPr>
               <a:t>Linux Cluster: </a:t>
             </a:r>
             <a:r>
+              <a:rPr lang="en-US" sz="1600">
+                <a:solidFill>
+                  <a:srgbClr val="444444"/>
+                </a:solidFill>
+                <a:latin typeface="Calibri"/>
+                <a:ea typeface="Calibri"/>
+                <a:cs typeface="Calibri"/>
+              </a:rPr>
+              <a:t>Peaks at 2.9x at 1p x 8t. However, on Linux</a:t>
+            </a:r>
+            <a:r>
               <a:rPr lang="en-US" sz="1600" dirty="0">
                 <a:solidFill>
                   <a:srgbClr val="444444"/>
                 </a:solidFill>
-                <a:latin typeface="Calibri" pitchFamily="34" charset="0"/>
-                <a:ea typeface="Calibri" pitchFamily="34" charset="-122"/>
-                <a:cs typeface="Calibri" pitchFamily="34" charset="-120"/>
-              </a:rPr>
-              <a:t>Peaks at 2.9x at 1p x 8t. However, is scaling by thread.</a:t>
-            </a:r>
-            <a:endParaRPr lang="en-US" sz="1600" dirty="0"/>
+                <a:latin typeface="Calibri"/>
+                <a:ea typeface="Calibri"/>
+                <a:cs typeface="Calibri"/>
+              </a:rPr>
+              <a:t> hybrid is scaling by thread.</a:t>
+            </a:r>
+            <a:endParaRPr lang="en-US" sz="1600" dirty="0">
+              <a:latin typeface="Calibri"/>
+              <a:ea typeface="Calibri"/>
+              <a:cs typeface="Calibri"/>
+            </a:endParaRPr>
           </a:p>
         </p:txBody>
       </p:sp>
@@ -2816,7 +2860,7 @@
               <a:buNone/>
             </a:pPr>
             <a:r>
-              <a:rPr lang="en-US" sz="3000" b="1" dirty="0">
+              <a:rPr lang="en-US" sz="3000" b="1">
                 <a:solidFill>
                   <a:srgbClr val="FFFFFF"/>
                 </a:solidFill>
@@ -2826,7 +2870,7 @@
               </a:rPr>
               <a:t>Where the Time Goes</a:t>
             </a:r>
-            <a:endParaRPr lang="en-US" sz="3000" dirty="0"/>
+            <a:endParaRPr lang="en-US" sz="3000"/>
           </a:p>
         </p:txBody>
       </p:sp>
@@ -2889,7 +2933,7 @@
               <a:buNone/>
             </a:pPr>
             <a:r>
-              <a:rPr lang="en-US" sz="1600" b="1" dirty="0">
+              <a:rPr lang="en-US" sz="1600" b="1">
                 <a:solidFill>
                   <a:srgbClr val="92400E"/>
                 </a:solidFill>
@@ -2900,7 +2944,7 @@
               <a:t>CV dominates: </a:t>
             </a:r>
             <a:r>
-              <a:rPr lang="en-US" sz="1600" dirty="0">
+              <a:rPr lang="en-US" sz="1600">
                 <a:solidFill>
                   <a:srgbClr val="444444"/>
                 </a:solidFill>
@@ -2912,7 +2956,7 @@
 </a:t>
             </a:r>
             <a:r>
-              <a:rPr lang="en-US" sz="1600" b="1" dirty="0">
+              <a:rPr lang="en-US" sz="1600" b="1">
                 <a:solidFill>
                   <a:srgbClr val="185FA5"/>
                 </a:solidFill>
@@ -2923,7 +2967,7 @@
               <a:t>OMP reduces CV: </a:t>
             </a:r>
             <a:r>
-              <a:rPr lang="en-US" sz="1600" dirty="0">
+              <a:rPr lang="en-US" sz="1600">
                 <a:solidFill>
                   <a:srgbClr val="444444"/>
                 </a:solidFill>
@@ -2933,7 +2977,7 @@
               </a:rPr>
               <a:t>threads parallelize inside each fold's train and classify calls.</a:t>
             </a:r>
-            <a:endParaRPr lang="en-US" sz="1600" dirty="0"/>
+            <a:endParaRPr lang="en-US" sz="1600"/>
           </a:p>
         </p:txBody>
       </p:sp>
@@ -3049,7 +3093,7 @@
               <a:buNone/>
             </a:pPr>
             <a:r>
-              <a:rPr lang="en-US" sz="3000" b="1" dirty="0">
+              <a:rPr lang="en-US" sz="3000" b="1">
                 <a:solidFill>
                   <a:srgbClr val="FFFFFF"/>
                 </a:solidFill>
@@ -3059,7 +3103,7 @@
               </a:rPr>
               <a:t>MPI Results: Train + Classify Only</a:t>
             </a:r>
-            <a:endParaRPr lang="en-US" sz="3000" dirty="0"/>
+            <a:endParaRPr lang="en-US" sz="3000"/>
           </a:p>
         </p:txBody>
       </p:sp>
@@ -3122,7 +3166,7 @@
               <a:buNone/>
             </a:pPr>
             <a:r>
-              <a:rPr lang="en-US" sz="1600" b="1" dirty="0">
+              <a:rPr lang="en-US" sz="1600" b="1">
                 <a:solidFill>
                   <a:srgbClr val="993C1D"/>
                 </a:solidFill>
@@ -3133,7 +3177,7 @@
               <a:t>When CV is excluded: </a:t>
             </a:r>
             <a:r>
-              <a:rPr lang="en-US" sz="1600" dirty="0">
+              <a:rPr lang="en-US" sz="1600">
                 <a:solidFill>
                   <a:srgbClr val="444444"/>
                 </a:solidFill>
@@ -3145,7 +3189,7 @@
 </a:t>
             </a:r>
             <a:r>
-              <a:rPr lang="en-US" sz="1600" b="1" dirty="0">
+              <a:rPr lang="en-US" sz="1600" b="1">
                 <a:solidFill>
                   <a:srgbClr val="0D3B6E"/>
                 </a:solidFill>
@@ -3156,7 +3200,7 @@
               <a:t>The bottleneck was never the algorithm. </a:t>
             </a:r>
             <a:r>
-              <a:rPr lang="en-US" sz="1600" dirty="0">
+              <a:rPr lang="en-US" sz="1600">
                 <a:solidFill>
                   <a:srgbClr val="444444"/>
                 </a:solidFill>
@@ -3166,7 +3210,7 @@
               </a:rPr>
               <a:t>CV broadcasts the full dataset on every fold split.</a:t>
             </a:r>
-            <a:endParaRPr lang="en-US" sz="1600" dirty="0"/>
+            <a:endParaRPr lang="en-US" sz="1600"/>
           </a:p>
         </p:txBody>
       </p:sp>
@@ -3282,7 +3326,7 @@
               <a:buNone/>
             </a:pPr>
             <a:r>
-              <a:rPr lang="en-US" sz="3000" b="1" dirty="0">
+              <a:rPr lang="en-US" sz="3000" b="1">
                 <a:solidFill>
                   <a:srgbClr val="FFFFFF"/>
                 </a:solidFill>
@@ -3292,7 +3336,7 @@
               </a:rPr>
               <a:t>Identifying the Bottlenecks</a:t>
             </a:r>
-            <a:endParaRPr lang="en-US" sz="3000" dirty="0"/>
+            <a:endParaRPr lang="en-US" sz="3000"/>
           </a:p>
         </p:txBody>
       </p:sp>
@@ -3321,7 +3365,7 @@
               <a:buNone/>
             </a:pPr>
             <a:r>
-              <a:rPr lang="en-US" sz="1600" b="1" dirty="0">
+              <a:rPr lang="en-US" sz="1600" b="1">
                 <a:solidFill>
                   <a:srgbClr val="0D3B6E"/>
                 </a:solidFill>
@@ -3331,7 +3375,7 @@
               </a:rPr>
               <a:t>Isolating the Problem</a:t>
             </a:r>
-            <a:endParaRPr lang="en-US" sz="1600" dirty="0"/>
+            <a:endParaRPr lang="en-US" sz="1600"/>
           </a:p>
         </p:txBody>
       </p:sp>
@@ -3353,7 +3397,7 @@
           <a:ln/>
         </p:spPr>
         <p:txBody>
-          <a:bodyPr wrap="square" rtlCol="0" anchor="t"/>
+          <a:bodyPr wrap="square" lIns="91440" tIns="45720" rIns="91440" bIns="45720" rtlCol="0" anchor="t"/>
           <a:lstStyle/>
           <a:p>
             <a:pPr marL="285750" indent="-285750">
@@ -3364,155 +3408,232 @@
               <a:buChar char="•"/>
             </a:pPr>
             <a:r>
-              <a:rPr lang="en-US" sz="1400" b="1" dirty="0">
+              <a:rPr lang="en-US" sz="1400" b="1">
                 <a:solidFill>
                   <a:srgbClr val="0D3B6E"/>
                 </a:solidFill>
-                <a:latin typeface="Calibri" pitchFamily="34" charset="0"/>
-                <a:ea typeface="Calibri" pitchFamily="34" charset="-122"/>
-                <a:cs typeface="Calibri" pitchFamily="34" charset="-120"/>
-              </a:rPr>
-              <a:t>MPI train+classify scales to 9.07x</a:t>
-            </a:r>
-            <a:r>
-              <a:rPr lang="en-US" sz="1400" dirty="0">
+                <a:latin typeface="Calibri"/>
+                <a:ea typeface="Calibri"/>
+                <a:cs typeface="Calibri"/>
+              </a:rPr>
+              <a:t>MPI </a:t>
+            </a:r>
+            <a:r>
+              <a:rPr lang="en-US" sz="1400" b="1" err="1">
+                <a:solidFill>
+                  <a:srgbClr val="0D3B6E"/>
+                </a:solidFill>
+                <a:latin typeface="Calibri"/>
+                <a:ea typeface="Calibri"/>
+                <a:cs typeface="Calibri"/>
+              </a:rPr>
+              <a:t>train+classify</a:t>
+            </a:r>
+            <a:r>
+              <a:rPr lang="en-US" sz="1400" b="1">
+                <a:solidFill>
+                  <a:srgbClr val="0D3B6E"/>
+                </a:solidFill>
+                <a:latin typeface="Calibri"/>
+                <a:ea typeface="Calibri"/>
+                <a:cs typeface="Calibri"/>
+              </a:rPr>
+              <a:t> scales to 9.07x</a:t>
+            </a:r>
+            <a:r>
+              <a:rPr lang="en-US" sz="1400">
                 <a:solidFill>
                   <a:srgbClr val="444444"/>
                 </a:solidFill>
-                <a:latin typeface="Calibri" pitchFamily="34" charset="0"/>
-                <a:ea typeface="Calibri" pitchFamily="34" charset="-122"/>
-                <a:cs typeface="Calibri" pitchFamily="34" charset="-120"/>
+                <a:latin typeface="Calibri"/>
+                <a:ea typeface="Calibri"/>
+                <a:cs typeface="Calibri"/>
               </a:rPr>
               <a:t> algorithm is not the problem
 </a:t>
             </a:r>
             <a:r>
-              <a:rPr lang="en-US" sz="1400" b="1" dirty="0">
+              <a:rPr lang="en-US" sz="1400" b="1">
                 <a:solidFill>
                   <a:srgbClr val="0D3B6E"/>
                 </a:solidFill>
-                <a:latin typeface="Calibri" pitchFamily="34" charset="0"/>
-                <a:ea typeface="Calibri" pitchFamily="34" charset="-122"/>
-                <a:cs typeface="Calibri" pitchFamily="34" charset="-120"/>
+                <a:latin typeface="Calibri"/>
+                <a:ea typeface="Calibri"/>
+                <a:cs typeface="Calibri"/>
               </a:rPr>
               <a:t>Add CV back and speedup collapses to 1.88x</a:t>
             </a:r>
             <a:r>
-              <a:rPr lang="en-US" sz="1400" dirty="0">
+              <a:rPr lang="en-US" sz="1400">
                 <a:solidFill>
                   <a:srgbClr val="444444"/>
                 </a:solidFill>
-                <a:latin typeface="Calibri" pitchFamily="34" charset="0"/>
-                <a:ea typeface="Calibri" pitchFamily="34" charset="-122"/>
-                <a:cs typeface="Calibri" pitchFamily="34" charset="-120"/>
-              </a:rPr>
-              <a:t> bottleneck lives inside cross_validate
+                <a:latin typeface="Calibri"/>
+                <a:ea typeface="Calibri"/>
+                <a:cs typeface="Calibri"/>
+              </a:rPr>
+              <a:t> bottleneck lives inside </a:t>
+            </a:r>
+            <a:r>
+              <a:rPr lang="en-US" sz="1400" err="1">
+                <a:solidFill>
+                  <a:srgbClr val="444444"/>
+                </a:solidFill>
+                <a:latin typeface="Calibri"/>
+                <a:ea typeface="Calibri"/>
+                <a:cs typeface="Calibri"/>
+              </a:rPr>
+              <a:t>cross_validate</a:t>
+            </a:r>
+            <a:r>
+              <a:rPr lang="en-US" sz="1400">
+                <a:solidFill>
+                  <a:srgbClr val="444444"/>
+                </a:solidFill>
+                <a:latin typeface="Calibri"/>
+                <a:ea typeface="Calibri"/>
+                <a:cs typeface="Calibri"/>
+              </a:rPr>
+              <a:t>
 </a:t>
             </a:r>
             <a:r>
-              <a:rPr lang="en-US" sz="1400" b="1" dirty="0">
+              <a:rPr lang="en-US" sz="1400" b="1" err="1">
                 <a:solidFill>
                   <a:srgbClr val="0D3B6E"/>
                 </a:solidFill>
-                <a:latin typeface="Calibri" pitchFamily="34" charset="0"/>
-                <a:ea typeface="Calibri" pitchFamily="34" charset="-122"/>
-                <a:cs typeface="Calibri" pitchFamily="34" charset="-120"/>
-              </a:rPr>
-              <a:t>copy_rows is only called from </a:t>
-            </a:r>
-            <a:r>
-              <a:rPr lang="en-US" sz="1400" b="1" dirty="0" err="1">
+                <a:latin typeface="Calibri"/>
+                <a:ea typeface="Calibri"/>
+                <a:cs typeface="Calibri"/>
+              </a:rPr>
+              <a:t>copy_rows</a:t>
+            </a:r>
+            <a:r>
+              <a:rPr lang="en-US" sz="1400" b="1">
                 <a:solidFill>
                   <a:srgbClr val="0D3B6E"/>
                 </a:solidFill>
-                <a:latin typeface="Calibri" pitchFamily="34" charset="0"/>
-                <a:ea typeface="Calibri" pitchFamily="34" charset="-122"/>
-                <a:cs typeface="Calibri" pitchFamily="34" charset="-120"/>
+                <a:latin typeface="Calibri"/>
+                <a:ea typeface="Calibri"/>
+                <a:cs typeface="Calibri"/>
+              </a:rPr>
+              <a:t> is only called from </a:t>
+            </a:r>
+            <a:r>
+              <a:rPr lang="en-US" sz="1400" b="1" err="1">
+                <a:solidFill>
+                  <a:srgbClr val="0D3B6E"/>
+                </a:solidFill>
+                <a:latin typeface="Calibri"/>
+                <a:ea typeface="Calibri"/>
+                <a:cs typeface="Calibri"/>
               </a:rPr>
               <a:t>cross_validate</a:t>
             </a:r>
             <a:r>
-              <a:rPr lang="en-US" sz="1400" dirty="0">
+              <a:rPr lang="en-US" sz="1400">
                 <a:solidFill>
                   <a:srgbClr val="444444"/>
                 </a:solidFill>
-                <a:latin typeface="Calibri" pitchFamily="34" charset="0"/>
-                <a:ea typeface="Calibri" pitchFamily="34" charset="-122"/>
-                <a:cs typeface="Calibri" pitchFamily="34" charset="-120"/>
+                <a:latin typeface="Calibri"/>
+                <a:ea typeface="Calibri"/>
+                <a:cs typeface="Calibri"/>
               </a:rPr>
               <a:t> never during main train or classify
 </a:t>
             </a:r>
             <a:r>
-              <a:rPr lang="en-US" sz="1400" b="1" dirty="0">
+              <a:rPr lang="en-US" sz="1400" b="1">
                 <a:solidFill>
                   <a:srgbClr val="0D3B6E"/>
                 </a:solidFill>
-                <a:latin typeface="Calibri" pitchFamily="34" charset="0"/>
-                <a:ea typeface="Calibri" pitchFamily="34" charset="-122"/>
-                <a:cs typeface="Calibri" pitchFamily="34" charset="-120"/>
+                <a:latin typeface="Calibri"/>
+                <a:ea typeface="Calibri"/>
+                <a:cs typeface="Calibri"/>
               </a:rPr>
               <a:t>Called twice per fold x 5 folds</a:t>
             </a:r>
             <a:r>
-              <a:rPr lang="en-US" sz="1400" dirty="0">
+              <a:rPr lang="en-US" sz="1400">
                 <a:solidFill>
                   <a:srgbClr val="444444"/>
                 </a:solidFill>
-                <a:latin typeface="Calibri" pitchFamily="34" charset="0"/>
-                <a:ea typeface="Calibri" pitchFamily="34" charset="-122"/>
-                <a:cs typeface="Calibri" pitchFamily="34" charset="-120"/>
-              </a:rPr>
-              <a:t> = 10 MPI_Allgatherv broadcasts per run
+                <a:latin typeface="Calibri"/>
+                <a:ea typeface="Calibri"/>
+                <a:cs typeface="Calibri"/>
+              </a:rPr>
+              <a:t> 10 </a:t>
+            </a:r>
+            <a:r>
+              <a:rPr lang="en-US" sz="1400" err="1">
+                <a:solidFill>
+                  <a:srgbClr val="444444"/>
+                </a:solidFill>
+                <a:latin typeface="Calibri"/>
+                <a:ea typeface="Calibri"/>
+                <a:cs typeface="Calibri"/>
+              </a:rPr>
+              <a:t>MPI_Allgatherv</a:t>
+            </a:r>
+            <a:r>
+              <a:rPr lang="en-US" sz="1400">
+                <a:solidFill>
+                  <a:srgbClr val="444444"/>
+                </a:solidFill>
+                <a:latin typeface="Calibri"/>
+                <a:ea typeface="Calibri"/>
+                <a:cs typeface="Calibri"/>
+              </a:rPr>
+              <a:t> broadcasts per run
 </a:t>
             </a:r>
             <a:r>
-              <a:rPr lang="en-US" sz="1400" b="1" dirty="0">
+              <a:rPr lang="en-US" sz="1400" b="1">
                 <a:solidFill>
                   <a:srgbClr val="0D3B6E"/>
                 </a:solidFill>
-                <a:latin typeface="Calibri" pitchFamily="34" charset="0"/>
-                <a:ea typeface="Calibri" pitchFamily="34" charset="-122"/>
-                <a:cs typeface="Calibri" pitchFamily="34" charset="-120"/>
+                <a:latin typeface="Calibri"/>
+                <a:ea typeface="Calibri"/>
+                <a:cs typeface="Calibri"/>
               </a:rPr>
               <a:t>Every rank already has the full dataset</a:t>
             </a:r>
             <a:r>
-              <a:rPr lang="en-US" sz="1400" dirty="0">
+              <a:rPr lang="en-US" sz="1400">
                 <a:solidFill>
                   <a:srgbClr val="444444"/>
                 </a:solidFill>
-                <a:latin typeface="Calibri" pitchFamily="34" charset="0"/>
-                <a:ea typeface="Calibri" pitchFamily="34" charset="-122"/>
-                <a:cs typeface="Calibri" pitchFamily="34" charset="-120"/>
+                <a:latin typeface="Calibri"/>
+                <a:ea typeface="Calibri"/>
+                <a:cs typeface="Calibri"/>
               </a:rPr>
               <a:t> each rank could build fold splits locally with zero communication
 </a:t>
             </a:r>
             <a:r>
-              <a:rPr lang="en-US" sz="1400" b="1" dirty="0">
+              <a:rPr lang="en-US" sz="1400" b="1">
                 <a:solidFill>
                   <a:srgbClr val="0D3B6E"/>
                 </a:solidFill>
-                <a:latin typeface="Calibri" pitchFamily="34" charset="0"/>
-                <a:ea typeface="Calibri" pitchFamily="34" charset="-122"/>
-                <a:cs typeface="Calibri" pitchFamily="34" charset="-120"/>
+                <a:latin typeface="Calibri"/>
+                <a:ea typeface="Calibri"/>
+                <a:cs typeface="Calibri"/>
               </a:rPr>
               <a:t>Hybrid threads bound on Expanse</a:t>
             </a:r>
             <a:r>
-              <a:rPr lang="en-US" sz="1400" dirty="0">
+              <a:rPr lang="en-US" sz="1400">
                 <a:solidFill>
                   <a:srgbClr val="444444"/>
                 </a:solidFill>
-                <a:latin typeface="Calibri" pitchFamily="34" charset="0"/>
-                <a:ea typeface="Calibri" pitchFamily="34" charset="-122"/>
-                <a:cs typeface="Calibri" pitchFamily="34" charset="-120"/>
+                <a:latin typeface="Calibri"/>
+                <a:ea typeface="Calibri"/>
+                <a:cs typeface="Calibri"/>
               </a:rPr>
               <a:t> due to </a:t>
             </a:r>
             <a:r>
-              <a:rPr lang="en-US" sz="1400" dirty="0">
+              <a:rPr lang="en-US" sz="1400">
                 <a:solidFill>
                   <a:srgbClr val="444444"/>
                 </a:solidFill>
@@ -3581,7 +3702,7 @@
               <a:buNone/>
             </a:pPr>
             <a:r>
-              <a:rPr lang="en-US" sz="1400" b="1" dirty="0">
+              <a:rPr lang="en-US" sz="1400" b="1">
                 <a:solidFill>
                   <a:srgbClr val="92400E"/>
                 </a:solidFill>
@@ -3592,7 +3713,7 @@
               <a:t>One function. </a:t>
             </a:r>
             <a:r>
-              <a:rPr lang="en-US" sz="1400" dirty="0">
+              <a:rPr lang="en-US" sz="1400">
                 <a:solidFill>
                   <a:srgbClr val="92400E"/>
                 </a:solidFill>
@@ -3602,7 +3723,7 @@
               </a:rPr>
               <a:t>Each rank can build its own fold split from data it already has no MPI_Allgatherv needed.</a:t>
             </a:r>
-            <a:endParaRPr lang="en-US" sz="1400" dirty="0"/>
+            <a:endParaRPr lang="en-US" sz="1400"/>
           </a:p>
         </p:txBody>
       </p:sp>
@@ -3631,7 +3752,7 @@
               <a:buNone/>
             </a:pPr>
             <a:r>
-              <a:rPr lang="en-US" sz="1600" b="1" dirty="0" err="1">
+              <a:rPr lang="en-US" sz="1600" b="1" err="1">
                 <a:solidFill>
                   <a:srgbClr val="993C1D"/>
                 </a:solidFill>
@@ -3642,7 +3763,7 @@
               <a:t>copy_rows</a:t>
             </a:r>
             <a:r>
-              <a:rPr lang="en-US" sz="1600" b="1" dirty="0">
+              <a:rPr lang="en-US" sz="1600" b="1">
                 <a:solidFill>
                   <a:srgbClr val="993C1D"/>
                 </a:solidFill>
@@ -3652,7 +3773,7 @@
               </a:rPr>
               <a:t>: the bottleneck</a:t>
             </a:r>
-            <a:endParaRPr lang="en-US" sz="1600" dirty="0"/>
+            <a:endParaRPr lang="en-US" sz="1600"/>
           </a:p>
         </p:txBody>
       </p:sp>
@@ -3715,7 +3836,7 @@
               <a:buNone/>
             </a:pPr>
             <a:r>
-              <a:rPr lang="en-US" sz="1050" dirty="0">
+              <a:rPr lang="en-US" sz="1050">
                 <a:solidFill>
                   <a:srgbClr val="FDE68A"/>
                 </a:solidFill>
@@ -3726,7 +3847,7 @@
               <a:t>void </a:t>
             </a:r>
             <a:r>
-              <a:rPr lang="en-US" sz="1050" dirty="0">
+              <a:rPr lang="en-US" sz="1050">
                 <a:solidFill>
                   <a:srgbClr val="FFFFFF"/>
                 </a:solidFill>
@@ -3738,7 +3859,7 @@
 </a:t>
             </a:r>
             <a:r>
-              <a:rPr lang="en-US" sz="1050" dirty="0">
+              <a:rPr lang="en-US" sz="1050">
                 <a:solidFill>
                   <a:srgbClr val="888888"/>
                 </a:solidFill>
@@ -3750,7 +3871,7 @@
 </a:t>
             </a:r>
             <a:r>
-              <a:rPr lang="en-US" sz="1050" dirty="0">
+              <a:rPr lang="en-US" sz="1050">
                 <a:solidFill>
                   <a:srgbClr val="FDE68A"/>
                 </a:solidFill>
@@ -3761,7 +3882,7 @@
               <a:t>  int </a:t>
             </a:r>
             <a:r>
-              <a:rPr lang="en-US" sz="1050" dirty="0">
+              <a:rPr lang="en-US" sz="1050">
                 <a:solidFill>
                   <a:srgbClr val="FFFFFF"/>
                 </a:solidFill>
@@ -3773,7 +3894,7 @@
 </a:t>
             </a:r>
             <a:r>
-              <a:rPr lang="en-US" sz="1050" dirty="0">
+              <a:rPr lang="en-US" sz="1050">
                 <a:solidFill>
                   <a:srgbClr val="FDE68A"/>
                 </a:solidFill>
@@ -3784,7 +3905,7 @@
               <a:t>  for </a:t>
             </a:r>
             <a:r>
-              <a:rPr lang="en-US" sz="1050" dirty="0">
+              <a:rPr lang="en-US" sz="1050">
                 <a:solidFill>
                   <a:srgbClr val="FFFFFF"/>
                 </a:solidFill>
@@ -3796,7 +3917,7 @@
 </a:t>
             </a:r>
             <a:r>
-              <a:rPr lang="en-US" sz="1050" dirty="0">
+              <a:rPr lang="en-US" sz="1050">
                 <a:solidFill>
                   <a:srgbClr val="7DD3FC"/>
                 </a:solidFill>
@@ -3807,7 +3928,7 @@
               <a:t>    memcpy</a:t>
             </a:r>
             <a:r>
-              <a:rPr lang="en-US" sz="1050" dirty="0">
+              <a:rPr lang="en-US" sz="1050">
                 <a:solidFill>
                   <a:srgbClr val="FFFFFF"/>
                 </a:solidFill>
@@ -3820,7 +3941,7 @@
 </a:t>
             </a:r>
             <a:r>
-              <a:rPr lang="en-US" sz="1050" dirty="0">
+              <a:rPr lang="en-US" sz="1050">
                 <a:solidFill>
                   <a:srgbClr val="888888"/>
                 </a:solidFill>
@@ -3832,7 +3953,7 @@
 </a:t>
             </a:r>
             <a:r>
-              <a:rPr lang="en-US" sz="1050" dirty="0">
+              <a:rPr lang="en-US" sz="1050">
                 <a:solidFill>
                   <a:srgbClr val="FCA5A5"/>
                 </a:solidFill>
@@ -3843,7 +3964,7 @@
               <a:t>  MPI_Allgatherv</a:t>
             </a:r>
             <a:r>
-              <a:rPr lang="en-US" sz="1050" dirty="0">
+              <a:rPr lang="en-US" sz="1050">
                 <a:solidFill>
                   <a:srgbClr val="FFFFFF"/>
                 </a:solidFill>
@@ -3860,7 +3981,7 @@
 </a:t>
             </a:r>
             <a:r>
-              <a:rPr lang="en-US" sz="1050" dirty="0">
+              <a:rPr lang="en-US" sz="1050">
                 <a:solidFill>
                   <a:srgbClr val="888888"/>
                 </a:solidFill>
@@ -3871,7 +3992,7 @@
               <a:t>// inside </a:t>
             </a:r>
             <a:r>
-              <a:rPr lang="en-US" sz="1050" dirty="0" err="1">
+              <a:rPr lang="en-US" sz="1050" err="1">
                 <a:solidFill>
                   <a:srgbClr val="888888"/>
                 </a:solidFill>
@@ -3882,7 +4003,7 @@
               <a:t>cross_validate</a:t>
             </a:r>
             <a:r>
-              <a:rPr lang="en-US" sz="1050" dirty="0">
+              <a:rPr lang="en-US" sz="1050">
                 <a:solidFill>
                   <a:srgbClr val="888888"/>
                 </a:solidFill>
@@ -3894,7 +4015,7 @@
 </a:t>
             </a:r>
             <a:r>
-              <a:rPr lang="en-US" sz="1050" dirty="0">
+              <a:rPr lang="en-US" sz="1050">
                 <a:solidFill>
                   <a:srgbClr val="FCA5A5"/>
                 </a:solidFill>
@@ -3905,7 +4026,7 @@
               <a:t>copy_rows</a:t>
             </a:r>
             <a:r>
-              <a:rPr lang="en-US" sz="1050" dirty="0">
+              <a:rPr lang="en-US" sz="1050">
                 <a:solidFill>
                   <a:srgbClr val="FFFFFF"/>
                 </a:solidFill>
@@ -3917,7 +4038,7 @@
 </a:t>
             </a:r>
             <a:r>
-              <a:rPr lang="en-US" sz="1050" dirty="0">
+              <a:rPr lang="en-US" sz="1050">
                 <a:solidFill>
                   <a:srgbClr val="FCA5A5"/>
                 </a:solidFill>
@@ -3928,7 +4049,7 @@
               <a:t>copy_rows</a:t>
             </a:r>
             <a:r>
-              <a:rPr lang="en-US" sz="1050" dirty="0">
+              <a:rPr lang="en-US" sz="1050">
                 <a:solidFill>
                   <a:srgbClr val="FFFFFF"/>
                 </a:solidFill>
@@ -3938,7 +4059,7 @@
               </a:rPr>
               <a:t>(..., test_idx,  test_size,  ...);</a:t>
             </a:r>
-            <a:endParaRPr lang="en-US" sz="1050" dirty="0"/>
+            <a:endParaRPr lang="en-US" sz="1050"/>
           </a:p>
         </p:txBody>
       </p:sp>
@@ -4024,7 +4145,7 @@
               <a:buNone/>
             </a:pPr>
             <a:r>
-              <a:rPr lang="en-US" sz="3000" b="1" dirty="0">
+              <a:rPr lang="en-US" sz="3000" b="1">
                 <a:solidFill>
                   <a:srgbClr val="FFFFFF"/>
                 </a:solidFill>
@@ -4034,7 +4155,7 @@
               </a:rPr>
               <a:t>Fixing the Bottleneck</a:t>
             </a:r>
-            <a:endParaRPr lang="en-US" sz="3000" dirty="0"/>
+            <a:endParaRPr lang="en-US" sz="3000"/>
           </a:p>
         </p:txBody>
       </p:sp>
@@ -4063,7 +4184,7 @@
               <a:buNone/>
             </a:pPr>
             <a:r>
-              <a:rPr lang="en-US" sz="1600" b="1" dirty="0">
+              <a:rPr lang="en-US" sz="1600" b="1">
                 <a:solidFill>
                   <a:srgbClr val="0D3B6E"/>
                 </a:solidFill>
@@ -4073,7 +4194,7 @@
               </a:rPr>
               <a:t>The Fix</a:t>
             </a:r>
-            <a:endParaRPr lang="en-US" sz="1600" dirty="0"/>
+            <a:endParaRPr lang="en-US" sz="1600"/>
           </a:p>
         </p:txBody>
       </p:sp>
@@ -4106,7 +4227,7 @@
               <a:buChar char="•"/>
             </a:pPr>
             <a:r>
-              <a:rPr lang="en-US" sz="1400" b="1" dirty="0">
+              <a:rPr lang="en-US" sz="1400" b="1">
                 <a:solidFill>
                   <a:srgbClr val="0D3B6E"/>
                 </a:solidFill>
@@ -4117,7 +4238,7 @@
               <a:t>copy_rows deleted</a:t>
             </a:r>
             <a:r>
-              <a:rPr lang="en-US" sz="1400" dirty="0">
+              <a:rPr lang="en-US" sz="1400">
                 <a:solidFill>
                   <a:srgbClr val="444444"/>
                 </a:solidFill>
@@ -4129,7 +4250,7 @@
 </a:t>
             </a:r>
             <a:r>
-              <a:rPr lang="en-US" sz="1400" b="1" dirty="0" err="1">
+              <a:rPr lang="en-US" sz="1400" b="1" err="1">
                 <a:solidFill>
                   <a:srgbClr val="0D3B6E"/>
                 </a:solidFill>
@@ -4140,7 +4261,7 @@
               <a:t>accumulate_counts_range</a:t>
             </a:r>
             <a:r>
-              <a:rPr lang="en-US" sz="1400" dirty="0">
+              <a:rPr lang="en-US" sz="1400">
                 <a:solidFill>
                   <a:srgbClr val="444444"/>
                 </a:solidFill>
@@ -4151,7 +4272,7 @@
               <a:t>  added </a:t>
             </a:r>
             <a:r>
-              <a:rPr lang="en-US" sz="1400" dirty="0" err="1">
+              <a:rPr lang="en-US" sz="1400" err="1">
                 <a:solidFill>
                   <a:srgbClr val="444444"/>
                 </a:solidFill>
@@ -4162,7 +4283,7 @@
               <a:t>row_indices</a:t>
             </a:r>
             <a:r>
-              <a:rPr lang="en-US" sz="1400" dirty="0">
+              <a:rPr lang="en-US" sz="1400">
                 <a:solidFill>
                   <a:srgbClr val="444444"/>
                 </a:solidFill>
@@ -4174,7 +4295,7 @@
 </a:t>
             </a:r>
             <a:r>
-              <a:rPr lang="en-US" sz="1400" b="1" dirty="0" err="1">
+              <a:rPr lang="en-US" sz="1400" b="1" err="1">
                 <a:solidFill>
                   <a:srgbClr val="0D3B6E"/>
                 </a:solidFill>
@@ -4185,7 +4306,7 @@
               <a:t>classify_dataset</a:t>
             </a:r>
             <a:r>
-              <a:rPr lang="en-US" sz="1400" dirty="0">
+              <a:rPr lang="en-US" sz="1400">
                 <a:solidFill>
                   <a:srgbClr val="444444"/>
                 </a:solidFill>
@@ -4197,7 +4318,7 @@
 </a:t>
             </a:r>
             <a:r>
-              <a:rPr lang="en-US" sz="1400" b="1" dirty="0" err="1">
+              <a:rPr lang="en-US" sz="1400" b="1" err="1">
                 <a:solidFill>
                   <a:srgbClr val="0D3B6E"/>
                 </a:solidFill>
@@ -4208,7 +4329,7 @@
               <a:t>build_truth</a:t>
             </a:r>
             <a:r>
-              <a:rPr lang="en-US" sz="1400" dirty="0">
+              <a:rPr lang="en-US" sz="1400">
                 <a:solidFill>
                   <a:srgbClr val="444444"/>
                 </a:solidFill>
@@ -4220,7 +4341,7 @@
 </a:t>
             </a:r>
             <a:r>
-              <a:rPr lang="en-US" sz="1400" b="1" dirty="0" err="1">
+              <a:rPr lang="en-US" sz="1400" b="1" err="1">
                 <a:solidFill>
                   <a:srgbClr val="0D3B6E"/>
                 </a:solidFill>
@@ -4231,7 +4352,7 @@
               <a:t>cross_validate</a:t>
             </a:r>
             <a:r>
-              <a:rPr lang="en-US" sz="1400" dirty="0">
+              <a:rPr lang="en-US" sz="1400">
                 <a:solidFill>
                   <a:srgbClr val="444444"/>
                 </a:solidFill>
@@ -4243,7 +4364,7 @@
 </a:t>
             </a:r>
             <a:r>
-              <a:rPr lang="en-US" sz="1400" b="1" dirty="0" err="1">
+              <a:rPr lang="en-US" sz="1400" b="1" err="1">
                 <a:solidFill>
                   <a:srgbClr val="0D3B6E"/>
                 </a:solidFill>
@@ -4254,7 +4375,7 @@
               <a:t>sbash</a:t>
             </a:r>
             <a:r>
-              <a:rPr lang="en-US" sz="1400" b="1" dirty="0">
+              <a:rPr lang="en-US" sz="1400" b="1">
                 <a:solidFill>
                   <a:srgbClr val="0D3B6E"/>
                 </a:solidFill>
@@ -4265,7 +4386,7 @@
               <a:t> </a:t>
             </a:r>
             <a:r>
-              <a:rPr lang="en-US" sz="1400" dirty="0">
+              <a:rPr lang="en-US" sz="1400">
                 <a:solidFill>
                   <a:srgbClr val="444444"/>
                 </a:solidFill>
@@ -4276,7 +4397,7 @@
               <a:t>removed map and bind flags and included </a:t>
             </a:r>
             <a:r>
-              <a:rPr lang="en-US" sz="1400" dirty="0">
+              <a:rPr lang="en-US" sz="1400">
                 <a:solidFill>
                   <a:srgbClr val="444444"/>
                 </a:solidFill>
@@ -4284,7 +4405,7 @@
               <a:t>--bind-to none on every hybrid </a:t>
             </a:r>
             <a:r>
-              <a:rPr lang="en-US" sz="1400" dirty="0" err="1">
+              <a:rPr lang="en-US" sz="1400" err="1">
                 <a:solidFill>
                   <a:srgbClr val="444444"/>
                 </a:solidFill>
@@ -4292,7 +4413,7 @@
               <a:t>mpiexec</a:t>
             </a:r>
             <a:r>
-              <a:rPr lang="en-US" sz="1400" dirty="0">
+              <a:rPr lang="en-US" sz="1400">
                 <a:solidFill>
                   <a:srgbClr val="444444"/>
                 </a:solidFill>
@@ -4361,7 +4482,7 @@
               <a:buNone/>
             </a:pPr>
             <a:r>
-              <a:rPr lang="en-US" sz="1400" b="1" dirty="0">
+              <a:rPr lang="en-US" sz="1400" b="1">
                 <a:solidFill>
                   <a:srgbClr val="0F6E56"/>
                 </a:solidFill>
@@ -4372,7 +4493,7 @@
               <a:t>Result: </a:t>
             </a:r>
             <a:r>
-              <a:rPr lang="en-US" sz="1400" dirty="0">
+              <a:rPr lang="en-US" sz="1400">
                 <a:solidFill>
                   <a:srgbClr val="0F6E56"/>
                 </a:solidFill>
@@ -4382,7 +4503,7 @@
               </a:rPr>
               <a:t>10 full-dataset broadcasts per CV run eliminated. Hybrid and MPI scale properly.</a:t>
             </a:r>
-            <a:endParaRPr lang="en-US" sz="1400" dirty="0"/>
+            <a:endParaRPr lang="en-US" sz="1400"/>
           </a:p>
         </p:txBody>
       </p:sp>
@@ -4411,7 +4532,7 @@
               <a:buNone/>
             </a:pPr>
             <a:r>
-              <a:rPr lang="en-US" sz="1600" b="1" dirty="0">
+              <a:rPr lang="en-US" sz="1600" b="1">
                 <a:solidFill>
                   <a:srgbClr val="0F6E56"/>
                 </a:solidFill>
@@ -4421,7 +4542,7 @@
               </a:rPr>
               <a:t>cross_validate: build indices, pass directly</a:t>
             </a:r>
-            <a:endParaRPr lang="en-US" sz="1600" dirty="0"/>
+            <a:endParaRPr lang="en-US" sz="1600"/>
           </a:p>
         </p:txBody>
       </p:sp>
@@ -4484,7 +4605,7 @@
               <a:buNone/>
             </a:pPr>
             <a:r>
-              <a:rPr lang="en-US" sz="1100" dirty="0">
+              <a:rPr lang="en-US" sz="1100">
                 <a:solidFill>
                   <a:srgbClr val="FDE68A"/>
                 </a:solidFill>
@@ -4495,7 +4616,7 @@
               <a:t>for </a:t>
             </a:r>
             <a:r>
-              <a:rPr lang="en-US" sz="1100" dirty="0">
+              <a:rPr lang="en-US" sz="1100">
                 <a:solidFill>
                   <a:srgbClr val="FFFFFF"/>
                 </a:solidFill>
@@ -4507,7 +4628,7 @@
 </a:t>
             </a:r>
             <a:r>
-              <a:rPr lang="en-US" sz="1100" dirty="0">
+              <a:rPr lang="en-US" sz="1100">
                 <a:solidFill>
                   <a:srgbClr val="888888"/>
                 </a:solidFill>
@@ -4519,7 +4640,7 @@
 </a:t>
             </a:r>
             <a:r>
-              <a:rPr lang="en-US" sz="1100" dirty="0">
+              <a:rPr lang="en-US" sz="1100">
                 <a:solidFill>
                   <a:srgbClr val="FDE68A"/>
                 </a:solidFill>
@@ -4530,7 +4651,7 @@
               <a:t>  for </a:t>
             </a:r>
             <a:r>
-              <a:rPr lang="en-US" sz="1100" dirty="0">
+              <a:rPr lang="en-US" sz="1100">
                 <a:solidFill>
                   <a:srgbClr val="FFFFFF"/>
                 </a:solidFill>
@@ -4542,7 +4663,7 @@
 </a:t>
             </a:r>
             <a:r>
-              <a:rPr lang="en-US" sz="1100" dirty="0">
+              <a:rPr lang="en-US" sz="1100">
                 <a:solidFill>
                   <a:srgbClr val="FDE68A"/>
                 </a:solidFill>
@@ -4553,7 +4674,7 @@
               <a:t>    if </a:t>
             </a:r>
             <a:r>
-              <a:rPr lang="en-US" sz="1100" dirty="0">
+              <a:rPr lang="en-US" sz="1100">
                 <a:solidFill>
                   <a:srgbClr val="FFFFFF"/>
                 </a:solidFill>
@@ -4565,7 +4686,7 @@
 </a:t>
             </a:r>
             <a:r>
-              <a:rPr lang="en-US" sz="1100" dirty="0">
+              <a:rPr lang="en-US" sz="1100">
                 <a:solidFill>
                   <a:srgbClr val="86EFAC"/>
                 </a:solidFill>
@@ -4576,7 +4697,7 @@
               <a:t>      test_idx</a:t>
             </a:r>
             <a:r>
-              <a:rPr lang="en-US" sz="1100" dirty="0">
+              <a:rPr lang="en-US" sz="1100">
                 <a:solidFill>
                   <a:srgbClr val="FFFFFF"/>
                 </a:solidFill>
@@ -4588,7 +4709,7 @@
 </a:t>
             </a:r>
             <a:r>
-              <a:rPr lang="en-US" sz="1100" dirty="0">
+              <a:rPr lang="en-US" sz="1100">
                 <a:solidFill>
                   <a:srgbClr val="FDE68A"/>
                 </a:solidFill>
@@ -4600,7 +4721,7 @@
 </a:t>
             </a:r>
             <a:r>
-              <a:rPr lang="en-US" sz="1100" dirty="0">
+              <a:rPr lang="en-US" sz="1100">
                 <a:solidFill>
                   <a:srgbClr val="86EFAC"/>
                 </a:solidFill>
@@ -4611,7 +4732,7 @@
               <a:t>      train_idx</a:t>
             </a:r>
             <a:r>
-              <a:rPr lang="en-US" sz="1100" dirty="0">
+              <a:rPr lang="en-US" sz="1100">
                 <a:solidFill>
                   <a:srgbClr val="FFFFFF"/>
                 </a:solidFill>
@@ -4624,7 +4745,7 @@
 </a:t>
             </a:r>
             <a:r>
-              <a:rPr lang="en-US" sz="1100" dirty="0">
+              <a:rPr lang="en-US" sz="1100">
                 <a:solidFill>
                   <a:srgbClr val="888888"/>
                 </a:solidFill>
@@ -4636,7 +4757,7 @@
 </a:t>
             </a:r>
             <a:r>
-              <a:rPr lang="en-US" sz="1100" dirty="0">
+              <a:rPr lang="en-US" sz="1100">
                 <a:solidFill>
                   <a:srgbClr val="86EFAC"/>
                 </a:solidFill>
@@ -4647,7 +4768,7 @@
               <a:t>  accumulate_counts_range</a:t>
             </a:r>
             <a:r>
-              <a:rPr lang="en-US" sz="1100" dirty="0">
+              <a:rPr lang="en-US" sz="1100">
                 <a:solidFill>
                   <a:srgbClr val="FFFFFF"/>
                 </a:solidFill>
@@ -4658,7 +4779,7 @@
               <a:t>(..., </a:t>
             </a:r>
             <a:r>
-              <a:rPr lang="en-US" sz="1100" dirty="0">
+              <a:rPr lang="en-US" sz="1100">
                 <a:solidFill>
                   <a:srgbClr val="86EFAC"/>
                 </a:solidFill>
@@ -4669,7 +4790,7 @@
               <a:t>train_idx</a:t>
             </a:r>
             <a:r>
-              <a:rPr lang="en-US" sz="1100" dirty="0">
+              <a:rPr lang="en-US" sz="1100">
                 <a:solidFill>
                   <a:srgbClr val="FFFFFF"/>
                 </a:solidFill>
@@ -4681,7 +4802,7 @@
 </a:t>
             </a:r>
             <a:r>
-              <a:rPr lang="en-US" sz="1100" dirty="0">
+              <a:rPr lang="en-US" sz="1100">
                 <a:solidFill>
                   <a:srgbClr val="86EFAC"/>
                 </a:solidFill>
@@ -4692,7 +4813,7 @@
               <a:t>  classify_dataset</a:t>
             </a:r>
             <a:r>
-              <a:rPr lang="en-US" sz="1100" dirty="0">
+              <a:rPr lang="en-US" sz="1100">
                 <a:solidFill>
                   <a:srgbClr val="FFFFFF"/>
                 </a:solidFill>
@@ -4703,7 +4824,7 @@
               <a:t>(..., pred_test, </a:t>
             </a:r>
             <a:r>
-              <a:rPr lang="en-US" sz="1100" dirty="0">
+              <a:rPr lang="en-US" sz="1100">
                 <a:solidFill>
                   <a:srgbClr val="86EFAC"/>
                 </a:solidFill>
@@ -4714,7 +4835,7 @@
               <a:t>test_idx</a:t>
             </a:r>
             <a:r>
-              <a:rPr lang="en-US" sz="1100" dirty="0">
+              <a:rPr lang="en-US" sz="1100">
                 <a:solidFill>
                   <a:srgbClr val="FFFFFF"/>
                 </a:solidFill>
@@ -4726,7 +4847,7 @@
 </a:t>
             </a:r>
             <a:r>
-              <a:rPr lang="en-US" sz="1100" dirty="0">
+              <a:rPr lang="en-US" sz="1100">
                 <a:solidFill>
                   <a:srgbClr val="86EFAC"/>
                 </a:solidFill>
@@ -4737,7 +4858,7 @@
               <a:t>  build_truth</a:t>
             </a:r>
             <a:r>
-              <a:rPr lang="en-US" sz="1100" dirty="0">
+              <a:rPr lang="en-US" sz="1100">
                 <a:solidFill>
                   <a:srgbClr val="FFFFFF"/>
                 </a:solidFill>
@@ -4748,7 +4869,7 @@
               <a:t>(..., y_test, </a:t>
             </a:r>
             <a:r>
-              <a:rPr lang="en-US" sz="1100" dirty="0">
+              <a:rPr lang="en-US" sz="1100">
                 <a:solidFill>
                   <a:srgbClr val="86EFAC"/>
                 </a:solidFill>
@@ -4759,7 +4880,7 @@
               <a:t>test_idx</a:t>
             </a:r>
             <a:r>
-              <a:rPr lang="en-US" sz="1100" dirty="0">
+              <a:rPr lang="en-US" sz="1100">
                 <a:solidFill>
                   <a:srgbClr val="FFFFFF"/>
                 </a:solidFill>
@@ -4769,14 +4890,14 @@
               </a:rPr>
               <a:t>);</a:t>
             </a:r>
-            <a:endParaRPr lang="en-US" sz="1100" dirty="0"/>
+            <a:endParaRPr lang="en-US" sz="1100"/>
           </a:p>
           <a:p>
             <a:pPr marL="0" indent="0">
               <a:buNone/>
             </a:pPr>
             <a:r>
-              <a:rPr lang="en-US" sz="1050" dirty="0">
+              <a:rPr lang="en-US" sz="1050">
                 <a:solidFill>
                   <a:srgbClr val="FFFFFF"/>
                 </a:solidFill>
@@ -4786,7 +4907,7 @@
               </a:rPr>
               <a:t>}</a:t>
             </a:r>
-            <a:endParaRPr lang="en-US" sz="1050" dirty="0"/>
+            <a:endParaRPr lang="en-US" sz="1050"/>
           </a:p>
         </p:txBody>
       </p:sp>
@@ -4872,7 +4993,7 @@
               <a:buNone/>
             </a:pPr>
             <a:r>
-              <a:rPr lang="en-US" sz="3000" b="1" dirty="0">
+              <a:rPr lang="en-US" sz="3000" b="1">
                 <a:solidFill>
                   <a:srgbClr val="FFFFFF"/>
                 </a:solidFill>
@@ -4882,7 +5003,7 @@
               </a:rPr>
               <a:t>MPI Results: After the Fix</a:t>
             </a:r>
-            <a:endParaRPr lang="en-US" sz="3000" dirty="0"/>
+            <a:endParaRPr lang="en-US" sz="3000"/>
           </a:p>
         </p:txBody>
       </p:sp>
@@ -4945,7 +5066,7 @@
               <a:buNone/>
             </a:pPr>
             <a:r>
-              <a:rPr lang="en-US" sz="1600" b="1" dirty="0">
+              <a:rPr lang="en-US" sz="1600" b="1">
                 <a:solidFill>
                   <a:srgbClr val="993C1D"/>
                 </a:solidFill>
@@ -4956,7 +5077,7 @@
               <a:t>Expanse: </a:t>
             </a:r>
             <a:r>
-              <a:rPr lang="en-US" sz="1600" dirty="0">
+              <a:rPr lang="en-US" sz="1600">
                 <a:solidFill>
                   <a:srgbClr val="444444"/>
                 </a:solidFill>
@@ -4968,7 +5089,7 @@
 </a:t>
             </a:r>
             <a:r>
-              <a:rPr lang="en-US" sz="1600" b="1" dirty="0">
+              <a:rPr lang="en-US" sz="1600" b="1">
                 <a:solidFill>
                   <a:srgbClr val="993C1D"/>
                 </a:solidFill>
@@ -4979,7 +5100,7 @@
               <a:t>Linux Cluster: </a:t>
             </a:r>
             <a:r>
-              <a:rPr lang="en-US" sz="1600" dirty="0">
+              <a:rPr lang="en-US" sz="1600">
                 <a:solidFill>
                   <a:srgbClr val="444444"/>
                 </a:solidFill>
@@ -4989,7 +5110,7 @@
               </a:rPr>
               <a:t>Reaches 2.67x at 8 procs. Up from 1.28x in v1.</a:t>
             </a:r>
-            <a:endParaRPr lang="en-US" sz="1600" dirty="0"/>
+            <a:endParaRPr lang="en-US" sz="1600"/>
           </a:p>
         </p:txBody>
       </p:sp>
@@ -5105,7 +5226,7 @@
               <a:buNone/>
             </a:pPr>
             <a:r>
-              <a:rPr lang="en-US" sz="3000" b="1" dirty="0">
+              <a:rPr lang="en-US" sz="3000" b="1">
                 <a:solidFill>
                   <a:srgbClr val="FFFFFF"/>
                 </a:solidFill>
@@ -5115,7 +5236,7 @@
               </a:rPr>
               <a:t>Hybrid Results: After the Fix</a:t>
             </a:r>
-            <a:endParaRPr lang="en-US" sz="3000" dirty="0"/>
+            <a:endParaRPr lang="en-US" sz="3000"/>
           </a:p>
         </p:txBody>
       </p:sp>
@@ -5178,7 +5299,7 @@
               <a:buNone/>
             </a:pPr>
             <a:r>
-              <a:rPr lang="en-US" sz="1600" b="1" dirty="0">
+              <a:rPr lang="en-US" sz="1600" b="1">
                 <a:solidFill>
                   <a:srgbClr val="0F6E56"/>
                 </a:solidFill>
@@ -5189,7 +5310,7 @@
               <a:t>Expanse: </a:t>
             </a:r>
             <a:r>
-              <a:rPr lang="en-US" sz="1600" dirty="0">
+              <a:rPr lang="en-US" sz="1600">
                 <a:solidFill>
                   <a:srgbClr val="444444"/>
                 </a:solidFill>
@@ -5201,7 +5322,7 @@
 </a:t>
             </a:r>
             <a:r>
-              <a:rPr lang="en-US" sz="1600" b="1" dirty="0">
+              <a:rPr lang="en-US" sz="1600" b="1">
                 <a:solidFill>
                   <a:srgbClr val="993C1D"/>
                 </a:solidFill>
@@ -5212,7 +5333,7 @@
               <a:t>Linux Cluster: </a:t>
             </a:r>
             <a:r>
-              <a:rPr lang="en-US" sz="1600" dirty="0">
+              <a:rPr lang="en-US" sz="1600">
                 <a:solidFill>
                   <a:srgbClr val="444444"/>
                 </a:solidFill>
@@ -5222,7 +5343,7 @@
               </a:rPr>
               <a:t>Best config hits 3.13x at 2p x 8t. Up from 2.90x in v1.</a:t>
             </a:r>
-            <a:endParaRPr lang="en-US" sz="1600" dirty="0"/>
+            <a:endParaRPr lang="en-US" sz="1600"/>
           </a:p>
         </p:txBody>
       </p:sp>
@@ -5338,7 +5459,7 @@
               <a:buNone/>
             </a:pPr>
             <a:r>
-              <a:rPr lang="en-US" sz="3000" b="1" dirty="0">
+              <a:rPr lang="en-US" sz="3000" b="1">
                 <a:solidFill>
                   <a:srgbClr val="FFFFFF"/>
                 </a:solidFill>
@@ -5348,7 +5469,7 @@
               </a:rPr>
               <a:t>Parallel Efficiency: OMP vs MPI</a:t>
             </a:r>
-            <a:endParaRPr lang="en-US" sz="3000" dirty="0"/>
+            <a:endParaRPr lang="en-US" sz="3000"/>
           </a:p>
         </p:txBody>
       </p:sp>
@@ -5411,7 +5532,7 @@
               <a:buNone/>
             </a:pPr>
             <a:r>
-              <a:rPr lang="en-US" sz="1600" b="1" dirty="0">
+              <a:rPr lang="en-US" sz="1600" b="1">
                 <a:solidFill>
                   <a:srgbClr val="185FA5"/>
                 </a:solidFill>
@@ -5422,7 +5543,7 @@
               <a:t>OMP: </a:t>
             </a:r>
             <a:r>
-              <a:rPr lang="en-US" sz="1600" dirty="0">
+              <a:rPr lang="en-US" sz="1600">
                 <a:solidFill>
                   <a:srgbClr val="444444"/>
                 </a:solidFill>
@@ -5434,7 +5555,7 @@
 </a:t>
             </a:r>
             <a:r>
-              <a:rPr lang="en-US" sz="1600" b="1" dirty="0">
+              <a:rPr lang="en-US" sz="1600" b="1">
                 <a:solidFill>
                   <a:srgbClr val="993C1D"/>
                 </a:solidFill>
@@ -5445,7 +5566,7 @@
               <a:t>MPI v2: </a:t>
             </a:r>
             <a:r>
-              <a:rPr lang="en-US" sz="1600" dirty="0">
+              <a:rPr lang="en-US" sz="1600">
                 <a:solidFill>
                   <a:srgbClr val="444444"/>
                 </a:solidFill>
@@ -5455,7 +5576,7 @@
               </a:rPr>
               <a:t>Efficiency now tracks OMP closely. v1 collapsed due to broadcast overhead.</a:t>
             </a:r>
-            <a:endParaRPr lang="en-US" sz="1600" dirty="0"/>
+            <a:endParaRPr lang="en-US" sz="1600"/>
           </a:p>
         </p:txBody>
       </p:sp>
@@ -5571,7 +5692,7 @@
               <a:buNone/>
             </a:pPr>
             <a:r>
-              <a:rPr lang="en-US" sz="3000" b="1" dirty="0">
+              <a:rPr lang="en-US" sz="3000" b="1">
                 <a:solidFill>
                   <a:srgbClr val="FFFFFF"/>
                 </a:solidFill>
@@ -5581,7 +5702,7 @@
               </a:rPr>
               <a:t>Naive Bayes Classifier</a:t>
             </a:r>
-            <a:endParaRPr lang="en-US" sz="3000" dirty="0"/>
+            <a:endParaRPr lang="en-US" sz="3000"/>
           </a:p>
         </p:txBody>
       </p:sp>
@@ -5614,7 +5735,7 @@
               <a:buChar char="•"/>
             </a:pPr>
             <a:r>
-              <a:rPr lang="en-US" dirty="0">
+              <a:rPr lang="en-US">
                 <a:solidFill>
                   <a:srgbClr val="1A1A1A"/>
                 </a:solidFill>
@@ -5624,7 +5745,7 @@
               </a:rPr>
               <a:t>All features are integer-coded categories</a:t>
             </a:r>
-            <a:endParaRPr lang="en-US" dirty="0"/>
+            <a:endParaRPr lang="en-US"/>
           </a:p>
           <a:p>
             <a:pPr marL="342900" indent="-342900">
@@ -5635,7 +5756,7 @@
               <a:buChar char="•"/>
             </a:pPr>
             <a:r>
-              <a:rPr lang="en-US" dirty="0">
+              <a:rPr lang="en-US">
                 <a:solidFill>
                   <a:srgbClr val="1A1A1A"/>
                 </a:solidFill>
@@ -5645,7 +5766,7 @@
               </a:rPr>
               <a:t>Training and classification processed row by row: no dependencies between rows</a:t>
             </a:r>
-            <a:endParaRPr lang="en-US" dirty="0"/>
+            <a:endParaRPr lang="en-US"/>
           </a:p>
           <a:p>
             <a:pPr marL="342900" indent="-342900">
@@ -5656,7 +5777,7 @@
               <a:buChar char="•"/>
             </a:pPr>
             <a:r>
-              <a:rPr lang="en-US" dirty="0">
+              <a:rPr lang="en-US">
                 <a:solidFill>
                   <a:srgbClr val="1A1A1A"/>
                 </a:solidFill>
@@ -5666,7 +5787,7 @@
               </a:rPr>
               <a:t>5-fold cross-validation: split data into 5 parts, train on 4, test on 1, rotate and repeat</a:t>
             </a:r>
-            <a:endParaRPr lang="en-US" dirty="0"/>
+            <a:endParaRPr lang="en-US"/>
           </a:p>
           <a:p>
             <a:pPr marL="342900" indent="-342900">
@@ -5677,7 +5798,7 @@
               <a:buChar char="•"/>
             </a:pPr>
             <a:r>
-              <a:rPr lang="en-US" dirty="0">
+              <a:rPr lang="en-US">
                 <a:solidFill>
                   <a:srgbClr val="1A1A1A"/>
                 </a:solidFill>
@@ -5687,7 +5808,7 @@
               </a:rPr>
               <a:t>ML metrics reported: accuracy and confusion matrix per fold</a:t>
             </a:r>
-            <a:endParaRPr lang="en-US" dirty="0"/>
+            <a:endParaRPr lang="en-US"/>
           </a:p>
           <a:p>
             <a:pPr marL="342900" indent="-342900">
@@ -5695,7 +5816,7 @@
               <a:buChar char="•"/>
             </a:pPr>
             <a:r>
-              <a:rPr lang="en-US" dirty="0">
+              <a:rPr lang="en-US">
                 <a:solidFill>
                   <a:srgbClr val="1A1A1A"/>
                 </a:solidFill>
@@ -5705,7 +5826,7 @@
               </a:rPr>
               <a:t>Log probabilities for numerical stability; Laplace smoothing (alpha=1.0) for unseen values</a:t>
             </a:r>
-            <a:endParaRPr lang="en-US" dirty="0"/>
+            <a:endParaRPr lang="en-US"/>
           </a:p>
         </p:txBody>
       </p:sp>
@@ -5768,7 +5889,7 @@
               <a:buNone/>
             </a:pPr>
             <a:r>
-              <a:rPr lang="en-US" sz="2000" b="1" dirty="0">
+              <a:rPr lang="en-US" sz="2000" b="1">
                 <a:solidFill>
                   <a:srgbClr val="FFFFFF"/>
                 </a:solidFill>
@@ -5784,7 +5905,7 @@
               <a:buNone/>
             </a:pPr>
             <a:r>
-              <a:rPr lang="en-US" sz="2000" b="1" dirty="0">
+              <a:rPr lang="en-US" sz="2000" b="1">
                 <a:solidFill>
                   <a:srgbClr val="FFFFFF"/>
                 </a:solidFill>
@@ -5794,7 +5915,7 @@
               </a:rPr>
               <a:t> P(y) ∏ P(xᵢ | y)</a:t>
             </a:r>
-            <a:endParaRPr lang="en-US" sz="2000" dirty="0"/>
+            <a:endParaRPr lang="en-US" sz="2000"/>
           </a:p>
         </p:txBody>
       </p:sp>
@@ -5860,7 +5981,7 @@
               <a:buNone/>
             </a:pPr>
             <a:r>
-              <a:rPr lang="en-US" sz="1600" b="1" dirty="0">
+              <a:rPr lang="en-US" sz="1600" b="1">
                 <a:solidFill>
                   <a:srgbClr val="0D3B6E"/>
                 </a:solidFill>
@@ -5871,7 +5992,7 @@
               <a:t>P(y)</a:t>
             </a:r>
             <a:r>
-              <a:rPr lang="en-US" sz="1600" dirty="0">
+              <a:rPr lang="en-US" sz="1600">
                 <a:solidFill>
                   <a:srgbClr val="444444"/>
                 </a:solidFill>
@@ -5883,7 +6004,7 @@
 </a:t>
             </a:r>
             <a:r>
-              <a:rPr lang="en-US" sz="1600" b="1" dirty="0">
+              <a:rPr lang="en-US" sz="1600" b="1">
                 <a:solidFill>
                   <a:srgbClr val="0D3B6E"/>
                 </a:solidFill>
@@ -5894,7 +6015,7 @@
               <a:t>P(xᵢ | y)</a:t>
             </a:r>
             <a:r>
-              <a:rPr lang="en-US" sz="1600" dirty="0">
+              <a:rPr lang="en-US" sz="1600">
                 <a:solidFill>
                   <a:srgbClr val="444444"/>
                 </a:solidFill>
@@ -5906,7 +6027,7 @@
 </a:t>
             </a:r>
             <a:r>
-              <a:rPr lang="en-US" sz="1600" b="1" dirty="0">
+              <a:rPr lang="en-US" sz="1600" b="1">
                 <a:solidFill>
                   <a:srgbClr val="0D3B6E"/>
                 </a:solidFill>
@@ -5917,7 +6038,7 @@
               <a:t>Predict</a:t>
             </a:r>
             <a:r>
-              <a:rPr lang="en-US" sz="1600" dirty="0">
+              <a:rPr lang="en-US" sz="1600">
                 <a:solidFill>
                   <a:srgbClr val="444444"/>
                 </a:solidFill>
@@ -5927,7 +6048,7 @@
               </a:rPr>
               <a:t> = argmax [ log P(y) + Σ log P(xᵢ|y) ]</a:t>
             </a:r>
-            <a:endParaRPr lang="en-US" sz="1600" dirty="0"/>
+            <a:endParaRPr lang="en-US" sz="1600"/>
           </a:p>
         </p:txBody>
       </p:sp>
@@ -5990,7 +6111,7 @@
               <a:buNone/>
             </a:pPr>
             <a:r>
-              <a:rPr lang="en-US" sz="1400" b="1" dirty="0">
+              <a:rPr lang="en-US" sz="1400" b="1">
                 <a:solidFill>
                   <a:srgbClr val="92400E"/>
                 </a:solidFill>
@@ -6001,7 +6122,7 @@
               <a:t>Note: </a:t>
             </a:r>
             <a:r>
-              <a:rPr lang="en-US" sz="1400" dirty="0">
+              <a:rPr lang="en-US" sz="1400">
                 <a:solidFill>
                   <a:srgbClr val="92400E"/>
                 </a:solidFill>
@@ -6011,7 +6132,7 @@
               </a:rPr>
               <a:t>Training and test sets are drawn from the same data. Accuracy will be artificially high. This is a parallel computing performance exercise, not a production ML system.</a:t>
             </a:r>
-            <a:endParaRPr lang="en-US" sz="1400" dirty="0"/>
+            <a:endParaRPr lang="en-US" sz="1400"/>
           </a:p>
         </p:txBody>
       </p:sp>
@@ -6097,7 +6218,7 @@
               <a:buNone/>
             </a:pPr>
             <a:r>
-              <a:rPr lang="en-US" sz="3000" b="1" dirty="0">
+              <a:rPr lang="en-US" sz="3000" b="1">
                 <a:solidFill>
                   <a:srgbClr val="FFFFFF"/>
                 </a:solidFill>
@@ -6107,7 +6228,7 @@
               </a:rPr>
               <a:t>Data-Size Scaling</a:t>
             </a:r>
-            <a:endParaRPr lang="en-US" sz="3000" dirty="0"/>
+            <a:endParaRPr lang="en-US" sz="3000"/>
           </a:p>
         </p:txBody>
       </p:sp>
@@ -6170,7 +6291,7 @@
               <a:buNone/>
             </a:pPr>
             <a:r>
-              <a:rPr lang="en-US" sz="1600" b="1" dirty="0">
+              <a:rPr lang="en-US" sz="1600" b="1">
                 <a:solidFill>
                   <a:srgbClr val="92400E"/>
                 </a:solidFill>
@@ -6181,7 +6302,7 @@
               <a:t>Expanse: </a:t>
             </a:r>
             <a:r>
-              <a:rPr lang="en-US" sz="1600" dirty="0">
+              <a:rPr lang="en-US" sz="1600">
                 <a:solidFill>
                   <a:srgbClr val="444444"/>
                 </a:solidFill>
@@ -6193,7 +6314,7 @@
 </a:t>
             </a:r>
             <a:r>
-              <a:rPr lang="en-US" sz="1600" b="1" dirty="0">
+              <a:rPr lang="en-US" sz="1600" b="1">
                 <a:solidFill>
                   <a:srgbClr val="993C1D"/>
                 </a:solidFill>
@@ -6204,7 +6325,7 @@
               <a:t>Linux Cluster: </a:t>
             </a:r>
             <a:r>
-              <a:rPr lang="en-US" sz="1600" dirty="0">
+              <a:rPr lang="en-US" sz="1600">
                 <a:solidFill>
                   <a:srgbClr val="444444"/>
                 </a:solidFill>
@@ -6214,7 +6335,7 @@
               </a:rPr>
               <a:t>Performance increases initially then decreases as N increases.</a:t>
             </a:r>
-            <a:endParaRPr lang="en-US" sz="1600" dirty="0"/>
+            <a:endParaRPr lang="en-US" sz="1600"/>
           </a:p>
         </p:txBody>
       </p:sp>
@@ -6330,7 +6451,7 @@
               <a:buNone/>
             </a:pPr>
             <a:r>
-              <a:rPr lang="en-US" sz="3000" b="1" dirty="0">
+              <a:rPr lang="en-US" sz="3000" b="1">
                 <a:solidFill>
                   <a:srgbClr val="FFFFFF"/>
                 </a:solidFill>
@@ -6340,7 +6461,7 @@
               </a:rPr>
               <a:t>Best Configuration Summary</a:t>
             </a:r>
-            <a:endParaRPr lang="en-US" sz="3000" dirty="0"/>
+            <a:endParaRPr lang="en-US" sz="3000"/>
           </a:p>
         </p:txBody>
       </p:sp>
@@ -6403,7 +6524,7 @@
               <a:buNone/>
             </a:pPr>
             <a:r>
-              <a:rPr lang="en-US" sz="1600" b="1" dirty="0">
+              <a:rPr lang="en-US" sz="1600" b="1">
                 <a:solidFill>
                   <a:srgbClr val="185FA5"/>
                 </a:solidFill>
@@ -6414,7 +6535,7 @@
               <a:t>Expanse: </a:t>
             </a:r>
             <a:r>
-              <a:rPr lang="en-US" sz="1600" dirty="0">
+              <a:rPr lang="en-US" sz="1600">
                 <a:solidFill>
                   <a:srgbClr val="444444"/>
                 </a:solidFill>
@@ -6426,7 +6547,7 @@
 </a:t>
             </a:r>
             <a:r>
-              <a:rPr lang="en-US" sz="1600" b="1" dirty="0">
+              <a:rPr lang="en-US" sz="1600" b="1">
                 <a:solidFill>
                   <a:srgbClr val="993C1D"/>
                 </a:solidFill>
@@ -6437,7 +6558,7 @@
               <a:t>Linux Cluster: </a:t>
             </a:r>
             <a:r>
-              <a:rPr lang="en-US" sz="1600" dirty="0">
+              <a:rPr lang="en-US" sz="1600">
                 <a:solidFill>
                   <a:srgbClr val="444444"/>
                 </a:solidFill>
@@ -6447,7 +6568,7 @@
               </a:rPr>
               <a:t>OMP leads at 3.29x. MPI v2 reaches 2.67x. Hybrid peaks at 3.13x.</a:t>
             </a:r>
-            <a:endParaRPr lang="en-US" sz="1600" dirty="0"/>
+            <a:endParaRPr lang="en-US" sz="1600"/>
           </a:p>
         </p:txBody>
       </p:sp>
@@ -6563,7 +6684,7 @@
               <a:buNone/>
             </a:pPr>
             <a:r>
-              <a:rPr lang="en-US" sz="3000" b="1" dirty="0">
+              <a:rPr lang="en-US" sz="3000" b="1">
                 <a:solidFill>
                   <a:srgbClr val="FFFFFF"/>
                 </a:solidFill>
@@ -6573,7 +6694,7 @@
               </a:rPr>
               <a:t>Conclusions</a:t>
             </a:r>
-            <a:endParaRPr lang="en-US" sz="3000" dirty="0"/>
+            <a:endParaRPr lang="en-US" sz="3000"/>
           </a:p>
         </p:txBody>
       </p:sp>
@@ -6636,7 +6757,7 @@
               <a:buNone/>
             </a:pPr>
             <a:r>
-              <a:rPr lang="en-US" sz="1600" b="1" dirty="0">
+              <a:rPr lang="en-US" sz="1600" b="1">
                 <a:solidFill>
                   <a:srgbClr val="185FA5"/>
                 </a:solidFill>
@@ -6646,7 +6767,7 @@
               </a:rPr>
               <a:t>Pipeline &amp; Methodology</a:t>
             </a:r>
-            <a:endParaRPr lang="en-US" sz="1600" dirty="0"/>
+            <a:endParaRPr lang="en-US" sz="1600"/>
           </a:p>
         </p:txBody>
       </p:sp>
@@ -6668,29 +6789,76 @@
           <a:ln/>
         </p:spPr>
         <p:txBody>
-          <a:bodyPr wrap="square" rtlCol="0" anchor="t"/>
-          <a:lstStyle/>
-          <a:p>
-            <a:pPr marL="0" indent="0">
+          <a:bodyPr wrap="square" lIns="91440" tIns="45720" rIns="91440" bIns="45720" rtlCol="0" anchor="t"/>
+          <a:lstStyle/>
+          <a:p>
+            <a:pPr>
               <a:spcAft>
                 <a:spcPts val="400"/>
               </a:spcAft>
-              <a:buNone/>
-            </a:pPr>
+            </a:pPr>
+            <a:r>
+              <a:rPr lang="en-US" sz="1400" err="1">
+                <a:solidFill>
+                  <a:srgbClr val="1A1A1A"/>
+                </a:solidFill>
+                <a:latin typeface="Calibri"/>
+                <a:ea typeface="Calibri"/>
+                <a:cs typeface="Calibri"/>
+              </a:rPr>
+              <a:t>sbash</a:t>
+            </a:r>
             <a:r>
               <a:rPr lang="en-US" sz="1400" dirty="0">
                 <a:solidFill>
                   <a:srgbClr val="1A1A1A"/>
                 </a:solidFill>
-                <a:latin typeface="Calibri" pitchFamily="34" charset="0"/>
-                <a:ea typeface="Calibri" pitchFamily="34" charset="-122"/>
-                <a:cs typeface="Calibri" pitchFamily="34" charset="-120"/>
-              </a:rPr>
-              <a:t>bash scripts,  Python parser, Jupyter notebook created a fast feedback loop
+                <a:latin typeface="Calibri"/>
+                <a:ea typeface="Calibri"/>
+                <a:cs typeface="Calibri"/>
+              </a:rPr>
+              <a:t> scripts,  Python parser, </a:t>
+            </a:r>
+            <a:r>
+              <a:rPr lang="en-US" sz="1400" err="1">
+                <a:solidFill>
+                  <a:srgbClr val="1A1A1A"/>
+                </a:solidFill>
+                <a:latin typeface="Calibri"/>
+                <a:ea typeface="Calibri"/>
+                <a:cs typeface="Calibri"/>
+              </a:rPr>
+              <a:t>Jupyter</a:t>
+            </a:r>
+            <a:r>
+              <a:rPr lang="en-US" sz="1400" dirty="0">
+                <a:solidFill>
+                  <a:srgbClr val="1A1A1A"/>
+                </a:solidFill>
+                <a:latin typeface="Calibri"/>
+                <a:ea typeface="Calibri"/>
+                <a:cs typeface="Calibri"/>
+              </a:rPr>
+              <a:t> notebook created a fast feedback loop
 Timing each phase independently revealed that CV dominated runtime 
-Data visualization caught the MPI bottleneck and drove the v2 fix</a:t>
-            </a:r>
-            <a:endParaRPr lang="en-US" sz="1400" dirty="0"/>
+Data visualization caught the MPI bottleneck and </a:t>
+            </a:r>
+            <a:r>
+              <a:rPr lang="en-US" sz="1400">
+                <a:solidFill>
+                  <a:srgbClr val="1A1A1A"/>
+                </a:solidFill>
+                <a:latin typeface="Calibri"/>
+                <a:ea typeface="Calibri"/>
+                <a:cs typeface="Calibri"/>
+              </a:rPr>
+              <a:t>the Hybrid bottleneck driving the v2 fix</a:t>
+            </a:r>
+            <a:endParaRPr lang="en-US" sz="1400">
+              <a:latin typeface="Calibri"/>
+              <a:ea typeface="Calibri"/>
+              <a:cs typeface="Calibri"/>
+            </a:endParaRPr>
           </a:p>
         </p:txBody>
       </p:sp>
@@ -6753,7 +6921,7 @@
               <a:buNone/>
             </a:pPr>
             <a:r>
-              <a:rPr lang="en-US" sz="1600" b="1" dirty="0">
+              <a:rPr lang="en-US" sz="1600" b="1">
                 <a:solidFill>
                   <a:srgbClr val="0F6E56"/>
                 </a:solidFill>
@@ -6763,7 +6931,7 @@
               </a:rPr>
               <a:t>Results</a:t>
             </a:r>
-            <a:endParaRPr lang="en-US" sz="1600" dirty="0"/>
+            <a:endParaRPr lang="en-US" sz="1600"/>
           </a:p>
         </p:txBody>
       </p:sp>
@@ -6785,7 +6953,7 @@
           <a:ln/>
         </p:spPr>
         <p:txBody>
-          <a:bodyPr wrap="square" rtlCol="0" anchor="t"/>
+          <a:bodyPr wrap="square" lIns="91440" tIns="45720" rIns="91440" bIns="45720" rtlCol="0" anchor="t"/>
           <a:lstStyle/>
           <a:p>
             <a:pPr marL="0" indent="0">
@@ -6799,9 +6967,9 @@
                 <a:solidFill>
                   <a:srgbClr val="1A1A1A"/>
                 </a:solidFill>
-                <a:latin typeface="Calibri" pitchFamily="34" charset="0"/>
-                <a:ea typeface="Calibri" pitchFamily="34" charset="-122"/>
-                <a:cs typeface="Calibri" pitchFamily="34" charset="-120"/>
+                <a:latin typeface="Calibri"/>
+                <a:ea typeface="Calibri"/>
+                <a:cs typeface="Calibri"/>
               </a:rPr>
               <a:t>OMP scaled well on both systems:  design paid off
 MPI v1 bottlenecked by </a:t>
@@ -6811,9 +6979,9 @@
                 <a:solidFill>
                   <a:srgbClr val="1A1A1A"/>
                 </a:solidFill>
-                <a:latin typeface="Calibri" pitchFamily="34" charset="0"/>
-                <a:ea typeface="Calibri" pitchFamily="34" charset="-122"/>
-                <a:cs typeface="Calibri" pitchFamily="34" charset="-120"/>
+                <a:latin typeface="Calibri"/>
+                <a:ea typeface="Calibri"/>
+                <a:cs typeface="Calibri"/>
               </a:rPr>
               <a:t>copy_rows</a:t>
             </a:r>
@@ -6822,33 +6990,47 @@
                 <a:solidFill>
                   <a:srgbClr val="1A1A1A"/>
                 </a:solidFill>
-                <a:latin typeface="Calibri" pitchFamily="34" charset="0"/>
-                <a:ea typeface="Calibri" pitchFamily="34" charset="-122"/>
-                <a:cs typeface="Calibri" pitchFamily="34" charset="-120"/>
+                <a:latin typeface="Calibri"/>
+                <a:ea typeface="Calibri"/>
+                <a:cs typeface="Calibri"/>
               </a:rPr>
               <a:t>, v2 fixed it and scaled to 6.55x on Expanse
 Hybrid v2 reached 8.06x combining both levels of parallelism</a:t>
             </a:r>
           </a:p>
           <a:p>
-            <a:pPr marL="0" indent="0">
+            <a:pPr>
               <a:spcAft>
                 <a:spcPts val="400"/>
               </a:spcAft>
-              <a:buNone/>
             </a:pPr>
             <a:r>
               <a:rPr lang="en-US" sz="1400" dirty="0">
                 <a:solidFill>
                   <a:srgbClr val="1A1A1A"/>
                 </a:solidFill>
-                <a:latin typeface="Calibri" pitchFamily="34" charset="0"/>
-                <a:ea typeface="Calibri" pitchFamily="34" charset="-122"/>
-                <a:cs typeface="Calibri" pitchFamily="34" charset="-120"/>
-              </a:rPr>
-              <a:t>Both MPI and Hybrid under performed vs OMP</a:t>
-            </a:r>
-            <a:endParaRPr lang="en-US" sz="1400" dirty="0"/>
+                <a:latin typeface="Calibri"/>
+                <a:ea typeface="Calibri"/>
+                <a:cs typeface="Calibri"/>
+              </a:rPr>
+              <a:t>Both MPI and Hybrid </a:t>
+            </a:r>
+            <a:r>
+              <a:rPr lang="en-US" sz="1400">
+                <a:solidFill>
+                  <a:srgbClr val="1A1A1A"/>
+                </a:solidFill>
+                <a:latin typeface="Calibri"/>
+                <a:ea typeface="Calibri"/>
+                <a:cs typeface="Calibri"/>
+              </a:rPr>
+              <a:t>underperformed OMP</a:t>
+            </a:r>
+            <a:endParaRPr lang="en-US" sz="1400">
+              <a:latin typeface="Calibri"/>
+              <a:ea typeface="Calibri"/>
+              <a:cs typeface="Calibri"/>
+            </a:endParaRPr>
           </a:p>
         </p:txBody>
       </p:sp>
@@ -6882,7 +7064,7 @@
           <a:bodyPr/>
           <a:lstStyle/>
           <a:p>
-            <a:endParaRPr lang="en-US" dirty="0"/>
+            <a:endParaRPr lang="en-US"/>
           </a:p>
         </p:txBody>
       </p:sp>
@@ -6911,7 +7093,7 @@
               <a:buNone/>
             </a:pPr>
             <a:r>
-              <a:rPr lang="en-US" sz="1600" b="1" dirty="0">
+              <a:rPr lang="en-US" sz="1600" b="1">
                 <a:solidFill>
                   <a:srgbClr val="92400E"/>
                 </a:solidFill>
@@ -6921,7 +7103,7 @@
               </a:rPr>
               <a:t>Expanse 16p x 16t Collapse</a:t>
             </a:r>
-            <a:endParaRPr lang="en-US" sz="1600" dirty="0"/>
+            <a:endParaRPr lang="en-US" sz="1600"/>
           </a:p>
         </p:txBody>
       </p:sp>
@@ -6943,23 +7125,31 @@
           <a:ln/>
         </p:spPr>
         <p:txBody>
-          <a:bodyPr wrap="square" rtlCol="0" anchor="t"/>
+          <a:bodyPr wrap="square" lIns="91440" tIns="45720" rIns="91440" bIns="45720" rtlCol="0" anchor="t"/>
           <a:lstStyle/>
           <a:p>
             <a:r>
               <a:rPr lang="en-US" sz="1400" dirty="0"/>
               <a:t>Allocated 4 nodes × 16 tasks × 8 CPUs to fully utilize 128 cores per node</a:t>
             </a:r>
-          </a:p>
-          <a:p>
-            <a:r>
-              <a:rPr lang="en-US" sz="1400" dirty="0"/>
+            <a:endParaRPr lang="en-US" dirty="0">
+              <a:ea typeface="Calibri" panose="020F0502020204030204"/>
+              <a:cs typeface="Calibri" panose="020F0502020204030204"/>
+            </a:endParaRPr>
+          </a:p>
+          <a:p>
+            <a:r>
+              <a:rPr lang="en-US" sz="1400"/>
               <a:t>--bind-to none untethered threads from specific cores but all 16 threads still run within their rank 16 threads per rank exceeded the 8-CPU ceiling; more nodes cannot fix intra-rank oversubscription</a:t>
             </a:r>
-          </a:p>
-          <a:p>
-            <a:r>
-              <a:rPr lang="en-US" sz="1400" dirty="0"/>
+            <a:endParaRPr lang="en-US" sz="1400">
+              <a:ea typeface="Calibri" panose="020F0502020204030204"/>
+              <a:cs typeface="Calibri" panose="020F0502020204030204"/>
+            </a:endParaRPr>
+          </a:p>
+          <a:p>
+            <a:r>
+              <a:rPr lang="en-US" sz="1400"/>
               <a:t>Collapse to 0.628x below serial is the expected result of 2:1 thread oversubscription </a:t>
             </a:r>
             <a:r>
@@ -6967,14 +7157,18 @@
                 <a:solidFill>
                   <a:srgbClr val="1A1A1A"/>
                 </a:solidFill>
-                <a:latin typeface="Calibri" pitchFamily="34" charset="0"/>
-                <a:ea typeface="Calibri" pitchFamily="34" charset="-122"/>
-                <a:cs typeface="Calibri" pitchFamily="34" charset="-120"/>
+                <a:latin typeface="Calibri"/>
+                <a:ea typeface="Calibri"/>
+                <a:cs typeface="Calibri"/>
               </a:rPr>
               <a:t>
 </a:t>
             </a:r>
-            <a:endParaRPr lang="en-US" sz="1400" dirty="0"/>
+            <a:endParaRPr lang="en-US" sz="1400" dirty="0">
+              <a:latin typeface="Calibri"/>
+              <a:ea typeface="Calibri"/>
+              <a:cs typeface="Calibri"/>
+            </a:endParaRPr>
           </a:p>
         </p:txBody>
       </p:sp>
@@ -7037,7 +7231,7 @@
               <a:buNone/>
             </a:pPr>
             <a:r>
-              <a:rPr lang="en-US" sz="1600" b="1" dirty="0">
+              <a:rPr lang="en-US" sz="1600" b="1">
                 <a:solidFill>
                   <a:srgbClr val="993C1D"/>
                 </a:solidFill>
@@ -7047,7 +7241,7 @@
               </a:rPr>
               <a:t>Linux Cluster Observations</a:t>
             </a:r>
-            <a:endParaRPr lang="en-US" sz="1600" dirty="0"/>
+            <a:endParaRPr lang="en-US" sz="1600"/>
           </a:p>
         </p:txBody>
       </p:sp>
@@ -7078,7 +7272,7 @@
               </a:spcAft>
             </a:pPr>
             <a:r>
-              <a:rPr lang="en-US" sz="1400" dirty="0"/>
+              <a:rPr lang="en-US" sz="1400"/>
               <a:t>MPI scaling on the Linux cluster was modest, reaching only 2.67x at 8 procs</a:t>
             </a:r>
           </a:p>
@@ -7089,7 +7283,7 @@
               </a:spcAft>
             </a:pPr>
             <a:r>
-              <a:rPr lang="en-US" sz="1400" dirty="0">
+              <a:rPr lang="en-US" sz="1400">
                 <a:solidFill>
                   <a:srgbClr val="1A1A1A"/>
                 </a:solidFill>
@@ -7108,7 +7302,7 @@
               <a:buNone/>
             </a:pPr>
             <a:r>
-              <a:rPr lang="en-US" sz="1400" dirty="0">
+              <a:rPr lang="en-US" sz="1400">
                 <a:solidFill>
                   <a:srgbClr val="1A1A1A"/>
                 </a:solidFill>
@@ -7118,7 +7312,7 @@
               </a:rPr>
               <a:t>Neither parallelization strategy gains much from larger data, suggesting memory bandwidth limits</a:t>
             </a:r>
-            <a:endParaRPr lang="en-US" sz="1400" dirty="0"/>
+            <a:endParaRPr lang="en-US" sz="1400"/>
           </a:p>
         </p:txBody>
       </p:sp>
@@ -7204,7 +7398,7 @@
               <a:buNone/>
             </a:pPr>
             <a:r>
-              <a:rPr lang="en-US" sz="3000" b="1" dirty="0">
+              <a:rPr lang="en-US" sz="3000" b="1">
                 <a:solidFill>
                   <a:srgbClr val="FFFFFF"/>
                 </a:solidFill>
@@ -7214,7 +7408,7 @@
               </a:rPr>
               <a:t>References</a:t>
             </a:r>
-            <a:endParaRPr lang="en-US" sz="3000" dirty="0"/>
+            <a:endParaRPr lang="en-US" sz="3000"/>
           </a:p>
         </p:txBody>
       </p:sp>
@@ -7241,118 +7435,141 @@
           <a:noFill/>
         </p:spPr>
         <p:txBody>
-          <a:bodyPr wrap="square" rtlCol="0">
+          <a:bodyPr wrap="square" lIns="91440" tIns="45720" rIns="91440" bIns="45720" rtlCol="0" anchor="t">
             <a:spAutoFit/>
           </a:bodyPr>
           <a:lstStyle/>
           <a:p>
             <a:r>
-              <a:rPr lang="en-US" sz="1400" dirty="0"/>
+              <a:rPr lang="en-US" sz="1400" b="1"/>
               <a:t>[1] CDC BRFSS 2015 Diabetes Health Indicators. UCI ML Repository.</a:t>
             </a:r>
           </a:p>
           <a:p>
             <a:r>
-              <a:rPr lang="en-US" sz="1400" dirty="0"/>
+              <a:rPr lang="en-US" sz="1400"/>
               <a:t>    https://archive.ics.uci.edu/dataset/891/cdc+diabetes+health+indicators</a:t>
             </a:r>
           </a:p>
           <a:p>
-            <a:endParaRPr lang="en-US" sz="1400" dirty="0"/>
-          </a:p>
-          <a:p>
-            <a:r>
-              <a:rPr lang="en-US" sz="1400" dirty="0"/>
+            <a:endParaRPr lang="en-US" sz="1400"/>
+          </a:p>
+          <a:p>
+            <a:r>
+              <a:rPr lang="en-US" sz="1400" b="1"/>
               <a:t>[2] Teboul, A. Heart Disease Health Indicators Dataset. Kaggle, 2021.</a:t>
             </a:r>
-          </a:p>
-          <a:p>
-            <a:r>
-              <a:rPr lang="en-US" sz="1400" dirty="0"/>
+            <a:endParaRPr lang="en-US" sz="1400" b="1">
+              <a:ea typeface="Calibri"/>
+              <a:cs typeface="Calibri"/>
+            </a:endParaRPr>
+          </a:p>
+          <a:p>
+            <a:r>
+              <a:rPr lang="en-US" sz="1400"/>
               <a:t>    https://www.kaggle.com/datasets/alexteboul/heart-disease-health-indicators-dataset</a:t>
             </a:r>
           </a:p>
           <a:p>
-            <a:endParaRPr lang="en-US" sz="1400" dirty="0"/>
-          </a:p>
-          <a:p>
-            <a:r>
-              <a:rPr lang="en-US" sz="1400" dirty="0"/>
+            <a:endParaRPr lang="en-US" sz="1400"/>
+          </a:p>
+          <a:p>
+            <a:r>
+              <a:rPr lang="en-US" sz="1400" b="1"/>
               <a:t>[3] OpenMP Architecture Review Board. OpenMP API Specification, Version 5.2, 2021.</a:t>
             </a:r>
-          </a:p>
-          <a:p>
-            <a:r>
-              <a:rPr lang="en-US" sz="1400" dirty="0"/>
+            <a:endParaRPr lang="en-US" sz="1400" b="1">
+              <a:ea typeface="Calibri"/>
+              <a:cs typeface="Calibri"/>
+            </a:endParaRPr>
+          </a:p>
+          <a:p>
+            <a:r>
+              <a:rPr lang="en-US" sz="1400"/>
               <a:t>    https://www.openmp.org/specifications/</a:t>
             </a:r>
           </a:p>
           <a:p>
-            <a:endParaRPr lang="en-US" sz="1400" dirty="0"/>
-          </a:p>
-          <a:p>
-            <a:r>
-              <a:rPr lang="en-US" sz="1400" dirty="0"/>
+            <a:endParaRPr lang="en-US" sz="1400"/>
+          </a:p>
+          <a:p>
+            <a:r>
+              <a:rPr lang="en-US" sz="1400" b="1"/>
               <a:t>[4] The Open MPI Project. Open MPI: A High Performance Message Passing Library.</a:t>
             </a:r>
-          </a:p>
-          <a:p>
-            <a:r>
-              <a:rPr lang="en-US" sz="1400" dirty="0"/>
+            <a:endParaRPr lang="en-US" sz="1400" b="1">
+              <a:ea typeface="Calibri"/>
+              <a:cs typeface="Calibri"/>
+            </a:endParaRPr>
+          </a:p>
+          <a:p>
+            <a:r>
+              <a:rPr lang="en-US" sz="1400"/>
               <a:t>    https://www.open-mpi.org/</a:t>
             </a:r>
           </a:p>
           <a:p>
-            <a:endParaRPr lang="en-US" sz="1400" dirty="0"/>
-          </a:p>
-          <a:p>
-            <a:r>
-              <a:rPr lang="en-US" sz="1400" dirty="0"/>
+            <a:endParaRPr lang="en-US" sz="1400" b="1">
+              <a:ea typeface="Calibri"/>
+              <a:cs typeface="Calibri"/>
+            </a:endParaRPr>
+          </a:p>
+          <a:p>
+            <a:r>
+              <a:rPr lang="en-US" sz="1400" b="1"/>
               <a:t>[5] San Diego Supercomputer Center. SDSC Expanse User Guide.</a:t>
             </a:r>
-          </a:p>
-          <a:p>
-            <a:r>
-              <a:rPr lang="en-US" sz="1400" dirty="0"/>
+            <a:endParaRPr lang="en-US" sz="1400" b="1">
+              <a:ea typeface="Calibri"/>
+              <a:cs typeface="Calibri"/>
+            </a:endParaRPr>
+          </a:p>
+          <a:p>
+            <a:r>
+              <a:rPr lang="en-US" sz="1400"/>
               <a:t>    https://www.sdsc.edu/systems/expanse/user_guide.html</a:t>
             </a:r>
           </a:p>
           <a:p>
-            <a:endParaRPr lang="en-US" sz="1400" dirty="0"/>
-          </a:p>
-          <a:p>
-            <a:r>
-              <a:rPr lang="en-US" sz="1400" dirty="0"/>
+            <a:endParaRPr lang="en-US" sz="1400"/>
+          </a:p>
+          <a:p>
+            <a:r>
+              <a:rPr lang="en-US" sz="1400" b="1"/>
               <a:t>[6] cppreference.com. C Standard Library: </a:t>
             </a:r>
             <a:r>
-              <a:rPr lang="en-US" sz="1400" dirty="0" err="1"/>
+              <a:rPr lang="en-US" sz="1400" b="1" err="1"/>
               <a:t>fgets</a:t>
             </a:r>
             <a:r>
-              <a:rPr lang="en-US" sz="1400" dirty="0"/>
+              <a:rPr lang="en-US" sz="1400" b="1"/>
               <a:t>, </a:t>
             </a:r>
             <a:r>
-              <a:rPr lang="en-US" sz="1400" dirty="0" err="1"/>
+              <a:rPr lang="en-US" sz="1400" b="1" err="1"/>
               <a:t>fopen</a:t>
             </a:r>
             <a:r>
-              <a:rPr lang="en-US" sz="1400" dirty="0"/>
+              <a:rPr lang="en-US" sz="1400" b="1"/>
               <a:t>, </a:t>
             </a:r>
             <a:r>
-              <a:rPr lang="en-US" sz="1400" dirty="0" err="1"/>
+              <a:rPr lang="en-US" sz="1400" b="1" err="1"/>
               <a:t>sscanf</a:t>
             </a:r>
             <a:r>
-              <a:rPr lang="en-US" sz="1400" dirty="0"/>
+              <a:rPr lang="en-US" sz="1400" b="1"/>
               <a:t>, File I/O Reference.</a:t>
             </a:r>
-          </a:p>
-          <a:p>
-            <a:r>
-              <a:rPr lang="en-US" sz="1400" dirty="0"/>
+            <a:endParaRPr lang="en-US" sz="1400" b="1">
+              <a:ea typeface="Calibri"/>
+              <a:cs typeface="Calibri"/>
+            </a:endParaRPr>
+          </a:p>
+          <a:p>
+            <a:r>
+              <a:rPr lang="en-US" sz="1400"/>
               <a:t>    https://en.cppreference.com/w/c/io</a:t>
             </a:r>
           </a:p>
@@ -7440,7 +7657,7 @@
               <a:buNone/>
             </a:pPr>
             <a:r>
-              <a:rPr lang="en-US" sz="3000" b="1" dirty="0">
+              <a:rPr lang="en-US" sz="3000" b="1">
                 <a:solidFill>
                   <a:srgbClr val="FFFFFF"/>
                 </a:solidFill>
@@ -7450,7 +7667,7 @@
               </a:rPr>
               <a:t>Data &amp; Preprocessing</a:t>
             </a:r>
-            <a:endParaRPr lang="en-US" sz="3000" dirty="0"/>
+            <a:endParaRPr lang="en-US" sz="3000"/>
           </a:p>
         </p:txBody>
       </p:sp>
@@ -7513,7 +7730,7 @@
               <a:buNone/>
             </a:pPr>
             <a:r>
-              <a:rPr lang="en-US" sz="1600" b="1" dirty="0">
+              <a:rPr lang="en-US" sz="1600" b="1">
                 <a:solidFill>
                   <a:srgbClr val="0D3B6E"/>
                 </a:solidFill>
@@ -7523,7 +7740,7 @@
               </a:rPr>
               <a:t>Diabetes Dataset</a:t>
             </a:r>
-            <a:endParaRPr lang="en-US" sz="1600" dirty="0"/>
+            <a:endParaRPr lang="en-US" sz="1600"/>
           </a:p>
         </p:txBody>
       </p:sp>
@@ -7552,7 +7769,7 @@
               <a:buNone/>
             </a:pPr>
             <a:r>
-              <a:rPr lang="en-US" sz="1400" b="1" dirty="0">
+              <a:rPr lang="en-US" sz="1400" b="1">
                 <a:solidFill>
                   <a:srgbClr val="0D3B6E"/>
                 </a:solidFill>
@@ -7563,7 +7780,7 @@
               <a:t>Source: </a:t>
             </a:r>
             <a:r>
-              <a:rPr lang="en-US" sz="1400" dirty="0">
+              <a:rPr lang="en-US" sz="1400">
                 <a:solidFill>
                   <a:srgbClr val="444444"/>
                 </a:solidFill>
@@ -7575,7 +7792,7 @@
 </a:t>
             </a:r>
             <a:r>
-              <a:rPr lang="en-US" sz="1400" b="1" dirty="0">
+              <a:rPr lang="en-US" sz="1400" b="1">
                 <a:solidFill>
                   <a:srgbClr val="0D3B6E"/>
                 </a:solidFill>
@@ -7586,7 +7803,7 @@
               <a:t>Size: </a:t>
             </a:r>
             <a:r>
-              <a:rPr lang="en-US" sz="1400" dirty="0">
+              <a:rPr lang="en-US" sz="1400">
                 <a:solidFill>
                   <a:srgbClr val="444444"/>
                 </a:solidFill>
@@ -7598,7 +7815,7 @@
 </a:t>
             </a:r>
             <a:r>
-              <a:rPr lang="en-US" sz="1400" b="1" dirty="0">
+              <a:rPr lang="en-US" sz="1400" b="1">
                 <a:solidFill>
                   <a:srgbClr val="0D3B6E"/>
                 </a:solidFill>
@@ -7609,7 +7826,7 @@
               <a:t>Features: </a:t>
             </a:r>
             <a:r>
-              <a:rPr lang="en-US" sz="1400" dirty="0">
+              <a:rPr lang="en-US" sz="1400">
                 <a:solidFill>
                   <a:srgbClr val="444444"/>
                 </a:solidFill>
@@ -7621,7 +7838,7 @@
 </a:t>
             </a:r>
             <a:r>
-              <a:rPr lang="en-US" sz="1400" b="1" dirty="0">
+              <a:rPr lang="en-US" sz="1400" b="1">
                 <a:solidFill>
                   <a:srgbClr val="0D3B6E"/>
                 </a:solidFill>
@@ -7632,7 +7849,7 @@
               <a:t>Target: </a:t>
             </a:r>
             <a:r>
-              <a:rPr lang="en-US" sz="1400" dirty="0">
+              <a:rPr lang="en-US" sz="1400">
                 <a:solidFill>
                   <a:srgbClr val="444444"/>
                 </a:solidFill>
@@ -7642,7 +7859,7 @@
               </a:rPr>
               <a:t>Diabetes positive / negative</a:t>
             </a:r>
-            <a:endParaRPr lang="en-US" sz="1400" dirty="0"/>
+            <a:endParaRPr lang="en-US" sz="1400"/>
           </a:p>
         </p:txBody>
       </p:sp>
@@ -7705,7 +7922,7 @@
               <a:buNone/>
             </a:pPr>
             <a:r>
-              <a:rPr lang="en-US" sz="1600" b="1" dirty="0">
+              <a:rPr lang="en-US" sz="1600" b="1">
                 <a:solidFill>
                   <a:srgbClr val="0D3B6E"/>
                 </a:solidFill>
@@ -7715,7 +7932,7 @@
               </a:rPr>
               <a:t>Heart Disease Dataset</a:t>
             </a:r>
-            <a:endParaRPr lang="en-US" sz="1600" dirty="0"/>
+            <a:endParaRPr lang="en-US" sz="1600"/>
           </a:p>
         </p:txBody>
       </p:sp>
@@ -7744,7 +7961,7 @@
               <a:buNone/>
             </a:pPr>
             <a:r>
-              <a:rPr lang="en-US" sz="1400" b="1" dirty="0">
+              <a:rPr lang="en-US" sz="1400" b="1">
                 <a:solidFill>
                   <a:srgbClr val="0D3B6E"/>
                 </a:solidFill>
@@ -7755,7 +7972,7 @@
               <a:t>Source: </a:t>
             </a:r>
             <a:r>
-              <a:rPr lang="en-US" sz="1400" dirty="0">
+              <a:rPr lang="en-US" sz="1400">
                 <a:solidFill>
                   <a:srgbClr val="444444"/>
                 </a:solidFill>
@@ -7767,7 +7984,7 @@
 </a:t>
             </a:r>
             <a:r>
-              <a:rPr lang="en-US" sz="1400" b="1" dirty="0">
+              <a:rPr lang="en-US" sz="1400" b="1">
                 <a:solidFill>
                   <a:srgbClr val="0D3B6E"/>
                 </a:solidFill>
@@ -7778,7 +7995,7 @@
               <a:t>Size: </a:t>
             </a:r>
             <a:r>
-              <a:rPr lang="en-US" sz="1400" dirty="0">
+              <a:rPr lang="en-US" sz="1400">
                 <a:solidFill>
                   <a:srgbClr val="444444"/>
                 </a:solidFill>
@@ -7790,7 +8007,7 @@
 </a:t>
             </a:r>
             <a:r>
-              <a:rPr lang="en-US" sz="1400" b="1" dirty="0">
+              <a:rPr lang="en-US" sz="1400" b="1">
                 <a:solidFill>
                   <a:srgbClr val="0D3B6E"/>
                 </a:solidFill>
@@ -7801,7 +8018,7 @@
               <a:t>Purpose: </a:t>
             </a:r>
             <a:r>
-              <a:rPr lang="en-US" sz="1400" dirty="0">
+              <a:rPr lang="en-US" sz="1400">
                 <a:solidFill>
                   <a:srgbClr val="444444"/>
                 </a:solidFill>
@@ -7811,7 +8028,7 @@
               </a:rPr>
               <a:t>Correctness verification only, not used for scaling tests</a:t>
             </a:r>
-            <a:endParaRPr lang="en-US" sz="1400" dirty="0"/>
+            <a:endParaRPr lang="en-US" sz="1400"/>
           </a:p>
         </p:txBody>
       </p:sp>
@@ -7840,7 +8057,7 @@
               <a:buNone/>
             </a:pPr>
             <a:r>
-              <a:rPr lang="en-US" sz="1600" b="1" dirty="0">
+              <a:rPr lang="en-US" sz="1600" b="1">
                 <a:solidFill>
                   <a:srgbClr val="0D3B6E"/>
                 </a:solidFill>
@@ -7850,7 +8067,7 @@
               </a:rPr>
               <a:t>Preprocessing Pipeline</a:t>
             </a:r>
-            <a:endParaRPr lang="en-US" sz="1600" dirty="0"/>
+            <a:endParaRPr lang="en-US" sz="1600"/>
           </a:p>
         </p:txBody>
       </p:sp>
@@ -7911,7 +8128,7 @@
               <a:buNone/>
             </a:pPr>
             <a:r>
-              <a:rPr lang="en-US" sz="1400" b="1" dirty="0">
+              <a:rPr lang="en-US" sz="1400" b="1">
                 <a:solidFill>
                   <a:srgbClr val="FFFFFF"/>
                 </a:solidFill>
@@ -7921,7 +8138,7 @@
               </a:rPr>
               <a:t>1</a:t>
             </a:r>
-            <a:endParaRPr lang="en-US" sz="1400" dirty="0"/>
+            <a:endParaRPr lang="en-US" sz="1400"/>
           </a:p>
         </p:txBody>
       </p:sp>
@@ -7950,7 +8167,7 @@
               <a:buNone/>
             </a:pPr>
             <a:r>
-              <a:rPr lang="en-US" sz="1600" b="1" dirty="0">
+              <a:rPr lang="en-US" sz="1600" b="1">
                 <a:solidFill>
                   <a:srgbClr val="0D3B6E"/>
                 </a:solidFill>
@@ -7960,7 +8177,7 @@
               </a:rPr>
               <a:t>diabetes_csv.py  /  heart_csv.py</a:t>
             </a:r>
-            <a:endParaRPr lang="en-US" sz="1600" dirty="0"/>
+            <a:endParaRPr lang="en-US" sz="1600"/>
           </a:p>
         </p:txBody>
       </p:sp>
@@ -7989,7 +8206,7 @@
               <a:buNone/>
             </a:pPr>
             <a:r>
-              <a:rPr lang="en-US" sz="1400" dirty="0">
+              <a:rPr lang="en-US" sz="1400">
                 <a:solidFill>
                   <a:srgbClr val="444444"/>
                 </a:solidFill>
@@ -7999,7 +8216,7 @@
               </a:rPr>
               <a:t>Two separate Python scripts, one per dataset</a:t>
             </a:r>
-            <a:endParaRPr lang="en-US" sz="1400" dirty="0"/>
+            <a:endParaRPr lang="en-US" sz="1400"/>
           </a:p>
         </p:txBody>
       </p:sp>
@@ -8092,7 +8309,7 @@
               <a:buNone/>
             </a:pPr>
             <a:r>
-              <a:rPr lang="en-US" sz="1400" b="1" dirty="0">
+              <a:rPr lang="en-US" sz="1400" b="1">
                 <a:solidFill>
                   <a:srgbClr val="FFFFFF"/>
                 </a:solidFill>
@@ -8102,7 +8319,7 @@
               </a:rPr>
               <a:t>2</a:t>
             </a:r>
-            <a:endParaRPr lang="en-US" sz="1400" dirty="0"/>
+            <a:endParaRPr lang="en-US" sz="1400"/>
           </a:p>
         </p:txBody>
       </p:sp>
@@ -8131,7 +8348,7 @@
               <a:buNone/>
             </a:pPr>
             <a:r>
-              <a:rPr lang="en-US" sz="1600" b="1" dirty="0">
+              <a:rPr lang="en-US" sz="1600" b="1">
                 <a:solidFill>
                   <a:srgbClr val="0D3B6E"/>
                 </a:solidFill>
@@ -8141,7 +8358,7 @@
               </a:rPr>
               <a:t>Integer encoding</a:t>
             </a:r>
-            <a:endParaRPr lang="en-US" sz="1600" dirty="0"/>
+            <a:endParaRPr lang="en-US" sz="1600"/>
           </a:p>
         </p:txBody>
       </p:sp>
@@ -8170,7 +8387,7 @@
               <a:buNone/>
             </a:pPr>
             <a:r>
-              <a:rPr lang="en-US" sz="1400" dirty="0">
+              <a:rPr lang="en-US" sz="1400">
                 <a:solidFill>
                   <a:srgbClr val="444444"/>
                 </a:solidFill>
@@ -8180,7 +8397,7 @@
               </a:rPr>
               <a:t>All features converted to categorical integer values</a:t>
             </a:r>
-            <a:endParaRPr lang="en-US" sz="1400" dirty="0"/>
+            <a:endParaRPr lang="en-US" sz="1400"/>
           </a:p>
         </p:txBody>
       </p:sp>
@@ -8273,7 +8490,7 @@
               <a:buNone/>
             </a:pPr>
             <a:r>
-              <a:rPr lang="en-US" sz="1400" b="1" dirty="0">
+              <a:rPr lang="en-US" sz="1400" b="1">
                 <a:solidFill>
                   <a:srgbClr val="FFFFFF"/>
                 </a:solidFill>
@@ -8283,7 +8500,7 @@
               </a:rPr>
               <a:t>3</a:t>
             </a:r>
-            <a:endParaRPr lang="en-US" sz="1400" dirty="0"/>
+            <a:endParaRPr lang="en-US" sz="1400"/>
           </a:p>
         </p:txBody>
       </p:sp>
@@ -8312,7 +8529,7 @@
               <a:buNone/>
             </a:pPr>
             <a:r>
-              <a:rPr lang="en-US" sz="1600" b="1" dirty="0">
+              <a:rPr lang="en-US" sz="1600" b="1">
                 <a:solidFill>
                   <a:srgbClr val="0D3B6E"/>
                 </a:solidFill>
@@ -8322,7 +8539,7 @@
               </a:rPr>
               <a:t>Scale diabetes data</a:t>
             </a:r>
-            <a:endParaRPr lang="en-US" sz="1600" dirty="0"/>
+            <a:endParaRPr lang="en-US" sz="1600"/>
           </a:p>
         </p:txBody>
       </p:sp>
@@ -8351,7 +8568,7 @@
               <a:buNone/>
             </a:pPr>
             <a:r>
-              <a:rPr lang="en-US" sz="1400" dirty="0">
+              <a:rPr lang="en-US" sz="1400">
                 <a:solidFill>
                   <a:srgbClr val="444444"/>
                 </a:solidFill>
@@ -8361,7 +8578,7 @@
               </a:rPr>
               <a:t>Resampled to generate 20k, 100k, 500k, and 1m variants</a:t>
             </a:r>
-            <a:endParaRPr lang="en-US" sz="1400" dirty="0"/>
+            <a:endParaRPr lang="en-US" sz="1400"/>
           </a:p>
         </p:txBody>
       </p:sp>
@@ -8454,7 +8671,7 @@
               <a:buNone/>
             </a:pPr>
             <a:r>
-              <a:rPr lang="en-US" sz="1400" b="1" dirty="0">
+              <a:rPr lang="en-US" sz="1400" b="1">
                 <a:solidFill>
                   <a:srgbClr val="FFFFFF"/>
                 </a:solidFill>
@@ -8464,7 +8681,7 @@
               </a:rPr>
               <a:t>4</a:t>
             </a:r>
-            <a:endParaRPr lang="en-US" sz="1400" dirty="0"/>
+            <a:endParaRPr lang="en-US" sz="1400"/>
           </a:p>
         </p:txBody>
       </p:sp>
@@ -8493,7 +8710,7 @@
               <a:buNone/>
             </a:pPr>
             <a:r>
-              <a:rPr lang="en-US" sz="1600" b="1" dirty="0">
+              <a:rPr lang="en-US" sz="1600" b="1">
                 <a:solidFill>
                   <a:srgbClr val="0D3B6E"/>
                 </a:solidFill>
@@ -8503,7 +8720,7 @@
               </a:rPr>
               <a:t>Output: three files per dataset</a:t>
             </a:r>
-            <a:endParaRPr lang="en-US" sz="1600" dirty="0"/>
+            <a:endParaRPr lang="en-US" sz="1600"/>
           </a:p>
         </p:txBody>
       </p:sp>
@@ -8532,7 +8749,7 @@
               <a:buNone/>
             </a:pPr>
             <a:r>
-              <a:rPr lang="en-US" sz="1400" dirty="0">
+              <a:rPr lang="en-US" sz="1400">
                 <a:solidFill>
                   <a:srgbClr val="444444"/>
                 </a:solidFill>
@@ -8542,7 +8759,7 @@
               </a:rPr>
               <a:t>metadata.csv  |  labeled.csv  |  unlabeled.csv</a:t>
             </a:r>
-            <a:endParaRPr lang="en-US" sz="1400" dirty="0"/>
+            <a:endParaRPr lang="en-US" sz="1400"/>
           </a:p>
         </p:txBody>
       </p:sp>
@@ -8628,7 +8845,7 @@
               <a:buNone/>
             </a:pPr>
             <a:r>
-              <a:rPr lang="en-US" sz="3000" b="1" dirty="0">
+              <a:rPr lang="en-US" sz="3000" b="1">
                 <a:solidFill>
                   <a:srgbClr val="FFFFFF"/>
                 </a:solidFill>
@@ -8638,7 +8855,7 @@
               </a:rPr>
               <a:t>Base Algorithm: nb_classifier.c</a:t>
             </a:r>
-            <a:endParaRPr lang="en-US" sz="3000" dirty="0"/>
+            <a:endParaRPr lang="en-US" sz="3000"/>
           </a:p>
         </p:txBody>
       </p:sp>
@@ -8699,7 +8916,7 @@
               <a:buNone/>
             </a:pPr>
             <a:r>
-              <a:rPr lang="en-US" sz="1300" b="1" dirty="0">
+              <a:rPr lang="en-US" sz="1300" b="1">
                 <a:solidFill>
                   <a:srgbClr val="FFFFFF"/>
                 </a:solidFill>
@@ -8709,7 +8926,7 @@
               </a:rPr>
               <a:t>1</a:t>
             </a:r>
-            <a:endParaRPr lang="en-US" sz="1300" dirty="0"/>
+            <a:endParaRPr lang="en-US" sz="1300"/>
           </a:p>
         </p:txBody>
       </p:sp>
@@ -8738,7 +8955,7 @@
               <a:buNone/>
             </a:pPr>
             <a:r>
-              <a:rPr lang="en-US" sz="1600" b="1" dirty="0">
+              <a:rPr lang="en-US" sz="1600" b="1">
                 <a:solidFill>
                   <a:srgbClr val="0D3B6E"/>
                 </a:solidFill>
@@ -8748,7 +8965,7 @@
               </a:rPr>
               <a:t>Read inputs</a:t>
             </a:r>
-            <a:endParaRPr lang="en-US" sz="1600" dirty="0"/>
+            <a:endParaRPr lang="en-US" sz="1600"/>
           </a:p>
         </p:txBody>
       </p:sp>
@@ -8777,7 +8994,7 @@
               <a:buNone/>
             </a:pPr>
             <a:r>
-              <a:rPr lang="en-US" sz="1400" dirty="0">
+              <a:rPr lang="en-US" sz="1400">
                 <a:solidFill>
                   <a:srgbClr val="444444"/>
                 </a:solidFill>
@@ -8787,7 +9004,7 @@
               </a:rPr>
               <a:t>Load metadata, labeled, and unlabeled CSVs into memory</a:t>
             </a:r>
-            <a:endParaRPr lang="en-US" sz="1400" dirty="0"/>
+            <a:endParaRPr lang="en-US" sz="1400"/>
           </a:p>
         </p:txBody>
       </p:sp>
@@ -8880,7 +9097,7 @@
               <a:buNone/>
             </a:pPr>
             <a:r>
-              <a:rPr lang="en-US" sz="1300" b="1" dirty="0">
+              <a:rPr lang="en-US" sz="1300" b="1">
                 <a:solidFill>
                   <a:srgbClr val="FFFFFF"/>
                 </a:solidFill>
@@ -8890,7 +9107,7 @@
               </a:rPr>
               <a:t>2</a:t>
             </a:r>
-            <a:endParaRPr lang="en-US" sz="1300" dirty="0"/>
+            <a:endParaRPr lang="en-US" sz="1300"/>
           </a:p>
         </p:txBody>
       </p:sp>
@@ -8919,7 +9136,7 @@
               <a:buNone/>
             </a:pPr>
             <a:r>
-              <a:rPr lang="en-US" sz="1600" b="1" dirty="0">
+              <a:rPr lang="en-US" sz="1600" b="1">
                 <a:solidFill>
                   <a:srgbClr val="0D3B6E"/>
                 </a:solidFill>
@@ -8929,7 +9146,7 @@
               </a:rPr>
               <a:t>Train</a:t>
             </a:r>
-            <a:endParaRPr lang="en-US" sz="1600" dirty="0"/>
+            <a:endParaRPr lang="en-US" sz="1600"/>
           </a:p>
         </p:txBody>
       </p:sp>
@@ -8958,7 +9175,7 @@
               <a:buNone/>
             </a:pPr>
             <a:r>
-              <a:rPr lang="en-US" sz="1400" dirty="0">
+              <a:rPr lang="en-US" sz="1400">
                 <a:solidFill>
                   <a:srgbClr val="444444"/>
                 </a:solidFill>
@@ -8968,7 +9185,7 @@
               </a:rPr>
               <a:t>Accumulate (feature, class) counts, convert to log probabilities</a:t>
             </a:r>
-            <a:endParaRPr lang="en-US" sz="1400" dirty="0"/>
+            <a:endParaRPr lang="en-US" sz="1400"/>
           </a:p>
         </p:txBody>
       </p:sp>
@@ -9061,7 +9278,7 @@
               <a:buNone/>
             </a:pPr>
             <a:r>
-              <a:rPr lang="en-US" sz="1300" b="1" dirty="0">
+              <a:rPr lang="en-US" sz="1300" b="1">
                 <a:solidFill>
                   <a:srgbClr val="FFFFFF"/>
                 </a:solidFill>
@@ -9071,7 +9288,7 @@
               </a:rPr>
               <a:t>3</a:t>
             </a:r>
-            <a:endParaRPr lang="en-US" sz="1300" dirty="0"/>
+            <a:endParaRPr lang="en-US" sz="1300"/>
           </a:p>
         </p:txBody>
       </p:sp>
@@ -9100,7 +9317,7 @@
               <a:buNone/>
             </a:pPr>
             <a:r>
-              <a:rPr lang="en-US" sz="1600" b="1" dirty="0">
+              <a:rPr lang="en-US" sz="1600" b="1">
                 <a:solidFill>
                   <a:srgbClr val="0D3B6E"/>
                 </a:solidFill>
@@ -9110,7 +9327,7 @@
               </a:rPr>
               <a:t>Cross-validate</a:t>
             </a:r>
-            <a:endParaRPr lang="en-US" sz="1600" dirty="0"/>
+            <a:endParaRPr lang="en-US" sz="1600"/>
           </a:p>
         </p:txBody>
       </p:sp>
@@ -9139,7 +9356,7 @@
               <a:buNone/>
             </a:pPr>
             <a:r>
-              <a:rPr lang="en-US" sz="1400" dirty="0">
+              <a:rPr lang="en-US" sz="1400">
                 <a:solidFill>
                   <a:srgbClr val="444444"/>
                 </a:solidFill>
@@ -9149,7 +9366,7 @@
               </a:rPr>
               <a:t>5-fold: train on k-1 folds, score held-out fold</a:t>
             </a:r>
-            <a:endParaRPr lang="en-US" sz="1400" dirty="0"/>
+            <a:endParaRPr lang="en-US" sz="1400"/>
           </a:p>
         </p:txBody>
       </p:sp>
@@ -9242,7 +9459,7 @@
               <a:buNone/>
             </a:pPr>
             <a:r>
-              <a:rPr lang="en-US" sz="1300" b="1" dirty="0">
+              <a:rPr lang="en-US" sz="1300" b="1">
                 <a:solidFill>
                   <a:srgbClr val="FFFFFF"/>
                 </a:solidFill>
@@ -9252,7 +9469,7 @@
               </a:rPr>
               <a:t>4</a:t>
             </a:r>
-            <a:endParaRPr lang="en-US" sz="1300" dirty="0"/>
+            <a:endParaRPr lang="en-US" sz="1300"/>
           </a:p>
         </p:txBody>
       </p:sp>
@@ -9281,7 +9498,7 @@
               <a:buNone/>
             </a:pPr>
             <a:r>
-              <a:rPr lang="en-US" sz="1600" b="1" dirty="0">
+              <a:rPr lang="en-US" sz="1600" b="1">
                 <a:solidFill>
                   <a:srgbClr val="0D3B6E"/>
                 </a:solidFill>
@@ -9291,7 +9508,7 @@
               </a:rPr>
               <a:t>Classify</a:t>
             </a:r>
-            <a:endParaRPr lang="en-US" sz="1600" dirty="0"/>
+            <a:endParaRPr lang="en-US" sz="1600"/>
           </a:p>
         </p:txBody>
       </p:sp>
@@ -9320,7 +9537,7 @@
               <a:buNone/>
             </a:pPr>
             <a:r>
-              <a:rPr lang="en-US" sz="1400" dirty="0">
+              <a:rPr lang="en-US" sz="1400">
                 <a:solidFill>
                   <a:srgbClr val="444444"/>
                 </a:solidFill>
@@ -9330,7 +9547,7 @@
               </a:rPr>
               <a:t>Score unlabeled rows against log probs, return argmax</a:t>
             </a:r>
-            <a:endParaRPr lang="en-US" sz="1400" dirty="0"/>
+            <a:endParaRPr lang="en-US" sz="1400"/>
           </a:p>
         </p:txBody>
       </p:sp>
@@ -9423,7 +9640,7 @@
               <a:buNone/>
             </a:pPr>
             <a:r>
-              <a:rPr lang="en-US" sz="1300" b="1" dirty="0">
+              <a:rPr lang="en-US" sz="1300" b="1">
                 <a:solidFill>
                   <a:srgbClr val="FFFFFF"/>
                 </a:solidFill>
@@ -9433,7 +9650,7 @@
               </a:rPr>
               <a:t>5</a:t>
             </a:r>
-            <a:endParaRPr lang="en-US" sz="1300" dirty="0"/>
+            <a:endParaRPr lang="en-US" sz="1300"/>
           </a:p>
         </p:txBody>
       </p:sp>
@@ -9462,7 +9679,7 @@
               <a:buNone/>
             </a:pPr>
             <a:r>
-              <a:rPr lang="en-US" sz="1600" b="1" dirty="0">
+              <a:rPr lang="en-US" sz="1600" b="1">
                 <a:solidFill>
                   <a:srgbClr val="0D3B6E"/>
                 </a:solidFill>
@@ -9472,7 +9689,7 @@
               </a:rPr>
               <a:t>Write output CSV</a:t>
             </a:r>
-            <a:endParaRPr lang="en-US" sz="1600" dirty="0"/>
+            <a:endParaRPr lang="en-US" sz="1600"/>
           </a:p>
         </p:txBody>
       </p:sp>
@@ -9501,7 +9718,7 @@
               <a:buNone/>
             </a:pPr>
             <a:r>
-              <a:rPr lang="en-US" sz="1400" dirty="0">
+              <a:rPr lang="en-US" sz="1400">
                 <a:solidFill>
                   <a:srgbClr val="444444"/>
                 </a:solidFill>
@@ -9511,7 +9728,7 @@
               </a:rPr>
               <a:t>Append predicted class as final column</a:t>
             </a:r>
-            <a:endParaRPr lang="en-US" sz="1400" dirty="0"/>
+            <a:endParaRPr lang="en-US" sz="1400"/>
           </a:p>
         </p:txBody>
       </p:sp>
@@ -9540,7 +9757,7 @@
               <a:buNone/>
             </a:pPr>
             <a:r>
-              <a:rPr lang="en-US" sz="1600" b="1" dirty="0">
+              <a:rPr lang="en-US" sz="1600" b="1">
                 <a:solidFill>
                   <a:srgbClr val="0D3B6E"/>
                 </a:solidFill>
@@ -9550,7 +9767,7 @@
               </a:rPr>
               <a:t>Design for Parallelism</a:t>
             </a:r>
-            <a:endParaRPr lang="en-US" sz="1600" dirty="0"/>
+            <a:endParaRPr lang="en-US" sz="1600"/>
           </a:p>
         </p:txBody>
       </p:sp>
@@ -9613,7 +9830,7 @@
               <a:buNone/>
             </a:pPr>
             <a:r>
-              <a:rPr lang="en-US" sz="1100" dirty="0">
+              <a:rPr lang="en-US" sz="1100">
                 <a:solidFill>
                   <a:srgbClr val="7DD3FC"/>
                 </a:solidFill>
@@ -9623,7 +9840,7 @@
               </a:rPr>
               <a:t>accumulate_counts_range(data, start, end, ...)</a:t>
             </a:r>
-            <a:endParaRPr lang="en-US" sz="1100" dirty="0"/>
+            <a:endParaRPr lang="en-US" sz="1100"/>
           </a:p>
         </p:txBody>
       </p:sp>
@@ -9686,7 +9903,7 @@
               <a:buNone/>
             </a:pPr>
             <a:r>
-              <a:rPr lang="en-US" sz="1100" dirty="0">
+              <a:rPr lang="en-US" sz="1100">
                 <a:solidFill>
                   <a:srgbClr val="7DD3FC"/>
                 </a:solidFill>
@@ -9696,7 +9913,7 @@
               </a:rPr>
               <a:t>P[ offset[j] + class * values[j] + value_idx ]</a:t>
             </a:r>
-            <a:endParaRPr lang="en-US" sz="1100" dirty="0"/>
+            <a:endParaRPr lang="en-US" sz="1100"/>
           </a:p>
         </p:txBody>
       </p:sp>
@@ -9728,7 +9945,7 @@
               <a:buSzPct val="100000"/>
               <a:buChar char="•"/>
             </a:pPr>
-            <a:endParaRPr lang="en-US" sz="1600" dirty="0">
+            <a:endParaRPr lang="en-US" sz="1600">
               <a:solidFill>
                 <a:srgbClr val="1A1A1A"/>
               </a:solidFill>
@@ -9746,7 +9963,7 @@
               <a:buChar char="•"/>
             </a:pPr>
             <a:r>
-              <a:rPr lang="en-US" sz="1600" dirty="0">
+              <a:rPr lang="en-US" sz="1600">
                 <a:solidFill>
                   <a:srgbClr val="1A1A1A"/>
                 </a:solidFill>
@@ -9766,7 +9983,7 @@
               <a:buChar char="•"/>
             </a:pPr>
             <a:r>
-              <a:rPr lang="en-US" sz="1600" dirty="0">
+              <a:rPr lang="en-US" sz="1600">
                 <a:solidFill>
                   <a:srgbClr val="1A1A1A"/>
                 </a:solidFill>
@@ -9786,7 +10003,7 @@
               <a:buChar char="•"/>
             </a:pPr>
             <a:r>
-              <a:rPr lang="en-US" sz="1600" dirty="0">
+              <a:rPr lang="en-US" sz="1600">
                 <a:solidFill>
                   <a:srgbClr val="1A1A1A"/>
                 </a:solidFill>
@@ -9806,7 +10023,7 @@
               <a:buChar char="•"/>
             </a:pPr>
             <a:r>
-              <a:rPr lang="en-US" sz="1600" dirty="0">
+              <a:rPr lang="en-US" sz="1600">
                 <a:solidFill>
                   <a:srgbClr val="1A1A1A"/>
                 </a:solidFill>
@@ -9826,7 +10043,7 @@
               <a:buChar char="•"/>
             </a:pPr>
             <a:r>
-              <a:rPr lang="en-US" sz="1600" dirty="0">
+              <a:rPr lang="en-US" sz="1600">
                 <a:solidFill>
                   <a:srgbClr val="1A1A1A"/>
                 </a:solidFill>
@@ -9836,7 +10053,7 @@
               </a:rPr>
               <a:t>Train, classify, and cross-validation can be timed separately.</a:t>
             </a:r>
-            <a:endParaRPr lang="en-US" sz="1600" dirty="0"/>
+            <a:endParaRPr lang="en-US" sz="1600"/>
           </a:p>
         </p:txBody>
       </p:sp>
@@ -9922,7 +10139,7 @@
               <a:buNone/>
             </a:pPr>
             <a:r>
-              <a:rPr lang="en-US" sz="3000" b="1" dirty="0">
+              <a:rPr lang="en-US" sz="3000" b="1">
                 <a:solidFill>
                   <a:srgbClr val="FFFFFF"/>
                 </a:solidFill>
@@ -9932,7 +10149,7 @@
               </a:rPr>
               <a:t>Parallelized Functions</a:t>
             </a:r>
-            <a:endParaRPr lang="en-US" sz="3000" dirty="0"/>
+            <a:endParaRPr lang="en-US" sz="3000"/>
           </a:p>
         </p:txBody>
       </p:sp>
@@ -9961,7 +10178,7 @@
               <a:buNone/>
             </a:pPr>
             <a:r>
-              <a:rPr lang="en-US" sz="1400" i="1" dirty="0">
+              <a:rPr lang="en-US" sz="1400" i="1">
                 <a:solidFill>
                   <a:srgbClr val="444444"/>
                 </a:solidFill>
@@ -9971,7 +10188,7 @@
               </a:rPr>
               <a:t>6 functions parallelized across 3 phases, file I/O intentionally left serial</a:t>
             </a:r>
-            <a:endParaRPr lang="en-US" sz="1400" dirty="0"/>
+            <a:endParaRPr lang="en-US" sz="1400"/>
           </a:p>
         </p:txBody>
       </p:sp>
@@ -10034,7 +10251,7 @@
               <a:buNone/>
             </a:pPr>
             <a:r>
-              <a:rPr lang="en-US" sz="1600" b="1" dirty="0">
+              <a:rPr lang="en-US" sz="1600" b="1">
                 <a:solidFill>
                   <a:srgbClr val="185FA5"/>
                 </a:solidFill>
@@ -10044,7 +10261,7 @@
               </a:rPr>
               <a:t>Cross-Validate  (k = 5 folds)</a:t>
             </a:r>
-            <a:endParaRPr lang="en-US" sz="1600" dirty="0"/>
+            <a:endParaRPr lang="en-US" sz="1600"/>
           </a:p>
         </p:txBody>
       </p:sp>
@@ -10107,7 +10324,7 @@
               <a:buNone/>
             </a:pPr>
             <a:r>
-              <a:rPr lang="en-US" sz="1200" b="1" dirty="0">
+              <a:rPr lang="en-US" sz="1200" b="1">
                 <a:solidFill>
                   <a:srgbClr val="0D3B6E"/>
                 </a:solidFill>
@@ -10117,7 +10334,7 @@
               </a:rPr>
               <a:t>copy_rows</a:t>
             </a:r>
-            <a:endParaRPr lang="en-US" sz="1200" dirty="0"/>
+            <a:endParaRPr lang="en-US" sz="1200"/>
           </a:p>
         </p:txBody>
       </p:sp>
@@ -10146,7 +10363,7 @@
               <a:buNone/>
             </a:pPr>
             <a:r>
-              <a:rPr lang="en-US" sz="1400" dirty="0">
+              <a:rPr lang="en-US" sz="1400">
                 <a:solidFill>
                   <a:srgbClr val="444444"/>
                 </a:solidFill>
@@ -10156,7 +10373,7 @@
               </a:rPr>
               <a:t>Builds fold train/test splits</a:t>
             </a:r>
-            <a:endParaRPr lang="en-US" sz="1400" dirty="0"/>
+            <a:endParaRPr lang="en-US" sz="1400"/>
           </a:p>
         </p:txBody>
       </p:sp>
@@ -10219,7 +10436,7 @@
               <a:buNone/>
             </a:pPr>
             <a:r>
-              <a:rPr lang="en-US" sz="1200" b="1" dirty="0">
+              <a:rPr lang="en-US" sz="1200" b="1">
                 <a:solidFill>
                   <a:srgbClr val="0D3B6E"/>
                 </a:solidFill>
@@ -10229,7 +10446,7 @@
               </a:rPr>
               <a:t>confusion_matrix_binary</a:t>
             </a:r>
-            <a:endParaRPr lang="en-US" sz="1200" dirty="0"/>
+            <a:endParaRPr lang="en-US" sz="1200"/>
           </a:p>
         </p:txBody>
       </p:sp>
@@ -10258,7 +10475,7 @@
               <a:buNone/>
             </a:pPr>
             <a:r>
-              <a:rPr lang="en-US" sz="1400" dirty="0">
+              <a:rPr lang="en-US" sz="1400">
                 <a:solidFill>
                   <a:srgbClr val="444444"/>
                 </a:solidFill>
@@ -10268,7 +10485,7 @@
               </a:rPr>
               <a:t>TN/FP/FN/TP</a:t>
             </a:r>
-            <a:endParaRPr lang="en-US" sz="1400" dirty="0"/>
+            <a:endParaRPr lang="en-US" sz="1400"/>
           </a:p>
         </p:txBody>
       </p:sp>
@@ -10331,7 +10548,7 @@
               <a:buNone/>
             </a:pPr>
             <a:r>
-              <a:rPr lang="en-US" sz="1600" b="1" dirty="0">
+              <a:rPr lang="en-US" sz="1600" b="1">
                 <a:solidFill>
                   <a:srgbClr val="0D3B6E"/>
                 </a:solidFill>
@@ -10341,7 +10558,7 @@
               </a:rPr>
               <a:t>Train</a:t>
             </a:r>
-            <a:endParaRPr lang="en-US" sz="1600" dirty="0"/>
+            <a:endParaRPr lang="en-US" sz="1600"/>
           </a:p>
         </p:txBody>
       </p:sp>
@@ -10404,7 +10621,7 @@
               <a:buNone/>
             </a:pPr>
             <a:r>
-              <a:rPr lang="en-US" sz="1200" b="1" dirty="0">
+              <a:rPr lang="en-US" sz="1200" b="1">
                 <a:solidFill>
                   <a:srgbClr val="0D3B6E"/>
                 </a:solidFill>
@@ -10414,7 +10631,7 @@
               </a:rPr>
               <a:t>accumulate_counts_range</a:t>
             </a:r>
-            <a:endParaRPr lang="en-US" sz="1200" dirty="0"/>
+            <a:endParaRPr lang="en-US" sz="1200"/>
           </a:p>
         </p:txBody>
       </p:sp>
@@ -10443,7 +10660,7 @@
               <a:buNone/>
             </a:pPr>
             <a:r>
-              <a:rPr lang="en-US" sz="1400" dirty="0">
+              <a:rPr lang="en-US" sz="1400">
                 <a:solidFill>
                   <a:srgbClr val="444444"/>
                 </a:solidFill>
@@ -10453,7 +10670,7 @@
               </a:rPr>
               <a:t>Counts (feature, class) occurrences over a row range.</a:t>
             </a:r>
-            <a:endParaRPr lang="en-US" sz="1400" dirty="0"/>
+            <a:endParaRPr lang="en-US" sz="1400"/>
           </a:p>
         </p:txBody>
       </p:sp>
@@ -10482,7 +10699,7 @@
               <a:buNone/>
             </a:pPr>
             <a:r>
-              <a:rPr lang="en-US" sz="1400" i="1" dirty="0">
+              <a:rPr lang="en-US" sz="1400" i="1">
                 <a:solidFill>
                   <a:srgbClr val="888888"/>
                 </a:solidFill>
@@ -10492,7 +10709,7 @@
               </a:rPr>
               <a:t>Counts converted to log probabilities with Laplace smoothing after reduction</a:t>
             </a:r>
-            <a:endParaRPr lang="en-US" sz="1400" dirty="0"/>
+            <a:endParaRPr lang="en-US" sz="1400"/>
           </a:p>
         </p:txBody>
       </p:sp>
@@ -10555,7 +10772,7 @@
               <a:buNone/>
             </a:pPr>
             <a:r>
-              <a:rPr lang="en-US" sz="1600" b="1" dirty="0">
+              <a:rPr lang="en-US" sz="1600" b="1">
                 <a:solidFill>
                   <a:srgbClr val="0D3B6E"/>
                 </a:solidFill>
@@ -10565,7 +10782,7 @@
               </a:rPr>
               <a:t>Classify</a:t>
             </a:r>
-            <a:endParaRPr lang="en-US" sz="1600" dirty="0"/>
+            <a:endParaRPr lang="en-US" sz="1600"/>
           </a:p>
         </p:txBody>
       </p:sp>
@@ -10628,7 +10845,7 @@
               <a:buNone/>
             </a:pPr>
             <a:r>
-              <a:rPr lang="en-US" sz="1200" b="1" dirty="0">
+              <a:rPr lang="en-US" sz="1200" b="1">
                 <a:solidFill>
                   <a:srgbClr val="0D3B6E"/>
                 </a:solidFill>
@@ -10638,7 +10855,7 @@
               </a:rPr>
               <a:t>classify_dataset</a:t>
             </a:r>
-            <a:endParaRPr lang="en-US" sz="1200" dirty="0"/>
+            <a:endParaRPr lang="en-US" sz="1200"/>
           </a:p>
         </p:txBody>
       </p:sp>
@@ -10667,7 +10884,7 @@
               <a:buNone/>
             </a:pPr>
             <a:r>
-              <a:rPr lang="en-US" sz="1400" dirty="0">
+              <a:rPr lang="en-US" sz="1400">
                 <a:solidFill>
                   <a:srgbClr val="444444"/>
                 </a:solidFill>
@@ -10677,7 +10894,7 @@
               </a:rPr>
               <a:t>Scores rows against log probs.</a:t>
             </a:r>
-            <a:endParaRPr lang="en-US" sz="1400" dirty="0"/>
+            <a:endParaRPr lang="en-US" sz="1400"/>
           </a:p>
         </p:txBody>
       </p:sp>
@@ -10740,7 +10957,7 @@
               <a:buNone/>
             </a:pPr>
             <a:r>
-              <a:rPr lang="en-US" sz="1200" b="1" dirty="0">
+              <a:rPr lang="en-US" sz="1200" b="1">
                 <a:solidFill>
                   <a:srgbClr val="0D3B6E"/>
                 </a:solidFill>
@@ -10750,7 +10967,7 @@
               </a:rPr>
               <a:t>build_truth</a:t>
             </a:r>
-            <a:endParaRPr lang="en-US" sz="1200" dirty="0"/>
+            <a:endParaRPr lang="en-US" sz="1200"/>
           </a:p>
         </p:txBody>
       </p:sp>
@@ -10779,7 +10996,7 @@
               <a:buNone/>
             </a:pPr>
             <a:r>
-              <a:rPr lang="en-US" sz="1400" dirty="0">
+              <a:rPr lang="en-US" sz="1400">
                 <a:solidFill>
                   <a:srgbClr val="444444"/>
                 </a:solidFill>
@@ -10789,7 +11006,7 @@
               </a:rPr>
               <a:t>Extracts true labels from final column.</a:t>
             </a:r>
-            <a:endParaRPr lang="en-US" sz="1400" dirty="0"/>
+            <a:endParaRPr lang="en-US" sz="1400"/>
           </a:p>
         </p:txBody>
       </p:sp>
@@ -10852,7 +11069,7 @@
               <a:buNone/>
             </a:pPr>
             <a:r>
-              <a:rPr lang="en-US" sz="1200" b="1" dirty="0">
+              <a:rPr lang="en-US" sz="1200" b="1">
                 <a:solidFill>
                   <a:srgbClr val="0D3B6E"/>
                 </a:solidFill>
@@ -10862,7 +11079,7 @@
               </a:rPr>
               <a:t>compute_accuracy</a:t>
             </a:r>
-            <a:endParaRPr lang="en-US" sz="1200" dirty="0"/>
+            <a:endParaRPr lang="en-US" sz="1200"/>
           </a:p>
         </p:txBody>
       </p:sp>
@@ -10891,7 +11108,7 @@
               <a:buNone/>
             </a:pPr>
             <a:r>
-              <a:rPr lang="en-US" sz="1400" dirty="0">
+              <a:rPr lang="en-US" sz="1400">
                 <a:solidFill>
                   <a:srgbClr val="444444"/>
                 </a:solidFill>
@@ -10901,7 +11118,7 @@
               </a:rPr>
               <a:t>Counts correct predictions.</a:t>
             </a:r>
-            <a:endParaRPr lang="en-US" sz="1400" dirty="0"/>
+            <a:endParaRPr lang="en-US" sz="1400"/>
           </a:p>
         </p:txBody>
       </p:sp>
@@ -10987,7 +11204,7 @@
               <a:buNone/>
             </a:pPr>
             <a:r>
-              <a:rPr lang="en-US" sz="3000" b="1" dirty="0">
+              <a:rPr lang="en-US" sz="3000" b="1">
                 <a:solidFill>
                   <a:srgbClr val="FFFFFF"/>
                 </a:solidFill>
@@ -10997,7 +11214,7 @@
               </a:rPr>
               <a:t>OpenMP Approach</a:t>
             </a:r>
-            <a:endParaRPr lang="en-US" sz="3000" dirty="0"/>
+            <a:endParaRPr lang="en-US" sz="3000"/>
           </a:p>
         </p:txBody>
       </p:sp>
@@ -11026,7 +11243,7 @@
               <a:buNone/>
             </a:pPr>
             <a:r>
-              <a:rPr lang="en-US" sz="1600" b="1" dirty="0">
+              <a:rPr lang="en-US" sz="1600" b="1">
                 <a:solidFill>
                   <a:srgbClr val="0D3B6E"/>
                 </a:solidFill>
@@ -11036,7 +11253,7 @@
               </a:rPr>
               <a:t>Design &amp; Approach</a:t>
             </a:r>
-            <a:endParaRPr lang="en-US" sz="1600" dirty="0"/>
+            <a:endParaRPr lang="en-US" sz="1600"/>
           </a:p>
         </p:txBody>
       </p:sp>
@@ -11069,7 +11286,7 @@
               <a:buChar char="•"/>
             </a:pPr>
             <a:r>
-              <a:rPr lang="en-US" sz="1400" b="1" dirty="0" err="1">
+              <a:rPr lang="en-US" sz="1400" b="1" err="1">
                 <a:solidFill>
                   <a:srgbClr val="0D3B6E"/>
                 </a:solidFill>
@@ -11080,7 +11297,7 @@
               <a:t>accumulate_counts_range</a:t>
             </a:r>
             <a:r>
-              <a:rPr lang="en-US" sz="1400" dirty="0">
+              <a:rPr lang="en-US" sz="1400">
                 <a:solidFill>
                   <a:srgbClr val="444444"/>
                 </a:solidFill>
@@ -11092,7 +11309,7 @@
 </a:t>
             </a:r>
             <a:r>
-              <a:rPr lang="en-US" sz="1400" b="1" dirty="0" err="1">
+              <a:rPr lang="en-US" sz="1400" b="1" err="1">
                 <a:solidFill>
                   <a:srgbClr val="0D3B6E"/>
                 </a:solidFill>
@@ -11103,7 +11320,7 @@
               <a:t>classify_dataset</a:t>
             </a:r>
             <a:r>
-              <a:rPr lang="en-US" sz="1400" b="1" dirty="0">
+              <a:rPr lang="en-US" sz="1400" b="1">
                 <a:solidFill>
                   <a:srgbClr val="444444"/>
                 </a:solidFill>
@@ -11114,7 +11331,7 @@
               <a:t>: </a:t>
             </a:r>
             <a:r>
-              <a:rPr lang="en-US" sz="1400" dirty="0">
+              <a:rPr lang="en-US" sz="1400">
                 <a:solidFill>
                   <a:srgbClr val="444444"/>
                 </a:solidFill>
@@ -11126,7 +11343,7 @@
 </a:t>
             </a:r>
             <a:r>
-              <a:rPr lang="en-US" sz="1400" b="1" dirty="0" err="1">
+              <a:rPr lang="en-US" sz="1400" b="1" err="1">
                 <a:solidFill>
                   <a:srgbClr val="0D3B6E"/>
                 </a:solidFill>
@@ -11137,7 +11354,7 @@
               <a:t>build_truth</a:t>
             </a:r>
             <a:r>
-              <a:rPr lang="en-US" sz="1400" dirty="0">
+              <a:rPr lang="en-US" sz="1400">
                 <a:solidFill>
                   <a:srgbClr val="444444"/>
                 </a:solidFill>
@@ -11149,7 +11366,7 @@
 </a:t>
             </a:r>
             <a:r>
-              <a:rPr lang="en-US" sz="1400" b="1" dirty="0" err="1">
+              <a:rPr lang="en-US" sz="1400" b="1" err="1">
                 <a:solidFill>
                   <a:srgbClr val="0D3B6E"/>
                 </a:solidFill>
@@ -11160,7 +11377,7 @@
               <a:t>compute_accuracy</a:t>
             </a:r>
             <a:r>
-              <a:rPr lang="en-US" sz="1400" dirty="0">
+              <a:rPr lang="en-US" sz="1400">
                 <a:solidFill>
                   <a:srgbClr val="444444"/>
                 </a:solidFill>
@@ -11172,7 +11389,7 @@
 </a:t>
             </a:r>
             <a:r>
-              <a:rPr lang="en-US" sz="1400" b="1" dirty="0" err="1">
+              <a:rPr lang="en-US" sz="1400" b="1" err="1">
                 <a:solidFill>
                   <a:srgbClr val="0D3B6E"/>
                 </a:solidFill>
@@ -11183,7 +11400,7 @@
               <a:t>confusion_matrix_binary</a:t>
             </a:r>
             <a:r>
-              <a:rPr lang="en-US" sz="1400" dirty="0">
+              <a:rPr lang="en-US" sz="1400">
                 <a:solidFill>
                   <a:srgbClr val="444444"/>
                 </a:solidFill>
@@ -11195,7 +11412,7 @@
 </a:t>
             </a:r>
             <a:r>
-              <a:rPr lang="en-US" sz="1400" b="1" dirty="0" err="1">
+              <a:rPr lang="en-US" sz="1400" b="1" err="1">
                 <a:solidFill>
                   <a:srgbClr val="0D3B6E"/>
                 </a:solidFill>
@@ -11206,7 +11423,7 @@
               <a:t>copy_rows</a:t>
             </a:r>
             <a:r>
-              <a:rPr lang="en-US" sz="1400" dirty="0">
+              <a:rPr lang="en-US" sz="1400">
                 <a:solidFill>
                   <a:srgbClr val="444444"/>
                 </a:solidFill>
@@ -11218,7 +11435,7 @@
 </a:t>
             </a:r>
             <a:r>
-              <a:rPr lang="en-US" sz="1400" b="1" dirty="0">
+              <a:rPr lang="en-US" sz="1400" b="1">
                 <a:solidFill>
                   <a:srgbClr val="0D3B6E"/>
                 </a:solidFill>
@@ -11229,7 +11446,7 @@
               <a:t>Fold loop stays serial</a:t>
             </a:r>
             <a:r>
-              <a:rPr lang="en-US" sz="1400" dirty="0">
+              <a:rPr lang="en-US" sz="1400">
                 <a:solidFill>
                   <a:srgbClr val="444444"/>
                 </a:solidFill>
@@ -11241,7 +11458,7 @@
 </a:t>
             </a:r>
             <a:r>
-              <a:rPr lang="en-US" sz="1400" b="1" dirty="0">
+              <a:rPr lang="en-US" sz="1400" b="1">
                 <a:solidFill>
                   <a:srgbClr val="0D3B6E"/>
                 </a:solidFill>
@@ -11252,7 +11469,7 @@
               <a:t>schedule(static default)</a:t>
             </a:r>
             <a:r>
-              <a:rPr lang="en-US" sz="1400" dirty="0">
+              <a:rPr lang="en-US" sz="1400">
                 <a:solidFill>
                   <a:srgbClr val="444444"/>
                 </a:solidFill>
@@ -11262,7 +11479,7 @@
               </a:rPr>
               <a:t> uniform work per row.</a:t>
             </a:r>
-            <a:endParaRPr lang="en-US" sz="1400" dirty="0"/>
+            <a:endParaRPr lang="en-US" sz="1400"/>
           </a:p>
         </p:txBody>
       </p:sp>
@@ -11325,7 +11542,7 @@
               <a:buNone/>
             </a:pPr>
             <a:r>
-              <a:rPr lang="en-US" sz="1300" dirty="0">
+              <a:rPr lang="en-US" sz="1300">
                 <a:solidFill>
                   <a:srgbClr val="0D3B6E"/>
                 </a:solidFill>
@@ -11335,7 +11552,7 @@
               </a:rPr>
               <a:t>Serial design enabled this, row ranges, flat arrays, and read-only log_probs required minimal changes.</a:t>
             </a:r>
-            <a:endParaRPr lang="en-US" sz="1300" dirty="0"/>
+            <a:endParaRPr lang="en-US" sz="1300"/>
           </a:p>
         </p:txBody>
       </p:sp>
@@ -11364,7 +11581,7 @@
               <a:buNone/>
             </a:pPr>
             <a:r>
-              <a:rPr lang="en-US" sz="1600" b="1" dirty="0">
+              <a:rPr lang="en-US" sz="1600" b="1">
                 <a:solidFill>
                   <a:srgbClr val="0D3B6E"/>
                 </a:solidFill>
@@ -11374,7 +11591,7 @@
               </a:rPr>
               <a:t>Key Pragmas</a:t>
             </a:r>
-            <a:endParaRPr lang="en-US" sz="1600" dirty="0"/>
+            <a:endParaRPr lang="en-US" sz="1600"/>
           </a:p>
         </p:txBody>
       </p:sp>
@@ -11403,7 +11620,7 @@
               <a:buNone/>
             </a:pPr>
             <a:r>
-              <a:rPr lang="en-US" sz="1400" i="1" dirty="0">
+              <a:rPr lang="en-US" sz="1400" i="1">
                 <a:solidFill>
                   <a:srgbClr val="888888"/>
                 </a:solidFill>
@@ -11413,7 +11630,7 @@
               </a:rPr>
               <a:t>Count accumulation  array reduction</a:t>
             </a:r>
-            <a:endParaRPr lang="en-US" sz="1400" dirty="0"/>
+            <a:endParaRPr lang="en-US" sz="1400"/>
           </a:p>
         </p:txBody>
       </p:sp>
@@ -11476,7 +11693,7 @@
               <a:buNone/>
             </a:pPr>
             <a:r>
-              <a:rPr lang="en-US" sz="1100" dirty="0">
+              <a:rPr lang="en-US" sz="1100">
                 <a:solidFill>
                   <a:srgbClr val="7DD3FC"/>
                 </a:solidFill>
@@ -11487,7 +11704,7 @@
               <a:t>#pragma omp parallel for</a:t>
             </a:r>
             <a:r>
-              <a:rPr lang="en-US" sz="1100" dirty="0">
+              <a:rPr lang="en-US" sz="1100">
                 <a:solidFill>
                   <a:srgbClr val="FFFFFF"/>
                 </a:solidFill>
@@ -11499,7 +11716,7 @@
 </a:t>
             </a:r>
             <a:r>
-              <a:rPr lang="en-US" sz="1100" dirty="0">
+              <a:rPr lang="en-US" sz="1100">
                 <a:solidFill>
                   <a:srgbClr val="FDE68A"/>
                 </a:solidFill>
@@ -11510,7 +11727,7 @@
               <a:t>  reduction</a:t>
             </a:r>
             <a:r>
-              <a:rPr lang="en-US" sz="1100" dirty="0">
+              <a:rPr lang="en-US" sz="1100">
                 <a:solidFill>
                   <a:srgbClr val="FFFFFF"/>
                 </a:solidFill>
@@ -11522,7 +11739,7 @@
 </a:t>
             </a:r>
             <a:r>
-              <a:rPr lang="en-US" sz="1100" dirty="0">
+              <a:rPr lang="en-US" sz="1100">
                 <a:solidFill>
                   <a:srgbClr val="FDE68A"/>
                 </a:solidFill>
@@ -11533,7 +11750,7 @@
               <a:t>  reduction</a:t>
             </a:r>
             <a:r>
-              <a:rPr lang="en-US" sz="1100" dirty="0">
+              <a:rPr lang="en-US" sz="1100">
                 <a:solidFill>
                   <a:srgbClr val="FFFFFF"/>
                 </a:solidFill>
@@ -11543,7 +11760,7 @@
               </a:rPr>
               <a:t>(+:feature_counts[:P])</a:t>
             </a:r>
-            <a:endParaRPr lang="en-US" sz="1100" dirty="0"/>
+            <a:endParaRPr lang="en-US" sz="1100"/>
           </a:p>
         </p:txBody>
       </p:sp>
@@ -11572,7 +11789,7 @@
               <a:buNone/>
             </a:pPr>
             <a:r>
-              <a:rPr lang="en-US" sz="1400" i="1" dirty="0">
+              <a:rPr lang="en-US" sz="1400" i="1">
                 <a:solidFill>
                   <a:srgbClr val="888888"/>
                 </a:solidFill>
@@ -11582,7 +11799,7 @@
               </a:rPr>
               <a:t>Classification</a:t>
             </a:r>
-            <a:endParaRPr lang="en-US" sz="1400" dirty="0"/>
+            <a:endParaRPr lang="en-US" sz="1400"/>
           </a:p>
         </p:txBody>
       </p:sp>
@@ -11645,7 +11862,7 @@
               <a:buNone/>
             </a:pPr>
             <a:r>
-              <a:rPr lang="en-US" sz="1100" dirty="0">
+              <a:rPr lang="en-US" sz="1100">
                 <a:solidFill>
                   <a:srgbClr val="7DD3FC"/>
                 </a:solidFill>
@@ -11657,7 +11874,7 @@
 </a:t>
             </a:r>
             <a:r>
-              <a:rPr lang="en-US" sz="1100" dirty="0">
+              <a:rPr lang="en-US" sz="1100">
                 <a:solidFill>
                   <a:srgbClr val="FDE68A"/>
                 </a:solidFill>
@@ -11668,7 +11885,7 @@
               <a:t>for </a:t>
             </a:r>
             <a:r>
-              <a:rPr lang="en-US" sz="1100" dirty="0">
+              <a:rPr lang="en-US" sz="1100">
                 <a:solidFill>
                   <a:srgbClr val="FFFFFF"/>
                 </a:solidFill>
@@ -11680,7 +11897,7 @@
 </a:t>
             </a:r>
             <a:r>
-              <a:rPr lang="en-US" sz="1100" dirty="0">
+              <a:rPr lang="en-US" sz="1100">
                 <a:solidFill>
                   <a:srgbClr val="86EFAC"/>
                 </a:solidFill>
@@ -11691,7 +11908,7 @@
               <a:t>  predictions[i]</a:t>
             </a:r>
             <a:r>
-              <a:rPr lang="en-US" sz="1100" dirty="0">
+              <a:rPr lang="en-US" sz="1100">
                 <a:solidFill>
                   <a:srgbClr val="FFFFFF"/>
                 </a:solidFill>
@@ -11701,7 +11918,7 @@
               </a:rPr>
               <a:t> = classify_row(...);</a:t>
             </a:r>
-            <a:endParaRPr lang="en-US" sz="1100" dirty="0"/>
+            <a:endParaRPr lang="en-US" sz="1100"/>
           </a:p>
         </p:txBody>
       </p:sp>
@@ -11730,7 +11947,7 @@
               <a:buNone/>
             </a:pPr>
             <a:r>
-              <a:rPr lang="en-US" sz="1400" i="1" dirty="0">
+              <a:rPr lang="en-US" sz="1400" i="1">
                 <a:solidFill>
                   <a:srgbClr val="888888"/>
                 </a:solidFill>
@@ -11740,7 +11957,7 @@
               </a:rPr>
               <a:t>Accuracy reduction</a:t>
             </a:r>
-            <a:endParaRPr lang="en-US" sz="1400" dirty="0"/>
+            <a:endParaRPr lang="en-US" sz="1400"/>
           </a:p>
         </p:txBody>
       </p:sp>
@@ -11803,7 +12020,7 @@
               <a:buNone/>
             </a:pPr>
             <a:r>
-              <a:rPr lang="en-US" sz="1100" dirty="0">
+              <a:rPr lang="en-US" sz="1100">
                 <a:solidFill>
                   <a:srgbClr val="7DD3FC"/>
                 </a:solidFill>
@@ -11815,7 +12032,7 @@
 </a:t>
             </a:r>
             <a:r>
-              <a:rPr lang="en-US" sz="1100" dirty="0">
+              <a:rPr lang="en-US" sz="1100">
                 <a:solidFill>
                   <a:srgbClr val="FDE68A"/>
                 </a:solidFill>
@@ -11826,7 +12043,7 @@
               <a:t>  reduction</a:t>
             </a:r>
             <a:r>
-              <a:rPr lang="en-US" sz="1100" dirty="0">
+              <a:rPr lang="en-US" sz="1100">
                 <a:solidFill>
                   <a:srgbClr val="FFFFFF"/>
                 </a:solidFill>
@@ -11838,7 +12055,7 @@
 </a:t>
             </a:r>
             <a:r>
-              <a:rPr lang="en-US" sz="1100" dirty="0">
+              <a:rPr lang="en-US" sz="1100">
                 <a:solidFill>
                   <a:srgbClr val="FDE68A"/>
                 </a:solidFill>
@@ -11849,7 +12066,7 @@
               <a:t>for </a:t>
             </a:r>
             <a:r>
-              <a:rPr lang="en-US" sz="1100" dirty="0">
+              <a:rPr lang="en-US" sz="1100">
                 <a:solidFill>
                   <a:srgbClr val="FFFFFF"/>
                 </a:solidFill>
@@ -11861,7 +12078,7 @@
 </a:t>
             </a:r>
             <a:r>
-              <a:rPr lang="en-US" sz="1100" dirty="0">
+              <a:rPr lang="en-US" sz="1100">
                 <a:solidFill>
                   <a:srgbClr val="FDE68A"/>
                 </a:solidFill>
@@ -11872,7 +12089,7 @@
               <a:t>  if </a:t>
             </a:r>
             <a:r>
-              <a:rPr lang="en-US" sz="1100" dirty="0">
+              <a:rPr lang="en-US" sz="1100">
                 <a:solidFill>
                   <a:srgbClr val="FFFFFF"/>
                 </a:solidFill>
@@ -11883,7 +12100,7 @@
               <a:t>(truth[i] == pred[i]) </a:t>
             </a:r>
             <a:r>
-              <a:rPr lang="en-US" sz="1100" dirty="0">
+              <a:rPr lang="en-US" sz="1100">
                 <a:solidFill>
                   <a:srgbClr val="86EFAC"/>
                 </a:solidFill>
@@ -11893,7 +12110,7 @@
               </a:rPr>
               <a:t>correct++;</a:t>
             </a:r>
-            <a:endParaRPr lang="en-US" sz="1100" dirty="0"/>
+            <a:endParaRPr lang="en-US" sz="1100"/>
           </a:p>
         </p:txBody>
       </p:sp>
@@ -11979,7 +12196,7 @@
               <a:buNone/>
             </a:pPr>
             <a:r>
-              <a:rPr lang="en-US" sz="3000" b="1" dirty="0">
+              <a:rPr lang="en-US" sz="3000" b="1">
                 <a:solidFill>
                   <a:srgbClr val="FFFFFF"/>
                 </a:solidFill>
@@ -11989,7 +12206,7 @@
               </a:rPr>
               <a:t>MPI Approach</a:t>
             </a:r>
-            <a:endParaRPr lang="en-US" sz="3000" dirty="0"/>
+            <a:endParaRPr lang="en-US" sz="3000"/>
           </a:p>
         </p:txBody>
       </p:sp>
@@ -12018,7 +12235,7 @@
               <a:buNone/>
             </a:pPr>
             <a:r>
-              <a:rPr lang="en-US" sz="1600" b="1" dirty="0">
+              <a:rPr lang="en-US" sz="1600" b="1">
                 <a:solidFill>
                   <a:srgbClr val="0D3B6E"/>
                 </a:solidFill>
@@ -12028,7 +12245,7 @@
               </a:rPr>
               <a:t>Design &amp; Approach</a:t>
             </a:r>
-            <a:endParaRPr lang="en-US" sz="1600" dirty="0"/>
+            <a:endParaRPr lang="en-US" sz="1600"/>
           </a:p>
         </p:txBody>
       </p:sp>
@@ -12061,7 +12278,7 @@
               <a:buChar char="•"/>
             </a:pPr>
             <a:r>
-              <a:rPr lang="en-US" sz="1400" b="1" dirty="0">
+              <a:rPr lang="en-US" sz="1400" b="1">
                 <a:solidFill>
                   <a:srgbClr val="0D3B6E"/>
                 </a:solidFill>
@@ -12072,7 +12289,7 @@
               <a:t>Rank 0</a:t>
             </a:r>
             <a:r>
-              <a:rPr lang="en-US" sz="1400" b="1" dirty="0">
+              <a:rPr lang="en-US" sz="1400" b="1">
                 <a:solidFill>
                   <a:srgbClr val="444444"/>
                 </a:solidFill>
@@ -12083,7 +12300,7 @@
               <a:t> </a:t>
             </a:r>
             <a:r>
-              <a:rPr lang="en-US" sz="1400" b="1" dirty="0">
+              <a:rPr lang="en-US" sz="1400" b="1">
                 <a:solidFill>
                   <a:srgbClr val="0D3B6E"/>
                 </a:solidFill>
@@ -12094,7 +12311,7 @@
               <a:t>reads all data</a:t>
             </a:r>
             <a:r>
-              <a:rPr lang="en-US" sz="1400" dirty="0">
+              <a:rPr lang="en-US" sz="1400">
                 <a:solidFill>
                   <a:srgbClr val="0D3B6E"/>
                 </a:solidFill>
@@ -12105,7 +12322,7 @@
               <a:t> </a:t>
             </a:r>
             <a:r>
-              <a:rPr lang="en-US" sz="1400" dirty="0" err="1">
+              <a:rPr lang="en-US" sz="1400" err="1">
                 <a:solidFill>
                   <a:srgbClr val="444444"/>
                 </a:solidFill>
@@ -12116,7 +12333,7 @@
               <a:t>MPI_Bcast</a:t>
             </a:r>
             <a:r>
-              <a:rPr lang="en-US" sz="1400" dirty="0">
+              <a:rPr lang="en-US" sz="1400">
                 <a:solidFill>
                   <a:srgbClr val="444444"/>
                 </a:solidFill>
@@ -12136,7 +12353,7 @@
               <a:buChar char="•"/>
             </a:pPr>
             <a:r>
-              <a:rPr lang="en-US" sz="1400" b="1" dirty="0" err="1">
+              <a:rPr lang="en-US" sz="1400" b="1" err="1">
                 <a:solidFill>
                   <a:srgbClr val="0D3B6E"/>
                 </a:solidFill>
@@ -12147,7 +12364,7 @@
               <a:t>accumulate_counts_range</a:t>
             </a:r>
             <a:r>
-              <a:rPr lang="en-US" sz="1400" b="1" dirty="0">
+              <a:rPr lang="en-US" sz="1400" b="1">
                 <a:solidFill>
                   <a:srgbClr val="0D3B6E"/>
                 </a:solidFill>
@@ -12158,7 +12375,7 @@
               <a:t> </a:t>
             </a:r>
             <a:r>
-              <a:rPr lang="en-US" sz="1400" dirty="0">
+              <a:rPr lang="en-US" sz="1400">
                 <a:solidFill>
                   <a:srgbClr val="444444"/>
                 </a:solidFill>
@@ -12169,7 +12386,7 @@
               <a:t>local rows, </a:t>
             </a:r>
             <a:r>
-              <a:rPr lang="en-US" sz="1400" dirty="0" err="1">
+              <a:rPr lang="en-US" sz="1400" err="1">
                 <a:solidFill>
                   <a:srgbClr val="444444"/>
                 </a:solidFill>
@@ -12180,7 +12397,7 @@
               <a:t>MPI_Allreduce</a:t>
             </a:r>
             <a:r>
-              <a:rPr lang="en-US" sz="1400" dirty="0">
+              <a:rPr lang="en-US" sz="1400">
                 <a:solidFill>
                   <a:srgbClr val="444444"/>
                 </a:solidFill>
@@ -12200,7 +12417,7 @@
               <a:buChar char="•"/>
             </a:pPr>
             <a:r>
-              <a:rPr lang="en-US" sz="1400" b="1" dirty="0" err="1">
+              <a:rPr lang="en-US" sz="1400" b="1" err="1">
                 <a:solidFill>
                   <a:srgbClr val="0D3B6E"/>
                 </a:solidFill>
@@ -12211,7 +12428,7 @@
               <a:t>classify_dataset</a:t>
             </a:r>
             <a:r>
-              <a:rPr lang="en-US" sz="1400" b="1" dirty="0">
+              <a:rPr lang="en-US" sz="1400" b="1">
                 <a:solidFill>
                   <a:srgbClr val="0D3B6E"/>
                 </a:solidFill>
@@ -12222,7 +12439,7 @@
               <a:t> </a:t>
             </a:r>
             <a:r>
-              <a:rPr lang="en-US" sz="1400" dirty="0">
+              <a:rPr lang="en-US" sz="1400">
                 <a:solidFill>
                   <a:srgbClr val="444444"/>
                 </a:solidFill>
@@ -12233,7 +12450,7 @@
               <a:t>local rows, </a:t>
             </a:r>
             <a:r>
-              <a:rPr lang="en-US" sz="1400" dirty="0" err="1">
+              <a:rPr lang="en-US" sz="1400" err="1">
                 <a:solidFill>
                   <a:srgbClr val="444444"/>
                 </a:solidFill>
@@ -12244,7 +12461,7 @@
               <a:t>MPI_Allgatherv</a:t>
             </a:r>
             <a:r>
-              <a:rPr lang="en-US" sz="1400" dirty="0">
+              <a:rPr lang="en-US" sz="1400">
                 <a:solidFill>
                   <a:srgbClr val="444444"/>
                 </a:solidFill>
@@ -12264,7 +12481,7 @@
               <a:buChar char="•"/>
             </a:pPr>
             <a:r>
-              <a:rPr lang="en-US" sz="1400" b="1" dirty="0" err="1">
+              <a:rPr lang="en-US" sz="1400" b="1" err="1">
                 <a:solidFill>
                   <a:srgbClr val="0D3B6E"/>
                 </a:solidFill>
@@ -12275,7 +12492,7 @@
               <a:t>build_truth</a:t>
             </a:r>
             <a:r>
-              <a:rPr lang="en-US" sz="1400" b="1" dirty="0">
+              <a:rPr lang="en-US" sz="1400" b="1">
                 <a:solidFill>
                   <a:srgbClr val="0D3B6E"/>
                 </a:solidFill>
@@ -12286,7 +12503,7 @@
               <a:t> </a:t>
             </a:r>
             <a:r>
-              <a:rPr lang="en-US" sz="1400" dirty="0">
+              <a:rPr lang="en-US" sz="1400">
                 <a:solidFill>
                   <a:srgbClr val="444444"/>
                 </a:solidFill>
@@ -12297,7 +12514,7 @@
               <a:t>local labels, </a:t>
             </a:r>
             <a:r>
-              <a:rPr lang="en-US" sz="1400" dirty="0" err="1">
+              <a:rPr lang="en-US" sz="1400" err="1">
                 <a:solidFill>
                   <a:srgbClr val="444444"/>
                 </a:solidFill>
@@ -12308,7 +12525,7 @@
               <a:t>MPI_Allgatherv</a:t>
             </a:r>
             <a:r>
-              <a:rPr lang="en-US" sz="1400" dirty="0">
+              <a:rPr lang="en-US" sz="1400">
                 <a:solidFill>
                   <a:srgbClr val="444444"/>
                 </a:solidFill>
@@ -12328,7 +12545,7 @@
               <a:buChar char="•"/>
             </a:pPr>
             <a:r>
-              <a:rPr lang="en-US" sz="1400" b="1" dirty="0" err="1">
+              <a:rPr lang="en-US" sz="1400" b="1" err="1">
                 <a:solidFill>
                   <a:srgbClr val="0D3B6E"/>
                 </a:solidFill>
@@ -12339,7 +12556,7 @@
               <a:t>compute_accuracy</a:t>
             </a:r>
             <a:r>
-              <a:rPr lang="en-US" sz="1400" b="1" dirty="0">
+              <a:rPr lang="en-US" sz="1400" b="1">
                 <a:solidFill>
                   <a:srgbClr val="0D3B6E"/>
                 </a:solidFill>
@@ -12350,7 +12567,7 @@
               <a:t> </a:t>
             </a:r>
             <a:r>
-              <a:rPr lang="en-US" sz="1400" dirty="0">
+              <a:rPr lang="en-US" sz="1400">
                 <a:solidFill>
                   <a:srgbClr val="444444"/>
                 </a:solidFill>
@@ -12361,7 +12578,7 @@
               <a:t>local counts, </a:t>
             </a:r>
             <a:r>
-              <a:rPr lang="en-US" sz="1400" dirty="0" err="1">
+              <a:rPr lang="en-US" sz="1400" err="1">
                 <a:solidFill>
                   <a:srgbClr val="444444"/>
                 </a:solidFill>
@@ -12372,7 +12589,7 @@
               <a:t>MPI_Allreduce</a:t>
             </a:r>
             <a:r>
-              <a:rPr lang="en-US" sz="1400" dirty="0">
+              <a:rPr lang="en-US" sz="1400">
                 <a:solidFill>
                   <a:srgbClr val="444444"/>
                 </a:solidFill>
@@ -12392,7 +12609,7 @@
               <a:buChar char="•"/>
             </a:pPr>
             <a:r>
-              <a:rPr lang="en-US" sz="1400" b="1" dirty="0" err="1">
+              <a:rPr lang="en-US" sz="1400" b="1" err="1">
                 <a:solidFill>
                   <a:srgbClr val="0D3B6E"/>
                 </a:solidFill>
@@ -12403,7 +12620,7 @@
               <a:t>copy_rows</a:t>
             </a:r>
             <a:r>
-              <a:rPr lang="en-US" sz="1400" b="1" dirty="0">
+              <a:rPr lang="en-US" sz="1400" b="1">
                 <a:solidFill>
                   <a:srgbClr val="0D3B6E"/>
                 </a:solidFill>
@@ -12414,7 +12631,7 @@
               <a:t> </a:t>
             </a:r>
             <a:r>
-              <a:rPr lang="en-US" sz="1400" dirty="0">
+              <a:rPr lang="en-US" sz="1400">
                 <a:solidFill>
                   <a:srgbClr val="444444"/>
                 </a:solidFill>
@@ -12425,7 +12642,7 @@
               <a:t>local split, </a:t>
             </a:r>
             <a:r>
-              <a:rPr lang="en-US" sz="1400" dirty="0" err="1">
+              <a:rPr lang="en-US" sz="1400" err="1">
                 <a:solidFill>
                   <a:srgbClr val="444444"/>
                 </a:solidFill>
@@ -12436,7 +12653,7 @@
               <a:t>MPI_Allgatherv</a:t>
             </a:r>
             <a:r>
-              <a:rPr lang="en-US" sz="1400" dirty="0">
+              <a:rPr lang="en-US" sz="1400">
                 <a:solidFill>
                   <a:srgbClr val="444444"/>
                 </a:solidFill>
@@ -12456,7 +12673,7 @@
               <a:buChar char="•"/>
             </a:pPr>
             <a:r>
-              <a:rPr lang="en-US" sz="1400" b="1" dirty="0" err="1">
+              <a:rPr lang="en-US" sz="1400" b="1" err="1">
                 <a:solidFill>
                   <a:srgbClr val="0D3B6E"/>
                 </a:solidFill>
@@ -12467,7 +12684,7 @@
               <a:t>confusion_matrix_binary</a:t>
             </a:r>
             <a:r>
-              <a:rPr lang="en-US" sz="1400" b="1" dirty="0">
+              <a:rPr lang="en-US" sz="1400" b="1">
                 <a:solidFill>
                   <a:srgbClr val="0D3B6E"/>
                 </a:solidFill>
@@ -12478,7 +12695,7 @@
               <a:t> </a:t>
             </a:r>
             <a:r>
-              <a:rPr lang="en-US" sz="1400" dirty="0">
+              <a:rPr lang="en-US" sz="1400">
                 <a:solidFill>
                   <a:srgbClr val="444444"/>
                 </a:solidFill>
@@ -12489,7 +12706,7 @@
               <a:t>local TN/FP/FN/TP, </a:t>
             </a:r>
             <a:r>
-              <a:rPr lang="en-US" sz="1400" dirty="0" err="1">
+              <a:rPr lang="en-US" sz="1400" err="1">
                 <a:solidFill>
                   <a:srgbClr val="444444"/>
                 </a:solidFill>
@@ -12500,7 +12717,7 @@
               <a:t>MPI_Reduce</a:t>
             </a:r>
             <a:r>
-              <a:rPr lang="en-US" sz="1400" dirty="0">
+              <a:rPr lang="en-US" sz="1400">
                 <a:solidFill>
                   <a:srgbClr val="444444"/>
                 </a:solidFill>
@@ -12510,7 +12727,7 @@
               </a:rPr>
               <a:t> to rank 0</a:t>
             </a:r>
-            <a:endParaRPr lang="en-US" sz="1400" dirty="0"/>
+            <a:endParaRPr lang="en-US" sz="1400"/>
           </a:p>
         </p:txBody>
       </p:sp>
@@ -12539,7 +12756,7 @@
               <a:buNone/>
             </a:pPr>
             <a:r>
-              <a:rPr lang="en-US" sz="1600" b="1" dirty="0">
+              <a:rPr lang="en-US" sz="1600" b="1">
                 <a:solidFill>
                   <a:srgbClr val="0D3B6E"/>
                 </a:solidFill>
@@ -12549,7 +12766,7 @@
               </a:rPr>
               <a:t>CV Functions</a:t>
             </a:r>
-            <a:endParaRPr lang="en-US" sz="1600" dirty="0"/>
+            <a:endParaRPr lang="en-US" sz="1600"/>
           </a:p>
         </p:txBody>
       </p:sp>
@@ -12578,7 +12795,7 @@
               <a:buNone/>
             </a:pPr>
             <a:r>
-              <a:rPr lang="en-US" sz="1400" i="1" dirty="0">
+              <a:rPr lang="en-US" sz="1400" i="1">
                 <a:solidFill>
                   <a:srgbClr val="888888"/>
                 </a:solidFill>
@@ -12589,7 +12806,7 @@
               <a:t>Function: </a:t>
             </a:r>
             <a:r>
-              <a:rPr lang="en-US" sz="1400" i="1" dirty="0" err="1">
+              <a:rPr lang="en-US" sz="1400" i="1" err="1">
                 <a:solidFill>
                   <a:srgbClr val="888888"/>
                 </a:solidFill>
@@ -12599,7 +12816,7 @@
               </a:rPr>
               <a:t>copy_rows</a:t>
             </a:r>
-            <a:endParaRPr lang="en-US" sz="1400" dirty="0"/>
+            <a:endParaRPr lang="en-US" sz="1400"/>
           </a:p>
         </p:txBody>
       </p:sp>
@@ -12662,7 +12879,7 @@
               <a:buNone/>
             </a:pPr>
             <a:r>
-              <a:rPr lang="en-US" sz="1050" dirty="0">
+              <a:rPr lang="en-US" sz="1050">
                 <a:solidFill>
                   <a:srgbClr val="888888"/>
                 </a:solidFill>
@@ -12674,7 +12891,7 @@
 </a:t>
             </a:r>
             <a:r>
-              <a:rPr lang="en-US" sz="1050" dirty="0">
+              <a:rPr lang="en-US" sz="1050">
                 <a:solidFill>
                   <a:srgbClr val="FDE68A"/>
                 </a:solidFill>
@@ -12685,7 +12902,7 @@
               <a:t>for </a:t>
             </a:r>
             <a:r>
-              <a:rPr lang="en-US" sz="1050" dirty="0">
+              <a:rPr lang="en-US" sz="1050">
                 <a:solidFill>
                   <a:srgbClr val="FFFFFF"/>
                 </a:solidFill>
@@ -12697,7 +12914,7 @@
 </a:t>
             </a:r>
             <a:r>
-              <a:rPr lang="en-US" sz="1050" dirty="0">
+              <a:rPr lang="en-US" sz="1050">
                 <a:solidFill>
                   <a:srgbClr val="7DD3FC"/>
                 </a:solidFill>
@@ -12708,7 +12925,7 @@
               <a:t>  memcpy</a:t>
             </a:r>
             <a:r>
-              <a:rPr lang="en-US" sz="1050" dirty="0">
+              <a:rPr lang="en-US" sz="1050">
                 <a:solidFill>
                   <a:srgbClr val="FFFFFF"/>
                 </a:solidFill>
@@ -12720,7 +12937,7 @@
 </a:t>
             </a:r>
             <a:r>
-              <a:rPr lang="en-US" sz="1050" dirty="0">
+              <a:rPr lang="en-US" sz="1050">
                 <a:solidFill>
                   <a:srgbClr val="FCA5A5"/>
                 </a:solidFill>
@@ -12731,7 +12948,7 @@
               <a:t>MPI_Allgatherv</a:t>
             </a:r>
             <a:r>
-              <a:rPr lang="en-US" sz="1050" dirty="0">
+              <a:rPr lang="en-US" sz="1050">
                 <a:solidFill>
                   <a:srgbClr val="FFFFFF"/>
                 </a:solidFill>
@@ -12741,14 +12958,14 @@
               </a:rPr>
               <a:t>(local_dest, local_rows*cols,</a:t>
             </a:r>
-            <a:endParaRPr lang="en-US" sz="1050" dirty="0"/>
+            <a:endParaRPr lang="en-US" sz="1050"/>
           </a:p>
           <a:p>
             <a:pPr marL="0" indent="0">
               <a:buNone/>
             </a:pPr>
             <a:r>
-              <a:rPr lang="en-US" sz="1050" dirty="0">
+              <a:rPr lang="en-US" sz="1050">
                 <a:solidFill>
                   <a:srgbClr val="FFFFFF"/>
                 </a:solidFill>
@@ -12758,14 +12975,14 @@
               </a:rPr>
               <a:t>  MPI_INT, dest, counts, displ,</a:t>
             </a:r>
-            <a:endParaRPr lang="en-US" sz="1050" dirty="0"/>
+            <a:endParaRPr lang="en-US" sz="1050"/>
           </a:p>
           <a:p>
             <a:pPr marL="0" indent="0">
               <a:buNone/>
             </a:pPr>
             <a:r>
-              <a:rPr lang="en-US" sz="1050" dirty="0">
+              <a:rPr lang="en-US" sz="1050">
                 <a:solidFill>
                   <a:srgbClr val="FFFFFF"/>
                 </a:solidFill>
@@ -12775,7 +12992,7 @@
               </a:rPr>
               <a:t>  MPI_INT, WORLD);</a:t>
             </a:r>
-            <a:endParaRPr lang="en-US" sz="1050" dirty="0"/>
+            <a:endParaRPr lang="en-US" sz="1050"/>
           </a:p>
         </p:txBody>
       </p:sp>
@@ -12804,7 +13021,7 @@
               <a:buNone/>
             </a:pPr>
             <a:r>
-              <a:rPr lang="en-US" sz="1400" i="1" dirty="0">
+              <a:rPr lang="en-US" sz="1400" i="1">
                 <a:solidFill>
                   <a:srgbClr val="888888"/>
                 </a:solidFill>
@@ -12815,7 +13032,7 @@
               <a:t>Function: </a:t>
             </a:r>
             <a:r>
-              <a:rPr lang="en-US" sz="1400" i="1" dirty="0" err="1">
+              <a:rPr lang="en-US" sz="1400" i="1" err="1">
                 <a:solidFill>
                   <a:srgbClr val="888888"/>
                 </a:solidFill>
@@ -12825,7 +13042,7 @@
               </a:rPr>
               <a:t>confusion_matrix_binary</a:t>
             </a:r>
-            <a:endParaRPr lang="en-US" sz="1400" dirty="0"/>
+            <a:endParaRPr lang="en-US" sz="1400"/>
           </a:p>
         </p:txBody>
       </p:sp>
@@ -12888,7 +13105,7 @@
               <a:buNone/>
             </a:pPr>
             <a:r>
-              <a:rPr lang="en-US" sz="1050" dirty="0">
+              <a:rPr lang="en-US" sz="1050">
                 <a:solidFill>
                   <a:srgbClr val="888888"/>
                 </a:solidFill>
@@ -12900,7 +13117,7 @@
 </a:t>
             </a:r>
             <a:r>
-              <a:rPr lang="en-US" sz="1050" dirty="0">
+              <a:rPr lang="en-US" sz="1050">
                 <a:solidFill>
                   <a:srgbClr val="FDE68A"/>
                 </a:solidFill>
@@ -12911,7 +13128,7 @@
               <a:t>for </a:t>
             </a:r>
             <a:r>
-              <a:rPr lang="en-US" sz="1050" dirty="0">
+              <a:rPr lang="en-US" sz="1050">
                 <a:solidFill>
                   <a:srgbClr val="FFFFFF"/>
                 </a:solidFill>
@@ -12923,7 +13140,7 @@
 </a:t>
             </a:r>
             <a:r>
-              <a:rPr lang="en-US" sz="1050" dirty="0">
+              <a:rPr lang="en-US" sz="1050">
                 <a:solidFill>
                   <a:srgbClr val="FDE68A"/>
                 </a:solidFill>
@@ -12934,7 +13151,7 @@
               <a:t>  if </a:t>
             </a:r>
             <a:r>
-              <a:rPr lang="en-US" sz="1050" dirty="0">
+              <a:rPr lang="en-US" sz="1050">
                 <a:solidFill>
                   <a:srgbClr val="FFFFFF"/>
                 </a:solidFill>
@@ -12945,7 +13162,7 @@
               <a:t>(truth[i]==0 &amp;&amp; pred[i]==0) </a:t>
             </a:r>
             <a:r>
-              <a:rPr lang="en-US" sz="1050" dirty="0">
+              <a:rPr lang="en-US" sz="1050">
                 <a:solidFill>
                   <a:srgbClr val="86EFAC"/>
                 </a:solidFill>
@@ -12956,7 +13173,7 @@
               <a:t>tn</a:t>
             </a:r>
             <a:r>
-              <a:rPr lang="en-US" sz="1050" dirty="0">
+              <a:rPr lang="en-US" sz="1050">
                 <a:solidFill>
                   <a:srgbClr val="FFFFFF"/>
                 </a:solidFill>
@@ -12966,14 +13183,14 @@
               </a:rPr>
               <a:t>++;</a:t>
             </a:r>
-            <a:endParaRPr lang="en-US" sz="1050" dirty="0"/>
+            <a:endParaRPr lang="en-US" sz="1050"/>
           </a:p>
           <a:p>
             <a:pPr marL="0" indent="0">
               <a:buNone/>
             </a:pPr>
             <a:r>
-              <a:rPr lang="en-US" sz="1050" dirty="0">
+              <a:rPr lang="en-US" sz="1050">
                 <a:solidFill>
                   <a:srgbClr val="FFFFFF"/>
                 </a:solidFill>
@@ -12983,14 +13200,14 @@
               </a:rPr>
               <a:t>  else if </a:t>
             </a:r>
-            <a:endParaRPr lang="en-US" sz="1050" dirty="0"/>
+            <a:endParaRPr lang="en-US" sz="1050"/>
           </a:p>
           <a:p>
             <a:pPr marL="0" indent="0">
               <a:buNone/>
             </a:pPr>
             <a:r>
-              <a:rPr lang="en-US" sz="1050" dirty="0">
+              <a:rPr lang="en-US" sz="1050">
                 <a:solidFill>
                   <a:srgbClr val="FFFFFF"/>
                 </a:solidFill>
@@ -13001,7 +13218,7 @@
               <a:t>(truth[i]==1 &amp;&amp; pred[i]==1) </a:t>
             </a:r>
             <a:r>
-              <a:rPr lang="en-US" sz="1050" dirty="0">
+              <a:rPr lang="en-US" sz="1050">
                 <a:solidFill>
                   <a:srgbClr val="86EFAC"/>
                 </a:solidFill>
@@ -13012,7 +13229,7 @@
               <a:t>tp</a:t>
             </a:r>
             <a:r>
-              <a:rPr lang="en-US" sz="1050" dirty="0">
+              <a:rPr lang="en-US" sz="1050">
                 <a:solidFill>
                   <a:srgbClr val="FFFFFF"/>
                 </a:solidFill>
@@ -13022,14 +13239,14 @@
               </a:rPr>
               <a:t>++;</a:t>
             </a:r>
-            <a:endParaRPr lang="en-US" sz="1050" dirty="0"/>
+            <a:endParaRPr lang="en-US" sz="1050"/>
           </a:p>
           <a:p>
             <a:pPr marL="0" indent="0">
               <a:buNone/>
             </a:pPr>
             <a:r>
-              <a:rPr lang="en-US" sz="1050" dirty="0">
+              <a:rPr lang="en-US" sz="1050">
                 <a:solidFill>
                   <a:srgbClr val="FFFFFF"/>
                 </a:solidFill>
@@ -13039,14 +13256,14 @@
               </a:rPr>
               <a:t>  </a:t>
             </a:r>
-            <a:endParaRPr lang="en-US" sz="1050" dirty="0"/>
+            <a:endParaRPr lang="en-US" sz="1050"/>
           </a:p>
           <a:p>
             <a:pPr marL="0" indent="0">
               <a:buNone/>
             </a:pPr>
             <a:r>
-              <a:rPr lang="en-US" sz="1050" dirty="0">
+              <a:rPr lang="en-US" sz="1050">
                 <a:solidFill>
                   <a:srgbClr val="888888"/>
                 </a:solidFill>
@@ -13059,7 +13276,7 @@
 </a:t>
             </a:r>
             <a:r>
-              <a:rPr lang="en-US" sz="1050" dirty="0">
+              <a:rPr lang="en-US" sz="1050">
                 <a:solidFill>
                   <a:srgbClr val="7DD3FC"/>
                 </a:solidFill>
@@ -13070,7 +13287,7 @@
               <a:t>MPI_Reduce</a:t>
             </a:r>
             <a:r>
-              <a:rPr lang="en-US" sz="1050" dirty="0">
+              <a:rPr lang="en-US" sz="1050">
                 <a:solidFill>
                   <a:srgbClr val="FFFFFF"/>
                 </a:solidFill>
@@ -13080,14 +13297,14 @@
               </a:rPr>
               <a:t>(local, global, 4, MPI_INT,</a:t>
             </a:r>
-            <a:endParaRPr lang="en-US" sz="1050" dirty="0"/>
+            <a:endParaRPr lang="en-US" sz="1050"/>
           </a:p>
           <a:p>
             <a:pPr marL="0" indent="0">
               <a:buNone/>
             </a:pPr>
             <a:r>
-              <a:rPr lang="en-US" sz="1050" dirty="0">
+              <a:rPr lang="en-US" sz="1050">
                 <a:solidFill>
                   <a:srgbClr val="FFFFFF"/>
                 </a:solidFill>
@@ -13097,14 +13314,14 @@
               </a:rPr>
               <a:t>  MPI_SUM, </a:t>
             </a:r>
-            <a:endParaRPr lang="en-US" sz="1050" dirty="0"/>
+            <a:endParaRPr lang="en-US" sz="1050"/>
           </a:p>
           <a:p>
             <a:pPr marL="0" indent="0">
               <a:buNone/>
             </a:pPr>
             <a:r>
-              <a:rPr lang="en-US" sz="1050" dirty="0">
+              <a:rPr lang="en-US" sz="1050">
                 <a:solidFill>
                   <a:srgbClr val="86EFAC"/>
                 </a:solidFill>
@@ -13115,7 +13332,7 @@
               <a:t>0</a:t>
             </a:r>
             <a:r>
-              <a:rPr lang="en-US" sz="1050" dirty="0">
+              <a:rPr lang="en-US" sz="1050">
                 <a:solidFill>
                   <a:srgbClr val="FFFFFF"/>
                 </a:solidFill>
@@ -13125,7 +13342,7 @@
               </a:rPr>
               <a:t>, MPI_COMM_WORLD);</a:t>
             </a:r>
-            <a:endParaRPr lang="en-US" sz="1050" dirty="0"/>
+            <a:endParaRPr lang="en-US" sz="1050"/>
           </a:p>
         </p:txBody>
       </p:sp>
@@ -13211,7 +13428,7 @@
               <a:buNone/>
             </a:pPr>
             <a:r>
-              <a:rPr lang="en-US" sz="3000" b="1" dirty="0">
+              <a:rPr lang="en-US" sz="3000" b="1">
                 <a:solidFill>
                   <a:srgbClr val="FFFFFF"/>
                 </a:solidFill>
@@ -13221,7 +13438,7 @@
               </a:rPr>
               <a:t>Hybrid Approach</a:t>
             </a:r>
-            <a:endParaRPr lang="en-US" sz="3000" dirty="0"/>
+            <a:endParaRPr lang="en-US" sz="3000"/>
           </a:p>
         </p:txBody>
       </p:sp>
@@ -13250,7 +13467,7 @@
               <a:buNone/>
             </a:pPr>
             <a:r>
-              <a:rPr lang="en-US" sz="1600" b="1" dirty="0">
+              <a:rPr lang="en-US" sz="1600" b="1">
                 <a:solidFill>
                   <a:srgbClr val="0D3B6E"/>
                 </a:solidFill>
@@ -13260,7 +13477,7 @@
               </a:rPr>
               <a:t>Design &amp; Approach</a:t>
             </a:r>
-            <a:endParaRPr lang="en-US" sz="1600" dirty="0"/>
+            <a:endParaRPr lang="en-US" sz="1600"/>
           </a:p>
         </p:txBody>
       </p:sp>
@@ -13293,7 +13510,7 @@
               <a:buChar char="•"/>
             </a:pPr>
             <a:r>
-              <a:rPr lang="en-US" sz="1600" b="1" dirty="0">
+              <a:rPr lang="en-US" sz="1600" b="1">
                 <a:solidFill>
                   <a:srgbClr val="0D3B6E"/>
                 </a:solidFill>
@@ -13304,7 +13521,7 @@
               <a:t>MPI</a:t>
             </a:r>
             <a:r>
-              <a:rPr lang="en-US" sz="1600" dirty="0">
+              <a:rPr lang="en-US" sz="1600">
                 <a:solidFill>
                   <a:srgbClr val="444444"/>
                 </a:solidFill>
@@ -13316,7 +13533,7 @@
 </a:t>
             </a:r>
             <a:r>
-              <a:rPr lang="en-US" sz="1600" b="1" dirty="0">
+              <a:rPr lang="en-US" sz="1600" b="1">
                 <a:solidFill>
                   <a:srgbClr val="0D3B6E"/>
                 </a:solidFill>
@@ -13327,7 +13544,7 @@
               <a:t>OpenMP</a:t>
             </a:r>
             <a:r>
-              <a:rPr lang="en-US" sz="1600" dirty="0">
+              <a:rPr lang="en-US" sz="1600">
                 <a:solidFill>
                   <a:srgbClr val="444444"/>
                 </a:solidFill>
@@ -13339,7 +13556,7 @@
 </a:t>
             </a:r>
             <a:r>
-              <a:rPr lang="en-US" sz="1600" b="1" dirty="0">
+              <a:rPr lang="en-US" sz="1600" b="1">
                 <a:solidFill>
                   <a:srgbClr val="0D3B6E"/>
                 </a:solidFill>
@@ -13350,7 +13567,7 @@
               <a:t>Two levels of parallelism</a:t>
             </a:r>
             <a:r>
-              <a:rPr lang="en-US" sz="1600" dirty="0">
+              <a:rPr lang="en-US" sz="1600">
                 <a:solidFill>
                   <a:srgbClr val="444444"/>
                 </a:solidFill>
@@ -13362,7 +13579,7 @@
 </a:t>
             </a:r>
             <a:r>
-              <a:rPr lang="en-US" sz="1600" b="1" dirty="0">
+              <a:rPr lang="en-US" sz="1600" b="1">
                 <a:solidFill>
                   <a:srgbClr val="0D3B6E"/>
                 </a:solidFill>
@@ -13373,7 +13590,7 @@
               <a:t>Same CV structure as MPI</a:t>
             </a:r>
             <a:r>
-              <a:rPr lang="en-US" sz="1600" dirty="0">
+              <a:rPr lang="en-US" sz="1600">
                 <a:solidFill>
                   <a:srgbClr val="444444"/>
                 </a:solidFill>
@@ -13385,7 +13602,7 @@
 </a:t>
             </a:r>
             <a:r>
-              <a:rPr lang="en-US" sz="1600" b="1" dirty="0">
+              <a:rPr lang="en-US" sz="1600" b="1">
                 <a:solidFill>
                   <a:srgbClr val="0D3B6E"/>
                 </a:solidFill>
@@ -13396,7 +13613,7 @@
               <a:t>CLI</a:t>
             </a:r>
             <a:r>
-              <a:rPr lang="en-US" sz="1600" dirty="0">
+              <a:rPr lang="en-US" sz="1600">
                 <a:solidFill>
                   <a:srgbClr val="444444"/>
                 </a:solidFill>
@@ -13408,7 +13625,7 @@
 </a:t>
             </a:r>
             <a:r>
-              <a:rPr lang="en-US" sz="1600" b="1" dirty="0">
+              <a:rPr lang="en-US" sz="1600" b="1">
                 <a:solidFill>
                   <a:srgbClr val="0D3B6E"/>
                 </a:solidFill>
@@ -13419,7 +13636,7 @@
               <a:t>Serial design paid off twice</a:t>
             </a:r>
             <a:r>
-              <a:rPr lang="en-US" sz="1600" dirty="0">
+              <a:rPr lang="en-US" sz="1600">
                 <a:solidFill>
                   <a:srgbClr val="444444"/>
                 </a:solidFill>
@@ -13429,7 +13646,7 @@
               </a:rPr>
               <a:t>  row ranges and flat arrays enabled both MPI and OMP with minimal changes</a:t>
             </a:r>
-            <a:endParaRPr lang="en-US" sz="1600" dirty="0"/>
+            <a:endParaRPr lang="en-US" sz="1600"/>
           </a:p>
         </p:txBody>
       </p:sp>
@@ -13458,7 +13675,7 @@
               <a:buNone/>
             </a:pPr>
             <a:r>
-              <a:rPr lang="en-US" sz="1400" b="1" dirty="0" err="1">
+              <a:rPr lang="en-US" sz="1400" b="1" err="1">
                 <a:solidFill>
                   <a:srgbClr val="0D3B6E"/>
                 </a:solidFill>
@@ -13469,7 +13686,7 @@
               <a:t>accumulate_counts_range</a:t>
             </a:r>
             <a:r>
-              <a:rPr lang="en-US" sz="1400" b="1" dirty="0">
+              <a:rPr lang="en-US" sz="1400" b="1">
                 <a:solidFill>
                   <a:srgbClr val="0D3B6E"/>
                 </a:solidFill>
@@ -13479,7 +13696,7 @@
               </a:rPr>
               <a:t>:  MPI + OMP cooperating</a:t>
             </a:r>
-            <a:endParaRPr lang="en-US" sz="1400" dirty="0"/>
+            <a:endParaRPr lang="en-US" sz="1400"/>
           </a:p>
         </p:txBody>
       </p:sp>
@@ -13542,7 +13759,7 @@
               <a:buNone/>
             </a:pPr>
             <a:r>
-              <a:rPr lang="en-US" sz="1100" dirty="0">
+              <a:rPr lang="en-US" sz="1100">
                 <a:solidFill>
                   <a:srgbClr val="888888"/>
                 </a:solidFill>
@@ -13554,7 +13771,7 @@
 </a:t>
             </a:r>
             <a:r>
-              <a:rPr lang="en-US" sz="1100" dirty="0">
+              <a:rPr lang="en-US" sz="1100">
                 <a:solidFill>
                   <a:srgbClr val="7DD3FC"/>
                 </a:solidFill>
@@ -13565,7 +13782,7 @@
               <a:t>MPI_Comm_rank</a:t>
             </a:r>
             <a:r>
-              <a:rPr lang="en-US" sz="1100" dirty="0">
+              <a:rPr lang="en-US" sz="1100">
                 <a:solidFill>
                   <a:srgbClr val="FFFFFF"/>
                 </a:solidFill>
@@ -13577,7 +13794,7 @@
 </a:t>
             </a:r>
             <a:r>
-              <a:rPr lang="en-US" sz="1100" dirty="0">
+              <a:rPr lang="en-US" sz="1100">
                 <a:solidFill>
                   <a:srgbClr val="FDE68A"/>
                 </a:solidFill>
@@ -13588,7 +13805,7 @@
               <a:t>int </a:t>
             </a:r>
             <a:r>
-              <a:rPr lang="en-US" sz="1100" dirty="0">
+              <a:rPr lang="en-US" sz="1100">
                 <a:solidFill>
                   <a:srgbClr val="FFFFFF"/>
                 </a:solidFill>
@@ -13600,7 +13817,7 @@
 </a:t>
             </a:r>
             <a:r>
-              <a:rPr lang="en-US" sz="1100" dirty="0">
+              <a:rPr lang="en-US" sz="1100">
                 <a:solidFill>
                   <a:srgbClr val="FDE68A"/>
                 </a:solidFill>
@@ -13611,7 +13828,7 @@
               <a:t>int </a:t>
             </a:r>
             <a:r>
-              <a:rPr lang="en-US" sz="1100" dirty="0">
+              <a:rPr lang="en-US" sz="1100">
                 <a:solidFill>
                   <a:srgbClr val="FFFFFF"/>
                 </a:solidFill>
@@ -13623,7 +13840,7 @@
 </a:t>
             </a:r>
             <a:r>
-              <a:rPr lang="en-US" sz="1100" dirty="0">
+              <a:rPr lang="en-US" sz="1100">
                 <a:solidFill>
                   <a:srgbClr val="888888"/>
                 </a:solidFill>
@@ -13635,7 +13852,7 @@
 </a:t>
             </a:r>
             <a:r>
-              <a:rPr lang="en-US" sz="1100" dirty="0">
+              <a:rPr lang="en-US" sz="1100">
                 <a:solidFill>
                   <a:srgbClr val="C4B5FD"/>
                 </a:solidFill>
@@ -13646,7 +13863,7 @@
               <a:t>#pragma omp parallel for </a:t>
             </a:r>
             <a:r>
-              <a:rPr lang="en-US" sz="1100" dirty="0">
+              <a:rPr lang="en-US" sz="1100">
                 <a:solidFill>
                   <a:srgbClr val="FDE68A"/>
                 </a:solidFill>
@@ -13657,7 +13874,7 @@
               <a:t>schedule</a:t>
             </a:r>
             <a:r>
-              <a:rPr lang="en-US" sz="1100" dirty="0">
+              <a:rPr lang="en-US" sz="1100">
                 <a:solidFill>
                   <a:srgbClr val="FFFFFF"/>
                 </a:solidFill>
@@ -13669,7 +13886,7 @@
 </a:t>
             </a:r>
             <a:r>
-              <a:rPr lang="en-US" sz="1100" dirty="0">
+              <a:rPr lang="en-US" sz="1100">
                 <a:solidFill>
                   <a:srgbClr val="FDE68A"/>
                 </a:solidFill>
@@ -13680,7 +13897,7 @@
               <a:t>  reduction</a:t>
             </a:r>
             <a:r>
-              <a:rPr lang="en-US" sz="1100" dirty="0">
+              <a:rPr lang="en-US" sz="1100">
                 <a:solidFill>
                   <a:srgbClr val="FFFFFF"/>
                 </a:solidFill>
@@ -13692,7 +13909,7 @@
 </a:t>
             </a:r>
             <a:r>
-              <a:rPr lang="en-US" sz="1100" dirty="0">
+              <a:rPr lang="en-US" sz="1100">
                 <a:solidFill>
                   <a:srgbClr val="FDE68A"/>
                 </a:solidFill>
@@ -13703,7 +13920,7 @@
               <a:t>  reduction</a:t>
             </a:r>
             <a:r>
-              <a:rPr lang="en-US" sz="1100" dirty="0">
+              <a:rPr lang="en-US" sz="1100">
                 <a:solidFill>
                   <a:srgbClr val="FFFFFF"/>
                 </a:solidFill>
@@ -13715,7 +13932,7 @@
 </a:t>
             </a:r>
             <a:r>
-              <a:rPr lang="en-US" sz="1100" dirty="0">
+              <a:rPr lang="en-US" sz="1100">
                 <a:solidFill>
                   <a:srgbClr val="FDE68A"/>
                 </a:solidFill>
@@ -13726,7 +13943,7 @@
               <a:t>for </a:t>
             </a:r>
             <a:r>
-              <a:rPr lang="en-US" sz="1100" dirty="0">
+              <a:rPr lang="en-US" sz="1100">
                 <a:solidFill>
                   <a:srgbClr val="FFFFFF"/>
                 </a:solidFill>
@@ -13738,7 +13955,7 @@
 </a:t>
             </a:r>
             <a:r>
-              <a:rPr lang="en-US" sz="1100" dirty="0">
+              <a:rPr lang="en-US" sz="1100">
                 <a:solidFill>
                   <a:srgbClr val="888888"/>
                 </a:solidFill>
@@ -13752,7 +13969,7 @@
 </a:t>
             </a:r>
             <a:r>
-              <a:rPr lang="en-US" sz="1100" dirty="0">
+              <a:rPr lang="en-US" sz="1100">
                 <a:solidFill>
                   <a:srgbClr val="FCA5A5"/>
                 </a:solidFill>
@@ -13763,7 +13980,7 @@
               <a:t>MPI_Allreduce</a:t>
             </a:r>
             <a:r>
-              <a:rPr lang="en-US" sz="1100" dirty="0">
+              <a:rPr lang="en-US" sz="1100">
                 <a:solidFill>
                   <a:srgbClr val="FFFFFF"/>
                 </a:solidFill>
@@ -13776,7 +13993,7 @@
 </a:t>
             </a:r>
             <a:r>
-              <a:rPr lang="en-US" sz="1100" dirty="0">
+              <a:rPr lang="en-US" sz="1100">
                 <a:solidFill>
                   <a:srgbClr val="FCA5A5"/>
                 </a:solidFill>
@@ -13787,7 +14004,7 @@
               <a:t>MPI_Allreduce</a:t>
             </a:r>
             <a:r>
-              <a:rPr lang="en-US" sz="1100" dirty="0">
+              <a:rPr lang="en-US" sz="1100">
                 <a:solidFill>
                   <a:srgbClr val="FFFFFF"/>
                 </a:solidFill>
@@ -13797,14 +14014,14 @@
               </a:rPr>
               <a:t>(local_feat, feature_counts,</a:t>
             </a:r>
-            <a:endParaRPr lang="en-US" sz="1100" dirty="0"/>
+            <a:endParaRPr lang="en-US" sz="1100"/>
           </a:p>
           <a:p>
             <a:pPr marL="0" indent="0">
               <a:buNone/>
             </a:pPr>
             <a:r>
-              <a:rPr lang="en-US" sz="1100" dirty="0">
+              <a:rPr lang="en-US" sz="1100">
                 <a:solidFill>
                   <a:srgbClr val="FFFFFF"/>
                 </a:solidFill>
@@ -13814,7 +14031,7 @@
               </a:rPr>
               <a:t>  P, MPI_LONG_LONG, MPI_SUM, WORLD);</a:t>
             </a:r>
-            <a:endParaRPr lang="en-US" sz="1100" dirty="0"/>
+            <a:endParaRPr lang="en-US" sz="1100"/>
           </a:p>
         </p:txBody>
       </p:sp>
@@ -13900,7 +14117,7 @@
               <a:buNone/>
             </a:pPr>
             <a:r>
-              <a:rPr lang="en-US" sz="3000" b="1" dirty="0">
+              <a:rPr lang="en-US" sz="3000" b="1">
                 <a:solidFill>
                   <a:srgbClr val="FFFFFF"/>
                 </a:solidFill>
@@ -13910,7 +14127,7 @@
               </a:rPr>
               <a:t>Experimental Setup</a:t>
             </a:r>
-            <a:endParaRPr lang="en-US" sz="3000" dirty="0"/>
+            <a:endParaRPr lang="en-US" sz="3000"/>
           </a:p>
         </p:txBody>
       </p:sp>
@@ -13940,7 +14157,7 @@
               <a:buChar char="•"/>
             </a:pPr>
             <a:r>
-              <a:rPr lang="en-US" dirty="0">
+              <a:rPr lang="en-US">
                 <a:solidFill>
                   <a:srgbClr val="1A1A1A"/>
                 </a:solidFill>
@@ -13958,7 +14175,7 @@
               <a:buChar char="•"/>
             </a:pPr>
             <a:r>
-              <a:rPr lang="en-US" dirty="0">
+              <a:rPr lang="en-US">
                 <a:solidFill>
                   <a:srgbClr val="1A1A1A"/>
                 </a:solidFill>
@@ -13968,14 +14185,14 @@
               </a:rPr>
               <a:t>Performance phase: each configuration run 5 times and averaged</a:t>
             </a:r>
-            <a:endParaRPr lang="en-US" dirty="0"/>
+            <a:endParaRPr lang="en-US"/>
           </a:p>
           <a:p>
             <a:pPr marL="342900" indent="-342900">
               <a:buSzPct val="100000"/>
               <a:buChar char="•"/>
             </a:pPr>
-            <a:endParaRPr lang="en-US" sz="1600" dirty="0"/>
+            <a:endParaRPr lang="en-US" sz="1600"/>
           </a:p>
         </p:txBody>
       </p:sp>
@@ -14004,7 +14221,7 @@
               <a:buNone/>
             </a:pPr>
             <a:r>
-              <a:rPr lang="en-US" b="1" dirty="0">
+              <a:rPr lang="en-US" b="1">
                 <a:solidFill>
                   <a:srgbClr val="185FA5"/>
                 </a:solidFill>
@@ -14014,7 +14231,7 @@
               </a:rPr>
               <a:t>Expanse (SDSC)</a:t>
             </a:r>
-            <a:endParaRPr lang="en-US" dirty="0"/>
+            <a:endParaRPr lang="en-US"/>
           </a:p>
         </p:txBody>
       </p:sp>
@@ -14027,7 +14244,7 @@
           <p:nvPr>
             <p:extLst>
               <p:ext uri="{D42A27DB-BD31-4B8C-83A1-F6EECF244321}">
-                <p14:modId xmlns:p14="http://schemas.microsoft.com/office/powerpoint/2010/main" val="2804466758"/>
+                <p14:modId xmlns:p14="http://schemas.microsoft.com/office/powerpoint/2010/main" val="2185988321"/>
               </p:ext>
             </p:extLst>
           </p:nvPr>
@@ -14066,7 +14283,7 @@
                         <a:buNone/>
                       </a:pPr>
                       <a:r>
-                        <a:rPr lang="en-US" sz="1300" b="1" dirty="0">
+                        <a:rPr lang="en-US" sz="1300" b="1">
                           <a:solidFill>
                             <a:srgbClr val="FFFFFF"/>
                           </a:solidFill>
@@ -14076,7 +14293,7 @@
                         </a:rPr>
                         <a:t>Phase</a:t>
                       </a:r>
-                      <a:endParaRPr lang="en-US" sz="1300" dirty="0">
+                      <a:endParaRPr lang="en-US" sz="1300">
                         <a:latin typeface="Calibri" charset="0"/>
                         <a:ea typeface="Calibri" charset="0"/>
                         <a:cs typeface="Calibri" charset="0"/>
@@ -14134,7 +14351,7 @@
                         <a:buNone/>
                       </a:pPr>
                       <a:r>
-                        <a:rPr lang="en-US" sz="1300" b="1" dirty="0">
+                        <a:rPr lang="en-US" sz="1300" b="1">
                           <a:solidFill>
                             <a:srgbClr val="FFFFFF"/>
                           </a:solidFill>
@@ -14144,7 +14361,7 @@
                         </a:rPr>
                         <a:t>Details</a:t>
                       </a:r>
-                      <a:endParaRPr lang="en-US" sz="1300" dirty="0">
+                      <a:endParaRPr lang="en-US" sz="1300">
                         <a:latin typeface="Calibri" charset="0"/>
                         <a:ea typeface="Calibri" charset="0"/>
                         <a:cs typeface="Calibri" charset="0"/>
@@ -14209,7 +14426,7 @@
                         <a:buNone/>
                       </a:pPr>
                       <a:r>
-                        <a:rPr lang="en-US" sz="1300" b="1" dirty="0">
+                        <a:rPr lang="en-US" sz="1300" b="1">
                           <a:solidFill>
                             <a:srgbClr val="1A1A1A"/>
                           </a:solidFill>
@@ -14219,7 +14436,7 @@
                         </a:rPr>
                         <a:t>Correctness</a:t>
                       </a:r>
-                      <a:endParaRPr lang="en-US" sz="1300" dirty="0">
+                      <a:endParaRPr lang="en-US" sz="1300">
                         <a:latin typeface="Calibri" charset="0"/>
                         <a:ea typeface="Calibri" charset="0"/>
                         <a:cs typeface="Calibri" charset="0"/>
@@ -14277,7 +14494,7 @@
                         <a:buNone/>
                       </a:pPr>
                       <a:r>
-                        <a:rPr lang="en-US" sz="1300" dirty="0">
+                        <a:rPr lang="en-US" sz="1300">
                           <a:solidFill>
                             <a:srgbClr val="1A1A1A"/>
                           </a:solidFill>
@@ -14287,7 +14504,7 @@
                         </a:rPr>
                         <a:t>All 4 implementations on heart dataset, 1 run each</a:t>
                       </a:r>
-                      <a:endParaRPr lang="en-US" sz="1300" dirty="0">
+                      <a:endParaRPr lang="en-US" sz="1300">
                         <a:latin typeface="Calibri" charset="0"/>
                         <a:ea typeface="Calibri" charset="0"/>
                         <a:cs typeface="Calibri" charset="0"/>
@@ -14352,7 +14569,7 @@
                         <a:buNone/>
                       </a:pPr>
                       <a:r>
-                        <a:rPr lang="en-US" sz="1300" b="1" dirty="0">
+                        <a:rPr lang="en-US" sz="1300" b="1">
                           <a:solidFill>
                             <a:srgbClr val="1A1A1A"/>
                           </a:solidFill>
@@ -14362,7 +14579,7 @@
                         </a:rPr>
                         <a:t>Size Scaling</a:t>
                       </a:r>
-                      <a:endParaRPr lang="en-US" sz="1300" dirty="0">
+                      <a:endParaRPr lang="en-US" sz="1300">
                         <a:latin typeface="Calibri" charset="0"/>
                         <a:ea typeface="Calibri" charset="0"/>
                         <a:cs typeface="Calibri" charset="0"/>
@@ -14420,7 +14637,7 @@
                         <a:buNone/>
                       </a:pPr>
                       <a:r>
-                        <a:rPr lang="en-US" sz="1300" dirty="0">
+                        <a:rPr lang="en-US" sz="1300">
                           <a:solidFill>
                             <a:srgbClr val="1A1A1A"/>
                           </a:solidFill>
@@ -14430,7 +14647,7 @@
                         </a:rPr>
                         <a:t>Serial, OMP 8t, MPI 8p, Hybrid 2p×4t — once each at 20k, 100k, 500k, 1m</a:t>
                       </a:r>
-                      <a:endParaRPr lang="en-US" sz="1300" dirty="0">
+                      <a:endParaRPr lang="en-US" sz="1300">
                         <a:latin typeface="Calibri" charset="0"/>
                         <a:ea typeface="Calibri" charset="0"/>
                         <a:cs typeface="Calibri" charset="0"/>
@@ -14495,7 +14712,7 @@
                         <a:buNone/>
                       </a:pPr>
                       <a:r>
-                        <a:rPr lang="en-US" sz="1300" b="1" dirty="0">
+                        <a:rPr lang="en-US" sz="1300" b="1">
                           <a:solidFill>
                             <a:srgbClr val="FFFFFF"/>
                           </a:solidFill>
@@ -14505,7 +14722,7 @@
                         </a:rPr>
                         <a:t>Performance</a:t>
                       </a:r>
-                      <a:endParaRPr lang="en-US" sz="1300" dirty="0">
+                      <a:endParaRPr lang="en-US" sz="1300">
                         <a:latin typeface="Calibri" charset="0"/>
                         <a:ea typeface="Calibri" charset="0"/>
                         <a:cs typeface="Calibri" charset="0"/>
@@ -14516,7 +14733,7 @@
                         <a:buNone/>
                       </a:pPr>
                       <a:r>
-                        <a:rPr lang="en-US" sz="1300" b="1" dirty="0">
+                        <a:rPr lang="en-US" sz="1300" b="1">
                           <a:solidFill>
                             <a:srgbClr val="FFFFFF"/>
                           </a:solidFill>
@@ -14526,7 +14743,7 @@
                         </a:rPr>
                         <a:t>(1m)</a:t>
                       </a:r>
-                      <a:endParaRPr lang="en-US" sz="1300" dirty="0">
+                      <a:endParaRPr lang="en-US" sz="1300">
                         <a:latin typeface="Calibri" charset="0"/>
                         <a:ea typeface="Calibri" charset="0"/>
                         <a:cs typeface="Calibri" charset="0"/>
@@ -14584,7 +14801,7 @@
                         <a:buNone/>
                       </a:pPr>
                       <a:r>
-                        <a:rPr lang="en-US" sz="1300" dirty="0">
+                        <a:rPr lang="en-US" sz="1300">
                           <a:solidFill>
                             <a:srgbClr val="FFFFFF"/>
                           </a:solidFill>
@@ -14594,7 +14811,28 @@
                         </a:rPr>
                         <a:t>OMP: 1,2,4,8,16 threads</a:t>
                       </a:r>
-                      <a:endParaRPr lang="en-US" sz="1300" dirty="0">
+                      <a:endParaRPr lang="en-US" sz="1300">
+                        <a:latin typeface="Calibri" charset="0"/>
+                        <a:ea typeface="Calibri" charset="0"/>
+                        <a:cs typeface="Calibri" charset="0"/>
+                      </a:endParaRPr>
+                    </a:p>
+                    <a:p>
+                      <a:pPr marL="0" indent="0" algn="l">
+                        <a:buNone/>
+                      </a:pPr>
+                      <a:r>
+                        <a:rPr lang="en-US" sz="1300">
+                          <a:solidFill>
+                            <a:srgbClr val="FFFFFF"/>
+                          </a:solidFill>
+                          <a:latin typeface="Calibri" pitchFamily="34" charset="0"/>
+                          <a:ea typeface="Calibri" pitchFamily="34" charset="-122"/>
+                          <a:cs typeface="Calibri" pitchFamily="34" charset="-120"/>
+                        </a:rPr>
+                        <a:t>MPI: 1,2,4,8,16 procs</a:t>
+                      </a:r>
+                      <a:endParaRPr lang="en-US" sz="1300">
                         <a:latin typeface="Calibri" charset="0"/>
                         <a:ea typeface="Calibri" charset="0"/>
                         <a:cs typeface="Calibri" charset="0"/>
@@ -14609,13 +14847,35 @@
                           <a:solidFill>
                             <a:srgbClr val="FFFFFF"/>
                           </a:solidFill>
-                          <a:latin typeface="Calibri" pitchFamily="34" charset="0"/>
-                          <a:ea typeface="Calibri" pitchFamily="34" charset="-122"/>
-                          <a:cs typeface="Calibri" pitchFamily="34" charset="-120"/>
+                          <a:latin typeface="Calibri"/>
+                          <a:ea typeface="Calibri"/>
+                          <a:cs typeface="Calibri"/>
                         </a:rPr>
-                        <a:t>MPI: 1,2,4,8,16 procs</a:t>
+                        <a:t>Hybrid: all </a:t>
                       </a:r>
-                      <a:endParaRPr lang="en-US" sz="1300" dirty="0">
+                      <a:r>
+                        <a:rPr lang="en-US" sz="1300">
+                          <a:solidFill>
+                            <a:srgbClr val="FFFFFF"/>
+                          </a:solidFill>
+                          <a:latin typeface="Calibri"/>
+                          <a:ea typeface="Calibri"/>
+                          <a:cs typeface="Calibri"/>
+                        </a:rPr>
+                        <a:t>proc * thread</a:t>
+                      </a:r>
+                      <a:r>
+                        <a:rPr lang="en-US" sz="1300" dirty="0">
+                          <a:solidFill>
+                            <a:srgbClr val="FFFFFF"/>
+                          </a:solidFill>
+                          <a:latin typeface="Calibri"/>
+                          <a:ea typeface="Calibri"/>
+                          <a:cs typeface="Calibri"/>
+                        </a:rPr>
+                        <a:t> combos</a:t>
+                      </a:r>
+                      <a:endParaRPr lang="en-US" sz="1300">
                         <a:latin typeface="Calibri" charset="0"/>
                         <a:ea typeface="Calibri" charset="0"/>
                         <a:cs typeface="Calibri" charset="0"/>
@@ -14626,28 +14886,7 @@
                         <a:buNone/>
                       </a:pPr>
                       <a:r>
-                        <a:rPr lang="en-US" sz="1300" dirty="0">
-                          <a:solidFill>
-                            <a:srgbClr val="FFFFFF"/>
-                          </a:solidFill>
-                          <a:latin typeface="Calibri" pitchFamily="34" charset="0"/>
-                          <a:ea typeface="Calibri" pitchFamily="34" charset="-122"/>
-                          <a:cs typeface="Calibri" pitchFamily="34" charset="-120"/>
-                        </a:rPr>
-                        <a:t>Hybrid: all proc×thread combos</a:t>
-                      </a:r>
-                      <a:endParaRPr lang="en-US" sz="1300" dirty="0">
-                        <a:latin typeface="Calibri" charset="0"/>
-                        <a:ea typeface="Calibri" charset="0"/>
-                        <a:cs typeface="Calibri" charset="0"/>
-                      </a:endParaRPr>
-                    </a:p>
-                    <a:p>
-                      <a:pPr marL="0" indent="0" algn="l">
-                        <a:buNone/>
-                      </a:pPr>
-                      <a:r>
-                        <a:rPr lang="en-US" sz="1300" dirty="0">
+                        <a:rPr lang="en-US" sz="1300">
                           <a:solidFill>
                             <a:srgbClr val="FFFFFF"/>
                           </a:solidFill>
@@ -14657,7 +14896,7 @@
                         </a:rPr>
                         <a:t>5 runs each, averaged</a:t>
                       </a:r>
-                      <a:endParaRPr lang="en-US" sz="1300" dirty="0">
+                      <a:endParaRPr lang="en-US" sz="1300">
                         <a:latin typeface="Calibri" charset="0"/>
                         <a:ea typeface="Calibri" charset="0"/>
                         <a:cs typeface="Calibri" charset="0"/>
@@ -14741,7 +14980,7 @@
               <a:buNone/>
             </a:pPr>
             <a:r>
-              <a:rPr lang="en-US" b="1" dirty="0">
+              <a:rPr lang="en-US" b="1">
                 <a:solidFill>
                   <a:srgbClr val="993C1D"/>
                 </a:solidFill>
@@ -14751,7 +14990,7 @@
               </a:rPr>
               <a:t>Linux Cluster (ISU)</a:t>
             </a:r>
-            <a:endParaRPr lang="en-US" dirty="0"/>
+            <a:endParaRPr lang="en-US"/>
           </a:p>
         </p:txBody>
       </p:sp>
@@ -14764,7 +15003,7 @@
           <p:nvPr>
             <p:extLst>
               <p:ext uri="{D42A27DB-BD31-4B8C-83A1-F6EECF244321}">
-                <p14:modId xmlns:p14="http://schemas.microsoft.com/office/powerpoint/2010/main" val="3429568789"/>
+                <p14:modId xmlns:p14="http://schemas.microsoft.com/office/powerpoint/2010/main" val="375570708"/>
               </p:ext>
             </p:extLst>
           </p:nvPr>
@@ -14803,7 +15042,7 @@
                         <a:buNone/>
                       </a:pPr>
                       <a:r>
-                        <a:rPr lang="en-US" sz="1300" b="1" dirty="0">
+                        <a:rPr lang="en-US" sz="1300" b="1">
                           <a:solidFill>
                             <a:srgbClr val="FFFFFF"/>
                           </a:solidFill>
@@ -14813,7 +15052,7 @@
                         </a:rPr>
                         <a:t>Phase</a:t>
                       </a:r>
-                      <a:endParaRPr lang="en-US" sz="1300" dirty="0">
+                      <a:endParaRPr lang="en-US" sz="1300">
                         <a:latin typeface="Calibri" charset="0"/>
                         <a:ea typeface="Calibri" charset="0"/>
                         <a:cs typeface="Calibri" charset="0"/>
@@ -14871,7 +15110,7 @@
                         <a:buNone/>
                       </a:pPr>
                       <a:r>
-                        <a:rPr lang="en-US" sz="1300" b="1" dirty="0">
+                        <a:rPr lang="en-US" sz="1300" b="1">
                           <a:solidFill>
                             <a:srgbClr val="FFFFFF"/>
                           </a:solidFill>
@@ -14881,7 +15120,7 @@
                         </a:rPr>
                         <a:t>Details</a:t>
                       </a:r>
-                      <a:endParaRPr lang="en-US" sz="1300" dirty="0">
+                      <a:endParaRPr lang="en-US" sz="1300">
                         <a:latin typeface="Calibri" charset="0"/>
                         <a:ea typeface="Calibri" charset="0"/>
                         <a:cs typeface="Calibri" charset="0"/>
@@ -14946,7 +15185,7 @@
                         <a:buNone/>
                       </a:pPr>
                       <a:r>
-                        <a:rPr lang="en-US" sz="1300" b="1" dirty="0">
+                        <a:rPr lang="en-US" sz="1300" b="1">
                           <a:solidFill>
                             <a:srgbClr val="1A1A1A"/>
                           </a:solidFill>
@@ -14956,7 +15195,7 @@
                         </a:rPr>
                         <a:t>Correctness</a:t>
                       </a:r>
-                      <a:endParaRPr lang="en-US" sz="1300" dirty="0">
+                      <a:endParaRPr lang="en-US" sz="1300">
                         <a:latin typeface="Calibri" charset="0"/>
                         <a:ea typeface="Calibri" charset="0"/>
                         <a:cs typeface="Calibri" charset="0"/>
@@ -15014,7 +15253,7 @@
                         <a:buNone/>
                       </a:pPr>
                       <a:r>
-                        <a:rPr lang="en-US" sz="1300" dirty="0">
+                        <a:rPr lang="en-US" sz="1300">
                           <a:solidFill>
                             <a:srgbClr val="1A1A1A"/>
                           </a:solidFill>
@@ -15024,7 +15263,7 @@
                         </a:rPr>
                         <a:t>All 4 implementations on heart dataset, 1 run each</a:t>
                       </a:r>
-                      <a:endParaRPr lang="en-US" sz="1300" dirty="0">
+                      <a:endParaRPr lang="en-US" sz="1300">
                         <a:latin typeface="Calibri" charset="0"/>
                         <a:ea typeface="Calibri" charset="0"/>
                         <a:cs typeface="Calibri" charset="0"/>
@@ -15089,7 +15328,7 @@
                         <a:buNone/>
                       </a:pPr>
                       <a:r>
-                        <a:rPr lang="en-US" sz="1300" b="1" dirty="0">
+                        <a:rPr lang="en-US" sz="1300" b="1">
                           <a:solidFill>
                             <a:srgbClr val="1A1A1A"/>
                           </a:solidFill>
@@ -15099,7 +15338,7 @@
                         </a:rPr>
                         <a:t>Size Scaling</a:t>
                       </a:r>
-                      <a:endParaRPr lang="en-US" sz="1300" dirty="0">
+                      <a:endParaRPr lang="en-US" sz="1300">
                         <a:latin typeface="Calibri" charset="0"/>
                         <a:ea typeface="Calibri" charset="0"/>
                         <a:cs typeface="Calibri" charset="0"/>
@@ -15157,7 +15396,7 @@
                         <a:buNone/>
                       </a:pPr>
                       <a:r>
-                        <a:rPr lang="en-US" sz="1300" dirty="0">
+                        <a:rPr lang="en-US" sz="1300">
                           <a:solidFill>
                             <a:srgbClr val="1A1A1A"/>
                           </a:solidFill>
@@ -15167,7 +15406,7 @@
                         </a:rPr>
                         <a:t>Serial, OMP 8t, MPI 8p, Hybrid 2p×4t — once each at 20k, 100k, 500k, 1m</a:t>
                       </a:r>
-                      <a:endParaRPr lang="en-US" sz="1300" dirty="0">
+                      <a:endParaRPr lang="en-US" sz="1300">
                         <a:latin typeface="Calibri" charset="0"/>
                         <a:ea typeface="Calibri" charset="0"/>
                         <a:cs typeface="Calibri" charset="0"/>
@@ -15232,7 +15471,7 @@
                         <a:buNone/>
                       </a:pPr>
                       <a:r>
-                        <a:rPr lang="en-US" sz="1300" b="1" dirty="0">
+                        <a:rPr lang="en-US" sz="1300" b="1">
                           <a:solidFill>
                             <a:srgbClr val="FFFFFF"/>
                           </a:solidFill>
@@ -15242,7 +15481,7 @@
                         </a:rPr>
                         <a:t>Performance</a:t>
                       </a:r>
-                      <a:endParaRPr lang="en-US" sz="1300" dirty="0">
+                      <a:endParaRPr lang="en-US" sz="1300">
                         <a:latin typeface="Calibri" charset="0"/>
                         <a:ea typeface="Calibri" charset="0"/>
                         <a:cs typeface="Calibri" charset="0"/>
@@ -15253,7 +15492,7 @@
                         <a:buNone/>
                       </a:pPr>
                       <a:r>
-                        <a:rPr lang="en-US" sz="1300" b="1" dirty="0">
+                        <a:rPr lang="en-US" sz="1300" b="1">
                           <a:solidFill>
                             <a:srgbClr val="FFFFFF"/>
                           </a:solidFill>
@@ -15263,7 +15502,7 @@
                         </a:rPr>
                         <a:t>(1m)</a:t>
                       </a:r>
-                      <a:endParaRPr lang="en-US" sz="1300" dirty="0">
+                      <a:endParaRPr lang="en-US" sz="1300">
                         <a:latin typeface="Calibri" charset="0"/>
                         <a:ea typeface="Calibri" charset="0"/>
                         <a:cs typeface="Calibri" charset="0"/>
@@ -15321,7 +15560,7 @@
                         <a:buNone/>
                       </a:pPr>
                       <a:r>
-                        <a:rPr lang="en-US" sz="1300" dirty="0">
+                        <a:rPr lang="en-US" sz="1300">
                           <a:solidFill>
                             <a:srgbClr val="FFFFFF"/>
                           </a:solidFill>
@@ -15331,7 +15570,28 @@
                         </a:rPr>
                         <a:t>OMP: 1,2,4,8 threads</a:t>
                       </a:r>
-                      <a:endParaRPr lang="en-US" sz="1300" dirty="0">
+                      <a:endParaRPr lang="en-US" sz="1300">
+                        <a:latin typeface="Calibri" charset="0"/>
+                        <a:ea typeface="Calibri" charset="0"/>
+                        <a:cs typeface="Calibri" charset="0"/>
+                      </a:endParaRPr>
+                    </a:p>
+                    <a:p>
+                      <a:pPr marL="0" indent="0" algn="l">
+                        <a:buNone/>
+                      </a:pPr>
+                      <a:r>
+                        <a:rPr lang="en-US" sz="1300">
+                          <a:solidFill>
+                            <a:srgbClr val="FFFFFF"/>
+                          </a:solidFill>
+                          <a:latin typeface="Calibri" pitchFamily="34" charset="0"/>
+                          <a:ea typeface="Calibri" pitchFamily="34" charset="-122"/>
+                          <a:cs typeface="Calibri" pitchFamily="34" charset="-120"/>
+                        </a:rPr>
+                        <a:t>MPI: 1,2,4,8 procs</a:t>
+                      </a:r>
+                      <a:endParaRPr lang="en-US" sz="1300">
                         <a:latin typeface="Calibri" charset="0"/>
                         <a:ea typeface="Calibri" charset="0"/>
                         <a:cs typeface="Calibri" charset="0"/>
@@ -15346,13 +15606,35 @@
                           <a:solidFill>
                             <a:srgbClr val="FFFFFF"/>
                           </a:solidFill>
-                          <a:latin typeface="Calibri" pitchFamily="34" charset="0"/>
-                          <a:ea typeface="Calibri" pitchFamily="34" charset="-122"/>
-                          <a:cs typeface="Calibri" pitchFamily="34" charset="-120"/>
+                          <a:latin typeface="Calibri"/>
+                          <a:ea typeface="Calibri"/>
+                          <a:cs typeface="Calibri"/>
                         </a:rPr>
-                        <a:t>MPI: 1,2,4,8 procs</a:t>
+                        <a:t>Hybrid: all </a:t>
                       </a:r>
-                      <a:endParaRPr lang="en-US" sz="1300" dirty="0">
+                      <a:r>
+                        <a:rPr lang="en-US" sz="1300">
+                          <a:solidFill>
+                            <a:srgbClr val="FFFFFF"/>
+                          </a:solidFill>
+                          <a:latin typeface="Calibri"/>
+                          <a:ea typeface="Calibri"/>
+                          <a:cs typeface="Calibri"/>
+                        </a:rPr>
+                        <a:t>proc * thread</a:t>
+                      </a:r>
+                      <a:r>
+                        <a:rPr lang="en-US" sz="1300" dirty="0">
+                          <a:solidFill>
+                            <a:srgbClr val="FFFFFF"/>
+                          </a:solidFill>
+                          <a:latin typeface="Calibri"/>
+                          <a:ea typeface="Calibri"/>
+                          <a:cs typeface="Calibri"/>
+                        </a:rPr>
+                        <a:t> combos</a:t>
+                      </a:r>
+                      <a:endParaRPr lang="en-US" sz="1300">
                         <a:latin typeface="Calibri" charset="0"/>
                         <a:ea typeface="Calibri" charset="0"/>
                         <a:cs typeface="Calibri" charset="0"/>
@@ -15363,28 +15645,7 @@
                         <a:buNone/>
                       </a:pPr>
                       <a:r>
-                        <a:rPr lang="en-US" sz="1300" dirty="0">
-                          <a:solidFill>
-                            <a:srgbClr val="FFFFFF"/>
-                          </a:solidFill>
-                          <a:latin typeface="Calibri" pitchFamily="34" charset="0"/>
-                          <a:ea typeface="Calibri" pitchFamily="34" charset="-122"/>
-                          <a:cs typeface="Calibri" pitchFamily="34" charset="-120"/>
-                        </a:rPr>
-                        <a:t>Hybrid: all proc×thread combos</a:t>
-                      </a:r>
-                      <a:endParaRPr lang="en-US" sz="1300" dirty="0">
-                        <a:latin typeface="Calibri" charset="0"/>
-                        <a:ea typeface="Calibri" charset="0"/>
-                        <a:cs typeface="Calibri" charset="0"/>
-                      </a:endParaRPr>
-                    </a:p>
-                    <a:p>
-                      <a:pPr marL="0" indent="0" algn="l">
-                        <a:buNone/>
-                      </a:pPr>
-                      <a:r>
-                        <a:rPr lang="en-US" sz="1300" dirty="0">
+                        <a:rPr lang="en-US" sz="1300">
                           <a:solidFill>
                             <a:srgbClr val="FFFFFF"/>
                           </a:solidFill>
@@ -15394,7 +15655,7 @@
                         </a:rPr>
                         <a:t>5 runs each, averaged</a:t>
                       </a:r>
-                      <a:endParaRPr lang="en-US" sz="1300" dirty="0">
+                      <a:endParaRPr lang="en-US" sz="1300">
                         <a:latin typeface="Calibri" charset="0"/>
                         <a:ea typeface="Calibri" charset="0"/>
                         <a:cs typeface="Calibri" charset="0"/>
